--- a/Week_2/React.pptx
+++ b/Week_2/React.pptx
@@ -9234,6 +9234,19 @@
               <a:t>Project names all lowercase/dashes</a:t>
             </a:r>
           </a:p>
+          <a:p>
+            <a:r>
+              <a:rPr lang="en-US" dirty="0"/>
+              <a:t>Recommended: </a:t>
+            </a:r>
+            <a:br>
+              <a:rPr lang="en-US" dirty="0"/>
+            </a:br>
+            <a:r>
+              <a:rPr lang="en-US" dirty="0"/>
+              <a:t>React Developer Tools browser extension</a:t>
+            </a:r>
+          </a:p>
         </p:txBody>
       </p:sp>
       <p:pic>
@@ -11139,6 +11152,36 @@
         <p:spPr>
           <a:xfrm>
             <a:off x="4438380" y="1796027"/>
+            <a:ext cx="7207535" cy="2991127"/>
+          </a:xfrm>
+          <a:prstGeom prst="rect">
+            <a:avLst/>
+          </a:prstGeom>
+        </p:spPr>
+      </p:pic>
+      <p:pic>
+        <p:nvPicPr>
+          <p:cNvPr id="10" name="Picture 9">
+            <a:extLst>
+              <a:ext uri="{FF2B5EF4-FFF2-40B4-BE49-F238E27FC236}">
+                <a16:creationId xmlns:a16="http://schemas.microsoft.com/office/drawing/2014/main" id="{095C0768-6BDD-8BFC-D27E-6A4A407AB8AB}"/>
+              </a:ext>
+            </a:extLst>
+          </p:cNvPr>
+          <p:cNvPicPr>
+            <a:picLocks noChangeAspect="1"/>
+          </p:cNvPicPr>
+          <p:nvPr/>
+        </p:nvPicPr>
+        <p:blipFill>
+          <a:blip r:embed="rId2"/>
+          <a:stretch>
+            <a:fillRect/>
+          </a:stretch>
+        </p:blipFill>
+        <p:spPr>
+          <a:xfrm>
+            <a:off x="4383210" y="1715956"/>
             <a:ext cx="7207535" cy="2991127"/>
           </a:xfrm>
           <a:prstGeom prst="rect">

--- a/Week_2/React.pptx
+++ b/Week_2/React.pptx
@@ -24,6 +24,16 @@
     <p:sldId id="277" r:id="rId18"/>
     <p:sldId id="278" r:id="rId19"/>
     <p:sldId id="279" r:id="rId20"/>
+    <p:sldId id="280" r:id="rId21"/>
+    <p:sldId id="281" r:id="rId22"/>
+    <p:sldId id="282" r:id="rId23"/>
+    <p:sldId id="283" r:id="rId24"/>
+    <p:sldId id="284" r:id="rId25"/>
+    <p:sldId id="285" r:id="rId26"/>
+    <p:sldId id="286" r:id="rId27"/>
+    <p:sldId id="287" r:id="rId28"/>
+    <p:sldId id="288" r:id="rId29"/>
+    <p:sldId id="289" r:id="rId30"/>
   </p:sldIdLst>
   <p:sldSz cx="12192000" cy="6858000"/>
   <p:notesSz cx="6858000" cy="9144000"/>
@@ -2608,7 +2618,7 @@
             <a:fld id="{B61BEF0D-F0BB-DE4B-95CE-6DB70DBA9567}" type="datetimeFigureOut">
               <a:rPr lang="en-US" dirty="0"/>
               <a:pPr/>
-              <a:t>9/28/2025</a:t>
+              <a:t>9/29/2025</a:t>
             </a:fld>
             <a:endParaRPr lang="en-US" dirty="0"/>
           </a:p>
@@ -2870,7 +2880,7 @@
             <a:fld id="{B61BEF0D-F0BB-DE4B-95CE-6DB70DBA9567}" type="datetimeFigureOut">
               <a:rPr lang="en-US" dirty="0"/>
               <a:pPr/>
-              <a:t>9/28/2025</a:t>
+              <a:t>9/29/2025</a:t>
             </a:fld>
             <a:endParaRPr lang="en-US" dirty="0"/>
           </a:p>
@@ -3105,7 +3115,7 @@
             <a:fld id="{B61BEF0D-F0BB-DE4B-95CE-6DB70DBA9567}" type="datetimeFigureOut">
               <a:rPr lang="en-US" dirty="0"/>
               <a:pPr/>
-              <a:t>9/28/2025</a:t>
+              <a:t>9/29/2025</a:t>
             </a:fld>
             <a:endParaRPr lang="en-US" dirty="0"/>
           </a:p>
@@ -3345,7 +3355,7 @@
             <a:fld id="{B61BEF0D-F0BB-DE4B-95CE-6DB70DBA9567}" type="datetimeFigureOut">
               <a:rPr lang="en-US" dirty="0"/>
               <a:pPr/>
-              <a:t>9/28/2025</a:t>
+              <a:t>9/29/2025</a:t>
             </a:fld>
             <a:endParaRPr lang="en-US" dirty="0"/>
           </a:p>
@@ -3653,7 +3663,7 @@
             <a:fld id="{B61BEF0D-F0BB-DE4B-95CE-6DB70DBA9567}" type="datetimeFigureOut">
               <a:rPr lang="en-US" dirty="0"/>
               <a:pPr/>
-              <a:t>9/28/2025</a:t>
+              <a:t>9/29/2025</a:t>
             </a:fld>
             <a:endParaRPr lang="en-US" dirty="0"/>
           </a:p>
@@ -3954,7 +3964,7 @@
             <a:fld id="{B61BEF0D-F0BB-DE4B-95CE-6DB70DBA9567}" type="datetimeFigureOut">
               <a:rPr lang="en-US" dirty="0"/>
               <a:pPr/>
-              <a:t>9/28/2025</a:t>
+              <a:t>9/29/2025</a:t>
             </a:fld>
             <a:endParaRPr lang="en-US" dirty="0"/>
           </a:p>
@@ -4375,7 +4385,7 @@
             <a:fld id="{B61BEF0D-F0BB-DE4B-95CE-6DB70DBA9567}" type="datetimeFigureOut">
               <a:rPr lang="en-US" dirty="0"/>
               <a:pPr/>
-              <a:t>9/28/2025</a:t>
+              <a:t>9/29/2025</a:t>
             </a:fld>
             <a:endParaRPr lang="en-US" dirty="0"/>
           </a:p>
@@ -4538,7 +4548,7 @@
             <a:fld id="{B61BEF0D-F0BB-DE4B-95CE-6DB70DBA9567}" type="datetimeFigureOut">
               <a:rPr lang="en-US" dirty="0"/>
               <a:pPr/>
-              <a:t>9/28/2025</a:t>
+              <a:t>9/29/2025</a:t>
             </a:fld>
             <a:endParaRPr lang="en-US" dirty="0"/>
           </a:p>
@@ -4635,7 +4645,7 @@
             <a:fld id="{B61BEF0D-F0BB-DE4B-95CE-6DB70DBA9567}" type="datetimeFigureOut">
               <a:rPr lang="en-US" dirty="0"/>
               <a:pPr/>
-              <a:t>9/28/2025</a:t>
+              <a:t>9/29/2025</a:t>
             </a:fld>
             <a:endParaRPr lang="en-US" dirty="0"/>
           </a:p>
@@ -5013,7 +5023,7 @@
             <a:fld id="{B61BEF0D-F0BB-DE4B-95CE-6DB70DBA9567}" type="datetimeFigureOut">
               <a:rPr lang="en-US" dirty="0"/>
               <a:pPr/>
-              <a:t>9/28/2025</a:t>
+              <a:t>9/29/2025</a:t>
             </a:fld>
             <a:endParaRPr lang="en-US" dirty="0"/>
           </a:p>
@@ -5299,7 +5309,7 @@
             <a:fld id="{B61BEF0D-F0BB-DE4B-95CE-6DB70DBA9567}" type="datetimeFigureOut">
               <a:rPr lang="en-US" dirty="0"/>
               <a:pPr/>
-              <a:t>9/28/2025</a:t>
+              <a:t>9/29/2025</a:t>
             </a:fld>
             <a:endParaRPr lang="en-US" dirty="0"/>
           </a:p>
@@ -5538,7 +5548,7 @@
             <a:fld id="{B61BEF0D-F0BB-DE4B-95CE-6DB70DBA9567}" type="datetimeFigureOut">
               <a:rPr lang="en-US" dirty="0"/>
               <a:pPr/>
-              <a:t>9/28/2025</a:t>
+              <a:t>9/29/2025</a:t>
             </a:fld>
             <a:endParaRPr lang="en-US" dirty="0"/>
           </a:p>
@@ -6419,6 +6429,12 @@
           <a:p>
             <a:r>
               <a:rPr lang="en-US" dirty="0"/>
+              <a:t>Delete app.css &amp; remove its reference</a:t>
+            </a:r>
+          </a:p>
+          <a:p>
+            <a:r>
+              <a:rPr lang="en-US" dirty="0"/>
               <a:t>Index.html:</a:t>
             </a:r>
           </a:p>
@@ -6841,7 +6857,7 @@
             </a:pPr>
             <a:r>
               <a:rPr lang="en-US" dirty="0"/>
-              <a:t>Notice the reset for the body element and p</a:t>
+              <a:t>Notice the reset for the &lt;body&gt; &amp; &lt;p&gt; elements</a:t>
             </a:r>
           </a:p>
         </p:txBody>
@@ -7008,7 +7024,7 @@
           <a:p>
             <a:r>
               <a:rPr lang="en-US" b="1" dirty="0"/>
-              <a:t>Scenario:  			   25 min</a:t>
+              <a:t>Scenario:  			   </a:t>
             </a:r>
           </a:p>
         </p:txBody>
@@ -7031,6 +7047,5624 @@
           <a:xfrm>
             <a:off x="5273080" y="3158496"/>
             <a:ext cx="5740756" cy="2753931"/>
+          </a:xfrm>
+          <a:prstGeom prst="rect">
+            <a:avLst/>
+          </a:prstGeom>
+        </p:spPr>
+        <p:txBody>
+          <a:bodyPr vert="horz" lIns="91440" tIns="45720" rIns="91440" bIns="45720" rtlCol="0" anchor="ctr">
+            <a:normAutofit fontScale="77500" lnSpcReduction="20000"/>
+          </a:bodyPr>
+          <a:lstStyle>
+            <a:lvl1pPr marL="306000" indent="-306000" algn="l" defTabSz="457200" rtl="0" eaLnBrk="1" latinLnBrk="0" hangingPunct="1">
+              <a:spcBef>
+                <a:spcPct val="20000"/>
+              </a:spcBef>
+              <a:spcAft>
+                <a:spcPts val="600"/>
+              </a:spcAft>
+              <a:buClr>
+                <a:schemeClr val="accent2"/>
+              </a:buClr>
+              <a:buSzPct val="92000"/>
+              <a:buFont typeface="Wingdings 2" panose="05020102010507070707" pitchFamily="18" charset="2"/>
+              <a:buChar char=""/>
+              <a:defRPr sz="1800" kern="1200">
+                <a:solidFill>
+                  <a:schemeClr val="tx2"/>
+                </a:solidFill>
+                <a:latin typeface="+mn-lt"/>
+                <a:ea typeface="+mn-ea"/>
+                <a:cs typeface="+mn-cs"/>
+              </a:defRPr>
+            </a:lvl1pPr>
+            <a:lvl2pPr marL="630000" indent="-306000" algn="l" defTabSz="457200" rtl="0" eaLnBrk="1" latinLnBrk="0" hangingPunct="1">
+              <a:spcBef>
+                <a:spcPct val="20000"/>
+              </a:spcBef>
+              <a:spcAft>
+                <a:spcPts val="600"/>
+              </a:spcAft>
+              <a:buClr>
+                <a:schemeClr val="accent2"/>
+              </a:buClr>
+              <a:buSzPct val="92000"/>
+              <a:buFont typeface="Wingdings 2" panose="05020102010507070707" pitchFamily="18" charset="2"/>
+              <a:buChar char=""/>
+              <a:defRPr sz="1600" kern="1200">
+                <a:solidFill>
+                  <a:schemeClr val="tx2"/>
+                </a:solidFill>
+                <a:latin typeface="+mn-lt"/>
+                <a:ea typeface="+mn-ea"/>
+                <a:cs typeface="+mn-cs"/>
+              </a:defRPr>
+            </a:lvl2pPr>
+            <a:lvl3pPr marL="900000" indent="-270000" algn="l" defTabSz="457200" rtl="0" eaLnBrk="1" latinLnBrk="0" hangingPunct="1">
+              <a:spcBef>
+                <a:spcPct val="20000"/>
+              </a:spcBef>
+              <a:spcAft>
+                <a:spcPts val="600"/>
+              </a:spcAft>
+              <a:buClr>
+                <a:schemeClr val="accent2"/>
+              </a:buClr>
+              <a:buSzPct val="92000"/>
+              <a:buFont typeface="Wingdings 2" panose="05020102010507070707" pitchFamily="18" charset="2"/>
+              <a:buChar char=""/>
+              <a:defRPr sz="1400" kern="1200">
+                <a:solidFill>
+                  <a:schemeClr val="tx2"/>
+                </a:solidFill>
+                <a:latin typeface="+mn-lt"/>
+                <a:ea typeface="+mn-ea"/>
+                <a:cs typeface="+mn-cs"/>
+              </a:defRPr>
+            </a:lvl3pPr>
+            <a:lvl4pPr marL="1242000" indent="-234000" algn="l" defTabSz="457200" rtl="0" eaLnBrk="1" latinLnBrk="0" hangingPunct="1">
+              <a:spcBef>
+                <a:spcPct val="20000"/>
+              </a:spcBef>
+              <a:spcAft>
+                <a:spcPts val="600"/>
+              </a:spcAft>
+              <a:buClr>
+                <a:schemeClr val="accent2"/>
+              </a:buClr>
+              <a:buSzPct val="92000"/>
+              <a:buFont typeface="Wingdings 2" panose="05020102010507070707" pitchFamily="18" charset="2"/>
+              <a:buChar char=""/>
+              <a:defRPr sz="1200" kern="1200">
+                <a:solidFill>
+                  <a:schemeClr val="tx2"/>
+                </a:solidFill>
+                <a:latin typeface="+mn-lt"/>
+                <a:ea typeface="+mn-ea"/>
+                <a:cs typeface="+mn-cs"/>
+              </a:defRPr>
+            </a:lvl4pPr>
+            <a:lvl5pPr marL="1602000" indent="-234000" algn="l" defTabSz="457200" rtl="0" eaLnBrk="1" latinLnBrk="0" hangingPunct="1">
+              <a:spcBef>
+                <a:spcPct val="20000"/>
+              </a:spcBef>
+              <a:spcAft>
+                <a:spcPts val="600"/>
+              </a:spcAft>
+              <a:buClr>
+                <a:schemeClr val="accent2"/>
+              </a:buClr>
+              <a:buSzPct val="92000"/>
+              <a:buFont typeface="Wingdings 2" panose="05020102010507070707" pitchFamily="18" charset="2"/>
+              <a:buChar char=""/>
+              <a:defRPr sz="1200" kern="1200">
+                <a:solidFill>
+                  <a:schemeClr val="tx2"/>
+                </a:solidFill>
+                <a:latin typeface="+mn-lt"/>
+                <a:ea typeface="+mn-ea"/>
+                <a:cs typeface="+mn-cs"/>
+              </a:defRPr>
+            </a:lvl5pPr>
+            <a:lvl6pPr marL="1900000" indent="-228600" algn="l" defTabSz="457200" rtl="0" eaLnBrk="1" latinLnBrk="0" hangingPunct="1">
+              <a:spcBef>
+                <a:spcPct val="20000"/>
+              </a:spcBef>
+              <a:spcAft>
+                <a:spcPts val="600"/>
+              </a:spcAft>
+              <a:buClr>
+                <a:schemeClr val="accent2"/>
+              </a:buClr>
+              <a:buSzPct val="92000"/>
+              <a:buFont typeface="Wingdings 2" panose="05020102010507070707" pitchFamily="18" charset="2"/>
+              <a:buChar char=""/>
+              <a:defRPr sz="1200" kern="1200">
+                <a:solidFill>
+                  <a:schemeClr val="tx2"/>
+                </a:solidFill>
+                <a:latin typeface="+mn-lt"/>
+                <a:ea typeface="+mn-ea"/>
+                <a:cs typeface="+mn-cs"/>
+              </a:defRPr>
+            </a:lvl6pPr>
+            <a:lvl7pPr marL="2200000" indent="-228600" algn="l" defTabSz="457200" rtl="0" eaLnBrk="1" latinLnBrk="0" hangingPunct="1">
+              <a:spcBef>
+                <a:spcPct val="20000"/>
+              </a:spcBef>
+              <a:spcAft>
+                <a:spcPts val="600"/>
+              </a:spcAft>
+              <a:buClr>
+                <a:schemeClr val="accent2"/>
+              </a:buClr>
+              <a:buSzPct val="92000"/>
+              <a:buFont typeface="Wingdings 2" panose="05020102010507070707" pitchFamily="18" charset="2"/>
+              <a:buChar char=""/>
+              <a:defRPr sz="1200" kern="1200">
+                <a:solidFill>
+                  <a:schemeClr val="tx2"/>
+                </a:solidFill>
+                <a:latin typeface="+mn-lt"/>
+                <a:ea typeface="+mn-ea"/>
+                <a:cs typeface="+mn-cs"/>
+              </a:defRPr>
+            </a:lvl7pPr>
+            <a:lvl8pPr marL="2500000" indent="-228600" algn="l" defTabSz="457200" rtl="0" eaLnBrk="1" latinLnBrk="0" hangingPunct="1">
+              <a:spcBef>
+                <a:spcPct val="20000"/>
+              </a:spcBef>
+              <a:spcAft>
+                <a:spcPts val="600"/>
+              </a:spcAft>
+              <a:buClr>
+                <a:schemeClr val="accent2"/>
+              </a:buClr>
+              <a:buSzPct val="92000"/>
+              <a:buFont typeface="Wingdings 2" panose="05020102010507070707" pitchFamily="18" charset="2"/>
+              <a:buChar char=""/>
+              <a:defRPr sz="1200" kern="1200">
+                <a:solidFill>
+                  <a:schemeClr val="tx2"/>
+                </a:solidFill>
+                <a:latin typeface="+mn-lt"/>
+                <a:ea typeface="+mn-ea"/>
+                <a:cs typeface="+mn-cs"/>
+              </a:defRPr>
+            </a:lvl8pPr>
+            <a:lvl9pPr marL="2800000" indent="-228600" algn="l" defTabSz="457200" rtl="0" eaLnBrk="1" latinLnBrk="0" hangingPunct="1">
+              <a:spcBef>
+                <a:spcPct val="20000"/>
+              </a:spcBef>
+              <a:spcAft>
+                <a:spcPts val="600"/>
+              </a:spcAft>
+              <a:buClr>
+                <a:schemeClr val="accent2"/>
+              </a:buClr>
+              <a:buSzPct val="92000"/>
+              <a:buFont typeface="Wingdings 2" panose="05020102010507070707" pitchFamily="18" charset="2"/>
+              <a:buChar char=""/>
+              <a:defRPr sz="1200" kern="1200">
+                <a:solidFill>
+                  <a:schemeClr val="tx2"/>
+                </a:solidFill>
+                <a:latin typeface="+mn-lt"/>
+                <a:ea typeface="+mn-ea"/>
+                <a:cs typeface="+mn-cs"/>
+              </a:defRPr>
+            </a:lvl9pPr>
+          </a:lstStyle>
+          <a:p>
+            <a:r>
+              <a:rPr lang="en-US" dirty="0"/>
+              <a:t>Your organization needs to build a portal for service technicians. This portal should be able to view, modify, and delete incidents. This application will be written in React.</a:t>
+            </a:r>
+          </a:p>
+          <a:p>
+            <a:r>
+              <a:rPr lang="en-US" dirty="0"/>
+              <a:t>In the ‘Home’ component, create a header using semantic html.</a:t>
+            </a:r>
+          </a:p>
+          <a:p>
+            <a:r>
+              <a:rPr lang="en-US" dirty="0"/>
+              <a:t>Within the header element, include a welcome message that reads: “Welcome {</a:t>
+            </a:r>
+            <a:r>
+              <a:rPr lang="en-US" dirty="0" err="1"/>
+              <a:t>user.Prefix</a:t>
+            </a:r>
+            <a:r>
+              <a:rPr lang="en-US" dirty="0"/>
+              <a:t>} {</a:t>
+            </a:r>
+            <a:r>
+              <a:rPr lang="en-US" dirty="0" err="1"/>
+              <a:t>user.LastName</a:t>
+            </a:r>
+            <a:r>
+              <a:rPr lang="en-US" dirty="0"/>
+              <a:t>}! Time since last incident: {</a:t>
+            </a:r>
+            <a:r>
+              <a:rPr lang="en-US" dirty="0" err="1"/>
+              <a:t>dummyTimeValue</a:t>
+            </a:r>
+            <a:r>
+              <a:rPr lang="en-US" dirty="0"/>
+              <a:t>}” </a:t>
+            </a:r>
+          </a:p>
+          <a:p>
+            <a:r>
+              <a:rPr lang="en-US" dirty="0"/>
+              <a:t>The data should come from an object in your component that stores your own name, the time value may be faked or left empty for now</a:t>
+            </a:r>
+          </a:p>
+          <a:p>
+            <a:r>
+              <a:rPr lang="en-US" dirty="0"/>
+              <a:t>Also include two links for ‘Home’ and ‘Incidents’</a:t>
+            </a:r>
+          </a:p>
+          <a:p>
+            <a:r>
+              <a:rPr lang="en-US" dirty="0"/>
+              <a:t>Style your component</a:t>
+            </a:r>
+            <a:br>
+              <a:rPr lang="en-US" dirty="0"/>
+            </a:br>
+            <a:endParaRPr lang="en-US" dirty="0"/>
+          </a:p>
+        </p:txBody>
+      </p:sp>
+    </p:spTree>
+    <p:extLst>
+      <p:ext uri="{BB962C8B-B14F-4D97-AF65-F5344CB8AC3E}">
+        <p14:creationId xmlns:p14="http://schemas.microsoft.com/office/powerpoint/2010/main" val="923394542"/>
+      </p:ext>
+    </p:extLst>
+  </p:cSld>
+  <p:clrMapOvr>
+    <a:masterClrMapping/>
+  </p:clrMapOvr>
+</p:sld>
+</file>
+
+<file path=ppt/slides/slide15.xml><?xml version="1.0" encoding="utf-8"?>
+<p:sld xmlns:a="http://schemas.openxmlformats.org/drawingml/2006/main" xmlns:r="http://schemas.openxmlformats.org/officeDocument/2006/relationships" xmlns:p="http://schemas.openxmlformats.org/presentationml/2006/main">
+  <p:cSld>
+    <p:spTree>
+      <p:nvGrpSpPr>
+        <p:cNvPr id="1" name=""/>
+        <p:cNvGrpSpPr/>
+        <p:nvPr/>
+      </p:nvGrpSpPr>
+      <p:grpSpPr>
+        <a:xfrm>
+          <a:off x="0" y="0"/>
+          <a:ext cx="0" cy="0"/>
+          <a:chOff x="0" y="0"/>
+          <a:chExt cx="0" cy="0"/>
+        </a:xfrm>
+      </p:grpSpPr>
+      <p:sp>
+        <p:nvSpPr>
+          <p:cNvPr id="2" name="Title 1">
+            <a:extLst>
+              <a:ext uri="{FF2B5EF4-FFF2-40B4-BE49-F238E27FC236}">
+                <a16:creationId xmlns:a16="http://schemas.microsoft.com/office/drawing/2014/main" id="{01C5EF81-D726-78E0-2499-8B2EA696FECD}"/>
+              </a:ext>
+            </a:extLst>
+          </p:cNvPr>
+          <p:cNvSpPr>
+            <a:spLocks noGrp="1"/>
+          </p:cNvSpPr>
+          <p:nvPr>
+            <p:ph type="title"/>
+          </p:nvPr>
+        </p:nvSpPr>
+        <p:spPr/>
+        <p:txBody>
+          <a:bodyPr/>
+          <a:lstStyle/>
+          <a:p>
+            <a:r>
+              <a:rPr lang="en-US" dirty="0"/>
+              <a:t>Props</a:t>
+            </a:r>
+          </a:p>
+        </p:txBody>
+      </p:sp>
+      <p:sp>
+        <p:nvSpPr>
+          <p:cNvPr id="3" name="Content Placeholder 2">
+            <a:extLst>
+              <a:ext uri="{FF2B5EF4-FFF2-40B4-BE49-F238E27FC236}">
+                <a16:creationId xmlns:a16="http://schemas.microsoft.com/office/drawing/2014/main" id="{C35245C2-04AC-9F7C-291A-201BD69055B4}"/>
+              </a:ext>
+            </a:extLst>
+          </p:cNvPr>
+          <p:cNvSpPr>
+            <a:spLocks noGrp="1"/>
+          </p:cNvSpPr>
+          <p:nvPr>
+            <p:ph idx="1"/>
+          </p:nvPr>
+        </p:nvSpPr>
+        <p:spPr>
+          <a:xfrm>
+            <a:off x="581193" y="2180496"/>
+            <a:ext cx="5175372" cy="3678303"/>
+          </a:xfrm>
+        </p:spPr>
+        <p:txBody>
+          <a:bodyPr/>
+          <a:lstStyle/>
+          <a:p>
+            <a:r>
+              <a:rPr lang="en-US" dirty="0"/>
+              <a:t>Short for properties</a:t>
+            </a:r>
+          </a:p>
+          <a:p>
+            <a:r>
+              <a:rPr lang="en-US" dirty="0"/>
+              <a:t>Child components can receive a ‘props’ object</a:t>
+            </a:r>
+          </a:p>
+          <a:p>
+            <a:pPr lvl="1"/>
+            <a:r>
+              <a:rPr lang="en-US" dirty="0"/>
+              <a:t>This object contains items passed from the parent</a:t>
+            </a:r>
+          </a:p>
+          <a:p>
+            <a:pPr lvl="1"/>
+            <a:r>
+              <a:rPr lang="en-US" dirty="0"/>
+              <a:t>These items can be objects, arrays, strings, numbers, and more </a:t>
+            </a:r>
+          </a:p>
+          <a:p>
+            <a:endParaRPr lang="en-US" dirty="0"/>
+          </a:p>
+        </p:txBody>
+      </p:sp>
+      <p:pic>
+        <p:nvPicPr>
+          <p:cNvPr id="5" name="Picture 4">
+            <a:extLst>
+              <a:ext uri="{FF2B5EF4-FFF2-40B4-BE49-F238E27FC236}">
+                <a16:creationId xmlns:a16="http://schemas.microsoft.com/office/drawing/2014/main" id="{F89AA80E-0263-FAF5-FB2C-7818C2A22A5A}"/>
+              </a:ext>
+            </a:extLst>
+          </p:cNvPr>
+          <p:cNvPicPr>
+            <a:picLocks noChangeAspect="1"/>
+          </p:cNvPicPr>
+          <p:nvPr/>
+        </p:nvPicPr>
+        <p:blipFill>
+          <a:blip r:embed="rId2"/>
+          <a:stretch>
+            <a:fillRect/>
+          </a:stretch>
+        </p:blipFill>
+        <p:spPr>
+          <a:xfrm>
+            <a:off x="6737810" y="2005677"/>
+            <a:ext cx="3724795" cy="1810003"/>
+          </a:xfrm>
+          <a:prstGeom prst="rect">
+            <a:avLst/>
+          </a:prstGeom>
+        </p:spPr>
+      </p:pic>
+      <p:pic>
+        <p:nvPicPr>
+          <p:cNvPr id="7" name="Picture 6">
+            <a:extLst>
+              <a:ext uri="{FF2B5EF4-FFF2-40B4-BE49-F238E27FC236}">
+                <a16:creationId xmlns:a16="http://schemas.microsoft.com/office/drawing/2014/main" id="{0397927B-9516-AD6C-2E60-F2E6508BFD04}"/>
+              </a:ext>
+            </a:extLst>
+          </p:cNvPr>
+          <p:cNvPicPr>
+            <a:picLocks noChangeAspect="1"/>
+          </p:cNvPicPr>
+          <p:nvPr/>
+        </p:nvPicPr>
+        <p:blipFill>
+          <a:blip r:embed="rId3"/>
+          <a:stretch>
+            <a:fillRect/>
+          </a:stretch>
+        </p:blipFill>
+        <p:spPr>
+          <a:xfrm>
+            <a:off x="6904522" y="4105401"/>
+            <a:ext cx="3391373" cy="2419688"/>
+          </a:xfrm>
+          <a:prstGeom prst="rect">
+            <a:avLst/>
+          </a:prstGeom>
+        </p:spPr>
+      </p:pic>
+    </p:spTree>
+    <p:extLst>
+      <p:ext uri="{BB962C8B-B14F-4D97-AF65-F5344CB8AC3E}">
+        <p14:creationId xmlns:p14="http://schemas.microsoft.com/office/powerpoint/2010/main" val="900187183"/>
+      </p:ext>
+    </p:extLst>
+  </p:cSld>
+  <p:clrMapOvr>
+    <a:masterClrMapping/>
+  </p:clrMapOvr>
+</p:sld>
+</file>
+
+<file path=ppt/slides/slide16.xml><?xml version="1.0" encoding="utf-8"?>
+<p:sld xmlns:a="http://schemas.openxmlformats.org/drawingml/2006/main" xmlns:r="http://schemas.openxmlformats.org/officeDocument/2006/relationships" xmlns:p="http://schemas.openxmlformats.org/presentationml/2006/main">
+  <p:cSld>
+    <p:spTree>
+      <p:nvGrpSpPr>
+        <p:cNvPr id="1" name=""/>
+        <p:cNvGrpSpPr/>
+        <p:nvPr/>
+      </p:nvGrpSpPr>
+      <p:grpSpPr>
+        <a:xfrm>
+          <a:off x="0" y="0"/>
+          <a:ext cx="0" cy="0"/>
+          <a:chOff x="0" y="0"/>
+          <a:chExt cx="0" cy="0"/>
+        </a:xfrm>
+      </p:grpSpPr>
+      <p:sp>
+        <p:nvSpPr>
+          <p:cNvPr id="2" name="Title 1">
+            <a:extLst>
+              <a:ext uri="{FF2B5EF4-FFF2-40B4-BE49-F238E27FC236}">
+                <a16:creationId xmlns:a16="http://schemas.microsoft.com/office/drawing/2014/main" id="{910DB054-6F18-D024-7E4F-50D0C21FB796}"/>
+              </a:ext>
+            </a:extLst>
+          </p:cNvPr>
+          <p:cNvSpPr>
+            <a:spLocks noGrp="1"/>
+          </p:cNvSpPr>
+          <p:nvPr>
+            <p:ph type="title"/>
+          </p:nvPr>
+        </p:nvSpPr>
+        <p:spPr/>
+        <p:txBody>
+          <a:bodyPr/>
+          <a:lstStyle/>
+          <a:p>
+            <a:r>
+              <a:rPr lang="en-US" dirty="0" err="1"/>
+              <a:t>Destructuring</a:t>
+            </a:r>
+            <a:r>
+              <a:rPr lang="en-US" dirty="0"/>
+              <a:t> Props</a:t>
+            </a:r>
+          </a:p>
+        </p:txBody>
+      </p:sp>
+      <p:sp>
+        <p:nvSpPr>
+          <p:cNvPr id="3" name="Content Placeholder 2">
+            <a:extLst>
+              <a:ext uri="{FF2B5EF4-FFF2-40B4-BE49-F238E27FC236}">
+                <a16:creationId xmlns:a16="http://schemas.microsoft.com/office/drawing/2014/main" id="{0F4EA587-F0A9-437C-0429-53B780C4F520}"/>
+              </a:ext>
+            </a:extLst>
+          </p:cNvPr>
+          <p:cNvSpPr>
+            <a:spLocks noGrp="1"/>
+          </p:cNvSpPr>
+          <p:nvPr>
+            <p:ph idx="1"/>
+          </p:nvPr>
+        </p:nvSpPr>
+        <p:spPr>
+          <a:xfrm>
+            <a:off x="943913" y="2908255"/>
+            <a:ext cx="4354490" cy="1130935"/>
+          </a:xfrm>
+        </p:spPr>
+        <p:txBody>
+          <a:bodyPr/>
+          <a:lstStyle/>
+          <a:p>
+            <a:r>
+              <a:rPr lang="en-US" dirty="0"/>
+              <a:t>We can pull out from the props object only what we need with </a:t>
+            </a:r>
+            <a:r>
+              <a:rPr lang="en-US" dirty="0" err="1"/>
+              <a:t>destructuring</a:t>
+            </a:r>
+            <a:endParaRPr lang="en-US" dirty="0"/>
+          </a:p>
+          <a:p>
+            <a:r>
+              <a:rPr lang="en-US" dirty="0"/>
+              <a:t>This is standard JavaScript (ES6 feature)</a:t>
+            </a:r>
+          </a:p>
+        </p:txBody>
+      </p:sp>
+      <p:pic>
+        <p:nvPicPr>
+          <p:cNvPr id="11" name="Picture 10">
+            <a:extLst>
+              <a:ext uri="{FF2B5EF4-FFF2-40B4-BE49-F238E27FC236}">
+                <a16:creationId xmlns:a16="http://schemas.microsoft.com/office/drawing/2014/main" id="{FC324A70-C563-3114-1238-7A1B0B870AB7}"/>
+              </a:ext>
+            </a:extLst>
+          </p:cNvPr>
+          <p:cNvPicPr>
+            <a:picLocks noChangeAspect="1"/>
+          </p:cNvPicPr>
+          <p:nvPr/>
+        </p:nvPicPr>
+        <p:blipFill>
+          <a:blip r:embed="rId2"/>
+          <a:stretch>
+            <a:fillRect/>
+          </a:stretch>
+        </p:blipFill>
+        <p:spPr>
+          <a:xfrm>
+            <a:off x="6195257" y="3265904"/>
+            <a:ext cx="4629796" cy="3124636"/>
+          </a:xfrm>
+          <a:prstGeom prst="rect">
+            <a:avLst/>
+          </a:prstGeom>
+        </p:spPr>
+      </p:pic>
+      <p:pic>
+        <p:nvPicPr>
+          <p:cNvPr id="13" name="Picture 12">
+            <a:extLst>
+              <a:ext uri="{FF2B5EF4-FFF2-40B4-BE49-F238E27FC236}">
+                <a16:creationId xmlns:a16="http://schemas.microsoft.com/office/drawing/2014/main" id="{C82BD620-473D-69E5-74BA-9823D6B9CCF2}"/>
+              </a:ext>
+            </a:extLst>
+          </p:cNvPr>
+          <p:cNvPicPr>
+            <a:picLocks noChangeAspect="1"/>
+          </p:cNvPicPr>
+          <p:nvPr/>
+        </p:nvPicPr>
+        <p:blipFill>
+          <a:blip r:embed="rId3"/>
+          <a:stretch>
+            <a:fillRect/>
+          </a:stretch>
+        </p:blipFill>
+        <p:spPr>
+          <a:xfrm>
+            <a:off x="6631749" y="2208436"/>
+            <a:ext cx="3562847" cy="924054"/>
+          </a:xfrm>
+          <a:prstGeom prst="rect">
+            <a:avLst/>
+          </a:prstGeom>
+        </p:spPr>
+      </p:pic>
+    </p:spTree>
+    <p:extLst>
+      <p:ext uri="{BB962C8B-B14F-4D97-AF65-F5344CB8AC3E}">
+        <p14:creationId xmlns:p14="http://schemas.microsoft.com/office/powerpoint/2010/main" val="1025800103"/>
+      </p:ext>
+    </p:extLst>
+  </p:cSld>
+  <p:clrMapOvr>
+    <a:masterClrMapping/>
+  </p:clrMapOvr>
+</p:sld>
+</file>
+
+<file path=ppt/slides/slide17.xml><?xml version="1.0" encoding="utf-8"?>
+<p:sld xmlns:a="http://schemas.openxmlformats.org/drawingml/2006/main" xmlns:r="http://schemas.openxmlformats.org/officeDocument/2006/relationships" xmlns:p="http://schemas.openxmlformats.org/presentationml/2006/main">
+  <p:cSld>
+    <p:spTree>
+      <p:nvGrpSpPr>
+        <p:cNvPr id="1" name="">
+          <a:extLst>
+            <a:ext uri="{FF2B5EF4-FFF2-40B4-BE49-F238E27FC236}">
+              <a16:creationId xmlns:a16="http://schemas.microsoft.com/office/drawing/2014/main" id="{6C663970-B580-3A35-3A9D-4A5EE22E502B}"/>
+            </a:ext>
+          </a:extLst>
+        </p:cNvPr>
+        <p:cNvGrpSpPr/>
+        <p:nvPr/>
+      </p:nvGrpSpPr>
+      <p:grpSpPr>
+        <a:xfrm>
+          <a:off x="0" y="0"/>
+          <a:ext cx="0" cy="0"/>
+          <a:chOff x="0" y="0"/>
+          <a:chExt cx="0" cy="0"/>
+        </a:xfrm>
+      </p:grpSpPr>
+      <p:sp>
+        <p:nvSpPr>
+          <p:cNvPr id="2" name="Title 1">
+            <a:extLst>
+              <a:ext uri="{FF2B5EF4-FFF2-40B4-BE49-F238E27FC236}">
+                <a16:creationId xmlns:a16="http://schemas.microsoft.com/office/drawing/2014/main" id="{CEE9B3CD-777A-23F4-8A44-017D8A5EF749}"/>
+              </a:ext>
+            </a:extLst>
+          </p:cNvPr>
+          <p:cNvSpPr>
+            <a:spLocks noGrp="1"/>
+          </p:cNvSpPr>
+          <p:nvPr>
+            <p:ph type="title"/>
+          </p:nvPr>
+        </p:nvSpPr>
+        <p:spPr/>
+        <p:txBody>
+          <a:bodyPr/>
+          <a:lstStyle/>
+          <a:p>
+            <a:r>
+              <a:rPr lang="en-US" dirty="0"/>
+              <a:t>Challenge – View an Incident</a:t>
+            </a:r>
+          </a:p>
+        </p:txBody>
+      </p:sp>
+      <p:sp>
+        <p:nvSpPr>
+          <p:cNvPr id="3" name="Content Placeholder 2">
+            <a:extLst>
+              <a:ext uri="{FF2B5EF4-FFF2-40B4-BE49-F238E27FC236}">
+                <a16:creationId xmlns:a16="http://schemas.microsoft.com/office/drawing/2014/main" id="{DEE1DCCD-078D-B123-DB79-BD4D98315F3C}"/>
+              </a:ext>
+            </a:extLst>
+          </p:cNvPr>
+          <p:cNvSpPr>
+            <a:spLocks noGrp="1"/>
+          </p:cNvSpPr>
+          <p:nvPr>
+            <p:ph idx="1"/>
+          </p:nvPr>
+        </p:nvSpPr>
+        <p:spPr>
+          <a:xfrm>
+            <a:off x="581192" y="2475925"/>
+            <a:ext cx="5317584" cy="1681246"/>
+          </a:xfrm>
+        </p:spPr>
+        <p:txBody>
+          <a:bodyPr/>
+          <a:lstStyle/>
+          <a:p>
+            <a:r>
+              <a:rPr lang="en-US" dirty="0"/>
+              <a:t>Create components to help manage incidents</a:t>
+            </a:r>
+          </a:p>
+        </p:txBody>
+      </p:sp>
+      <p:sp>
+        <p:nvSpPr>
+          <p:cNvPr id="6" name="TextBox 5">
+            <a:extLst>
+              <a:ext uri="{FF2B5EF4-FFF2-40B4-BE49-F238E27FC236}">
+                <a16:creationId xmlns:a16="http://schemas.microsoft.com/office/drawing/2014/main" id="{215E1F43-B795-CC7C-96F2-AD110F6D62D2}"/>
+              </a:ext>
+            </a:extLst>
+          </p:cNvPr>
+          <p:cNvSpPr txBox="1"/>
+          <p:nvPr/>
+        </p:nvSpPr>
+        <p:spPr>
+          <a:xfrm>
+            <a:off x="1228165" y="2402747"/>
+            <a:ext cx="756938" cy="369332"/>
+          </a:xfrm>
+          <a:prstGeom prst="rect">
+            <a:avLst/>
+          </a:prstGeom>
+          <a:noFill/>
+        </p:spPr>
+        <p:txBody>
+          <a:bodyPr wrap="none" rtlCol="0">
+            <a:spAutoFit/>
+          </a:bodyPr>
+          <a:lstStyle/>
+          <a:p>
+            <a:r>
+              <a:rPr lang="en-US" b="1" dirty="0"/>
+              <a:t>Goal:</a:t>
+            </a:r>
+          </a:p>
+        </p:txBody>
+      </p:sp>
+      <p:sp>
+        <p:nvSpPr>
+          <p:cNvPr id="7" name="TextBox 6">
+            <a:extLst>
+              <a:ext uri="{FF2B5EF4-FFF2-40B4-BE49-F238E27FC236}">
+                <a16:creationId xmlns:a16="http://schemas.microsoft.com/office/drawing/2014/main" id="{D5D4F60E-0B3C-786C-4B70-9146F5D2F5F2}"/>
+              </a:ext>
+            </a:extLst>
+          </p:cNvPr>
+          <p:cNvSpPr txBox="1"/>
+          <p:nvPr/>
+        </p:nvSpPr>
+        <p:spPr>
+          <a:xfrm>
+            <a:off x="6676991" y="2402747"/>
+            <a:ext cx="4933817" cy="369332"/>
+          </a:xfrm>
+          <a:prstGeom prst="rect">
+            <a:avLst/>
+          </a:prstGeom>
+          <a:noFill/>
+        </p:spPr>
+        <p:txBody>
+          <a:bodyPr wrap="square" rtlCol="0">
+            <a:spAutoFit/>
+          </a:bodyPr>
+          <a:lstStyle/>
+          <a:p>
+            <a:r>
+              <a:rPr lang="en-US" b="1" dirty="0"/>
+              <a:t>Scenario:  			   </a:t>
+            </a:r>
+          </a:p>
+        </p:txBody>
+      </p:sp>
+      <p:sp>
+        <p:nvSpPr>
+          <p:cNvPr id="8" name="Content Placeholder 2">
+            <a:extLst>
+              <a:ext uri="{FF2B5EF4-FFF2-40B4-BE49-F238E27FC236}">
+                <a16:creationId xmlns:a16="http://schemas.microsoft.com/office/drawing/2014/main" id="{A0C29790-AE69-F5E8-B7DB-110ACFAB5F4C}"/>
+              </a:ext>
+            </a:extLst>
+          </p:cNvPr>
+          <p:cNvSpPr txBox="1">
+            <a:spLocks/>
+          </p:cNvSpPr>
+          <p:nvPr/>
+        </p:nvSpPr>
+        <p:spPr>
+          <a:xfrm>
+            <a:off x="5368433" y="3072518"/>
+            <a:ext cx="5740756" cy="2753931"/>
+          </a:xfrm>
+          <a:prstGeom prst="rect">
+            <a:avLst/>
+          </a:prstGeom>
+        </p:spPr>
+        <p:txBody>
+          <a:bodyPr vert="horz" lIns="91440" tIns="45720" rIns="91440" bIns="45720" rtlCol="0" anchor="ctr">
+            <a:normAutofit fontScale="77500" lnSpcReduction="20000"/>
+          </a:bodyPr>
+          <a:lstStyle>
+            <a:lvl1pPr marL="306000" indent="-306000" algn="l" defTabSz="457200" rtl="0" eaLnBrk="1" latinLnBrk="0" hangingPunct="1">
+              <a:spcBef>
+                <a:spcPct val="20000"/>
+              </a:spcBef>
+              <a:spcAft>
+                <a:spcPts val="600"/>
+              </a:spcAft>
+              <a:buClr>
+                <a:schemeClr val="accent2"/>
+              </a:buClr>
+              <a:buSzPct val="92000"/>
+              <a:buFont typeface="Wingdings 2" panose="05020102010507070707" pitchFamily="18" charset="2"/>
+              <a:buChar char=""/>
+              <a:defRPr sz="1800" kern="1200">
+                <a:solidFill>
+                  <a:schemeClr val="tx2"/>
+                </a:solidFill>
+                <a:latin typeface="+mn-lt"/>
+                <a:ea typeface="+mn-ea"/>
+                <a:cs typeface="+mn-cs"/>
+              </a:defRPr>
+            </a:lvl1pPr>
+            <a:lvl2pPr marL="630000" indent="-306000" algn="l" defTabSz="457200" rtl="0" eaLnBrk="1" latinLnBrk="0" hangingPunct="1">
+              <a:spcBef>
+                <a:spcPct val="20000"/>
+              </a:spcBef>
+              <a:spcAft>
+                <a:spcPts val="600"/>
+              </a:spcAft>
+              <a:buClr>
+                <a:schemeClr val="accent2"/>
+              </a:buClr>
+              <a:buSzPct val="92000"/>
+              <a:buFont typeface="Wingdings 2" panose="05020102010507070707" pitchFamily="18" charset="2"/>
+              <a:buChar char=""/>
+              <a:defRPr sz="1600" kern="1200">
+                <a:solidFill>
+                  <a:schemeClr val="tx2"/>
+                </a:solidFill>
+                <a:latin typeface="+mn-lt"/>
+                <a:ea typeface="+mn-ea"/>
+                <a:cs typeface="+mn-cs"/>
+              </a:defRPr>
+            </a:lvl2pPr>
+            <a:lvl3pPr marL="900000" indent="-270000" algn="l" defTabSz="457200" rtl="0" eaLnBrk="1" latinLnBrk="0" hangingPunct="1">
+              <a:spcBef>
+                <a:spcPct val="20000"/>
+              </a:spcBef>
+              <a:spcAft>
+                <a:spcPts val="600"/>
+              </a:spcAft>
+              <a:buClr>
+                <a:schemeClr val="accent2"/>
+              </a:buClr>
+              <a:buSzPct val="92000"/>
+              <a:buFont typeface="Wingdings 2" panose="05020102010507070707" pitchFamily="18" charset="2"/>
+              <a:buChar char=""/>
+              <a:defRPr sz="1400" kern="1200">
+                <a:solidFill>
+                  <a:schemeClr val="tx2"/>
+                </a:solidFill>
+                <a:latin typeface="+mn-lt"/>
+                <a:ea typeface="+mn-ea"/>
+                <a:cs typeface="+mn-cs"/>
+              </a:defRPr>
+            </a:lvl3pPr>
+            <a:lvl4pPr marL="1242000" indent="-234000" algn="l" defTabSz="457200" rtl="0" eaLnBrk="1" latinLnBrk="0" hangingPunct="1">
+              <a:spcBef>
+                <a:spcPct val="20000"/>
+              </a:spcBef>
+              <a:spcAft>
+                <a:spcPts val="600"/>
+              </a:spcAft>
+              <a:buClr>
+                <a:schemeClr val="accent2"/>
+              </a:buClr>
+              <a:buSzPct val="92000"/>
+              <a:buFont typeface="Wingdings 2" panose="05020102010507070707" pitchFamily="18" charset="2"/>
+              <a:buChar char=""/>
+              <a:defRPr sz="1200" kern="1200">
+                <a:solidFill>
+                  <a:schemeClr val="tx2"/>
+                </a:solidFill>
+                <a:latin typeface="+mn-lt"/>
+                <a:ea typeface="+mn-ea"/>
+                <a:cs typeface="+mn-cs"/>
+              </a:defRPr>
+            </a:lvl4pPr>
+            <a:lvl5pPr marL="1602000" indent="-234000" algn="l" defTabSz="457200" rtl="0" eaLnBrk="1" latinLnBrk="0" hangingPunct="1">
+              <a:spcBef>
+                <a:spcPct val="20000"/>
+              </a:spcBef>
+              <a:spcAft>
+                <a:spcPts val="600"/>
+              </a:spcAft>
+              <a:buClr>
+                <a:schemeClr val="accent2"/>
+              </a:buClr>
+              <a:buSzPct val="92000"/>
+              <a:buFont typeface="Wingdings 2" panose="05020102010507070707" pitchFamily="18" charset="2"/>
+              <a:buChar char=""/>
+              <a:defRPr sz="1200" kern="1200">
+                <a:solidFill>
+                  <a:schemeClr val="tx2"/>
+                </a:solidFill>
+                <a:latin typeface="+mn-lt"/>
+                <a:ea typeface="+mn-ea"/>
+                <a:cs typeface="+mn-cs"/>
+              </a:defRPr>
+            </a:lvl5pPr>
+            <a:lvl6pPr marL="1900000" indent="-228600" algn="l" defTabSz="457200" rtl="0" eaLnBrk="1" latinLnBrk="0" hangingPunct="1">
+              <a:spcBef>
+                <a:spcPct val="20000"/>
+              </a:spcBef>
+              <a:spcAft>
+                <a:spcPts val="600"/>
+              </a:spcAft>
+              <a:buClr>
+                <a:schemeClr val="accent2"/>
+              </a:buClr>
+              <a:buSzPct val="92000"/>
+              <a:buFont typeface="Wingdings 2" panose="05020102010507070707" pitchFamily="18" charset="2"/>
+              <a:buChar char=""/>
+              <a:defRPr sz="1200" kern="1200">
+                <a:solidFill>
+                  <a:schemeClr val="tx2"/>
+                </a:solidFill>
+                <a:latin typeface="+mn-lt"/>
+                <a:ea typeface="+mn-ea"/>
+                <a:cs typeface="+mn-cs"/>
+              </a:defRPr>
+            </a:lvl6pPr>
+            <a:lvl7pPr marL="2200000" indent="-228600" algn="l" defTabSz="457200" rtl="0" eaLnBrk="1" latinLnBrk="0" hangingPunct="1">
+              <a:spcBef>
+                <a:spcPct val="20000"/>
+              </a:spcBef>
+              <a:spcAft>
+                <a:spcPts val="600"/>
+              </a:spcAft>
+              <a:buClr>
+                <a:schemeClr val="accent2"/>
+              </a:buClr>
+              <a:buSzPct val="92000"/>
+              <a:buFont typeface="Wingdings 2" panose="05020102010507070707" pitchFamily="18" charset="2"/>
+              <a:buChar char=""/>
+              <a:defRPr sz="1200" kern="1200">
+                <a:solidFill>
+                  <a:schemeClr val="tx2"/>
+                </a:solidFill>
+                <a:latin typeface="+mn-lt"/>
+                <a:ea typeface="+mn-ea"/>
+                <a:cs typeface="+mn-cs"/>
+              </a:defRPr>
+            </a:lvl7pPr>
+            <a:lvl8pPr marL="2500000" indent="-228600" algn="l" defTabSz="457200" rtl="0" eaLnBrk="1" latinLnBrk="0" hangingPunct="1">
+              <a:spcBef>
+                <a:spcPct val="20000"/>
+              </a:spcBef>
+              <a:spcAft>
+                <a:spcPts val="600"/>
+              </a:spcAft>
+              <a:buClr>
+                <a:schemeClr val="accent2"/>
+              </a:buClr>
+              <a:buSzPct val="92000"/>
+              <a:buFont typeface="Wingdings 2" panose="05020102010507070707" pitchFamily="18" charset="2"/>
+              <a:buChar char=""/>
+              <a:defRPr sz="1200" kern="1200">
+                <a:solidFill>
+                  <a:schemeClr val="tx2"/>
+                </a:solidFill>
+                <a:latin typeface="+mn-lt"/>
+                <a:ea typeface="+mn-ea"/>
+                <a:cs typeface="+mn-cs"/>
+              </a:defRPr>
+            </a:lvl8pPr>
+            <a:lvl9pPr marL="2800000" indent="-228600" algn="l" defTabSz="457200" rtl="0" eaLnBrk="1" latinLnBrk="0" hangingPunct="1">
+              <a:spcBef>
+                <a:spcPct val="20000"/>
+              </a:spcBef>
+              <a:spcAft>
+                <a:spcPts val="600"/>
+              </a:spcAft>
+              <a:buClr>
+                <a:schemeClr val="accent2"/>
+              </a:buClr>
+              <a:buSzPct val="92000"/>
+              <a:buFont typeface="Wingdings 2" panose="05020102010507070707" pitchFamily="18" charset="2"/>
+              <a:buChar char=""/>
+              <a:defRPr sz="1200" kern="1200">
+                <a:solidFill>
+                  <a:schemeClr val="tx2"/>
+                </a:solidFill>
+                <a:latin typeface="+mn-lt"/>
+                <a:ea typeface="+mn-ea"/>
+                <a:cs typeface="+mn-cs"/>
+              </a:defRPr>
+            </a:lvl9pPr>
+          </a:lstStyle>
+          <a:p>
+            <a:r>
+              <a:rPr lang="en-US" dirty="0"/>
+              <a:t>Your organization needs to build a portal for service technicians. This portal should be able to view, modify, and delete incidents. This application will be written in React.</a:t>
+            </a:r>
+          </a:p>
+          <a:p>
+            <a:r>
+              <a:rPr lang="en-US" dirty="0"/>
+              <a:t>In the ‘Home’ component, under the header, nest a ‘</a:t>
+            </a:r>
+            <a:r>
+              <a:rPr lang="en-US" dirty="0" err="1"/>
+              <a:t>IncidentList</a:t>
+            </a:r>
+            <a:r>
+              <a:rPr lang="en-US" dirty="0"/>
+              <a:t>’ component. Then, inside of ‘</a:t>
+            </a:r>
+            <a:r>
+              <a:rPr lang="en-US" dirty="0" err="1"/>
+              <a:t>IncidentList</a:t>
+            </a:r>
+            <a:r>
+              <a:rPr lang="en-US" dirty="0"/>
+              <a:t>’, nest an ‘Incident’ component.</a:t>
+            </a:r>
+          </a:p>
+          <a:p>
+            <a:r>
+              <a:rPr lang="en-US" dirty="0"/>
+              <a:t>Import the provided JSON dummy data into ‘</a:t>
+            </a:r>
+            <a:r>
+              <a:rPr lang="en-US" dirty="0" err="1"/>
+              <a:t>IncidentList</a:t>
+            </a:r>
+            <a:r>
+              <a:rPr lang="en-US" dirty="0"/>
+              <a:t>’</a:t>
+            </a:r>
+          </a:p>
+          <a:p>
+            <a:r>
+              <a:rPr lang="en-US" dirty="0"/>
+              <a:t>Render the first incident record by passing the record data down via props to the ‘Incident’ component</a:t>
+            </a:r>
+          </a:p>
+          <a:p>
+            <a:r>
+              <a:rPr lang="en-US" dirty="0"/>
+              <a:t>Style the Incident component into a card that displays the incident id, priority, severity, and status fields</a:t>
+            </a:r>
+            <a:br>
+              <a:rPr lang="en-US" dirty="0"/>
+            </a:br>
+            <a:endParaRPr lang="en-US" dirty="0"/>
+          </a:p>
+        </p:txBody>
+      </p:sp>
+      <p:pic>
+        <p:nvPicPr>
+          <p:cNvPr id="5" name="Picture 4">
+            <a:extLst>
+              <a:ext uri="{FF2B5EF4-FFF2-40B4-BE49-F238E27FC236}">
+                <a16:creationId xmlns:a16="http://schemas.microsoft.com/office/drawing/2014/main" id="{6D4165F0-AC1B-F1D0-07B9-660B830EBEAD}"/>
+              </a:ext>
+            </a:extLst>
+          </p:cNvPr>
+          <p:cNvPicPr>
+            <a:picLocks noChangeAspect="1"/>
+          </p:cNvPicPr>
+          <p:nvPr/>
+        </p:nvPicPr>
+        <p:blipFill>
+          <a:blip r:embed="rId2"/>
+          <a:stretch>
+            <a:fillRect/>
+          </a:stretch>
+        </p:blipFill>
+        <p:spPr>
+          <a:xfrm>
+            <a:off x="1376220" y="4401670"/>
+            <a:ext cx="2289077" cy="1937992"/>
+          </a:xfrm>
+          <a:prstGeom prst="rect">
+            <a:avLst/>
+          </a:prstGeom>
+        </p:spPr>
+      </p:pic>
+    </p:spTree>
+    <p:extLst>
+      <p:ext uri="{BB962C8B-B14F-4D97-AF65-F5344CB8AC3E}">
+        <p14:creationId xmlns:p14="http://schemas.microsoft.com/office/powerpoint/2010/main" val="3927732176"/>
+      </p:ext>
+    </p:extLst>
+  </p:cSld>
+  <p:clrMapOvr>
+    <a:masterClrMapping/>
+  </p:clrMapOvr>
+</p:sld>
+</file>
+
+<file path=ppt/slides/slide18.xml><?xml version="1.0" encoding="utf-8"?>
+<p:sld xmlns:a="http://schemas.openxmlformats.org/drawingml/2006/main" xmlns:r="http://schemas.openxmlformats.org/officeDocument/2006/relationships" xmlns:p="http://schemas.openxmlformats.org/presentationml/2006/main">
+  <p:cSld>
+    <p:spTree>
+      <p:nvGrpSpPr>
+        <p:cNvPr id="1" name=""/>
+        <p:cNvGrpSpPr/>
+        <p:nvPr/>
+      </p:nvGrpSpPr>
+      <p:grpSpPr>
+        <a:xfrm>
+          <a:off x="0" y="0"/>
+          <a:ext cx="0" cy="0"/>
+          <a:chOff x="0" y="0"/>
+          <a:chExt cx="0" cy="0"/>
+        </a:xfrm>
+      </p:grpSpPr>
+      <p:sp>
+        <p:nvSpPr>
+          <p:cNvPr id="2" name="Title 1">
+            <a:extLst>
+              <a:ext uri="{FF2B5EF4-FFF2-40B4-BE49-F238E27FC236}">
+                <a16:creationId xmlns:a16="http://schemas.microsoft.com/office/drawing/2014/main" id="{54D54031-2D95-205E-B81A-3800E5D2F3E4}"/>
+              </a:ext>
+            </a:extLst>
+          </p:cNvPr>
+          <p:cNvSpPr>
+            <a:spLocks noGrp="1"/>
+          </p:cNvSpPr>
+          <p:nvPr>
+            <p:ph type="title"/>
+          </p:nvPr>
+        </p:nvSpPr>
+        <p:spPr/>
+        <p:txBody>
+          <a:bodyPr/>
+          <a:lstStyle/>
+          <a:p>
+            <a:r>
+              <a:rPr lang="en-US" dirty="0"/>
+              <a:t>Lists</a:t>
+            </a:r>
+          </a:p>
+        </p:txBody>
+      </p:sp>
+      <p:sp>
+        <p:nvSpPr>
+          <p:cNvPr id="3" name="Content Placeholder 2">
+            <a:extLst>
+              <a:ext uri="{FF2B5EF4-FFF2-40B4-BE49-F238E27FC236}">
+                <a16:creationId xmlns:a16="http://schemas.microsoft.com/office/drawing/2014/main" id="{9180332D-03AE-5D81-20B0-21B34D330182}"/>
+              </a:ext>
+            </a:extLst>
+          </p:cNvPr>
+          <p:cNvSpPr>
+            <a:spLocks noGrp="1"/>
+          </p:cNvSpPr>
+          <p:nvPr>
+            <p:ph idx="1"/>
+          </p:nvPr>
+        </p:nvSpPr>
+        <p:spPr>
+          <a:xfrm>
+            <a:off x="581192" y="2180497"/>
+            <a:ext cx="11029615" cy="1248504"/>
+          </a:xfrm>
+        </p:spPr>
+        <p:txBody>
+          <a:bodyPr/>
+          <a:lstStyle/>
+          <a:p>
+            <a:r>
+              <a:rPr lang="en-US" dirty="0"/>
+              <a:t>The JavaScript map() array method is used for looping through a list and rendering content:</a:t>
+            </a:r>
+          </a:p>
+          <a:p>
+            <a:pPr lvl="1"/>
+            <a:r>
+              <a:rPr lang="en-US" dirty="0"/>
+              <a:t>A key is HIGHLY encouraged (or else you will get a warning) – A key allows React to update an item and refresh the component properly if it is updated or removed </a:t>
+            </a:r>
+          </a:p>
+        </p:txBody>
+      </p:sp>
+      <p:pic>
+        <p:nvPicPr>
+          <p:cNvPr id="5" name="Picture 4">
+            <a:extLst>
+              <a:ext uri="{FF2B5EF4-FFF2-40B4-BE49-F238E27FC236}">
+                <a16:creationId xmlns:a16="http://schemas.microsoft.com/office/drawing/2014/main" id="{124D1BD0-1119-8C20-CD4B-655713E110C2}"/>
+              </a:ext>
+            </a:extLst>
+          </p:cNvPr>
+          <p:cNvPicPr>
+            <a:picLocks noChangeAspect="1"/>
+          </p:cNvPicPr>
+          <p:nvPr/>
+        </p:nvPicPr>
+        <p:blipFill>
+          <a:blip r:embed="rId2"/>
+          <a:stretch>
+            <a:fillRect/>
+          </a:stretch>
+        </p:blipFill>
+        <p:spPr>
+          <a:xfrm>
+            <a:off x="1684227" y="3602597"/>
+            <a:ext cx="8823543" cy="2694294"/>
+          </a:xfrm>
+          <a:prstGeom prst="rect">
+            <a:avLst/>
+          </a:prstGeom>
+        </p:spPr>
+      </p:pic>
+    </p:spTree>
+    <p:extLst>
+      <p:ext uri="{BB962C8B-B14F-4D97-AF65-F5344CB8AC3E}">
+        <p14:creationId xmlns:p14="http://schemas.microsoft.com/office/powerpoint/2010/main" val="1895791079"/>
+      </p:ext>
+    </p:extLst>
+  </p:cSld>
+  <p:clrMapOvr>
+    <a:masterClrMapping/>
+  </p:clrMapOvr>
+</p:sld>
+</file>
+
+<file path=ppt/slides/slide19.xml><?xml version="1.0" encoding="utf-8"?>
+<p:sld xmlns:a="http://schemas.openxmlformats.org/drawingml/2006/main" xmlns:r="http://schemas.openxmlformats.org/officeDocument/2006/relationships" xmlns:p="http://schemas.openxmlformats.org/presentationml/2006/main">
+  <p:cSld>
+    <p:spTree>
+      <p:nvGrpSpPr>
+        <p:cNvPr id="1" name="">
+          <a:extLst>
+            <a:ext uri="{FF2B5EF4-FFF2-40B4-BE49-F238E27FC236}">
+              <a16:creationId xmlns:a16="http://schemas.microsoft.com/office/drawing/2014/main" id="{DDCA1431-1044-F8DC-F67B-8483993AE82E}"/>
+            </a:ext>
+          </a:extLst>
+        </p:cNvPr>
+        <p:cNvGrpSpPr/>
+        <p:nvPr/>
+      </p:nvGrpSpPr>
+      <p:grpSpPr>
+        <a:xfrm>
+          <a:off x="0" y="0"/>
+          <a:ext cx="0" cy="0"/>
+          <a:chOff x="0" y="0"/>
+          <a:chExt cx="0" cy="0"/>
+        </a:xfrm>
+      </p:grpSpPr>
+      <p:sp>
+        <p:nvSpPr>
+          <p:cNvPr id="2" name="Title 1">
+            <a:extLst>
+              <a:ext uri="{FF2B5EF4-FFF2-40B4-BE49-F238E27FC236}">
+                <a16:creationId xmlns:a16="http://schemas.microsoft.com/office/drawing/2014/main" id="{E716AE94-3F36-12C5-8548-C3DFAEE335E5}"/>
+              </a:ext>
+            </a:extLst>
+          </p:cNvPr>
+          <p:cNvSpPr>
+            <a:spLocks noGrp="1"/>
+          </p:cNvSpPr>
+          <p:nvPr>
+            <p:ph type="title"/>
+          </p:nvPr>
+        </p:nvSpPr>
+        <p:spPr/>
+        <p:txBody>
+          <a:bodyPr/>
+          <a:lstStyle/>
+          <a:p>
+            <a:r>
+              <a:rPr lang="en-US" dirty="0"/>
+              <a:t>Challenge – View All the incidents</a:t>
+            </a:r>
+          </a:p>
+        </p:txBody>
+      </p:sp>
+      <p:sp>
+        <p:nvSpPr>
+          <p:cNvPr id="3" name="Content Placeholder 2">
+            <a:extLst>
+              <a:ext uri="{FF2B5EF4-FFF2-40B4-BE49-F238E27FC236}">
+                <a16:creationId xmlns:a16="http://schemas.microsoft.com/office/drawing/2014/main" id="{C2F91159-254F-2A45-308C-9EFACD5920A2}"/>
+              </a:ext>
+            </a:extLst>
+          </p:cNvPr>
+          <p:cNvSpPr>
+            <a:spLocks noGrp="1"/>
+          </p:cNvSpPr>
+          <p:nvPr>
+            <p:ph idx="1"/>
+          </p:nvPr>
+        </p:nvSpPr>
+        <p:spPr>
+          <a:xfrm>
+            <a:off x="581192" y="2475925"/>
+            <a:ext cx="5317584" cy="1681246"/>
+          </a:xfrm>
+        </p:spPr>
+        <p:txBody>
+          <a:bodyPr/>
+          <a:lstStyle/>
+          <a:p>
+            <a:r>
+              <a:rPr lang="en-US" dirty="0"/>
+              <a:t>Edit your work so that all incidents display</a:t>
+            </a:r>
+          </a:p>
+        </p:txBody>
+      </p:sp>
+      <p:sp>
+        <p:nvSpPr>
+          <p:cNvPr id="6" name="TextBox 5">
+            <a:extLst>
+              <a:ext uri="{FF2B5EF4-FFF2-40B4-BE49-F238E27FC236}">
+                <a16:creationId xmlns:a16="http://schemas.microsoft.com/office/drawing/2014/main" id="{99137B85-329C-D7A2-FD80-98DDDAC248A8}"/>
+              </a:ext>
+            </a:extLst>
+          </p:cNvPr>
+          <p:cNvSpPr txBox="1"/>
+          <p:nvPr/>
+        </p:nvSpPr>
+        <p:spPr>
+          <a:xfrm>
+            <a:off x="1228165" y="2402747"/>
+            <a:ext cx="756938" cy="369332"/>
+          </a:xfrm>
+          <a:prstGeom prst="rect">
+            <a:avLst/>
+          </a:prstGeom>
+          <a:noFill/>
+        </p:spPr>
+        <p:txBody>
+          <a:bodyPr wrap="none" rtlCol="0">
+            <a:spAutoFit/>
+          </a:bodyPr>
+          <a:lstStyle/>
+          <a:p>
+            <a:r>
+              <a:rPr lang="en-US" b="1" dirty="0"/>
+              <a:t>Goal:</a:t>
+            </a:r>
+          </a:p>
+        </p:txBody>
+      </p:sp>
+      <p:sp>
+        <p:nvSpPr>
+          <p:cNvPr id="7" name="TextBox 6">
+            <a:extLst>
+              <a:ext uri="{FF2B5EF4-FFF2-40B4-BE49-F238E27FC236}">
+                <a16:creationId xmlns:a16="http://schemas.microsoft.com/office/drawing/2014/main" id="{9261B69C-A152-D3A6-CD68-1DA17F801EE2}"/>
+              </a:ext>
+            </a:extLst>
+          </p:cNvPr>
+          <p:cNvSpPr txBox="1"/>
+          <p:nvPr/>
+        </p:nvSpPr>
+        <p:spPr>
+          <a:xfrm>
+            <a:off x="6676991" y="2402747"/>
+            <a:ext cx="4933817" cy="369332"/>
+          </a:xfrm>
+          <a:prstGeom prst="rect">
+            <a:avLst/>
+          </a:prstGeom>
+          <a:noFill/>
+        </p:spPr>
+        <p:txBody>
+          <a:bodyPr wrap="square" rtlCol="0">
+            <a:spAutoFit/>
+          </a:bodyPr>
+          <a:lstStyle/>
+          <a:p>
+            <a:r>
+              <a:rPr lang="en-US" b="1" dirty="0"/>
+              <a:t>Scenario:  			   </a:t>
+            </a:r>
+          </a:p>
+        </p:txBody>
+      </p:sp>
+      <p:sp>
+        <p:nvSpPr>
+          <p:cNvPr id="8" name="Content Placeholder 2">
+            <a:extLst>
+              <a:ext uri="{FF2B5EF4-FFF2-40B4-BE49-F238E27FC236}">
+                <a16:creationId xmlns:a16="http://schemas.microsoft.com/office/drawing/2014/main" id="{45AEE151-BC9C-8BDA-FA0B-94944123D0CA}"/>
+              </a:ext>
+            </a:extLst>
+          </p:cNvPr>
+          <p:cNvSpPr txBox="1">
+            <a:spLocks/>
+          </p:cNvSpPr>
+          <p:nvPr/>
+        </p:nvSpPr>
+        <p:spPr>
+          <a:xfrm>
+            <a:off x="5314644" y="3054587"/>
+            <a:ext cx="5740756" cy="2753931"/>
+          </a:xfrm>
+          <a:prstGeom prst="rect">
+            <a:avLst/>
+          </a:prstGeom>
+        </p:spPr>
+        <p:txBody>
+          <a:bodyPr vert="horz" lIns="91440" tIns="45720" rIns="91440" bIns="45720" rtlCol="0" anchor="ctr">
+            <a:normAutofit fontScale="92500"/>
+          </a:bodyPr>
+          <a:lstStyle>
+            <a:lvl1pPr marL="306000" indent="-306000" algn="l" defTabSz="457200" rtl="0" eaLnBrk="1" latinLnBrk="0" hangingPunct="1">
+              <a:spcBef>
+                <a:spcPct val="20000"/>
+              </a:spcBef>
+              <a:spcAft>
+                <a:spcPts val="600"/>
+              </a:spcAft>
+              <a:buClr>
+                <a:schemeClr val="accent2"/>
+              </a:buClr>
+              <a:buSzPct val="92000"/>
+              <a:buFont typeface="Wingdings 2" panose="05020102010507070707" pitchFamily="18" charset="2"/>
+              <a:buChar char=""/>
+              <a:defRPr sz="1800" kern="1200">
+                <a:solidFill>
+                  <a:schemeClr val="tx2"/>
+                </a:solidFill>
+                <a:latin typeface="+mn-lt"/>
+                <a:ea typeface="+mn-ea"/>
+                <a:cs typeface="+mn-cs"/>
+              </a:defRPr>
+            </a:lvl1pPr>
+            <a:lvl2pPr marL="630000" indent="-306000" algn="l" defTabSz="457200" rtl="0" eaLnBrk="1" latinLnBrk="0" hangingPunct="1">
+              <a:spcBef>
+                <a:spcPct val="20000"/>
+              </a:spcBef>
+              <a:spcAft>
+                <a:spcPts val="600"/>
+              </a:spcAft>
+              <a:buClr>
+                <a:schemeClr val="accent2"/>
+              </a:buClr>
+              <a:buSzPct val="92000"/>
+              <a:buFont typeface="Wingdings 2" panose="05020102010507070707" pitchFamily="18" charset="2"/>
+              <a:buChar char=""/>
+              <a:defRPr sz="1600" kern="1200">
+                <a:solidFill>
+                  <a:schemeClr val="tx2"/>
+                </a:solidFill>
+                <a:latin typeface="+mn-lt"/>
+                <a:ea typeface="+mn-ea"/>
+                <a:cs typeface="+mn-cs"/>
+              </a:defRPr>
+            </a:lvl2pPr>
+            <a:lvl3pPr marL="900000" indent="-270000" algn="l" defTabSz="457200" rtl="0" eaLnBrk="1" latinLnBrk="0" hangingPunct="1">
+              <a:spcBef>
+                <a:spcPct val="20000"/>
+              </a:spcBef>
+              <a:spcAft>
+                <a:spcPts val="600"/>
+              </a:spcAft>
+              <a:buClr>
+                <a:schemeClr val="accent2"/>
+              </a:buClr>
+              <a:buSzPct val="92000"/>
+              <a:buFont typeface="Wingdings 2" panose="05020102010507070707" pitchFamily="18" charset="2"/>
+              <a:buChar char=""/>
+              <a:defRPr sz="1400" kern="1200">
+                <a:solidFill>
+                  <a:schemeClr val="tx2"/>
+                </a:solidFill>
+                <a:latin typeface="+mn-lt"/>
+                <a:ea typeface="+mn-ea"/>
+                <a:cs typeface="+mn-cs"/>
+              </a:defRPr>
+            </a:lvl3pPr>
+            <a:lvl4pPr marL="1242000" indent="-234000" algn="l" defTabSz="457200" rtl="0" eaLnBrk="1" latinLnBrk="0" hangingPunct="1">
+              <a:spcBef>
+                <a:spcPct val="20000"/>
+              </a:spcBef>
+              <a:spcAft>
+                <a:spcPts val="600"/>
+              </a:spcAft>
+              <a:buClr>
+                <a:schemeClr val="accent2"/>
+              </a:buClr>
+              <a:buSzPct val="92000"/>
+              <a:buFont typeface="Wingdings 2" panose="05020102010507070707" pitchFamily="18" charset="2"/>
+              <a:buChar char=""/>
+              <a:defRPr sz="1200" kern="1200">
+                <a:solidFill>
+                  <a:schemeClr val="tx2"/>
+                </a:solidFill>
+                <a:latin typeface="+mn-lt"/>
+                <a:ea typeface="+mn-ea"/>
+                <a:cs typeface="+mn-cs"/>
+              </a:defRPr>
+            </a:lvl4pPr>
+            <a:lvl5pPr marL="1602000" indent="-234000" algn="l" defTabSz="457200" rtl="0" eaLnBrk="1" latinLnBrk="0" hangingPunct="1">
+              <a:spcBef>
+                <a:spcPct val="20000"/>
+              </a:spcBef>
+              <a:spcAft>
+                <a:spcPts val="600"/>
+              </a:spcAft>
+              <a:buClr>
+                <a:schemeClr val="accent2"/>
+              </a:buClr>
+              <a:buSzPct val="92000"/>
+              <a:buFont typeface="Wingdings 2" panose="05020102010507070707" pitchFamily="18" charset="2"/>
+              <a:buChar char=""/>
+              <a:defRPr sz="1200" kern="1200">
+                <a:solidFill>
+                  <a:schemeClr val="tx2"/>
+                </a:solidFill>
+                <a:latin typeface="+mn-lt"/>
+                <a:ea typeface="+mn-ea"/>
+                <a:cs typeface="+mn-cs"/>
+              </a:defRPr>
+            </a:lvl5pPr>
+            <a:lvl6pPr marL="1900000" indent="-228600" algn="l" defTabSz="457200" rtl="0" eaLnBrk="1" latinLnBrk="0" hangingPunct="1">
+              <a:spcBef>
+                <a:spcPct val="20000"/>
+              </a:spcBef>
+              <a:spcAft>
+                <a:spcPts val="600"/>
+              </a:spcAft>
+              <a:buClr>
+                <a:schemeClr val="accent2"/>
+              </a:buClr>
+              <a:buSzPct val="92000"/>
+              <a:buFont typeface="Wingdings 2" panose="05020102010507070707" pitchFamily="18" charset="2"/>
+              <a:buChar char=""/>
+              <a:defRPr sz="1200" kern="1200">
+                <a:solidFill>
+                  <a:schemeClr val="tx2"/>
+                </a:solidFill>
+                <a:latin typeface="+mn-lt"/>
+                <a:ea typeface="+mn-ea"/>
+                <a:cs typeface="+mn-cs"/>
+              </a:defRPr>
+            </a:lvl6pPr>
+            <a:lvl7pPr marL="2200000" indent="-228600" algn="l" defTabSz="457200" rtl="0" eaLnBrk="1" latinLnBrk="0" hangingPunct="1">
+              <a:spcBef>
+                <a:spcPct val="20000"/>
+              </a:spcBef>
+              <a:spcAft>
+                <a:spcPts val="600"/>
+              </a:spcAft>
+              <a:buClr>
+                <a:schemeClr val="accent2"/>
+              </a:buClr>
+              <a:buSzPct val="92000"/>
+              <a:buFont typeface="Wingdings 2" panose="05020102010507070707" pitchFamily="18" charset="2"/>
+              <a:buChar char=""/>
+              <a:defRPr sz="1200" kern="1200">
+                <a:solidFill>
+                  <a:schemeClr val="tx2"/>
+                </a:solidFill>
+                <a:latin typeface="+mn-lt"/>
+                <a:ea typeface="+mn-ea"/>
+                <a:cs typeface="+mn-cs"/>
+              </a:defRPr>
+            </a:lvl7pPr>
+            <a:lvl8pPr marL="2500000" indent="-228600" algn="l" defTabSz="457200" rtl="0" eaLnBrk="1" latinLnBrk="0" hangingPunct="1">
+              <a:spcBef>
+                <a:spcPct val="20000"/>
+              </a:spcBef>
+              <a:spcAft>
+                <a:spcPts val="600"/>
+              </a:spcAft>
+              <a:buClr>
+                <a:schemeClr val="accent2"/>
+              </a:buClr>
+              <a:buSzPct val="92000"/>
+              <a:buFont typeface="Wingdings 2" panose="05020102010507070707" pitchFamily="18" charset="2"/>
+              <a:buChar char=""/>
+              <a:defRPr sz="1200" kern="1200">
+                <a:solidFill>
+                  <a:schemeClr val="tx2"/>
+                </a:solidFill>
+                <a:latin typeface="+mn-lt"/>
+                <a:ea typeface="+mn-ea"/>
+                <a:cs typeface="+mn-cs"/>
+              </a:defRPr>
+            </a:lvl8pPr>
+            <a:lvl9pPr marL="2800000" indent="-228600" algn="l" defTabSz="457200" rtl="0" eaLnBrk="1" latinLnBrk="0" hangingPunct="1">
+              <a:spcBef>
+                <a:spcPct val="20000"/>
+              </a:spcBef>
+              <a:spcAft>
+                <a:spcPts val="600"/>
+              </a:spcAft>
+              <a:buClr>
+                <a:schemeClr val="accent2"/>
+              </a:buClr>
+              <a:buSzPct val="92000"/>
+              <a:buFont typeface="Wingdings 2" panose="05020102010507070707" pitchFamily="18" charset="2"/>
+              <a:buChar char=""/>
+              <a:defRPr sz="1200" kern="1200">
+                <a:solidFill>
+                  <a:schemeClr val="tx2"/>
+                </a:solidFill>
+                <a:latin typeface="+mn-lt"/>
+                <a:ea typeface="+mn-ea"/>
+                <a:cs typeface="+mn-cs"/>
+              </a:defRPr>
+            </a:lvl9pPr>
+          </a:lstStyle>
+          <a:p>
+            <a:r>
+              <a:rPr lang="en-US" dirty="0"/>
+              <a:t>Your organization needs to build a portal for service technicians. This portal should be able to view, modify, and delete incidents. This application will be written in React.</a:t>
+            </a:r>
+          </a:p>
+          <a:p>
+            <a:r>
+              <a:rPr lang="en-US" dirty="0"/>
+              <a:t>Modify your ‘</a:t>
+            </a:r>
+            <a:r>
+              <a:rPr lang="en-US" dirty="0" err="1"/>
+              <a:t>IncidentList</a:t>
+            </a:r>
+            <a:r>
+              <a:rPr lang="en-US" dirty="0"/>
+              <a:t>’ component so that it loops through the dummy data and displays all the incident records. </a:t>
+            </a:r>
+          </a:p>
+          <a:p>
+            <a:r>
+              <a:rPr lang="en-US" dirty="0"/>
+              <a:t>Style your components so each record is displayed on a card</a:t>
+            </a:r>
+            <a:br>
+              <a:rPr lang="en-US" dirty="0"/>
+            </a:br>
+            <a:endParaRPr lang="en-US" dirty="0"/>
+          </a:p>
+        </p:txBody>
+      </p:sp>
+      <p:pic>
+        <p:nvPicPr>
+          <p:cNvPr id="9" name="Picture 8">
+            <a:extLst>
+              <a:ext uri="{FF2B5EF4-FFF2-40B4-BE49-F238E27FC236}">
+                <a16:creationId xmlns:a16="http://schemas.microsoft.com/office/drawing/2014/main" id="{301F7FB4-FEC9-EBDC-B712-189139808A18}"/>
+              </a:ext>
+            </a:extLst>
+          </p:cNvPr>
+          <p:cNvPicPr>
+            <a:picLocks noChangeAspect="1"/>
+          </p:cNvPicPr>
+          <p:nvPr/>
+        </p:nvPicPr>
+        <p:blipFill>
+          <a:blip r:embed="rId2"/>
+          <a:stretch>
+            <a:fillRect/>
+          </a:stretch>
+        </p:blipFill>
+        <p:spPr>
+          <a:xfrm>
+            <a:off x="512576" y="4301422"/>
+            <a:ext cx="4474772" cy="1681246"/>
+          </a:xfrm>
+          <a:prstGeom prst="rect">
+            <a:avLst/>
+          </a:prstGeom>
+        </p:spPr>
+      </p:pic>
+    </p:spTree>
+    <p:extLst>
+      <p:ext uri="{BB962C8B-B14F-4D97-AF65-F5344CB8AC3E}">
+        <p14:creationId xmlns:p14="http://schemas.microsoft.com/office/powerpoint/2010/main" val="436625631"/>
+      </p:ext>
+    </p:extLst>
+  </p:cSld>
+  <p:clrMapOvr>
+    <a:masterClrMapping/>
+  </p:clrMapOvr>
+</p:sld>
+</file>
+
+<file path=ppt/slides/slide2.xml><?xml version="1.0" encoding="utf-8"?>
+<p:sld xmlns:a="http://schemas.openxmlformats.org/drawingml/2006/main" xmlns:r="http://schemas.openxmlformats.org/officeDocument/2006/relationships" xmlns:p="http://schemas.openxmlformats.org/presentationml/2006/main">
+  <p:cSld>
+    <p:bg>
+      <p:bgPr>
+        <a:solidFill>
+          <a:schemeClr val="bg1"/>
+        </a:solidFill>
+        <a:effectLst/>
+      </p:bgPr>
+    </p:bg>
+    <p:spTree>
+      <p:nvGrpSpPr>
+        <p:cNvPr id="1" name=""/>
+        <p:cNvGrpSpPr/>
+        <p:nvPr/>
+      </p:nvGrpSpPr>
+      <p:grpSpPr>
+        <a:xfrm>
+          <a:off x="0" y="0"/>
+          <a:ext cx="0" cy="0"/>
+          <a:chOff x="0" y="0"/>
+          <a:chExt cx="0" cy="0"/>
+        </a:xfrm>
+      </p:grpSpPr>
+      <p:sp useBgFill="1">
+        <p:nvSpPr>
+          <p:cNvPr id="10" name="Rectangle 9">
+            <a:extLst>
+              <a:ext uri="{FF2B5EF4-FFF2-40B4-BE49-F238E27FC236}">
+                <a16:creationId xmlns:a16="http://schemas.microsoft.com/office/drawing/2014/main" id="{F1ADD25B-0A33-4EF2-90F4-43139269318B}"/>
+              </a:ext>
+              <a:ext uri="{C183D7F6-B498-43B3-948B-1728B52AA6E4}">
+                <adec:decorative xmlns:adec="http://schemas.microsoft.com/office/drawing/2017/decorative" val="1"/>
+              </a:ext>
+            </a:extLst>
+          </p:cNvPr>
+          <p:cNvSpPr>
+            <a:spLocks noGrp="1" noRot="1" noChangeAspect="1" noMove="1" noResize="1" noEditPoints="1" noAdjustHandles="1" noChangeArrowheads="1" noChangeShapeType="1" noTextEdit="1"/>
+          </p:cNvSpPr>
+          <p:nvPr>
+            <p:extLst>
+              <p:ext uri="{386F3935-93C4-4BCD-93E2-E3B085C9AB24}">
+                <p16:designElem xmlns:p16="http://schemas.microsoft.com/office/powerpoint/2015/main" val="1"/>
+              </p:ext>
+            </p:extLst>
+          </p:nvPr>
+        </p:nvSpPr>
+        <p:spPr>
+          <a:xfrm>
+            <a:off x="0" y="614406"/>
+            <a:ext cx="12192000" cy="6243593"/>
+          </a:xfrm>
+          <a:prstGeom prst="rect">
+            <a:avLst/>
+          </a:prstGeom>
+          <a:ln>
+            <a:noFill/>
+          </a:ln>
+        </p:spPr>
+        <p:style>
+          <a:lnRef idx="2">
+            <a:schemeClr val="accent1">
+              <a:shade val="50000"/>
+            </a:schemeClr>
+          </a:lnRef>
+          <a:fillRef idx="1">
+            <a:schemeClr val="accent1"/>
+          </a:fillRef>
+          <a:effectRef idx="0">
+            <a:schemeClr val="accent1"/>
+          </a:effectRef>
+          <a:fontRef idx="minor">
+            <a:schemeClr val="lt1"/>
+          </a:fontRef>
+        </p:style>
+        <p:txBody>
+          <a:bodyPr rtlCol="0" anchor="ctr"/>
+          <a:lstStyle/>
+          <a:p>
+            <a:pPr algn="ctr"/>
+            <a:endParaRPr lang="en-US"/>
+          </a:p>
+        </p:txBody>
+      </p:sp>
+      <p:sp>
+        <p:nvSpPr>
+          <p:cNvPr id="12" name="Rectangle 11">
+            <a:extLst>
+              <a:ext uri="{FF2B5EF4-FFF2-40B4-BE49-F238E27FC236}">
+                <a16:creationId xmlns:a16="http://schemas.microsoft.com/office/drawing/2014/main" id="{74DB6F31-1B9E-4237-84A3-0825BFDF4616}"/>
+              </a:ext>
+              <a:ext uri="{C183D7F6-B498-43B3-948B-1728B52AA6E4}">
+                <adec:decorative xmlns:adec="http://schemas.microsoft.com/office/drawing/2017/decorative" val="1"/>
+              </a:ext>
+            </a:extLst>
+          </p:cNvPr>
+          <p:cNvSpPr>
+            <a:spLocks noGrp="1" noRot="1" noChangeAspect="1" noMove="1" noResize="1" noEditPoints="1" noAdjustHandles="1" noChangeArrowheads="1" noChangeShapeType="1" noTextEdit="1"/>
+          </p:cNvSpPr>
+          <p:nvPr>
+            <p:extLst>
+              <p:ext uri="{386F3935-93C4-4BCD-93E2-E3B085C9AB24}">
+                <p16:designElem xmlns:p16="http://schemas.microsoft.com/office/powerpoint/2015/main" val="1"/>
+              </p:ext>
+            </p:extLst>
+          </p:nvPr>
+        </p:nvSpPr>
+        <p:spPr>
+          <a:xfrm>
+            <a:off x="442377" y="614407"/>
+            <a:ext cx="3707477" cy="5611772"/>
+          </a:xfrm>
+          <a:prstGeom prst="rect">
+            <a:avLst/>
+          </a:prstGeom>
+          <a:solidFill>
+            <a:schemeClr val="accent1"/>
+          </a:solidFill>
+          <a:ln>
+            <a:noFill/>
+          </a:ln>
+          <a:effectLst/>
+        </p:spPr>
+        <p:style>
+          <a:lnRef idx="1">
+            <a:schemeClr val="accent1"/>
+          </a:lnRef>
+          <a:fillRef idx="3">
+            <a:schemeClr val="accent1"/>
+          </a:fillRef>
+          <a:effectRef idx="2">
+            <a:schemeClr val="accent1"/>
+          </a:effectRef>
+          <a:fontRef idx="minor">
+            <a:schemeClr val="lt1"/>
+          </a:fontRef>
+        </p:style>
+        <p:txBody>
+          <a:bodyPr/>
+          <a:lstStyle/>
+          <a:p>
+            <a:endParaRPr lang="en-US"/>
+          </a:p>
+        </p:txBody>
+      </p:sp>
+      <p:sp>
+        <p:nvSpPr>
+          <p:cNvPr id="2" name="Title 1">
+            <a:extLst>
+              <a:ext uri="{FF2B5EF4-FFF2-40B4-BE49-F238E27FC236}">
+                <a16:creationId xmlns:a16="http://schemas.microsoft.com/office/drawing/2014/main" id="{2B2FDC9B-E008-C5DA-8CAB-633216688A9B}"/>
+              </a:ext>
+            </a:extLst>
+          </p:cNvPr>
+          <p:cNvSpPr>
+            <a:spLocks noGrp="1"/>
+          </p:cNvSpPr>
+          <p:nvPr>
+            <p:ph type="title"/>
+          </p:nvPr>
+        </p:nvSpPr>
+        <p:spPr>
+          <a:xfrm>
+            <a:off x="601255" y="702156"/>
+            <a:ext cx="3409783" cy="1013800"/>
+          </a:xfrm>
+        </p:spPr>
+        <p:txBody>
+          <a:bodyPr>
+            <a:normAutofit/>
+          </a:bodyPr>
+          <a:lstStyle/>
+          <a:p>
+            <a:r>
+              <a:rPr lang="en-US" dirty="0"/>
+              <a:t>What is React?</a:t>
+            </a:r>
+          </a:p>
+        </p:txBody>
+      </p:sp>
+      <p:sp>
+        <p:nvSpPr>
+          <p:cNvPr id="3" name="Content Placeholder 2">
+            <a:extLst>
+              <a:ext uri="{FF2B5EF4-FFF2-40B4-BE49-F238E27FC236}">
+                <a16:creationId xmlns:a16="http://schemas.microsoft.com/office/drawing/2014/main" id="{C3D85CE1-91C2-05D6-C8B9-88412DDBD769}"/>
+              </a:ext>
+            </a:extLst>
+          </p:cNvPr>
+          <p:cNvSpPr>
+            <a:spLocks noGrp="1"/>
+          </p:cNvSpPr>
+          <p:nvPr>
+            <p:ph idx="1"/>
+          </p:nvPr>
+        </p:nvSpPr>
+        <p:spPr>
+          <a:xfrm>
+            <a:off x="601255" y="1964168"/>
+            <a:ext cx="3409782" cy="4036582"/>
+          </a:xfrm>
+        </p:spPr>
+        <p:txBody>
+          <a:bodyPr>
+            <a:normAutofit/>
+          </a:bodyPr>
+          <a:lstStyle/>
+          <a:p>
+            <a:r>
+              <a:rPr lang="en-US" dirty="0">
+                <a:solidFill>
+                  <a:schemeClr val="bg1"/>
+                </a:solidFill>
+              </a:rPr>
+              <a:t>Definition: </a:t>
+            </a:r>
+            <a:r>
+              <a:rPr lang="en-US" dirty="0">
+                <a:solidFill>
+                  <a:schemeClr val="accent2"/>
+                </a:solidFill>
+              </a:rPr>
+              <a:t>React</a:t>
+            </a:r>
+            <a:r>
+              <a:rPr lang="en-US" dirty="0">
+                <a:solidFill>
+                  <a:schemeClr val="bg1"/>
+                </a:solidFill>
+              </a:rPr>
+              <a:t> is a front-end JavaScript library</a:t>
+            </a:r>
+          </a:p>
+          <a:p>
+            <a:pPr lvl="1"/>
+            <a:r>
+              <a:rPr lang="en-US" dirty="0">
+                <a:solidFill>
+                  <a:schemeClr val="bg1"/>
+                </a:solidFill>
+              </a:rPr>
+              <a:t>React is also known as React.js or ReactJS</a:t>
+            </a:r>
+          </a:p>
+          <a:p>
+            <a:pPr lvl="1"/>
+            <a:r>
+              <a:rPr lang="en-US" dirty="0">
+                <a:solidFill>
+                  <a:schemeClr val="bg1"/>
+                </a:solidFill>
+              </a:rPr>
+              <a:t>React is a tool for building UI components</a:t>
+            </a:r>
+          </a:p>
+          <a:p>
+            <a:r>
+              <a:rPr lang="en-US" dirty="0" err="1">
+                <a:solidFill>
+                  <a:schemeClr val="bg1"/>
+                </a:solidFill>
+              </a:rPr>
+              <a:t>react.dev</a:t>
+            </a:r>
+            <a:r>
+              <a:rPr lang="en-US" dirty="0">
+                <a:solidFill>
+                  <a:schemeClr val="bg1"/>
+                </a:solidFill>
+              </a:rPr>
+              <a:t>/learn </a:t>
+            </a:r>
+          </a:p>
+        </p:txBody>
+      </p:sp>
+      <p:pic>
+        <p:nvPicPr>
+          <p:cNvPr id="5" name="Picture 4">
+            <a:extLst>
+              <a:ext uri="{FF2B5EF4-FFF2-40B4-BE49-F238E27FC236}">
+                <a16:creationId xmlns:a16="http://schemas.microsoft.com/office/drawing/2014/main" id="{61DACAEC-8645-F494-584E-E0B6A07EE975}"/>
+              </a:ext>
+            </a:extLst>
+          </p:cNvPr>
+          <p:cNvPicPr>
+            <a:picLocks noChangeAspect="1"/>
+          </p:cNvPicPr>
+          <p:nvPr/>
+        </p:nvPicPr>
+        <p:blipFill>
+          <a:blip r:embed="rId2"/>
+          <a:stretch>
+            <a:fillRect/>
+          </a:stretch>
+        </p:blipFill>
+        <p:spPr>
+          <a:xfrm>
+            <a:off x="4784250" y="718314"/>
+            <a:ext cx="6340790" cy="2710686"/>
+          </a:xfrm>
+          <a:prstGeom prst="rect">
+            <a:avLst/>
+          </a:prstGeom>
+        </p:spPr>
+      </p:pic>
+      <p:pic>
+        <p:nvPicPr>
+          <p:cNvPr id="7" name="Picture 6">
+            <a:extLst>
+              <a:ext uri="{FF2B5EF4-FFF2-40B4-BE49-F238E27FC236}">
+                <a16:creationId xmlns:a16="http://schemas.microsoft.com/office/drawing/2014/main" id="{30CE7030-0458-1D8B-C108-9447BDFFDCCD}"/>
+              </a:ext>
+            </a:extLst>
+          </p:cNvPr>
+          <p:cNvPicPr>
+            <a:picLocks noChangeAspect="1"/>
+          </p:cNvPicPr>
+          <p:nvPr/>
+        </p:nvPicPr>
+        <p:blipFill>
+          <a:blip r:embed="rId3"/>
+          <a:stretch>
+            <a:fillRect/>
+          </a:stretch>
+        </p:blipFill>
+        <p:spPr>
+          <a:xfrm>
+            <a:off x="4784251" y="3635363"/>
+            <a:ext cx="6340790" cy="2745804"/>
+          </a:xfrm>
+          <a:prstGeom prst="rect">
+            <a:avLst/>
+          </a:prstGeom>
+        </p:spPr>
+      </p:pic>
+    </p:spTree>
+    <p:extLst>
+      <p:ext uri="{BB962C8B-B14F-4D97-AF65-F5344CB8AC3E}">
+        <p14:creationId xmlns:p14="http://schemas.microsoft.com/office/powerpoint/2010/main" val="1314330982"/>
+      </p:ext>
+    </p:extLst>
+  </p:cSld>
+  <p:clrMapOvr>
+    <a:masterClrMapping/>
+  </p:clrMapOvr>
+</p:sld>
+</file>
+
+<file path=ppt/slides/slide20.xml><?xml version="1.0" encoding="utf-8"?>
+<p:sld xmlns:a="http://schemas.openxmlformats.org/drawingml/2006/main" xmlns:r="http://schemas.openxmlformats.org/officeDocument/2006/relationships" xmlns:p="http://schemas.openxmlformats.org/presentationml/2006/main">
+  <p:cSld>
+    <p:spTree>
+      <p:nvGrpSpPr>
+        <p:cNvPr id="1" name=""/>
+        <p:cNvGrpSpPr/>
+        <p:nvPr/>
+      </p:nvGrpSpPr>
+      <p:grpSpPr>
+        <a:xfrm>
+          <a:off x="0" y="0"/>
+          <a:ext cx="0" cy="0"/>
+          <a:chOff x="0" y="0"/>
+          <a:chExt cx="0" cy="0"/>
+        </a:xfrm>
+      </p:grpSpPr>
+      <p:sp>
+        <p:nvSpPr>
+          <p:cNvPr id="2" name="Title 1">
+            <a:extLst>
+              <a:ext uri="{FF2B5EF4-FFF2-40B4-BE49-F238E27FC236}">
+                <a16:creationId xmlns:a16="http://schemas.microsoft.com/office/drawing/2014/main" id="{2B2DE725-1CDE-DC05-9B0B-F6EF7E414296}"/>
+              </a:ext>
+            </a:extLst>
+          </p:cNvPr>
+          <p:cNvSpPr>
+            <a:spLocks noGrp="1"/>
+          </p:cNvSpPr>
+          <p:nvPr>
+            <p:ph type="title"/>
+          </p:nvPr>
+        </p:nvSpPr>
+        <p:spPr/>
+        <p:txBody>
+          <a:bodyPr/>
+          <a:lstStyle/>
+          <a:p>
+            <a:r>
+              <a:rPr lang="en-US" dirty="0"/>
+              <a:t>Conditional Rendering</a:t>
+            </a:r>
+          </a:p>
+        </p:txBody>
+      </p:sp>
+      <p:sp>
+        <p:nvSpPr>
+          <p:cNvPr id="3" name="Content Placeholder 2">
+            <a:extLst>
+              <a:ext uri="{FF2B5EF4-FFF2-40B4-BE49-F238E27FC236}">
+                <a16:creationId xmlns:a16="http://schemas.microsoft.com/office/drawing/2014/main" id="{0D28832B-2AB9-5271-6004-609F75E541E9}"/>
+              </a:ext>
+            </a:extLst>
+          </p:cNvPr>
+          <p:cNvSpPr>
+            <a:spLocks noGrp="1"/>
+          </p:cNvSpPr>
+          <p:nvPr>
+            <p:ph idx="1"/>
+          </p:nvPr>
+        </p:nvSpPr>
+        <p:spPr>
+          <a:xfrm>
+            <a:off x="581192" y="2180497"/>
+            <a:ext cx="11108581" cy="448404"/>
+          </a:xfrm>
+        </p:spPr>
+        <p:txBody>
+          <a:bodyPr/>
+          <a:lstStyle/>
+          <a:p>
+            <a:r>
+              <a:rPr lang="en-US" dirty="0"/>
+              <a:t>Conditional rendering makes it easy to show or hide any elements/components as we wish </a:t>
+            </a:r>
+          </a:p>
+        </p:txBody>
+      </p:sp>
+      <p:pic>
+        <p:nvPicPr>
+          <p:cNvPr id="5" name="Picture 4">
+            <a:extLst>
+              <a:ext uri="{FF2B5EF4-FFF2-40B4-BE49-F238E27FC236}">
+                <a16:creationId xmlns:a16="http://schemas.microsoft.com/office/drawing/2014/main" id="{C197494E-B764-C56A-B45C-780AD05284AC}"/>
+              </a:ext>
+            </a:extLst>
+          </p:cNvPr>
+          <p:cNvPicPr>
+            <a:picLocks noChangeAspect="1"/>
+          </p:cNvPicPr>
+          <p:nvPr/>
+        </p:nvPicPr>
+        <p:blipFill>
+          <a:blip r:embed="rId2"/>
+          <a:stretch>
+            <a:fillRect/>
+          </a:stretch>
+        </p:blipFill>
+        <p:spPr>
+          <a:xfrm>
+            <a:off x="869146" y="2763983"/>
+            <a:ext cx="3277057" cy="3915321"/>
+          </a:xfrm>
+          <a:prstGeom prst="rect">
+            <a:avLst/>
+          </a:prstGeom>
+        </p:spPr>
+      </p:pic>
+      <p:pic>
+        <p:nvPicPr>
+          <p:cNvPr id="7" name="Picture 6">
+            <a:extLst>
+              <a:ext uri="{FF2B5EF4-FFF2-40B4-BE49-F238E27FC236}">
+                <a16:creationId xmlns:a16="http://schemas.microsoft.com/office/drawing/2014/main" id="{BEBEAD4A-B0C9-69B3-484D-D8BB8E43A4D1}"/>
+              </a:ext>
+            </a:extLst>
+          </p:cNvPr>
+          <p:cNvPicPr>
+            <a:picLocks noChangeAspect="1"/>
+          </p:cNvPicPr>
+          <p:nvPr/>
+        </p:nvPicPr>
+        <p:blipFill>
+          <a:blip r:embed="rId3"/>
+          <a:stretch>
+            <a:fillRect/>
+          </a:stretch>
+        </p:blipFill>
+        <p:spPr>
+          <a:xfrm>
+            <a:off x="8694194" y="3300230"/>
+            <a:ext cx="2286319" cy="2657846"/>
+          </a:xfrm>
+          <a:prstGeom prst="rect">
+            <a:avLst/>
+          </a:prstGeom>
+        </p:spPr>
+      </p:pic>
+      <p:pic>
+        <p:nvPicPr>
+          <p:cNvPr id="9" name="Picture 8">
+            <a:extLst>
+              <a:ext uri="{FF2B5EF4-FFF2-40B4-BE49-F238E27FC236}">
+                <a16:creationId xmlns:a16="http://schemas.microsoft.com/office/drawing/2014/main" id="{B5B0A2E2-2983-C975-AD39-5E8088C2F4FA}"/>
+              </a:ext>
+            </a:extLst>
+          </p:cNvPr>
+          <p:cNvPicPr>
+            <a:picLocks noChangeAspect="1"/>
+          </p:cNvPicPr>
+          <p:nvPr/>
+        </p:nvPicPr>
+        <p:blipFill>
+          <a:blip r:embed="rId4"/>
+          <a:stretch>
+            <a:fillRect/>
+          </a:stretch>
+        </p:blipFill>
+        <p:spPr>
+          <a:xfrm>
+            <a:off x="4443485" y="4009941"/>
+            <a:ext cx="3953427" cy="1238423"/>
+          </a:xfrm>
+          <a:prstGeom prst="rect">
+            <a:avLst/>
+          </a:prstGeom>
+        </p:spPr>
+      </p:pic>
+    </p:spTree>
+    <p:extLst>
+      <p:ext uri="{BB962C8B-B14F-4D97-AF65-F5344CB8AC3E}">
+        <p14:creationId xmlns:p14="http://schemas.microsoft.com/office/powerpoint/2010/main" val="254436730"/>
+      </p:ext>
+    </p:extLst>
+  </p:cSld>
+  <p:clrMapOvr>
+    <a:masterClrMapping/>
+  </p:clrMapOvr>
+</p:sld>
+</file>
+
+<file path=ppt/slides/slide21.xml><?xml version="1.0" encoding="utf-8"?>
+<p:sld xmlns:a="http://schemas.openxmlformats.org/drawingml/2006/main" xmlns:r="http://schemas.openxmlformats.org/officeDocument/2006/relationships" xmlns:p="http://schemas.openxmlformats.org/presentationml/2006/main">
+  <p:cSld>
+    <p:spTree>
+      <p:nvGrpSpPr>
+        <p:cNvPr id="1" name=""/>
+        <p:cNvGrpSpPr/>
+        <p:nvPr/>
+      </p:nvGrpSpPr>
+      <p:grpSpPr>
+        <a:xfrm>
+          <a:off x="0" y="0"/>
+          <a:ext cx="0" cy="0"/>
+          <a:chOff x="0" y="0"/>
+          <a:chExt cx="0" cy="0"/>
+        </a:xfrm>
+      </p:grpSpPr>
+      <p:sp>
+        <p:nvSpPr>
+          <p:cNvPr id="2" name="Title 1">
+            <a:extLst>
+              <a:ext uri="{FF2B5EF4-FFF2-40B4-BE49-F238E27FC236}">
+                <a16:creationId xmlns:a16="http://schemas.microsoft.com/office/drawing/2014/main" id="{46EF7853-9938-39C7-9AB6-BE8691626130}"/>
+              </a:ext>
+            </a:extLst>
+          </p:cNvPr>
+          <p:cNvSpPr>
+            <a:spLocks noGrp="1"/>
+          </p:cNvSpPr>
+          <p:nvPr>
+            <p:ph type="title"/>
+          </p:nvPr>
+        </p:nvSpPr>
+        <p:spPr/>
+        <p:txBody>
+          <a:bodyPr/>
+          <a:lstStyle/>
+          <a:p>
+            <a:r>
+              <a:rPr lang="en-US" dirty="0"/>
+              <a:t>Firing Events</a:t>
+            </a:r>
+          </a:p>
+        </p:txBody>
+      </p:sp>
+      <p:sp>
+        <p:nvSpPr>
+          <p:cNvPr id="3" name="Content Placeholder 2">
+            <a:extLst>
+              <a:ext uri="{FF2B5EF4-FFF2-40B4-BE49-F238E27FC236}">
+                <a16:creationId xmlns:a16="http://schemas.microsoft.com/office/drawing/2014/main" id="{068EFA18-6278-EC01-BBBC-42D2EFE3F69B}"/>
+              </a:ext>
+            </a:extLst>
+          </p:cNvPr>
+          <p:cNvSpPr>
+            <a:spLocks noGrp="1"/>
+          </p:cNvSpPr>
+          <p:nvPr>
+            <p:ph idx="1"/>
+          </p:nvPr>
+        </p:nvSpPr>
+        <p:spPr>
+          <a:xfrm>
+            <a:off x="1017611" y="2256136"/>
+            <a:ext cx="4707780" cy="3678303"/>
+          </a:xfrm>
+        </p:spPr>
+        <p:txBody>
+          <a:bodyPr/>
+          <a:lstStyle/>
+          <a:p>
+            <a:r>
+              <a:rPr lang="en-US" dirty="0"/>
+              <a:t>Define an event handler function inside the component</a:t>
+            </a:r>
+          </a:p>
+          <a:p>
+            <a:r>
+              <a:rPr lang="en-US" dirty="0"/>
+              <a:t>Notice ‘</a:t>
+            </a:r>
+            <a:r>
+              <a:rPr lang="en-US" dirty="0" err="1"/>
+              <a:t>onClick</a:t>
+            </a:r>
+            <a:r>
+              <a:rPr lang="en-US" dirty="0"/>
+              <a:t>’ vs ‘onclick’ in JavaScript</a:t>
+            </a:r>
+          </a:p>
+        </p:txBody>
+      </p:sp>
+      <p:pic>
+        <p:nvPicPr>
+          <p:cNvPr id="5" name="Picture 4">
+            <a:extLst>
+              <a:ext uri="{FF2B5EF4-FFF2-40B4-BE49-F238E27FC236}">
+                <a16:creationId xmlns:a16="http://schemas.microsoft.com/office/drawing/2014/main" id="{0AA19D4A-2C9A-BA32-D701-058544F5B7EF}"/>
+              </a:ext>
+            </a:extLst>
+          </p:cNvPr>
+          <p:cNvPicPr>
+            <a:picLocks noChangeAspect="1"/>
+          </p:cNvPicPr>
+          <p:nvPr/>
+        </p:nvPicPr>
+        <p:blipFill>
+          <a:blip r:embed="rId2"/>
+          <a:stretch>
+            <a:fillRect/>
+          </a:stretch>
+        </p:blipFill>
+        <p:spPr>
+          <a:xfrm>
+            <a:off x="6189518" y="2180496"/>
+            <a:ext cx="4248743" cy="3829584"/>
+          </a:xfrm>
+          <a:prstGeom prst="rect">
+            <a:avLst/>
+          </a:prstGeom>
+        </p:spPr>
+      </p:pic>
+    </p:spTree>
+    <p:extLst>
+      <p:ext uri="{BB962C8B-B14F-4D97-AF65-F5344CB8AC3E}">
+        <p14:creationId xmlns:p14="http://schemas.microsoft.com/office/powerpoint/2010/main" val="1555461767"/>
+      </p:ext>
+    </p:extLst>
+  </p:cSld>
+  <p:clrMapOvr>
+    <a:masterClrMapping/>
+  </p:clrMapOvr>
+</p:sld>
+</file>
+
+<file path=ppt/slides/slide22.xml><?xml version="1.0" encoding="utf-8"?>
+<p:sld xmlns:a="http://schemas.openxmlformats.org/drawingml/2006/main" xmlns:r="http://schemas.openxmlformats.org/officeDocument/2006/relationships" xmlns:p="http://schemas.openxmlformats.org/presentationml/2006/main">
+  <p:cSld>
+    <p:spTree>
+      <p:nvGrpSpPr>
+        <p:cNvPr id="1" name=""/>
+        <p:cNvGrpSpPr/>
+        <p:nvPr/>
+      </p:nvGrpSpPr>
+      <p:grpSpPr>
+        <a:xfrm>
+          <a:off x="0" y="0"/>
+          <a:ext cx="0" cy="0"/>
+          <a:chOff x="0" y="0"/>
+          <a:chExt cx="0" cy="0"/>
+        </a:xfrm>
+      </p:grpSpPr>
+      <p:sp>
+        <p:nvSpPr>
+          <p:cNvPr id="2" name="Title 1">
+            <a:extLst>
+              <a:ext uri="{FF2B5EF4-FFF2-40B4-BE49-F238E27FC236}">
+                <a16:creationId xmlns:a16="http://schemas.microsoft.com/office/drawing/2014/main" id="{9CC30CA0-0E39-E6CD-D106-B6E26FF5B511}"/>
+              </a:ext>
+            </a:extLst>
+          </p:cNvPr>
+          <p:cNvSpPr>
+            <a:spLocks noGrp="1"/>
+          </p:cNvSpPr>
+          <p:nvPr>
+            <p:ph type="title"/>
+          </p:nvPr>
+        </p:nvSpPr>
+        <p:spPr/>
+        <p:txBody>
+          <a:bodyPr/>
+          <a:lstStyle/>
+          <a:p>
+            <a:r>
+              <a:rPr lang="en-US" dirty="0"/>
+              <a:t>Keeping State</a:t>
+            </a:r>
+          </a:p>
+        </p:txBody>
+      </p:sp>
+      <p:sp>
+        <p:nvSpPr>
+          <p:cNvPr id="3" name="Content Placeholder 2">
+            <a:extLst>
+              <a:ext uri="{FF2B5EF4-FFF2-40B4-BE49-F238E27FC236}">
+                <a16:creationId xmlns:a16="http://schemas.microsoft.com/office/drawing/2014/main" id="{7148026D-834F-4536-EFAC-FEDE7A88FD8E}"/>
+              </a:ext>
+            </a:extLst>
+          </p:cNvPr>
+          <p:cNvSpPr>
+            <a:spLocks noGrp="1"/>
+          </p:cNvSpPr>
+          <p:nvPr>
+            <p:ph idx="1"/>
+          </p:nvPr>
+        </p:nvSpPr>
+        <p:spPr>
+          <a:xfrm>
+            <a:off x="581193" y="2180496"/>
+            <a:ext cx="5514808" cy="3678303"/>
+          </a:xfrm>
+        </p:spPr>
+        <p:txBody>
+          <a:bodyPr/>
+          <a:lstStyle/>
+          <a:p>
+            <a:r>
+              <a:rPr lang="en-US" dirty="0"/>
+              <a:t>Definition: </a:t>
+            </a:r>
+            <a:r>
+              <a:rPr lang="en-US" dirty="0">
+                <a:solidFill>
+                  <a:schemeClr val="accent2"/>
+                </a:solidFill>
+              </a:rPr>
+              <a:t>State</a:t>
+            </a:r>
+            <a:r>
+              <a:rPr lang="en-US" dirty="0"/>
+              <a:t> is an object that holds data or information about a component that may change over time.</a:t>
+            </a:r>
+          </a:p>
+          <a:p>
+            <a:pPr lvl="1"/>
+            <a:r>
+              <a:rPr lang="en-US" dirty="0"/>
+              <a:t>The ‘memory’ of a component</a:t>
+            </a:r>
+          </a:p>
+          <a:p>
+            <a:pPr lvl="1"/>
+            <a:r>
+              <a:rPr lang="en-US" dirty="0"/>
+              <a:t>It allows the component to keep track of values between renders</a:t>
+            </a:r>
+          </a:p>
+          <a:p>
+            <a:r>
+              <a:rPr lang="en-US" dirty="0"/>
+              <a:t>When state changes, React automatically re-renders the component (and any children that depend on the state) so the UI stays in sync with data</a:t>
+            </a:r>
+          </a:p>
+        </p:txBody>
+      </p:sp>
+      <p:pic>
+        <p:nvPicPr>
+          <p:cNvPr id="5" name="Picture 4">
+            <a:extLst>
+              <a:ext uri="{FF2B5EF4-FFF2-40B4-BE49-F238E27FC236}">
+                <a16:creationId xmlns:a16="http://schemas.microsoft.com/office/drawing/2014/main" id="{D0218A49-D737-AFEB-6AEE-38DB38C53C55}"/>
+              </a:ext>
+            </a:extLst>
+          </p:cNvPr>
+          <p:cNvPicPr>
+            <a:picLocks noChangeAspect="1"/>
+          </p:cNvPicPr>
+          <p:nvPr/>
+        </p:nvPicPr>
+        <p:blipFill>
+          <a:blip r:embed="rId2"/>
+          <a:stretch>
+            <a:fillRect/>
+          </a:stretch>
+        </p:blipFill>
+        <p:spPr>
+          <a:xfrm>
+            <a:off x="6348065" y="3169807"/>
+            <a:ext cx="4982270" cy="2476846"/>
+          </a:xfrm>
+          <a:prstGeom prst="rect">
+            <a:avLst/>
+          </a:prstGeom>
+        </p:spPr>
+      </p:pic>
+      <p:pic>
+        <p:nvPicPr>
+          <p:cNvPr id="7" name="Picture 6">
+            <a:extLst>
+              <a:ext uri="{FF2B5EF4-FFF2-40B4-BE49-F238E27FC236}">
+                <a16:creationId xmlns:a16="http://schemas.microsoft.com/office/drawing/2014/main" id="{2FD9F3C8-0DB5-1735-A0C6-EC72B12472F6}"/>
+              </a:ext>
+            </a:extLst>
+          </p:cNvPr>
+          <p:cNvPicPr>
+            <a:picLocks noChangeAspect="1"/>
+          </p:cNvPicPr>
+          <p:nvPr/>
+        </p:nvPicPr>
+        <p:blipFill>
+          <a:blip r:embed="rId3"/>
+          <a:stretch>
+            <a:fillRect/>
+          </a:stretch>
+        </p:blipFill>
+        <p:spPr>
+          <a:xfrm>
+            <a:off x="6892170" y="2534191"/>
+            <a:ext cx="3894059" cy="325549"/>
+          </a:xfrm>
+          <a:prstGeom prst="rect">
+            <a:avLst/>
+          </a:prstGeom>
+        </p:spPr>
+      </p:pic>
+    </p:spTree>
+    <p:extLst>
+      <p:ext uri="{BB962C8B-B14F-4D97-AF65-F5344CB8AC3E}">
+        <p14:creationId xmlns:p14="http://schemas.microsoft.com/office/powerpoint/2010/main" val="1091049630"/>
+      </p:ext>
+    </p:extLst>
+  </p:cSld>
+  <p:clrMapOvr>
+    <a:masterClrMapping/>
+  </p:clrMapOvr>
+</p:sld>
+</file>
+
+<file path=ppt/slides/slide23.xml><?xml version="1.0" encoding="utf-8"?>
+<p:sld xmlns:a="http://schemas.openxmlformats.org/drawingml/2006/main" xmlns:r="http://schemas.openxmlformats.org/officeDocument/2006/relationships" xmlns:p="http://schemas.openxmlformats.org/presentationml/2006/main">
+  <p:cSld>
+    <p:spTree>
+      <p:nvGrpSpPr>
+        <p:cNvPr id="1" name="">
+          <a:extLst>
+            <a:ext uri="{FF2B5EF4-FFF2-40B4-BE49-F238E27FC236}">
+              <a16:creationId xmlns:a16="http://schemas.microsoft.com/office/drawing/2014/main" id="{1FA38A92-7CA6-98CE-1F12-F07DFA289658}"/>
+            </a:ext>
+          </a:extLst>
+        </p:cNvPr>
+        <p:cNvGrpSpPr/>
+        <p:nvPr/>
+      </p:nvGrpSpPr>
+      <p:grpSpPr>
+        <a:xfrm>
+          <a:off x="0" y="0"/>
+          <a:ext cx="0" cy="0"/>
+          <a:chOff x="0" y="0"/>
+          <a:chExt cx="0" cy="0"/>
+        </a:xfrm>
+      </p:grpSpPr>
+      <p:sp>
+        <p:nvSpPr>
+          <p:cNvPr id="2" name="Title 1">
+            <a:extLst>
+              <a:ext uri="{FF2B5EF4-FFF2-40B4-BE49-F238E27FC236}">
+                <a16:creationId xmlns:a16="http://schemas.microsoft.com/office/drawing/2014/main" id="{6BF446BB-545C-3087-6716-AA96A4492DED}"/>
+              </a:ext>
+            </a:extLst>
+          </p:cNvPr>
+          <p:cNvSpPr>
+            <a:spLocks noGrp="1"/>
+          </p:cNvSpPr>
+          <p:nvPr>
+            <p:ph type="title"/>
+          </p:nvPr>
+        </p:nvSpPr>
+        <p:spPr/>
+        <p:txBody>
+          <a:bodyPr/>
+          <a:lstStyle/>
+          <a:p>
+            <a:r>
+              <a:rPr lang="en-US" dirty="0"/>
+              <a:t>Challenge – Create Basic App Navigation</a:t>
+            </a:r>
+          </a:p>
+        </p:txBody>
+      </p:sp>
+      <p:sp>
+        <p:nvSpPr>
+          <p:cNvPr id="3" name="Content Placeholder 2">
+            <a:extLst>
+              <a:ext uri="{FF2B5EF4-FFF2-40B4-BE49-F238E27FC236}">
+                <a16:creationId xmlns:a16="http://schemas.microsoft.com/office/drawing/2014/main" id="{914E266E-CDAD-72D0-3711-9B0D065546E1}"/>
+              </a:ext>
+            </a:extLst>
+          </p:cNvPr>
+          <p:cNvSpPr>
+            <a:spLocks noGrp="1"/>
+          </p:cNvSpPr>
+          <p:nvPr>
+            <p:ph idx="1"/>
+          </p:nvPr>
+        </p:nvSpPr>
+        <p:spPr>
+          <a:xfrm>
+            <a:off x="581192" y="2475925"/>
+            <a:ext cx="5317584" cy="1681246"/>
+          </a:xfrm>
+        </p:spPr>
+        <p:txBody>
+          <a:bodyPr/>
+          <a:lstStyle/>
+          <a:p>
+            <a:r>
+              <a:rPr lang="en-US" dirty="0"/>
+              <a:t>Edit your work to conditionally render components</a:t>
+            </a:r>
+          </a:p>
+        </p:txBody>
+      </p:sp>
+      <p:sp>
+        <p:nvSpPr>
+          <p:cNvPr id="6" name="TextBox 5">
+            <a:extLst>
+              <a:ext uri="{FF2B5EF4-FFF2-40B4-BE49-F238E27FC236}">
+                <a16:creationId xmlns:a16="http://schemas.microsoft.com/office/drawing/2014/main" id="{80EA335E-334A-2B86-AA57-B869D6AB62E7}"/>
+              </a:ext>
+            </a:extLst>
+          </p:cNvPr>
+          <p:cNvSpPr txBox="1"/>
+          <p:nvPr/>
+        </p:nvSpPr>
+        <p:spPr>
+          <a:xfrm>
+            <a:off x="1228165" y="2402747"/>
+            <a:ext cx="756938" cy="369332"/>
+          </a:xfrm>
+          <a:prstGeom prst="rect">
+            <a:avLst/>
+          </a:prstGeom>
+          <a:noFill/>
+        </p:spPr>
+        <p:txBody>
+          <a:bodyPr wrap="none" rtlCol="0">
+            <a:spAutoFit/>
+          </a:bodyPr>
+          <a:lstStyle/>
+          <a:p>
+            <a:r>
+              <a:rPr lang="en-US" b="1" dirty="0"/>
+              <a:t>Goal:</a:t>
+            </a:r>
+          </a:p>
+        </p:txBody>
+      </p:sp>
+      <p:sp>
+        <p:nvSpPr>
+          <p:cNvPr id="7" name="TextBox 6">
+            <a:extLst>
+              <a:ext uri="{FF2B5EF4-FFF2-40B4-BE49-F238E27FC236}">
+                <a16:creationId xmlns:a16="http://schemas.microsoft.com/office/drawing/2014/main" id="{2C0F6C0E-A730-E9D7-0FA0-3052BCB4A91B}"/>
+              </a:ext>
+            </a:extLst>
+          </p:cNvPr>
+          <p:cNvSpPr txBox="1"/>
+          <p:nvPr/>
+        </p:nvSpPr>
+        <p:spPr>
+          <a:xfrm>
+            <a:off x="6676991" y="2402747"/>
+            <a:ext cx="4933817" cy="369332"/>
+          </a:xfrm>
+          <a:prstGeom prst="rect">
+            <a:avLst/>
+          </a:prstGeom>
+          <a:noFill/>
+        </p:spPr>
+        <p:txBody>
+          <a:bodyPr wrap="square" rtlCol="0">
+            <a:spAutoFit/>
+          </a:bodyPr>
+          <a:lstStyle/>
+          <a:p>
+            <a:r>
+              <a:rPr lang="en-US" b="1" dirty="0"/>
+              <a:t>Scenario:  			   </a:t>
+            </a:r>
+          </a:p>
+        </p:txBody>
+      </p:sp>
+      <p:sp>
+        <p:nvSpPr>
+          <p:cNvPr id="8" name="Content Placeholder 2">
+            <a:extLst>
+              <a:ext uri="{FF2B5EF4-FFF2-40B4-BE49-F238E27FC236}">
+                <a16:creationId xmlns:a16="http://schemas.microsoft.com/office/drawing/2014/main" id="{56E06756-F910-4AFC-390A-72B04540CFFD}"/>
+              </a:ext>
+            </a:extLst>
+          </p:cNvPr>
+          <p:cNvSpPr txBox="1">
+            <a:spLocks/>
+          </p:cNvSpPr>
+          <p:nvPr/>
+        </p:nvSpPr>
+        <p:spPr>
+          <a:xfrm>
+            <a:off x="6031417" y="3099411"/>
+            <a:ext cx="5740756" cy="2315271"/>
+          </a:xfrm>
+          <a:prstGeom prst="rect">
+            <a:avLst/>
+          </a:prstGeom>
+        </p:spPr>
+        <p:txBody>
+          <a:bodyPr vert="horz" lIns="91440" tIns="45720" rIns="91440" bIns="45720" rtlCol="0" anchor="ctr">
+            <a:normAutofit fontScale="85000" lnSpcReduction="20000"/>
+          </a:bodyPr>
+          <a:lstStyle>
+            <a:lvl1pPr marL="306000" indent="-306000" algn="l" defTabSz="457200" rtl="0" eaLnBrk="1" latinLnBrk="0" hangingPunct="1">
+              <a:spcBef>
+                <a:spcPct val="20000"/>
+              </a:spcBef>
+              <a:spcAft>
+                <a:spcPts val="600"/>
+              </a:spcAft>
+              <a:buClr>
+                <a:schemeClr val="accent2"/>
+              </a:buClr>
+              <a:buSzPct val="92000"/>
+              <a:buFont typeface="Wingdings 2" panose="05020102010507070707" pitchFamily="18" charset="2"/>
+              <a:buChar char=""/>
+              <a:defRPr sz="1800" kern="1200">
+                <a:solidFill>
+                  <a:schemeClr val="tx2"/>
+                </a:solidFill>
+                <a:latin typeface="+mn-lt"/>
+                <a:ea typeface="+mn-ea"/>
+                <a:cs typeface="+mn-cs"/>
+              </a:defRPr>
+            </a:lvl1pPr>
+            <a:lvl2pPr marL="630000" indent="-306000" algn="l" defTabSz="457200" rtl="0" eaLnBrk="1" latinLnBrk="0" hangingPunct="1">
+              <a:spcBef>
+                <a:spcPct val="20000"/>
+              </a:spcBef>
+              <a:spcAft>
+                <a:spcPts val="600"/>
+              </a:spcAft>
+              <a:buClr>
+                <a:schemeClr val="accent2"/>
+              </a:buClr>
+              <a:buSzPct val="92000"/>
+              <a:buFont typeface="Wingdings 2" panose="05020102010507070707" pitchFamily="18" charset="2"/>
+              <a:buChar char=""/>
+              <a:defRPr sz="1600" kern="1200">
+                <a:solidFill>
+                  <a:schemeClr val="tx2"/>
+                </a:solidFill>
+                <a:latin typeface="+mn-lt"/>
+                <a:ea typeface="+mn-ea"/>
+                <a:cs typeface="+mn-cs"/>
+              </a:defRPr>
+            </a:lvl2pPr>
+            <a:lvl3pPr marL="900000" indent="-270000" algn="l" defTabSz="457200" rtl="0" eaLnBrk="1" latinLnBrk="0" hangingPunct="1">
+              <a:spcBef>
+                <a:spcPct val="20000"/>
+              </a:spcBef>
+              <a:spcAft>
+                <a:spcPts val="600"/>
+              </a:spcAft>
+              <a:buClr>
+                <a:schemeClr val="accent2"/>
+              </a:buClr>
+              <a:buSzPct val="92000"/>
+              <a:buFont typeface="Wingdings 2" panose="05020102010507070707" pitchFamily="18" charset="2"/>
+              <a:buChar char=""/>
+              <a:defRPr sz="1400" kern="1200">
+                <a:solidFill>
+                  <a:schemeClr val="tx2"/>
+                </a:solidFill>
+                <a:latin typeface="+mn-lt"/>
+                <a:ea typeface="+mn-ea"/>
+                <a:cs typeface="+mn-cs"/>
+              </a:defRPr>
+            </a:lvl3pPr>
+            <a:lvl4pPr marL="1242000" indent="-234000" algn="l" defTabSz="457200" rtl="0" eaLnBrk="1" latinLnBrk="0" hangingPunct="1">
+              <a:spcBef>
+                <a:spcPct val="20000"/>
+              </a:spcBef>
+              <a:spcAft>
+                <a:spcPts val="600"/>
+              </a:spcAft>
+              <a:buClr>
+                <a:schemeClr val="accent2"/>
+              </a:buClr>
+              <a:buSzPct val="92000"/>
+              <a:buFont typeface="Wingdings 2" panose="05020102010507070707" pitchFamily="18" charset="2"/>
+              <a:buChar char=""/>
+              <a:defRPr sz="1200" kern="1200">
+                <a:solidFill>
+                  <a:schemeClr val="tx2"/>
+                </a:solidFill>
+                <a:latin typeface="+mn-lt"/>
+                <a:ea typeface="+mn-ea"/>
+                <a:cs typeface="+mn-cs"/>
+              </a:defRPr>
+            </a:lvl4pPr>
+            <a:lvl5pPr marL="1602000" indent="-234000" algn="l" defTabSz="457200" rtl="0" eaLnBrk="1" latinLnBrk="0" hangingPunct="1">
+              <a:spcBef>
+                <a:spcPct val="20000"/>
+              </a:spcBef>
+              <a:spcAft>
+                <a:spcPts val="600"/>
+              </a:spcAft>
+              <a:buClr>
+                <a:schemeClr val="accent2"/>
+              </a:buClr>
+              <a:buSzPct val="92000"/>
+              <a:buFont typeface="Wingdings 2" panose="05020102010507070707" pitchFamily="18" charset="2"/>
+              <a:buChar char=""/>
+              <a:defRPr sz="1200" kern="1200">
+                <a:solidFill>
+                  <a:schemeClr val="tx2"/>
+                </a:solidFill>
+                <a:latin typeface="+mn-lt"/>
+                <a:ea typeface="+mn-ea"/>
+                <a:cs typeface="+mn-cs"/>
+              </a:defRPr>
+            </a:lvl5pPr>
+            <a:lvl6pPr marL="1900000" indent="-228600" algn="l" defTabSz="457200" rtl="0" eaLnBrk="1" latinLnBrk="0" hangingPunct="1">
+              <a:spcBef>
+                <a:spcPct val="20000"/>
+              </a:spcBef>
+              <a:spcAft>
+                <a:spcPts val="600"/>
+              </a:spcAft>
+              <a:buClr>
+                <a:schemeClr val="accent2"/>
+              </a:buClr>
+              <a:buSzPct val="92000"/>
+              <a:buFont typeface="Wingdings 2" panose="05020102010507070707" pitchFamily="18" charset="2"/>
+              <a:buChar char=""/>
+              <a:defRPr sz="1200" kern="1200">
+                <a:solidFill>
+                  <a:schemeClr val="tx2"/>
+                </a:solidFill>
+                <a:latin typeface="+mn-lt"/>
+                <a:ea typeface="+mn-ea"/>
+                <a:cs typeface="+mn-cs"/>
+              </a:defRPr>
+            </a:lvl6pPr>
+            <a:lvl7pPr marL="2200000" indent="-228600" algn="l" defTabSz="457200" rtl="0" eaLnBrk="1" latinLnBrk="0" hangingPunct="1">
+              <a:spcBef>
+                <a:spcPct val="20000"/>
+              </a:spcBef>
+              <a:spcAft>
+                <a:spcPts val="600"/>
+              </a:spcAft>
+              <a:buClr>
+                <a:schemeClr val="accent2"/>
+              </a:buClr>
+              <a:buSzPct val="92000"/>
+              <a:buFont typeface="Wingdings 2" panose="05020102010507070707" pitchFamily="18" charset="2"/>
+              <a:buChar char=""/>
+              <a:defRPr sz="1200" kern="1200">
+                <a:solidFill>
+                  <a:schemeClr val="tx2"/>
+                </a:solidFill>
+                <a:latin typeface="+mn-lt"/>
+                <a:ea typeface="+mn-ea"/>
+                <a:cs typeface="+mn-cs"/>
+              </a:defRPr>
+            </a:lvl7pPr>
+            <a:lvl8pPr marL="2500000" indent="-228600" algn="l" defTabSz="457200" rtl="0" eaLnBrk="1" latinLnBrk="0" hangingPunct="1">
+              <a:spcBef>
+                <a:spcPct val="20000"/>
+              </a:spcBef>
+              <a:spcAft>
+                <a:spcPts val="600"/>
+              </a:spcAft>
+              <a:buClr>
+                <a:schemeClr val="accent2"/>
+              </a:buClr>
+              <a:buSzPct val="92000"/>
+              <a:buFont typeface="Wingdings 2" panose="05020102010507070707" pitchFamily="18" charset="2"/>
+              <a:buChar char=""/>
+              <a:defRPr sz="1200" kern="1200">
+                <a:solidFill>
+                  <a:schemeClr val="tx2"/>
+                </a:solidFill>
+                <a:latin typeface="+mn-lt"/>
+                <a:ea typeface="+mn-ea"/>
+                <a:cs typeface="+mn-cs"/>
+              </a:defRPr>
+            </a:lvl8pPr>
+            <a:lvl9pPr marL="2800000" indent="-228600" algn="l" defTabSz="457200" rtl="0" eaLnBrk="1" latinLnBrk="0" hangingPunct="1">
+              <a:spcBef>
+                <a:spcPct val="20000"/>
+              </a:spcBef>
+              <a:spcAft>
+                <a:spcPts val="600"/>
+              </a:spcAft>
+              <a:buClr>
+                <a:schemeClr val="accent2"/>
+              </a:buClr>
+              <a:buSzPct val="92000"/>
+              <a:buFont typeface="Wingdings 2" panose="05020102010507070707" pitchFamily="18" charset="2"/>
+              <a:buChar char=""/>
+              <a:defRPr sz="1200" kern="1200">
+                <a:solidFill>
+                  <a:schemeClr val="tx2"/>
+                </a:solidFill>
+                <a:latin typeface="+mn-lt"/>
+                <a:ea typeface="+mn-ea"/>
+                <a:cs typeface="+mn-cs"/>
+              </a:defRPr>
+            </a:lvl9pPr>
+          </a:lstStyle>
+          <a:p>
+            <a:r>
+              <a:rPr lang="en-US" dirty="0"/>
+              <a:t>Your organization needs to build a portal for service technicians. This portal should be able to view, modify, and delete incidents. This application will be written in React.</a:t>
+            </a:r>
+          </a:p>
+          <a:p>
+            <a:r>
+              <a:rPr lang="en-US" dirty="0"/>
+              <a:t>Modify your ‘Home’ component so that under the header, it will conditionally render either your ‘</a:t>
+            </a:r>
+            <a:r>
+              <a:rPr lang="en-US" dirty="0" err="1"/>
+              <a:t>IncidentList</a:t>
+            </a:r>
+            <a:r>
+              <a:rPr lang="en-US" dirty="0"/>
+              <a:t>’ component or a ‘Welcome’ component. </a:t>
+            </a:r>
+          </a:p>
+          <a:p>
+            <a:pPr lvl="1"/>
+            <a:r>
+              <a:rPr lang="en-US" dirty="0"/>
+              <a:t>It should conditionally render via navigation links in the header</a:t>
+            </a:r>
+          </a:p>
+          <a:p>
+            <a:pPr lvl="1"/>
+            <a:r>
+              <a:rPr lang="en-US" dirty="0"/>
+              <a:t>The ‘Welcome’ component may be a very simple dummy component that simply returns text ‘Welcome’</a:t>
+            </a:r>
+            <a:br>
+              <a:rPr lang="en-US" dirty="0"/>
+            </a:br>
+            <a:endParaRPr lang="en-US" dirty="0"/>
+          </a:p>
+        </p:txBody>
+      </p:sp>
+    </p:spTree>
+    <p:extLst>
+      <p:ext uri="{BB962C8B-B14F-4D97-AF65-F5344CB8AC3E}">
+        <p14:creationId xmlns:p14="http://schemas.microsoft.com/office/powerpoint/2010/main" val="1595042382"/>
+      </p:ext>
+    </p:extLst>
+  </p:cSld>
+  <p:clrMapOvr>
+    <a:masterClrMapping/>
+  </p:clrMapOvr>
+</p:sld>
+</file>
+
+<file path=ppt/slides/slide24.xml><?xml version="1.0" encoding="utf-8"?>
+<p:sld xmlns:a="http://schemas.openxmlformats.org/drawingml/2006/main" xmlns:r="http://schemas.openxmlformats.org/officeDocument/2006/relationships" xmlns:p="http://schemas.openxmlformats.org/presentationml/2006/main">
+  <p:cSld>
+    <p:spTree>
+      <p:nvGrpSpPr>
+        <p:cNvPr id="1" name=""/>
+        <p:cNvGrpSpPr/>
+        <p:nvPr/>
+      </p:nvGrpSpPr>
+      <p:grpSpPr>
+        <a:xfrm>
+          <a:off x="0" y="0"/>
+          <a:ext cx="0" cy="0"/>
+          <a:chOff x="0" y="0"/>
+          <a:chExt cx="0" cy="0"/>
+        </a:xfrm>
+      </p:grpSpPr>
+      <p:sp>
+        <p:nvSpPr>
+          <p:cNvPr id="2" name="Title 1">
+            <a:extLst>
+              <a:ext uri="{FF2B5EF4-FFF2-40B4-BE49-F238E27FC236}">
+                <a16:creationId xmlns:a16="http://schemas.microsoft.com/office/drawing/2014/main" id="{34F24C51-BF7C-0C7E-8B22-346123C1D58E}"/>
+              </a:ext>
+            </a:extLst>
+          </p:cNvPr>
+          <p:cNvSpPr>
+            <a:spLocks noGrp="1"/>
+          </p:cNvSpPr>
+          <p:nvPr>
+            <p:ph type="title"/>
+          </p:nvPr>
+        </p:nvSpPr>
+        <p:spPr/>
+        <p:txBody>
+          <a:bodyPr/>
+          <a:lstStyle/>
+          <a:p>
+            <a:r>
+              <a:rPr lang="en-US" dirty="0"/>
+              <a:t>Passing Callback Functions to Child Components</a:t>
+            </a:r>
+          </a:p>
+        </p:txBody>
+      </p:sp>
+      <p:sp>
+        <p:nvSpPr>
+          <p:cNvPr id="3" name="Content Placeholder 2">
+            <a:extLst>
+              <a:ext uri="{FF2B5EF4-FFF2-40B4-BE49-F238E27FC236}">
+                <a16:creationId xmlns:a16="http://schemas.microsoft.com/office/drawing/2014/main" id="{88DDA8C7-B5EB-70ED-13C9-5641B98904FA}"/>
+              </a:ext>
+            </a:extLst>
+          </p:cNvPr>
+          <p:cNvSpPr>
+            <a:spLocks noGrp="1"/>
+          </p:cNvSpPr>
+          <p:nvPr>
+            <p:ph idx="1"/>
+          </p:nvPr>
+        </p:nvSpPr>
+        <p:spPr>
+          <a:xfrm>
+            <a:off x="581193" y="2180496"/>
+            <a:ext cx="4322502" cy="3678303"/>
+          </a:xfrm>
+        </p:spPr>
+        <p:txBody>
+          <a:bodyPr/>
+          <a:lstStyle/>
+          <a:p>
+            <a:r>
+              <a:rPr lang="en-US" dirty="0"/>
+              <a:t>Notice how we pass in a callback function into the Incident component called ‘</a:t>
+            </a:r>
+            <a:r>
+              <a:rPr lang="en-US" dirty="0" err="1"/>
+              <a:t>handleClick</a:t>
+            </a:r>
+            <a:r>
+              <a:rPr lang="en-US" dirty="0"/>
+              <a:t>’</a:t>
+            </a:r>
+          </a:p>
+          <a:p>
+            <a:r>
+              <a:rPr lang="en-US" dirty="0"/>
+              <a:t>Then in our parent component, we can set the callback that will be performed for ‘</a:t>
+            </a:r>
+            <a:r>
+              <a:rPr lang="en-US" dirty="0" err="1"/>
+              <a:t>handleClick</a:t>
+            </a:r>
+            <a:r>
+              <a:rPr lang="en-US" dirty="0"/>
+              <a:t>’</a:t>
+            </a:r>
+          </a:p>
+          <a:p>
+            <a:pPr lvl="1"/>
+            <a:r>
+              <a:rPr lang="en-US" dirty="0"/>
+              <a:t>In this case, ‘</a:t>
+            </a:r>
+            <a:r>
+              <a:rPr lang="en-US" dirty="0" err="1"/>
+              <a:t>handleClick</a:t>
+            </a:r>
+            <a:r>
+              <a:rPr lang="en-US" dirty="0"/>
+              <a:t>’ will fire off another function local to the parent component </a:t>
+            </a:r>
+          </a:p>
+        </p:txBody>
+      </p:sp>
+      <p:pic>
+        <p:nvPicPr>
+          <p:cNvPr id="5" name="Picture 4">
+            <a:extLst>
+              <a:ext uri="{FF2B5EF4-FFF2-40B4-BE49-F238E27FC236}">
+                <a16:creationId xmlns:a16="http://schemas.microsoft.com/office/drawing/2014/main" id="{7A3FB8CD-A14C-08A4-55AF-08B5A5A3B5AB}"/>
+              </a:ext>
+            </a:extLst>
+          </p:cNvPr>
+          <p:cNvPicPr>
+            <a:picLocks noChangeAspect="1"/>
+          </p:cNvPicPr>
+          <p:nvPr/>
+        </p:nvPicPr>
+        <p:blipFill>
+          <a:blip r:embed="rId2"/>
+          <a:stretch>
+            <a:fillRect/>
+          </a:stretch>
+        </p:blipFill>
+        <p:spPr>
+          <a:xfrm>
+            <a:off x="5712269" y="5142043"/>
+            <a:ext cx="5172797" cy="1171739"/>
+          </a:xfrm>
+          <a:prstGeom prst="rect">
+            <a:avLst/>
+          </a:prstGeom>
+        </p:spPr>
+      </p:pic>
+      <p:pic>
+        <p:nvPicPr>
+          <p:cNvPr id="9" name="Picture 8">
+            <a:extLst>
+              <a:ext uri="{FF2B5EF4-FFF2-40B4-BE49-F238E27FC236}">
+                <a16:creationId xmlns:a16="http://schemas.microsoft.com/office/drawing/2014/main" id="{325A5988-DF64-D8AE-8ECA-42BD8942AEF9}"/>
+              </a:ext>
+            </a:extLst>
+          </p:cNvPr>
+          <p:cNvPicPr>
+            <a:picLocks noChangeAspect="1"/>
+          </p:cNvPicPr>
+          <p:nvPr/>
+        </p:nvPicPr>
+        <p:blipFill>
+          <a:blip r:embed="rId3"/>
+          <a:stretch>
+            <a:fillRect/>
+          </a:stretch>
+        </p:blipFill>
+        <p:spPr>
+          <a:xfrm>
+            <a:off x="5235074" y="2061971"/>
+            <a:ext cx="6335009" cy="2734057"/>
+          </a:xfrm>
+          <a:prstGeom prst="rect">
+            <a:avLst/>
+          </a:prstGeom>
+        </p:spPr>
+      </p:pic>
+    </p:spTree>
+    <p:extLst>
+      <p:ext uri="{BB962C8B-B14F-4D97-AF65-F5344CB8AC3E}">
+        <p14:creationId xmlns:p14="http://schemas.microsoft.com/office/powerpoint/2010/main" val="2016975729"/>
+      </p:ext>
+    </p:extLst>
+  </p:cSld>
+  <p:clrMapOvr>
+    <a:masterClrMapping/>
+  </p:clrMapOvr>
+</p:sld>
+</file>
+
+<file path=ppt/slides/slide25.xml><?xml version="1.0" encoding="utf-8"?>
+<p:sld xmlns:a="http://schemas.openxmlformats.org/drawingml/2006/main" xmlns:r="http://schemas.openxmlformats.org/officeDocument/2006/relationships" xmlns:p="http://schemas.openxmlformats.org/presentationml/2006/main">
+  <p:cSld>
+    <p:spTree>
+      <p:nvGrpSpPr>
+        <p:cNvPr id="1" name=""/>
+        <p:cNvGrpSpPr/>
+        <p:nvPr/>
+      </p:nvGrpSpPr>
+      <p:grpSpPr>
+        <a:xfrm>
+          <a:off x="0" y="0"/>
+          <a:ext cx="0" cy="0"/>
+          <a:chOff x="0" y="0"/>
+          <a:chExt cx="0" cy="0"/>
+        </a:xfrm>
+      </p:grpSpPr>
+      <p:sp>
+        <p:nvSpPr>
+          <p:cNvPr id="2" name="Title 1">
+            <a:extLst>
+              <a:ext uri="{FF2B5EF4-FFF2-40B4-BE49-F238E27FC236}">
+                <a16:creationId xmlns:a16="http://schemas.microsoft.com/office/drawing/2014/main" id="{54438627-39B0-81E8-E217-8D36A5360407}"/>
+              </a:ext>
+            </a:extLst>
+          </p:cNvPr>
+          <p:cNvSpPr>
+            <a:spLocks noGrp="1"/>
+          </p:cNvSpPr>
+          <p:nvPr>
+            <p:ph type="title"/>
+          </p:nvPr>
+        </p:nvSpPr>
+        <p:spPr/>
+        <p:txBody>
+          <a:bodyPr/>
+          <a:lstStyle/>
+          <a:p>
+            <a:r>
+              <a:rPr lang="en-US" dirty="0"/>
+              <a:t>Deleting Items From Lists</a:t>
+            </a:r>
+          </a:p>
+        </p:txBody>
+      </p:sp>
+      <p:sp>
+        <p:nvSpPr>
+          <p:cNvPr id="3" name="Content Placeholder 2">
+            <a:extLst>
+              <a:ext uri="{FF2B5EF4-FFF2-40B4-BE49-F238E27FC236}">
+                <a16:creationId xmlns:a16="http://schemas.microsoft.com/office/drawing/2014/main" id="{00A971B3-1B53-48ED-3CA2-468B766DC7EA}"/>
+              </a:ext>
+            </a:extLst>
+          </p:cNvPr>
+          <p:cNvSpPr>
+            <a:spLocks noGrp="1"/>
+          </p:cNvSpPr>
+          <p:nvPr>
+            <p:ph idx="1"/>
+          </p:nvPr>
+        </p:nvSpPr>
+        <p:spPr>
+          <a:xfrm>
+            <a:off x="640422" y="2343081"/>
+            <a:ext cx="10911153" cy="853649"/>
+          </a:xfrm>
+        </p:spPr>
+        <p:txBody>
+          <a:bodyPr>
+            <a:normAutofit fontScale="92500"/>
+          </a:bodyPr>
+          <a:lstStyle/>
+          <a:p>
+            <a:r>
+              <a:rPr lang="en-US" dirty="0"/>
+              <a:t>The JavaScript filter() function will return a new array where all items meet the criteria </a:t>
+            </a:r>
+          </a:p>
+          <a:p>
+            <a:r>
+              <a:rPr lang="en-US" dirty="0"/>
+              <a:t>In this example, we are getting a copy of the array will all items except for the incident where its ID was provided</a:t>
+            </a:r>
+          </a:p>
+        </p:txBody>
+      </p:sp>
+      <p:pic>
+        <p:nvPicPr>
+          <p:cNvPr id="7" name="Picture 6">
+            <a:extLst>
+              <a:ext uri="{FF2B5EF4-FFF2-40B4-BE49-F238E27FC236}">
+                <a16:creationId xmlns:a16="http://schemas.microsoft.com/office/drawing/2014/main" id="{27D773C1-3F1D-6574-7846-6C0CAE4E7FC2}"/>
+              </a:ext>
+            </a:extLst>
+          </p:cNvPr>
+          <p:cNvPicPr>
+            <a:picLocks noChangeAspect="1"/>
+          </p:cNvPicPr>
+          <p:nvPr/>
+        </p:nvPicPr>
+        <p:blipFill>
+          <a:blip r:embed="rId2"/>
+          <a:stretch>
+            <a:fillRect/>
+          </a:stretch>
+        </p:blipFill>
+        <p:spPr>
+          <a:xfrm>
+            <a:off x="1238759" y="4080578"/>
+            <a:ext cx="9714477" cy="1399543"/>
+          </a:xfrm>
+          <a:prstGeom prst="rect">
+            <a:avLst/>
+          </a:prstGeom>
+        </p:spPr>
+      </p:pic>
+    </p:spTree>
+    <p:extLst>
+      <p:ext uri="{BB962C8B-B14F-4D97-AF65-F5344CB8AC3E}">
+        <p14:creationId xmlns:p14="http://schemas.microsoft.com/office/powerpoint/2010/main" val="2463026830"/>
+      </p:ext>
+    </p:extLst>
+  </p:cSld>
+  <p:clrMapOvr>
+    <a:masterClrMapping/>
+  </p:clrMapOvr>
+</p:sld>
+</file>
+
+<file path=ppt/slides/slide26.xml><?xml version="1.0" encoding="utf-8"?>
+<p:sld xmlns:a="http://schemas.openxmlformats.org/drawingml/2006/main" xmlns:r="http://schemas.openxmlformats.org/officeDocument/2006/relationships" xmlns:p="http://schemas.openxmlformats.org/presentationml/2006/main">
+  <p:cSld>
+    <p:spTree>
+      <p:nvGrpSpPr>
+        <p:cNvPr id="1" name="">
+          <a:extLst>
+            <a:ext uri="{FF2B5EF4-FFF2-40B4-BE49-F238E27FC236}">
+              <a16:creationId xmlns:a16="http://schemas.microsoft.com/office/drawing/2014/main" id="{8A93E161-F4BA-66C1-5793-AA217ACAD4C5}"/>
+            </a:ext>
+          </a:extLst>
+        </p:cNvPr>
+        <p:cNvGrpSpPr/>
+        <p:nvPr/>
+      </p:nvGrpSpPr>
+      <p:grpSpPr>
+        <a:xfrm>
+          <a:off x="0" y="0"/>
+          <a:ext cx="0" cy="0"/>
+          <a:chOff x="0" y="0"/>
+          <a:chExt cx="0" cy="0"/>
+        </a:xfrm>
+      </p:grpSpPr>
+      <p:sp>
+        <p:nvSpPr>
+          <p:cNvPr id="2" name="Title 1">
+            <a:extLst>
+              <a:ext uri="{FF2B5EF4-FFF2-40B4-BE49-F238E27FC236}">
+                <a16:creationId xmlns:a16="http://schemas.microsoft.com/office/drawing/2014/main" id="{E5FA353E-7723-F682-AD14-6250128A260B}"/>
+              </a:ext>
+            </a:extLst>
+          </p:cNvPr>
+          <p:cNvSpPr>
+            <a:spLocks noGrp="1"/>
+          </p:cNvSpPr>
+          <p:nvPr>
+            <p:ph type="title"/>
+          </p:nvPr>
+        </p:nvSpPr>
+        <p:spPr/>
+        <p:txBody>
+          <a:bodyPr/>
+          <a:lstStyle/>
+          <a:p>
+            <a:r>
+              <a:rPr lang="en-US" dirty="0"/>
+              <a:t>Challenge – Delete Incidents</a:t>
+            </a:r>
+          </a:p>
+        </p:txBody>
+      </p:sp>
+      <p:sp>
+        <p:nvSpPr>
+          <p:cNvPr id="3" name="Content Placeholder 2">
+            <a:extLst>
+              <a:ext uri="{FF2B5EF4-FFF2-40B4-BE49-F238E27FC236}">
+                <a16:creationId xmlns:a16="http://schemas.microsoft.com/office/drawing/2014/main" id="{D331666D-E78D-4A35-BEB2-F43A5BD97E42}"/>
+              </a:ext>
+            </a:extLst>
+          </p:cNvPr>
+          <p:cNvSpPr>
+            <a:spLocks noGrp="1"/>
+          </p:cNvSpPr>
+          <p:nvPr>
+            <p:ph idx="1"/>
+          </p:nvPr>
+        </p:nvSpPr>
+        <p:spPr>
+          <a:xfrm>
+            <a:off x="581192" y="2475925"/>
+            <a:ext cx="5317584" cy="1681246"/>
+          </a:xfrm>
+        </p:spPr>
+        <p:txBody>
+          <a:bodyPr/>
+          <a:lstStyle/>
+          <a:p>
+            <a:r>
+              <a:rPr lang="en-US" dirty="0"/>
+              <a:t>Create a button on the incident component to delete the incident from the list</a:t>
+            </a:r>
+          </a:p>
+        </p:txBody>
+      </p:sp>
+      <p:sp>
+        <p:nvSpPr>
+          <p:cNvPr id="6" name="TextBox 5">
+            <a:extLst>
+              <a:ext uri="{FF2B5EF4-FFF2-40B4-BE49-F238E27FC236}">
+                <a16:creationId xmlns:a16="http://schemas.microsoft.com/office/drawing/2014/main" id="{5A5A4F7A-2C15-E272-C77B-423CB2B7DD51}"/>
+              </a:ext>
+            </a:extLst>
+          </p:cNvPr>
+          <p:cNvSpPr txBox="1"/>
+          <p:nvPr/>
+        </p:nvSpPr>
+        <p:spPr>
+          <a:xfrm>
+            <a:off x="1228165" y="2402747"/>
+            <a:ext cx="756938" cy="369332"/>
+          </a:xfrm>
+          <a:prstGeom prst="rect">
+            <a:avLst/>
+          </a:prstGeom>
+          <a:noFill/>
+        </p:spPr>
+        <p:txBody>
+          <a:bodyPr wrap="none" rtlCol="0">
+            <a:spAutoFit/>
+          </a:bodyPr>
+          <a:lstStyle/>
+          <a:p>
+            <a:r>
+              <a:rPr lang="en-US" b="1" dirty="0"/>
+              <a:t>Goal:</a:t>
+            </a:r>
+          </a:p>
+        </p:txBody>
+      </p:sp>
+      <p:sp>
+        <p:nvSpPr>
+          <p:cNvPr id="7" name="TextBox 6">
+            <a:extLst>
+              <a:ext uri="{FF2B5EF4-FFF2-40B4-BE49-F238E27FC236}">
+                <a16:creationId xmlns:a16="http://schemas.microsoft.com/office/drawing/2014/main" id="{369F47EC-97AB-22DC-3530-9B65E5C79CEF}"/>
+              </a:ext>
+            </a:extLst>
+          </p:cNvPr>
+          <p:cNvSpPr txBox="1"/>
+          <p:nvPr/>
+        </p:nvSpPr>
+        <p:spPr>
+          <a:xfrm>
+            <a:off x="6676991" y="2402747"/>
+            <a:ext cx="4933817" cy="369332"/>
+          </a:xfrm>
+          <a:prstGeom prst="rect">
+            <a:avLst/>
+          </a:prstGeom>
+          <a:noFill/>
+        </p:spPr>
+        <p:txBody>
+          <a:bodyPr wrap="square" rtlCol="0">
+            <a:spAutoFit/>
+          </a:bodyPr>
+          <a:lstStyle/>
+          <a:p>
+            <a:r>
+              <a:rPr lang="en-US" b="1" dirty="0"/>
+              <a:t>Scenario:  			</a:t>
+            </a:r>
+          </a:p>
+        </p:txBody>
+      </p:sp>
+      <p:sp>
+        <p:nvSpPr>
+          <p:cNvPr id="8" name="Content Placeholder 2">
+            <a:extLst>
+              <a:ext uri="{FF2B5EF4-FFF2-40B4-BE49-F238E27FC236}">
+                <a16:creationId xmlns:a16="http://schemas.microsoft.com/office/drawing/2014/main" id="{76AE7A51-3F2A-03CF-A82D-343A11028C57}"/>
+              </a:ext>
+            </a:extLst>
+          </p:cNvPr>
+          <p:cNvSpPr txBox="1">
+            <a:spLocks/>
+          </p:cNvSpPr>
+          <p:nvPr/>
+        </p:nvSpPr>
+        <p:spPr>
+          <a:xfrm>
+            <a:off x="6000244" y="2900119"/>
+            <a:ext cx="5740756" cy="1536799"/>
+          </a:xfrm>
+          <a:prstGeom prst="rect">
+            <a:avLst/>
+          </a:prstGeom>
+        </p:spPr>
+        <p:txBody>
+          <a:bodyPr vert="horz" lIns="91440" tIns="45720" rIns="91440" bIns="45720" rtlCol="0" anchor="ctr">
+            <a:normAutofit/>
+          </a:bodyPr>
+          <a:lstStyle>
+            <a:lvl1pPr marL="306000" indent="-306000" algn="l" defTabSz="457200" rtl="0" eaLnBrk="1" latinLnBrk="0" hangingPunct="1">
+              <a:spcBef>
+                <a:spcPct val="20000"/>
+              </a:spcBef>
+              <a:spcAft>
+                <a:spcPts val="600"/>
+              </a:spcAft>
+              <a:buClr>
+                <a:schemeClr val="accent2"/>
+              </a:buClr>
+              <a:buSzPct val="92000"/>
+              <a:buFont typeface="Wingdings 2" panose="05020102010507070707" pitchFamily="18" charset="2"/>
+              <a:buChar char=""/>
+              <a:defRPr sz="1800" kern="1200">
+                <a:solidFill>
+                  <a:schemeClr val="tx2"/>
+                </a:solidFill>
+                <a:latin typeface="+mn-lt"/>
+                <a:ea typeface="+mn-ea"/>
+                <a:cs typeface="+mn-cs"/>
+              </a:defRPr>
+            </a:lvl1pPr>
+            <a:lvl2pPr marL="630000" indent="-306000" algn="l" defTabSz="457200" rtl="0" eaLnBrk="1" latinLnBrk="0" hangingPunct="1">
+              <a:spcBef>
+                <a:spcPct val="20000"/>
+              </a:spcBef>
+              <a:spcAft>
+                <a:spcPts val="600"/>
+              </a:spcAft>
+              <a:buClr>
+                <a:schemeClr val="accent2"/>
+              </a:buClr>
+              <a:buSzPct val="92000"/>
+              <a:buFont typeface="Wingdings 2" panose="05020102010507070707" pitchFamily="18" charset="2"/>
+              <a:buChar char=""/>
+              <a:defRPr sz="1600" kern="1200">
+                <a:solidFill>
+                  <a:schemeClr val="tx2"/>
+                </a:solidFill>
+                <a:latin typeface="+mn-lt"/>
+                <a:ea typeface="+mn-ea"/>
+                <a:cs typeface="+mn-cs"/>
+              </a:defRPr>
+            </a:lvl2pPr>
+            <a:lvl3pPr marL="900000" indent="-270000" algn="l" defTabSz="457200" rtl="0" eaLnBrk="1" latinLnBrk="0" hangingPunct="1">
+              <a:spcBef>
+                <a:spcPct val="20000"/>
+              </a:spcBef>
+              <a:spcAft>
+                <a:spcPts val="600"/>
+              </a:spcAft>
+              <a:buClr>
+                <a:schemeClr val="accent2"/>
+              </a:buClr>
+              <a:buSzPct val="92000"/>
+              <a:buFont typeface="Wingdings 2" panose="05020102010507070707" pitchFamily="18" charset="2"/>
+              <a:buChar char=""/>
+              <a:defRPr sz="1400" kern="1200">
+                <a:solidFill>
+                  <a:schemeClr val="tx2"/>
+                </a:solidFill>
+                <a:latin typeface="+mn-lt"/>
+                <a:ea typeface="+mn-ea"/>
+                <a:cs typeface="+mn-cs"/>
+              </a:defRPr>
+            </a:lvl3pPr>
+            <a:lvl4pPr marL="1242000" indent="-234000" algn="l" defTabSz="457200" rtl="0" eaLnBrk="1" latinLnBrk="0" hangingPunct="1">
+              <a:spcBef>
+                <a:spcPct val="20000"/>
+              </a:spcBef>
+              <a:spcAft>
+                <a:spcPts val="600"/>
+              </a:spcAft>
+              <a:buClr>
+                <a:schemeClr val="accent2"/>
+              </a:buClr>
+              <a:buSzPct val="92000"/>
+              <a:buFont typeface="Wingdings 2" panose="05020102010507070707" pitchFamily="18" charset="2"/>
+              <a:buChar char=""/>
+              <a:defRPr sz="1200" kern="1200">
+                <a:solidFill>
+                  <a:schemeClr val="tx2"/>
+                </a:solidFill>
+                <a:latin typeface="+mn-lt"/>
+                <a:ea typeface="+mn-ea"/>
+                <a:cs typeface="+mn-cs"/>
+              </a:defRPr>
+            </a:lvl4pPr>
+            <a:lvl5pPr marL="1602000" indent="-234000" algn="l" defTabSz="457200" rtl="0" eaLnBrk="1" latinLnBrk="0" hangingPunct="1">
+              <a:spcBef>
+                <a:spcPct val="20000"/>
+              </a:spcBef>
+              <a:spcAft>
+                <a:spcPts val="600"/>
+              </a:spcAft>
+              <a:buClr>
+                <a:schemeClr val="accent2"/>
+              </a:buClr>
+              <a:buSzPct val="92000"/>
+              <a:buFont typeface="Wingdings 2" panose="05020102010507070707" pitchFamily="18" charset="2"/>
+              <a:buChar char=""/>
+              <a:defRPr sz="1200" kern="1200">
+                <a:solidFill>
+                  <a:schemeClr val="tx2"/>
+                </a:solidFill>
+                <a:latin typeface="+mn-lt"/>
+                <a:ea typeface="+mn-ea"/>
+                <a:cs typeface="+mn-cs"/>
+              </a:defRPr>
+            </a:lvl5pPr>
+            <a:lvl6pPr marL="1900000" indent="-228600" algn="l" defTabSz="457200" rtl="0" eaLnBrk="1" latinLnBrk="0" hangingPunct="1">
+              <a:spcBef>
+                <a:spcPct val="20000"/>
+              </a:spcBef>
+              <a:spcAft>
+                <a:spcPts val="600"/>
+              </a:spcAft>
+              <a:buClr>
+                <a:schemeClr val="accent2"/>
+              </a:buClr>
+              <a:buSzPct val="92000"/>
+              <a:buFont typeface="Wingdings 2" panose="05020102010507070707" pitchFamily="18" charset="2"/>
+              <a:buChar char=""/>
+              <a:defRPr sz="1200" kern="1200">
+                <a:solidFill>
+                  <a:schemeClr val="tx2"/>
+                </a:solidFill>
+                <a:latin typeface="+mn-lt"/>
+                <a:ea typeface="+mn-ea"/>
+                <a:cs typeface="+mn-cs"/>
+              </a:defRPr>
+            </a:lvl6pPr>
+            <a:lvl7pPr marL="2200000" indent="-228600" algn="l" defTabSz="457200" rtl="0" eaLnBrk="1" latinLnBrk="0" hangingPunct="1">
+              <a:spcBef>
+                <a:spcPct val="20000"/>
+              </a:spcBef>
+              <a:spcAft>
+                <a:spcPts val="600"/>
+              </a:spcAft>
+              <a:buClr>
+                <a:schemeClr val="accent2"/>
+              </a:buClr>
+              <a:buSzPct val="92000"/>
+              <a:buFont typeface="Wingdings 2" panose="05020102010507070707" pitchFamily="18" charset="2"/>
+              <a:buChar char=""/>
+              <a:defRPr sz="1200" kern="1200">
+                <a:solidFill>
+                  <a:schemeClr val="tx2"/>
+                </a:solidFill>
+                <a:latin typeface="+mn-lt"/>
+                <a:ea typeface="+mn-ea"/>
+                <a:cs typeface="+mn-cs"/>
+              </a:defRPr>
+            </a:lvl7pPr>
+            <a:lvl8pPr marL="2500000" indent="-228600" algn="l" defTabSz="457200" rtl="0" eaLnBrk="1" latinLnBrk="0" hangingPunct="1">
+              <a:spcBef>
+                <a:spcPct val="20000"/>
+              </a:spcBef>
+              <a:spcAft>
+                <a:spcPts val="600"/>
+              </a:spcAft>
+              <a:buClr>
+                <a:schemeClr val="accent2"/>
+              </a:buClr>
+              <a:buSzPct val="92000"/>
+              <a:buFont typeface="Wingdings 2" panose="05020102010507070707" pitchFamily="18" charset="2"/>
+              <a:buChar char=""/>
+              <a:defRPr sz="1200" kern="1200">
+                <a:solidFill>
+                  <a:schemeClr val="tx2"/>
+                </a:solidFill>
+                <a:latin typeface="+mn-lt"/>
+                <a:ea typeface="+mn-ea"/>
+                <a:cs typeface="+mn-cs"/>
+              </a:defRPr>
+            </a:lvl8pPr>
+            <a:lvl9pPr marL="2800000" indent="-228600" algn="l" defTabSz="457200" rtl="0" eaLnBrk="1" latinLnBrk="0" hangingPunct="1">
+              <a:spcBef>
+                <a:spcPct val="20000"/>
+              </a:spcBef>
+              <a:spcAft>
+                <a:spcPts val="600"/>
+              </a:spcAft>
+              <a:buClr>
+                <a:schemeClr val="accent2"/>
+              </a:buClr>
+              <a:buSzPct val="92000"/>
+              <a:buFont typeface="Wingdings 2" panose="05020102010507070707" pitchFamily="18" charset="2"/>
+              <a:buChar char=""/>
+              <a:defRPr sz="1200" kern="1200">
+                <a:solidFill>
+                  <a:schemeClr val="tx2"/>
+                </a:solidFill>
+                <a:latin typeface="+mn-lt"/>
+                <a:ea typeface="+mn-ea"/>
+                <a:cs typeface="+mn-cs"/>
+              </a:defRPr>
+            </a:lvl9pPr>
+          </a:lstStyle>
+          <a:p>
+            <a:r>
+              <a:rPr lang="en-US" dirty="0"/>
+              <a:t>Modify your ‘Incident’ component so that it has a delete button</a:t>
+            </a:r>
+          </a:p>
+          <a:p>
+            <a:r>
+              <a:rPr lang="en-US" dirty="0"/>
+              <a:t>The button should remove the Incident from the Incident list component</a:t>
+            </a:r>
+          </a:p>
+        </p:txBody>
+      </p:sp>
+      <p:pic>
+        <p:nvPicPr>
+          <p:cNvPr id="5" name="Picture 4">
+            <a:extLst>
+              <a:ext uri="{FF2B5EF4-FFF2-40B4-BE49-F238E27FC236}">
+                <a16:creationId xmlns:a16="http://schemas.microsoft.com/office/drawing/2014/main" id="{66856136-A0B5-745A-83A5-13A9CF71FD47}"/>
+              </a:ext>
+            </a:extLst>
+          </p:cNvPr>
+          <p:cNvPicPr>
+            <a:picLocks noChangeAspect="1"/>
+          </p:cNvPicPr>
+          <p:nvPr/>
+        </p:nvPicPr>
+        <p:blipFill>
+          <a:blip r:embed="rId2"/>
+          <a:stretch>
+            <a:fillRect/>
+          </a:stretch>
+        </p:blipFill>
+        <p:spPr>
+          <a:xfrm>
+            <a:off x="1985103" y="4054749"/>
+            <a:ext cx="2463162" cy="2588408"/>
+          </a:xfrm>
+          <a:prstGeom prst="rect">
+            <a:avLst/>
+          </a:prstGeom>
+        </p:spPr>
+      </p:pic>
+    </p:spTree>
+    <p:extLst>
+      <p:ext uri="{BB962C8B-B14F-4D97-AF65-F5344CB8AC3E}">
+        <p14:creationId xmlns:p14="http://schemas.microsoft.com/office/powerpoint/2010/main" val="3607207212"/>
+      </p:ext>
+    </p:extLst>
+  </p:cSld>
+  <p:clrMapOvr>
+    <a:masterClrMapping/>
+  </p:clrMapOvr>
+</p:sld>
+</file>
+
+<file path=ppt/slides/slide27.xml><?xml version="1.0" encoding="utf-8"?>
+<p:sld xmlns:a="http://schemas.openxmlformats.org/drawingml/2006/main" xmlns:r="http://schemas.openxmlformats.org/officeDocument/2006/relationships" xmlns:p="http://schemas.openxmlformats.org/presentationml/2006/main">
+  <p:cSld>
+    <p:spTree>
+      <p:nvGrpSpPr>
+        <p:cNvPr id="1" name=""/>
+        <p:cNvGrpSpPr/>
+        <p:nvPr/>
+      </p:nvGrpSpPr>
+      <p:grpSpPr>
+        <a:xfrm>
+          <a:off x="0" y="0"/>
+          <a:ext cx="0" cy="0"/>
+          <a:chOff x="0" y="0"/>
+          <a:chExt cx="0" cy="0"/>
+        </a:xfrm>
+      </p:grpSpPr>
+      <p:sp>
+        <p:nvSpPr>
+          <p:cNvPr id="2" name="Title 1">
+            <a:extLst>
+              <a:ext uri="{FF2B5EF4-FFF2-40B4-BE49-F238E27FC236}">
+                <a16:creationId xmlns:a16="http://schemas.microsoft.com/office/drawing/2014/main" id="{8DF01766-6676-B1B0-2EE9-CA962A0C95C5}"/>
+              </a:ext>
+            </a:extLst>
+          </p:cNvPr>
+          <p:cNvSpPr>
+            <a:spLocks noGrp="1"/>
+          </p:cNvSpPr>
+          <p:nvPr>
+            <p:ph type="title"/>
+          </p:nvPr>
+        </p:nvSpPr>
+        <p:spPr/>
+        <p:txBody>
+          <a:bodyPr/>
+          <a:lstStyle/>
+          <a:p>
+            <a:r>
+              <a:rPr lang="en-US" dirty="0"/>
+              <a:t>Sharing Component Data / Lifting Up State</a:t>
+            </a:r>
+          </a:p>
+        </p:txBody>
+      </p:sp>
+      <p:sp>
+        <p:nvSpPr>
+          <p:cNvPr id="3" name="Content Placeholder 2">
+            <a:extLst>
+              <a:ext uri="{FF2B5EF4-FFF2-40B4-BE49-F238E27FC236}">
+                <a16:creationId xmlns:a16="http://schemas.microsoft.com/office/drawing/2014/main" id="{921C1379-3FD8-126B-7875-4935837ADD8D}"/>
+              </a:ext>
+            </a:extLst>
+          </p:cNvPr>
+          <p:cNvSpPr>
+            <a:spLocks noGrp="1"/>
+          </p:cNvSpPr>
+          <p:nvPr>
+            <p:ph idx="1"/>
+          </p:nvPr>
+        </p:nvSpPr>
+        <p:spPr>
+          <a:xfrm>
+            <a:off x="581192" y="2180496"/>
+            <a:ext cx="4863644" cy="1809613"/>
+          </a:xfrm>
+        </p:spPr>
+        <p:txBody>
+          <a:bodyPr/>
+          <a:lstStyle/>
+          <a:p>
+            <a:r>
+              <a:rPr lang="en-US" dirty="0"/>
+              <a:t>Where we use state matters</a:t>
+            </a:r>
+          </a:p>
+          <a:p>
+            <a:r>
+              <a:rPr lang="en-US" dirty="0"/>
+              <a:t>Lifting State – refers to moving state from one component to a common parent so that multiple child components can share and update it</a:t>
+            </a:r>
+          </a:p>
+        </p:txBody>
+      </p:sp>
+      <p:pic>
+        <p:nvPicPr>
+          <p:cNvPr id="5" name="Picture 4">
+            <a:extLst>
+              <a:ext uri="{FF2B5EF4-FFF2-40B4-BE49-F238E27FC236}">
+                <a16:creationId xmlns:a16="http://schemas.microsoft.com/office/drawing/2014/main" id="{452F90BB-931D-1296-F8BA-E8E8A54C79AC}"/>
+              </a:ext>
+            </a:extLst>
+          </p:cNvPr>
+          <p:cNvPicPr>
+            <a:picLocks noChangeAspect="1"/>
+          </p:cNvPicPr>
+          <p:nvPr/>
+        </p:nvPicPr>
+        <p:blipFill>
+          <a:blip r:embed="rId2"/>
+          <a:stretch>
+            <a:fillRect/>
+          </a:stretch>
+        </p:blipFill>
+        <p:spPr>
+          <a:xfrm>
+            <a:off x="581192" y="4895661"/>
+            <a:ext cx="5801042" cy="351578"/>
+          </a:xfrm>
+          <a:prstGeom prst="rect">
+            <a:avLst/>
+          </a:prstGeom>
+        </p:spPr>
+      </p:pic>
+      <p:sp>
+        <p:nvSpPr>
+          <p:cNvPr id="6" name="Rectangle 5">
+            <a:extLst>
+              <a:ext uri="{FF2B5EF4-FFF2-40B4-BE49-F238E27FC236}">
+                <a16:creationId xmlns:a16="http://schemas.microsoft.com/office/drawing/2014/main" id="{F3FBC935-5316-94D2-DC66-956B102CE455}"/>
+              </a:ext>
+            </a:extLst>
+          </p:cNvPr>
+          <p:cNvSpPr/>
+          <p:nvPr/>
+        </p:nvSpPr>
+        <p:spPr>
+          <a:xfrm>
+            <a:off x="8006355" y="2408412"/>
+            <a:ext cx="1403122" cy="883227"/>
+          </a:xfrm>
+          <a:prstGeom prst="rect">
+            <a:avLst/>
+          </a:prstGeom>
+        </p:spPr>
+        <p:style>
+          <a:lnRef idx="2">
+            <a:schemeClr val="accent1">
+              <a:shade val="15000"/>
+            </a:schemeClr>
+          </a:lnRef>
+          <a:fillRef idx="1">
+            <a:schemeClr val="accent1"/>
+          </a:fillRef>
+          <a:effectRef idx="0">
+            <a:schemeClr val="accent1"/>
+          </a:effectRef>
+          <a:fontRef idx="minor">
+            <a:schemeClr val="lt1"/>
+          </a:fontRef>
+        </p:style>
+        <p:txBody>
+          <a:bodyPr rtlCol="0" anchor="ctr"/>
+          <a:lstStyle/>
+          <a:p>
+            <a:pPr algn="ctr"/>
+            <a:r>
+              <a:rPr lang="en-US" dirty="0"/>
+              <a:t>Home</a:t>
+            </a:r>
+          </a:p>
+        </p:txBody>
+      </p:sp>
+      <p:sp>
+        <p:nvSpPr>
+          <p:cNvPr id="7" name="Rectangle 6">
+            <a:extLst>
+              <a:ext uri="{FF2B5EF4-FFF2-40B4-BE49-F238E27FC236}">
+                <a16:creationId xmlns:a16="http://schemas.microsoft.com/office/drawing/2014/main" id="{C1774722-6334-B5C1-4D96-6D397FB410E8}"/>
+              </a:ext>
+            </a:extLst>
+          </p:cNvPr>
+          <p:cNvSpPr/>
+          <p:nvPr/>
+        </p:nvSpPr>
+        <p:spPr>
+          <a:xfrm>
+            <a:off x="9117979" y="3592848"/>
+            <a:ext cx="1403122" cy="883227"/>
+          </a:xfrm>
+          <a:prstGeom prst="rect">
+            <a:avLst/>
+          </a:prstGeom>
+        </p:spPr>
+        <p:style>
+          <a:lnRef idx="2">
+            <a:schemeClr val="accent1">
+              <a:shade val="15000"/>
+            </a:schemeClr>
+          </a:lnRef>
+          <a:fillRef idx="1">
+            <a:schemeClr val="accent1"/>
+          </a:fillRef>
+          <a:effectRef idx="0">
+            <a:schemeClr val="accent1"/>
+          </a:effectRef>
+          <a:fontRef idx="minor">
+            <a:schemeClr val="lt1"/>
+          </a:fontRef>
+        </p:style>
+        <p:txBody>
+          <a:bodyPr rtlCol="0" anchor="ctr"/>
+          <a:lstStyle/>
+          <a:p>
+            <a:pPr algn="ctr"/>
+            <a:r>
+              <a:rPr lang="en-US" dirty="0" err="1"/>
+              <a:t>IncidentList</a:t>
+            </a:r>
+            <a:endParaRPr lang="en-US" dirty="0"/>
+          </a:p>
+        </p:txBody>
+      </p:sp>
+      <p:sp>
+        <p:nvSpPr>
+          <p:cNvPr id="8" name="Rectangle 7">
+            <a:extLst>
+              <a:ext uri="{FF2B5EF4-FFF2-40B4-BE49-F238E27FC236}">
+                <a16:creationId xmlns:a16="http://schemas.microsoft.com/office/drawing/2014/main" id="{60F27F19-0997-032F-707B-081DEACA4C01}"/>
+              </a:ext>
+            </a:extLst>
+          </p:cNvPr>
+          <p:cNvSpPr/>
+          <p:nvPr/>
+        </p:nvSpPr>
+        <p:spPr>
+          <a:xfrm>
+            <a:off x="6975414" y="5071450"/>
+            <a:ext cx="1403122" cy="883227"/>
+          </a:xfrm>
+          <a:prstGeom prst="rect">
+            <a:avLst/>
+          </a:prstGeom>
+        </p:spPr>
+        <p:style>
+          <a:lnRef idx="2">
+            <a:schemeClr val="accent1">
+              <a:shade val="15000"/>
+            </a:schemeClr>
+          </a:lnRef>
+          <a:fillRef idx="1">
+            <a:schemeClr val="accent1"/>
+          </a:fillRef>
+          <a:effectRef idx="0">
+            <a:schemeClr val="accent1"/>
+          </a:effectRef>
+          <a:fontRef idx="minor">
+            <a:schemeClr val="lt1"/>
+          </a:fontRef>
+        </p:style>
+        <p:txBody>
+          <a:bodyPr rtlCol="0" anchor="ctr"/>
+          <a:lstStyle/>
+          <a:p>
+            <a:pPr algn="ctr"/>
+            <a:r>
+              <a:rPr lang="en-US" dirty="0"/>
+              <a:t>Incident</a:t>
+            </a:r>
+          </a:p>
+        </p:txBody>
+      </p:sp>
+      <p:sp>
+        <p:nvSpPr>
+          <p:cNvPr id="9" name="Rectangle 8">
+            <a:extLst>
+              <a:ext uri="{FF2B5EF4-FFF2-40B4-BE49-F238E27FC236}">
+                <a16:creationId xmlns:a16="http://schemas.microsoft.com/office/drawing/2014/main" id="{FDADA160-FB17-1B45-DBED-AFA672DFCC40}"/>
+              </a:ext>
+            </a:extLst>
+          </p:cNvPr>
+          <p:cNvSpPr/>
+          <p:nvPr/>
+        </p:nvSpPr>
+        <p:spPr>
+          <a:xfrm>
+            <a:off x="6975414" y="3592849"/>
+            <a:ext cx="1403122" cy="883227"/>
+          </a:xfrm>
+          <a:prstGeom prst="rect">
+            <a:avLst/>
+          </a:prstGeom>
+        </p:spPr>
+        <p:style>
+          <a:lnRef idx="2">
+            <a:schemeClr val="accent1">
+              <a:shade val="15000"/>
+            </a:schemeClr>
+          </a:lnRef>
+          <a:fillRef idx="1">
+            <a:schemeClr val="accent1"/>
+          </a:fillRef>
+          <a:effectRef idx="0">
+            <a:schemeClr val="accent1"/>
+          </a:effectRef>
+          <a:fontRef idx="minor">
+            <a:schemeClr val="lt1"/>
+          </a:fontRef>
+        </p:style>
+        <p:txBody>
+          <a:bodyPr rtlCol="0" anchor="ctr"/>
+          <a:lstStyle/>
+          <a:p>
+            <a:pPr algn="ctr"/>
+            <a:r>
+              <a:rPr lang="en-US" dirty="0"/>
+              <a:t>Home</a:t>
+            </a:r>
+          </a:p>
+        </p:txBody>
+      </p:sp>
+      <p:cxnSp>
+        <p:nvCxnSpPr>
+          <p:cNvPr id="15" name="Connector: Elbow 14">
+            <a:extLst>
+              <a:ext uri="{FF2B5EF4-FFF2-40B4-BE49-F238E27FC236}">
+                <a16:creationId xmlns:a16="http://schemas.microsoft.com/office/drawing/2014/main" id="{EF25FD60-3ADA-AD65-DAE5-9AB5E7B1D2A4}"/>
+              </a:ext>
+            </a:extLst>
+          </p:cNvPr>
+          <p:cNvCxnSpPr>
+            <a:cxnSpLocks/>
+            <a:stCxn id="6" idx="1"/>
+            <a:endCxn id="9" idx="0"/>
+          </p:cNvCxnSpPr>
+          <p:nvPr/>
+        </p:nvCxnSpPr>
+        <p:spPr>
+          <a:xfrm rot="10800000" flipV="1">
+            <a:off x="7676975" y="2850025"/>
+            <a:ext cx="329380" cy="742823"/>
+          </a:xfrm>
+          <a:prstGeom prst="bentConnector2">
+            <a:avLst/>
+          </a:prstGeom>
+          <a:ln>
+            <a:tailEnd type="triangle"/>
+          </a:ln>
+        </p:spPr>
+        <p:style>
+          <a:lnRef idx="1">
+            <a:schemeClr val="accent1"/>
+          </a:lnRef>
+          <a:fillRef idx="0">
+            <a:schemeClr val="accent1"/>
+          </a:fillRef>
+          <a:effectRef idx="0">
+            <a:schemeClr val="accent1"/>
+          </a:effectRef>
+          <a:fontRef idx="minor">
+            <a:schemeClr val="tx1"/>
+          </a:fontRef>
+        </p:style>
+      </p:cxnSp>
+      <p:cxnSp>
+        <p:nvCxnSpPr>
+          <p:cNvPr id="19" name="Connector: Elbow 18">
+            <a:extLst>
+              <a:ext uri="{FF2B5EF4-FFF2-40B4-BE49-F238E27FC236}">
+                <a16:creationId xmlns:a16="http://schemas.microsoft.com/office/drawing/2014/main" id="{E5DA25C1-9805-F6D0-7AEA-377B7B840A1C}"/>
+              </a:ext>
+            </a:extLst>
+          </p:cNvPr>
+          <p:cNvCxnSpPr>
+            <a:cxnSpLocks/>
+            <a:stCxn id="6" idx="3"/>
+            <a:endCxn id="7" idx="0"/>
+          </p:cNvCxnSpPr>
+          <p:nvPr/>
+        </p:nvCxnSpPr>
+        <p:spPr>
+          <a:xfrm>
+            <a:off x="9409477" y="2850026"/>
+            <a:ext cx="410063" cy="742822"/>
+          </a:xfrm>
+          <a:prstGeom prst="bentConnector2">
+            <a:avLst/>
+          </a:prstGeom>
+          <a:ln>
+            <a:tailEnd type="triangle"/>
+          </a:ln>
+        </p:spPr>
+        <p:style>
+          <a:lnRef idx="1">
+            <a:schemeClr val="accent1"/>
+          </a:lnRef>
+          <a:fillRef idx="0">
+            <a:schemeClr val="accent1"/>
+          </a:fillRef>
+          <a:effectRef idx="0">
+            <a:schemeClr val="accent1"/>
+          </a:effectRef>
+          <a:fontRef idx="minor">
+            <a:schemeClr val="tx1"/>
+          </a:fontRef>
+        </p:style>
+      </p:cxnSp>
+      <p:cxnSp>
+        <p:nvCxnSpPr>
+          <p:cNvPr id="26" name="Straight Arrow Connector 25">
+            <a:extLst>
+              <a:ext uri="{FF2B5EF4-FFF2-40B4-BE49-F238E27FC236}">
+                <a16:creationId xmlns:a16="http://schemas.microsoft.com/office/drawing/2014/main" id="{DEC96D39-AFA0-6B1E-D6E6-71982AE13C3B}"/>
+              </a:ext>
+            </a:extLst>
+          </p:cNvPr>
+          <p:cNvCxnSpPr>
+            <a:cxnSpLocks/>
+            <a:stCxn id="9" idx="2"/>
+            <a:endCxn id="8" idx="0"/>
+          </p:cNvCxnSpPr>
+          <p:nvPr/>
+        </p:nvCxnSpPr>
+        <p:spPr>
+          <a:xfrm>
+            <a:off x="7676975" y="4476076"/>
+            <a:ext cx="0" cy="595374"/>
+          </a:xfrm>
+          <a:prstGeom prst="straightConnector1">
+            <a:avLst/>
+          </a:prstGeom>
+          <a:ln>
+            <a:tailEnd type="triangle"/>
+          </a:ln>
+        </p:spPr>
+        <p:style>
+          <a:lnRef idx="1">
+            <a:schemeClr val="accent1"/>
+          </a:lnRef>
+          <a:fillRef idx="0">
+            <a:schemeClr val="accent1"/>
+          </a:fillRef>
+          <a:effectRef idx="0">
+            <a:schemeClr val="accent1"/>
+          </a:effectRef>
+          <a:fontRef idx="minor">
+            <a:schemeClr val="tx1"/>
+          </a:fontRef>
+        </p:style>
+      </p:cxnSp>
+      <p:sp>
+        <p:nvSpPr>
+          <p:cNvPr id="28" name="TextBox 27">
+            <a:extLst>
+              <a:ext uri="{FF2B5EF4-FFF2-40B4-BE49-F238E27FC236}">
+                <a16:creationId xmlns:a16="http://schemas.microsoft.com/office/drawing/2014/main" id="{B6D9D018-B6C6-3C0A-B86D-1E6E8236059B}"/>
+              </a:ext>
+            </a:extLst>
+          </p:cNvPr>
+          <p:cNvSpPr txBox="1"/>
+          <p:nvPr/>
+        </p:nvSpPr>
+        <p:spPr>
+          <a:xfrm>
+            <a:off x="8639356" y="4816013"/>
+            <a:ext cx="3185092" cy="1200329"/>
+          </a:xfrm>
+          <a:prstGeom prst="rect">
+            <a:avLst/>
+          </a:prstGeom>
+          <a:noFill/>
+        </p:spPr>
+        <p:txBody>
+          <a:bodyPr wrap="square" rtlCol="0">
+            <a:spAutoFit/>
+          </a:bodyPr>
+          <a:lstStyle/>
+          <a:p>
+            <a:r>
+              <a:rPr lang="en-US" dirty="0"/>
+              <a:t>If state is at the </a:t>
+            </a:r>
+            <a:r>
+              <a:rPr lang="en-US" dirty="0" err="1"/>
+              <a:t>IncidentList</a:t>
+            </a:r>
+            <a:r>
+              <a:rPr lang="en-US" dirty="0"/>
+              <a:t> component, then it will be reset each time the component unloads from the virtual DOM</a:t>
+            </a:r>
+          </a:p>
+        </p:txBody>
+      </p:sp>
+    </p:spTree>
+    <p:extLst>
+      <p:ext uri="{BB962C8B-B14F-4D97-AF65-F5344CB8AC3E}">
+        <p14:creationId xmlns:p14="http://schemas.microsoft.com/office/powerpoint/2010/main" val="2342300579"/>
+      </p:ext>
+    </p:extLst>
+  </p:cSld>
+  <p:clrMapOvr>
+    <a:masterClrMapping/>
+  </p:clrMapOvr>
+</p:sld>
+</file>
+
+<file path=ppt/slides/slide28.xml><?xml version="1.0" encoding="utf-8"?>
+<p:sld xmlns:a="http://schemas.openxmlformats.org/drawingml/2006/main" xmlns:r="http://schemas.openxmlformats.org/officeDocument/2006/relationships" xmlns:p="http://schemas.openxmlformats.org/presentationml/2006/main">
+  <p:cSld>
+    <p:spTree>
+      <p:nvGrpSpPr>
+        <p:cNvPr id="1" name="">
+          <a:extLst>
+            <a:ext uri="{FF2B5EF4-FFF2-40B4-BE49-F238E27FC236}">
+              <a16:creationId xmlns:a16="http://schemas.microsoft.com/office/drawing/2014/main" id="{D75D9E68-1C6C-E13E-CE0E-8C509701EE14}"/>
+            </a:ext>
+          </a:extLst>
+        </p:cNvPr>
+        <p:cNvGrpSpPr/>
+        <p:nvPr/>
+      </p:nvGrpSpPr>
+      <p:grpSpPr>
+        <a:xfrm>
+          <a:off x="0" y="0"/>
+          <a:ext cx="0" cy="0"/>
+          <a:chOff x="0" y="0"/>
+          <a:chExt cx="0" cy="0"/>
+        </a:xfrm>
+      </p:grpSpPr>
+      <p:sp>
+        <p:nvSpPr>
+          <p:cNvPr id="2" name="Title 1">
+            <a:extLst>
+              <a:ext uri="{FF2B5EF4-FFF2-40B4-BE49-F238E27FC236}">
+                <a16:creationId xmlns:a16="http://schemas.microsoft.com/office/drawing/2014/main" id="{9CA0F9AE-1BC4-1DEB-1D5C-8E1A4180B534}"/>
+              </a:ext>
+            </a:extLst>
+          </p:cNvPr>
+          <p:cNvSpPr>
+            <a:spLocks noGrp="1"/>
+          </p:cNvSpPr>
+          <p:nvPr>
+            <p:ph type="title"/>
+          </p:nvPr>
+        </p:nvSpPr>
+        <p:spPr/>
+        <p:txBody>
+          <a:bodyPr/>
+          <a:lstStyle/>
+          <a:p>
+            <a:r>
+              <a:rPr lang="en-US" dirty="0"/>
+              <a:t>Sharing Component Data / Lifting Up State</a:t>
+            </a:r>
+          </a:p>
+        </p:txBody>
+      </p:sp>
+      <p:sp>
+        <p:nvSpPr>
+          <p:cNvPr id="3" name="Content Placeholder 2">
+            <a:extLst>
+              <a:ext uri="{FF2B5EF4-FFF2-40B4-BE49-F238E27FC236}">
+                <a16:creationId xmlns:a16="http://schemas.microsoft.com/office/drawing/2014/main" id="{A401D1BE-9773-AE65-B2E8-7F34F98692DB}"/>
+              </a:ext>
+            </a:extLst>
+          </p:cNvPr>
+          <p:cNvSpPr>
+            <a:spLocks noGrp="1"/>
+          </p:cNvSpPr>
+          <p:nvPr>
+            <p:ph idx="1"/>
+          </p:nvPr>
+        </p:nvSpPr>
+        <p:spPr>
+          <a:xfrm>
+            <a:off x="6534120" y="2479007"/>
+            <a:ext cx="4537291" cy="3673457"/>
+          </a:xfrm>
+        </p:spPr>
+        <p:txBody>
+          <a:bodyPr/>
+          <a:lstStyle/>
+          <a:p>
+            <a:r>
+              <a:rPr lang="en-US" dirty="0"/>
+              <a:t>If state is instead placed at ‘Home’, then if we modify the incident list, then that change will persist even if we reload the component</a:t>
+            </a:r>
+          </a:p>
+        </p:txBody>
+      </p:sp>
+      <p:sp>
+        <p:nvSpPr>
+          <p:cNvPr id="6" name="Rectangle 5">
+            <a:extLst>
+              <a:ext uri="{FF2B5EF4-FFF2-40B4-BE49-F238E27FC236}">
+                <a16:creationId xmlns:a16="http://schemas.microsoft.com/office/drawing/2014/main" id="{96299E5A-2595-F19C-2872-45CDD0BDC220}"/>
+              </a:ext>
+            </a:extLst>
+          </p:cNvPr>
+          <p:cNvSpPr/>
+          <p:nvPr/>
+        </p:nvSpPr>
+        <p:spPr>
+          <a:xfrm>
+            <a:off x="3317814" y="2479007"/>
+            <a:ext cx="1403122" cy="883227"/>
+          </a:xfrm>
+          <a:prstGeom prst="rect">
+            <a:avLst/>
+          </a:prstGeom>
+        </p:spPr>
+        <p:style>
+          <a:lnRef idx="2">
+            <a:schemeClr val="accent1">
+              <a:shade val="15000"/>
+            </a:schemeClr>
+          </a:lnRef>
+          <a:fillRef idx="1">
+            <a:schemeClr val="accent1"/>
+          </a:fillRef>
+          <a:effectRef idx="0">
+            <a:schemeClr val="accent1"/>
+          </a:effectRef>
+          <a:fontRef idx="minor">
+            <a:schemeClr val="lt1"/>
+          </a:fontRef>
+        </p:style>
+        <p:txBody>
+          <a:bodyPr rtlCol="0" anchor="ctr"/>
+          <a:lstStyle/>
+          <a:p>
+            <a:pPr algn="ctr"/>
+            <a:r>
+              <a:rPr lang="en-US" dirty="0"/>
+              <a:t>Home</a:t>
+            </a:r>
+          </a:p>
+        </p:txBody>
+      </p:sp>
+      <p:sp>
+        <p:nvSpPr>
+          <p:cNvPr id="7" name="Rectangle 6">
+            <a:extLst>
+              <a:ext uri="{FF2B5EF4-FFF2-40B4-BE49-F238E27FC236}">
+                <a16:creationId xmlns:a16="http://schemas.microsoft.com/office/drawing/2014/main" id="{25D56EBA-408B-F237-F878-49327D2A58A2}"/>
+              </a:ext>
+            </a:extLst>
+          </p:cNvPr>
+          <p:cNvSpPr/>
+          <p:nvPr/>
+        </p:nvSpPr>
+        <p:spPr>
+          <a:xfrm>
+            <a:off x="4429438" y="3663443"/>
+            <a:ext cx="1403122" cy="883227"/>
+          </a:xfrm>
+          <a:prstGeom prst="rect">
+            <a:avLst/>
+          </a:prstGeom>
+        </p:spPr>
+        <p:style>
+          <a:lnRef idx="2">
+            <a:schemeClr val="accent1">
+              <a:shade val="15000"/>
+            </a:schemeClr>
+          </a:lnRef>
+          <a:fillRef idx="1">
+            <a:schemeClr val="accent1"/>
+          </a:fillRef>
+          <a:effectRef idx="0">
+            <a:schemeClr val="accent1"/>
+          </a:effectRef>
+          <a:fontRef idx="minor">
+            <a:schemeClr val="lt1"/>
+          </a:fontRef>
+        </p:style>
+        <p:txBody>
+          <a:bodyPr rtlCol="0" anchor="ctr"/>
+          <a:lstStyle/>
+          <a:p>
+            <a:pPr algn="ctr"/>
+            <a:r>
+              <a:rPr lang="en-US" dirty="0" err="1"/>
+              <a:t>IncidentList</a:t>
+            </a:r>
+            <a:endParaRPr lang="en-US" dirty="0"/>
+          </a:p>
+        </p:txBody>
+      </p:sp>
+      <p:sp>
+        <p:nvSpPr>
+          <p:cNvPr id="8" name="Rectangle 7">
+            <a:extLst>
+              <a:ext uri="{FF2B5EF4-FFF2-40B4-BE49-F238E27FC236}">
+                <a16:creationId xmlns:a16="http://schemas.microsoft.com/office/drawing/2014/main" id="{FB5C7DE7-825D-B9F3-F981-8F1EEE651804}"/>
+              </a:ext>
+            </a:extLst>
+          </p:cNvPr>
+          <p:cNvSpPr/>
+          <p:nvPr/>
+        </p:nvSpPr>
+        <p:spPr>
+          <a:xfrm>
+            <a:off x="2286873" y="5142045"/>
+            <a:ext cx="1403122" cy="883227"/>
+          </a:xfrm>
+          <a:prstGeom prst="rect">
+            <a:avLst/>
+          </a:prstGeom>
+        </p:spPr>
+        <p:style>
+          <a:lnRef idx="2">
+            <a:schemeClr val="accent1">
+              <a:shade val="15000"/>
+            </a:schemeClr>
+          </a:lnRef>
+          <a:fillRef idx="1">
+            <a:schemeClr val="accent1"/>
+          </a:fillRef>
+          <a:effectRef idx="0">
+            <a:schemeClr val="accent1"/>
+          </a:effectRef>
+          <a:fontRef idx="minor">
+            <a:schemeClr val="lt1"/>
+          </a:fontRef>
+        </p:style>
+        <p:txBody>
+          <a:bodyPr rtlCol="0" anchor="ctr"/>
+          <a:lstStyle/>
+          <a:p>
+            <a:pPr algn="ctr"/>
+            <a:r>
+              <a:rPr lang="en-US" dirty="0"/>
+              <a:t>Incident</a:t>
+            </a:r>
+          </a:p>
+        </p:txBody>
+      </p:sp>
+      <p:sp>
+        <p:nvSpPr>
+          <p:cNvPr id="9" name="Rectangle 8">
+            <a:extLst>
+              <a:ext uri="{FF2B5EF4-FFF2-40B4-BE49-F238E27FC236}">
+                <a16:creationId xmlns:a16="http://schemas.microsoft.com/office/drawing/2014/main" id="{C7E0526C-5A7D-29F2-8759-C9030965C369}"/>
+              </a:ext>
+            </a:extLst>
+          </p:cNvPr>
+          <p:cNvSpPr/>
+          <p:nvPr/>
+        </p:nvSpPr>
+        <p:spPr>
+          <a:xfrm>
+            <a:off x="2286873" y="3663444"/>
+            <a:ext cx="1403122" cy="883227"/>
+          </a:xfrm>
+          <a:prstGeom prst="rect">
+            <a:avLst/>
+          </a:prstGeom>
+        </p:spPr>
+        <p:style>
+          <a:lnRef idx="2">
+            <a:schemeClr val="accent1">
+              <a:shade val="15000"/>
+            </a:schemeClr>
+          </a:lnRef>
+          <a:fillRef idx="1">
+            <a:schemeClr val="accent1"/>
+          </a:fillRef>
+          <a:effectRef idx="0">
+            <a:schemeClr val="accent1"/>
+          </a:effectRef>
+          <a:fontRef idx="minor">
+            <a:schemeClr val="lt1"/>
+          </a:fontRef>
+        </p:style>
+        <p:txBody>
+          <a:bodyPr rtlCol="0" anchor="ctr"/>
+          <a:lstStyle/>
+          <a:p>
+            <a:pPr algn="ctr"/>
+            <a:r>
+              <a:rPr lang="en-US" dirty="0"/>
+              <a:t>Home</a:t>
+            </a:r>
+          </a:p>
+        </p:txBody>
+      </p:sp>
+      <p:cxnSp>
+        <p:nvCxnSpPr>
+          <p:cNvPr id="15" name="Connector: Elbow 14">
+            <a:extLst>
+              <a:ext uri="{FF2B5EF4-FFF2-40B4-BE49-F238E27FC236}">
+                <a16:creationId xmlns:a16="http://schemas.microsoft.com/office/drawing/2014/main" id="{77EAD238-9878-270B-E359-4CA536DE9AAE}"/>
+              </a:ext>
+            </a:extLst>
+          </p:cNvPr>
+          <p:cNvCxnSpPr>
+            <a:cxnSpLocks/>
+            <a:stCxn id="6" idx="1"/>
+            <a:endCxn id="9" idx="0"/>
+          </p:cNvCxnSpPr>
+          <p:nvPr/>
+        </p:nvCxnSpPr>
+        <p:spPr>
+          <a:xfrm rot="10800000" flipV="1">
+            <a:off x="2988434" y="2920620"/>
+            <a:ext cx="329380" cy="742823"/>
+          </a:xfrm>
+          <a:prstGeom prst="bentConnector2">
+            <a:avLst/>
+          </a:prstGeom>
+          <a:ln>
+            <a:tailEnd type="triangle"/>
+          </a:ln>
+        </p:spPr>
+        <p:style>
+          <a:lnRef idx="1">
+            <a:schemeClr val="accent1"/>
+          </a:lnRef>
+          <a:fillRef idx="0">
+            <a:schemeClr val="accent1"/>
+          </a:fillRef>
+          <a:effectRef idx="0">
+            <a:schemeClr val="accent1"/>
+          </a:effectRef>
+          <a:fontRef idx="minor">
+            <a:schemeClr val="tx1"/>
+          </a:fontRef>
+        </p:style>
+      </p:cxnSp>
+      <p:cxnSp>
+        <p:nvCxnSpPr>
+          <p:cNvPr id="19" name="Connector: Elbow 18">
+            <a:extLst>
+              <a:ext uri="{FF2B5EF4-FFF2-40B4-BE49-F238E27FC236}">
+                <a16:creationId xmlns:a16="http://schemas.microsoft.com/office/drawing/2014/main" id="{6A5AB5CB-B895-4C4E-ABB1-32CC50521AC4}"/>
+              </a:ext>
+            </a:extLst>
+          </p:cNvPr>
+          <p:cNvCxnSpPr>
+            <a:cxnSpLocks/>
+            <a:stCxn id="6" idx="3"/>
+            <a:endCxn id="7" idx="0"/>
+          </p:cNvCxnSpPr>
+          <p:nvPr/>
+        </p:nvCxnSpPr>
+        <p:spPr>
+          <a:xfrm>
+            <a:off x="4720936" y="2920621"/>
+            <a:ext cx="410063" cy="742822"/>
+          </a:xfrm>
+          <a:prstGeom prst="bentConnector2">
+            <a:avLst/>
+          </a:prstGeom>
+          <a:ln>
+            <a:tailEnd type="triangle"/>
+          </a:ln>
+        </p:spPr>
+        <p:style>
+          <a:lnRef idx="1">
+            <a:schemeClr val="accent1"/>
+          </a:lnRef>
+          <a:fillRef idx="0">
+            <a:schemeClr val="accent1"/>
+          </a:fillRef>
+          <a:effectRef idx="0">
+            <a:schemeClr val="accent1"/>
+          </a:effectRef>
+          <a:fontRef idx="minor">
+            <a:schemeClr val="tx1"/>
+          </a:fontRef>
+        </p:style>
+      </p:cxnSp>
+      <p:cxnSp>
+        <p:nvCxnSpPr>
+          <p:cNvPr id="26" name="Straight Arrow Connector 25">
+            <a:extLst>
+              <a:ext uri="{FF2B5EF4-FFF2-40B4-BE49-F238E27FC236}">
+                <a16:creationId xmlns:a16="http://schemas.microsoft.com/office/drawing/2014/main" id="{AF615FB2-2CF4-96E1-19CA-86D09CD447E1}"/>
+              </a:ext>
+            </a:extLst>
+          </p:cNvPr>
+          <p:cNvCxnSpPr>
+            <a:cxnSpLocks/>
+            <a:stCxn id="9" idx="2"/>
+            <a:endCxn id="8" idx="0"/>
+          </p:cNvCxnSpPr>
+          <p:nvPr/>
+        </p:nvCxnSpPr>
+        <p:spPr>
+          <a:xfrm>
+            <a:off x="2988434" y="4546671"/>
+            <a:ext cx="0" cy="595374"/>
+          </a:xfrm>
+          <a:prstGeom prst="straightConnector1">
+            <a:avLst/>
+          </a:prstGeom>
+          <a:ln>
+            <a:tailEnd type="triangle"/>
+          </a:ln>
+        </p:spPr>
+        <p:style>
+          <a:lnRef idx="1">
+            <a:schemeClr val="accent1"/>
+          </a:lnRef>
+          <a:fillRef idx="0">
+            <a:schemeClr val="accent1"/>
+          </a:fillRef>
+          <a:effectRef idx="0">
+            <a:schemeClr val="accent1"/>
+          </a:effectRef>
+          <a:fontRef idx="minor">
+            <a:schemeClr val="tx1"/>
+          </a:fontRef>
+        </p:style>
+      </p:cxnSp>
+    </p:spTree>
+    <p:extLst>
+      <p:ext uri="{BB962C8B-B14F-4D97-AF65-F5344CB8AC3E}">
+        <p14:creationId xmlns:p14="http://schemas.microsoft.com/office/powerpoint/2010/main" val="2577593458"/>
+      </p:ext>
+    </p:extLst>
+  </p:cSld>
+  <p:clrMapOvr>
+    <a:masterClrMapping/>
+  </p:clrMapOvr>
+</p:sld>
+</file>
+
+<file path=ppt/slides/slide29.xml><?xml version="1.0" encoding="utf-8"?>
+<p:sld xmlns:a="http://schemas.openxmlformats.org/drawingml/2006/main" xmlns:r="http://schemas.openxmlformats.org/officeDocument/2006/relationships" xmlns:p="http://schemas.openxmlformats.org/presentationml/2006/main">
+  <p:cSld>
+    <p:spTree>
+      <p:nvGrpSpPr>
+        <p:cNvPr id="1" name="">
+          <a:extLst>
+            <a:ext uri="{FF2B5EF4-FFF2-40B4-BE49-F238E27FC236}">
+              <a16:creationId xmlns:a16="http://schemas.microsoft.com/office/drawing/2014/main" id="{975F5A0B-0EEA-6B4B-06CB-49A8EB87FAB2}"/>
+            </a:ext>
+          </a:extLst>
+        </p:cNvPr>
+        <p:cNvGrpSpPr/>
+        <p:nvPr/>
+      </p:nvGrpSpPr>
+      <p:grpSpPr>
+        <a:xfrm>
+          <a:off x="0" y="0"/>
+          <a:ext cx="0" cy="0"/>
+          <a:chOff x="0" y="0"/>
+          <a:chExt cx="0" cy="0"/>
+        </a:xfrm>
+      </p:grpSpPr>
+      <p:sp>
+        <p:nvSpPr>
+          <p:cNvPr id="2" name="Title 1">
+            <a:extLst>
+              <a:ext uri="{FF2B5EF4-FFF2-40B4-BE49-F238E27FC236}">
+                <a16:creationId xmlns:a16="http://schemas.microsoft.com/office/drawing/2014/main" id="{A3DC51E1-36AF-1C25-B81A-794FDF3B39DE}"/>
+              </a:ext>
+            </a:extLst>
+          </p:cNvPr>
+          <p:cNvSpPr>
+            <a:spLocks noGrp="1"/>
+          </p:cNvSpPr>
+          <p:nvPr>
+            <p:ph type="title"/>
+          </p:nvPr>
+        </p:nvSpPr>
+        <p:spPr/>
+        <p:txBody>
+          <a:bodyPr/>
+          <a:lstStyle/>
+          <a:p>
+            <a:r>
+              <a:rPr lang="en-US" dirty="0"/>
+              <a:t>Challenge – Lift Up Incident List State</a:t>
+            </a:r>
+          </a:p>
+        </p:txBody>
+      </p:sp>
+      <p:sp>
+        <p:nvSpPr>
+          <p:cNvPr id="3" name="Content Placeholder 2">
+            <a:extLst>
+              <a:ext uri="{FF2B5EF4-FFF2-40B4-BE49-F238E27FC236}">
+                <a16:creationId xmlns:a16="http://schemas.microsoft.com/office/drawing/2014/main" id="{25510645-0665-83EF-BD6E-39F27F418F6A}"/>
+              </a:ext>
+            </a:extLst>
+          </p:cNvPr>
+          <p:cNvSpPr>
+            <a:spLocks noGrp="1"/>
+          </p:cNvSpPr>
+          <p:nvPr>
+            <p:ph idx="1"/>
+          </p:nvPr>
+        </p:nvSpPr>
+        <p:spPr>
+          <a:xfrm>
+            <a:off x="581192" y="2475925"/>
+            <a:ext cx="5317584" cy="1681246"/>
+          </a:xfrm>
+        </p:spPr>
+        <p:txBody>
+          <a:bodyPr/>
+          <a:lstStyle/>
+          <a:p>
+            <a:r>
+              <a:rPr lang="en-US" dirty="0"/>
+              <a:t>Lift up the state of the Incident list so that changes are persisted</a:t>
+            </a:r>
+          </a:p>
+        </p:txBody>
+      </p:sp>
+      <p:sp>
+        <p:nvSpPr>
+          <p:cNvPr id="6" name="TextBox 5">
+            <a:extLst>
+              <a:ext uri="{FF2B5EF4-FFF2-40B4-BE49-F238E27FC236}">
+                <a16:creationId xmlns:a16="http://schemas.microsoft.com/office/drawing/2014/main" id="{5EA649EF-E600-4EED-A8C1-7DDCA92B190F}"/>
+              </a:ext>
+            </a:extLst>
+          </p:cNvPr>
+          <p:cNvSpPr txBox="1"/>
+          <p:nvPr/>
+        </p:nvSpPr>
+        <p:spPr>
+          <a:xfrm>
+            <a:off x="1228165" y="2402747"/>
+            <a:ext cx="756938" cy="369332"/>
+          </a:xfrm>
+          <a:prstGeom prst="rect">
+            <a:avLst/>
+          </a:prstGeom>
+          <a:noFill/>
+        </p:spPr>
+        <p:txBody>
+          <a:bodyPr wrap="none" rtlCol="0">
+            <a:spAutoFit/>
+          </a:bodyPr>
+          <a:lstStyle/>
+          <a:p>
+            <a:r>
+              <a:rPr lang="en-US" b="1" dirty="0"/>
+              <a:t>Goal:</a:t>
+            </a:r>
+          </a:p>
+        </p:txBody>
+      </p:sp>
+      <p:sp>
+        <p:nvSpPr>
+          <p:cNvPr id="7" name="TextBox 6">
+            <a:extLst>
+              <a:ext uri="{FF2B5EF4-FFF2-40B4-BE49-F238E27FC236}">
+                <a16:creationId xmlns:a16="http://schemas.microsoft.com/office/drawing/2014/main" id="{918A1F33-BE64-6ABA-C3BB-7D62A15D95EE}"/>
+              </a:ext>
+            </a:extLst>
+          </p:cNvPr>
+          <p:cNvSpPr txBox="1"/>
+          <p:nvPr/>
+        </p:nvSpPr>
+        <p:spPr>
+          <a:xfrm>
+            <a:off x="6676991" y="2402747"/>
+            <a:ext cx="4933817" cy="369332"/>
+          </a:xfrm>
+          <a:prstGeom prst="rect">
+            <a:avLst/>
+          </a:prstGeom>
+          <a:noFill/>
+        </p:spPr>
+        <p:txBody>
+          <a:bodyPr wrap="square" rtlCol="0">
+            <a:spAutoFit/>
+          </a:bodyPr>
+          <a:lstStyle/>
+          <a:p>
+            <a:r>
+              <a:rPr lang="en-US" b="1" dirty="0"/>
+              <a:t>Scenario:  			</a:t>
+            </a:r>
+          </a:p>
+        </p:txBody>
+      </p:sp>
+      <p:sp>
+        <p:nvSpPr>
+          <p:cNvPr id="8" name="Content Placeholder 2">
+            <a:extLst>
+              <a:ext uri="{FF2B5EF4-FFF2-40B4-BE49-F238E27FC236}">
+                <a16:creationId xmlns:a16="http://schemas.microsoft.com/office/drawing/2014/main" id="{7B967E04-EE72-1F98-CF06-82015E95405E}"/>
+              </a:ext>
+            </a:extLst>
+          </p:cNvPr>
+          <p:cNvSpPr txBox="1">
+            <a:spLocks/>
+          </p:cNvSpPr>
+          <p:nvPr/>
+        </p:nvSpPr>
+        <p:spPr>
+          <a:xfrm>
+            <a:off x="6000244" y="2900119"/>
+            <a:ext cx="5740756" cy="2442846"/>
+          </a:xfrm>
+          <a:prstGeom prst="rect">
+            <a:avLst/>
+          </a:prstGeom>
+        </p:spPr>
+        <p:txBody>
+          <a:bodyPr vert="horz" lIns="91440" tIns="45720" rIns="91440" bIns="45720" rtlCol="0" anchor="ctr">
+            <a:normAutofit/>
+          </a:bodyPr>
+          <a:lstStyle>
+            <a:lvl1pPr marL="306000" indent="-306000" algn="l" defTabSz="457200" rtl="0" eaLnBrk="1" latinLnBrk="0" hangingPunct="1">
+              <a:spcBef>
+                <a:spcPct val="20000"/>
+              </a:spcBef>
+              <a:spcAft>
+                <a:spcPts val="600"/>
+              </a:spcAft>
+              <a:buClr>
+                <a:schemeClr val="accent2"/>
+              </a:buClr>
+              <a:buSzPct val="92000"/>
+              <a:buFont typeface="Wingdings 2" panose="05020102010507070707" pitchFamily="18" charset="2"/>
+              <a:buChar char=""/>
+              <a:defRPr sz="1800" kern="1200">
+                <a:solidFill>
+                  <a:schemeClr val="tx2"/>
+                </a:solidFill>
+                <a:latin typeface="+mn-lt"/>
+                <a:ea typeface="+mn-ea"/>
+                <a:cs typeface="+mn-cs"/>
+              </a:defRPr>
+            </a:lvl1pPr>
+            <a:lvl2pPr marL="630000" indent="-306000" algn="l" defTabSz="457200" rtl="0" eaLnBrk="1" latinLnBrk="0" hangingPunct="1">
+              <a:spcBef>
+                <a:spcPct val="20000"/>
+              </a:spcBef>
+              <a:spcAft>
+                <a:spcPts val="600"/>
+              </a:spcAft>
+              <a:buClr>
+                <a:schemeClr val="accent2"/>
+              </a:buClr>
+              <a:buSzPct val="92000"/>
+              <a:buFont typeface="Wingdings 2" panose="05020102010507070707" pitchFamily="18" charset="2"/>
+              <a:buChar char=""/>
+              <a:defRPr sz="1600" kern="1200">
+                <a:solidFill>
+                  <a:schemeClr val="tx2"/>
+                </a:solidFill>
+                <a:latin typeface="+mn-lt"/>
+                <a:ea typeface="+mn-ea"/>
+                <a:cs typeface="+mn-cs"/>
+              </a:defRPr>
+            </a:lvl2pPr>
+            <a:lvl3pPr marL="900000" indent="-270000" algn="l" defTabSz="457200" rtl="0" eaLnBrk="1" latinLnBrk="0" hangingPunct="1">
+              <a:spcBef>
+                <a:spcPct val="20000"/>
+              </a:spcBef>
+              <a:spcAft>
+                <a:spcPts val="600"/>
+              </a:spcAft>
+              <a:buClr>
+                <a:schemeClr val="accent2"/>
+              </a:buClr>
+              <a:buSzPct val="92000"/>
+              <a:buFont typeface="Wingdings 2" panose="05020102010507070707" pitchFamily="18" charset="2"/>
+              <a:buChar char=""/>
+              <a:defRPr sz="1400" kern="1200">
+                <a:solidFill>
+                  <a:schemeClr val="tx2"/>
+                </a:solidFill>
+                <a:latin typeface="+mn-lt"/>
+                <a:ea typeface="+mn-ea"/>
+                <a:cs typeface="+mn-cs"/>
+              </a:defRPr>
+            </a:lvl3pPr>
+            <a:lvl4pPr marL="1242000" indent="-234000" algn="l" defTabSz="457200" rtl="0" eaLnBrk="1" latinLnBrk="0" hangingPunct="1">
+              <a:spcBef>
+                <a:spcPct val="20000"/>
+              </a:spcBef>
+              <a:spcAft>
+                <a:spcPts val="600"/>
+              </a:spcAft>
+              <a:buClr>
+                <a:schemeClr val="accent2"/>
+              </a:buClr>
+              <a:buSzPct val="92000"/>
+              <a:buFont typeface="Wingdings 2" panose="05020102010507070707" pitchFamily="18" charset="2"/>
+              <a:buChar char=""/>
+              <a:defRPr sz="1200" kern="1200">
+                <a:solidFill>
+                  <a:schemeClr val="tx2"/>
+                </a:solidFill>
+                <a:latin typeface="+mn-lt"/>
+                <a:ea typeface="+mn-ea"/>
+                <a:cs typeface="+mn-cs"/>
+              </a:defRPr>
+            </a:lvl4pPr>
+            <a:lvl5pPr marL="1602000" indent="-234000" algn="l" defTabSz="457200" rtl="0" eaLnBrk="1" latinLnBrk="0" hangingPunct="1">
+              <a:spcBef>
+                <a:spcPct val="20000"/>
+              </a:spcBef>
+              <a:spcAft>
+                <a:spcPts val="600"/>
+              </a:spcAft>
+              <a:buClr>
+                <a:schemeClr val="accent2"/>
+              </a:buClr>
+              <a:buSzPct val="92000"/>
+              <a:buFont typeface="Wingdings 2" panose="05020102010507070707" pitchFamily="18" charset="2"/>
+              <a:buChar char=""/>
+              <a:defRPr sz="1200" kern="1200">
+                <a:solidFill>
+                  <a:schemeClr val="tx2"/>
+                </a:solidFill>
+                <a:latin typeface="+mn-lt"/>
+                <a:ea typeface="+mn-ea"/>
+                <a:cs typeface="+mn-cs"/>
+              </a:defRPr>
+            </a:lvl5pPr>
+            <a:lvl6pPr marL="1900000" indent="-228600" algn="l" defTabSz="457200" rtl="0" eaLnBrk="1" latinLnBrk="0" hangingPunct="1">
+              <a:spcBef>
+                <a:spcPct val="20000"/>
+              </a:spcBef>
+              <a:spcAft>
+                <a:spcPts val="600"/>
+              </a:spcAft>
+              <a:buClr>
+                <a:schemeClr val="accent2"/>
+              </a:buClr>
+              <a:buSzPct val="92000"/>
+              <a:buFont typeface="Wingdings 2" panose="05020102010507070707" pitchFamily="18" charset="2"/>
+              <a:buChar char=""/>
+              <a:defRPr sz="1200" kern="1200">
+                <a:solidFill>
+                  <a:schemeClr val="tx2"/>
+                </a:solidFill>
+                <a:latin typeface="+mn-lt"/>
+                <a:ea typeface="+mn-ea"/>
+                <a:cs typeface="+mn-cs"/>
+              </a:defRPr>
+            </a:lvl6pPr>
+            <a:lvl7pPr marL="2200000" indent="-228600" algn="l" defTabSz="457200" rtl="0" eaLnBrk="1" latinLnBrk="0" hangingPunct="1">
+              <a:spcBef>
+                <a:spcPct val="20000"/>
+              </a:spcBef>
+              <a:spcAft>
+                <a:spcPts val="600"/>
+              </a:spcAft>
+              <a:buClr>
+                <a:schemeClr val="accent2"/>
+              </a:buClr>
+              <a:buSzPct val="92000"/>
+              <a:buFont typeface="Wingdings 2" panose="05020102010507070707" pitchFamily="18" charset="2"/>
+              <a:buChar char=""/>
+              <a:defRPr sz="1200" kern="1200">
+                <a:solidFill>
+                  <a:schemeClr val="tx2"/>
+                </a:solidFill>
+                <a:latin typeface="+mn-lt"/>
+                <a:ea typeface="+mn-ea"/>
+                <a:cs typeface="+mn-cs"/>
+              </a:defRPr>
+            </a:lvl7pPr>
+            <a:lvl8pPr marL="2500000" indent="-228600" algn="l" defTabSz="457200" rtl="0" eaLnBrk="1" latinLnBrk="0" hangingPunct="1">
+              <a:spcBef>
+                <a:spcPct val="20000"/>
+              </a:spcBef>
+              <a:spcAft>
+                <a:spcPts val="600"/>
+              </a:spcAft>
+              <a:buClr>
+                <a:schemeClr val="accent2"/>
+              </a:buClr>
+              <a:buSzPct val="92000"/>
+              <a:buFont typeface="Wingdings 2" panose="05020102010507070707" pitchFamily="18" charset="2"/>
+              <a:buChar char=""/>
+              <a:defRPr sz="1200" kern="1200">
+                <a:solidFill>
+                  <a:schemeClr val="tx2"/>
+                </a:solidFill>
+                <a:latin typeface="+mn-lt"/>
+                <a:ea typeface="+mn-ea"/>
+                <a:cs typeface="+mn-cs"/>
+              </a:defRPr>
+            </a:lvl8pPr>
+            <a:lvl9pPr marL="2800000" indent="-228600" algn="l" defTabSz="457200" rtl="0" eaLnBrk="1" latinLnBrk="0" hangingPunct="1">
+              <a:spcBef>
+                <a:spcPct val="20000"/>
+              </a:spcBef>
+              <a:spcAft>
+                <a:spcPts val="600"/>
+              </a:spcAft>
+              <a:buClr>
+                <a:schemeClr val="accent2"/>
+              </a:buClr>
+              <a:buSzPct val="92000"/>
+              <a:buFont typeface="Wingdings 2" panose="05020102010507070707" pitchFamily="18" charset="2"/>
+              <a:buChar char=""/>
+              <a:defRPr sz="1200" kern="1200">
+                <a:solidFill>
+                  <a:schemeClr val="tx2"/>
+                </a:solidFill>
+                <a:latin typeface="+mn-lt"/>
+                <a:ea typeface="+mn-ea"/>
+                <a:cs typeface="+mn-cs"/>
+              </a:defRPr>
+            </a:lvl9pPr>
+          </a:lstStyle>
+          <a:p>
+            <a:r>
+              <a:rPr lang="en-US" dirty="0"/>
+              <a:t>Modify your ‘Incident’ component so that it has a delete button</a:t>
+            </a:r>
+          </a:p>
+          <a:p>
+            <a:r>
+              <a:rPr lang="en-US" dirty="0"/>
+              <a:t>You will need to make edits to the Home and Incident list components:</a:t>
+            </a:r>
+          </a:p>
+          <a:p>
+            <a:pPr lvl="1"/>
+            <a:r>
+              <a:rPr lang="en-US" dirty="0"/>
+              <a:t>Move state and the delete function to ‘Home’</a:t>
+            </a:r>
+          </a:p>
+          <a:p>
+            <a:pPr lvl="1"/>
+            <a:r>
+              <a:rPr lang="en-US" dirty="0"/>
+              <a:t>Chain a callback function from Incident list component to the Home component – this wires up the delete function</a:t>
+            </a:r>
+          </a:p>
+        </p:txBody>
+      </p:sp>
+      <p:pic>
+        <p:nvPicPr>
+          <p:cNvPr id="5" name="Picture 4">
+            <a:extLst>
+              <a:ext uri="{FF2B5EF4-FFF2-40B4-BE49-F238E27FC236}">
+                <a16:creationId xmlns:a16="http://schemas.microsoft.com/office/drawing/2014/main" id="{FE6AE13A-2BFF-80B8-2166-4D4FD2A5D874}"/>
+              </a:ext>
+            </a:extLst>
+          </p:cNvPr>
+          <p:cNvPicPr>
+            <a:picLocks noChangeAspect="1"/>
+          </p:cNvPicPr>
+          <p:nvPr/>
+        </p:nvPicPr>
+        <p:blipFill>
+          <a:blip r:embed="rId2"/>
+          <a:stretch>
+            <a:fillRect/>
+          </a:stretch>
+        </p:blipFill>
+        <p:spPr>
+          <a:xfrm>
+            <a:off x="1985103" y="4054749"/>
+            <a:ext cx="2463162" cy="2588408"/>
+          </a:xfrm>
+          <a:prstGeom prst="rect">
+            <a:avLst/>
+          </a:prstGeom>
+        </p:spPr>
+      </p:pic>
+    </p:spTree>
+    <p:extLst>
+      <p:ext uri="{BB962C8B-B14F-4D97-AF65-F5344CB8AC3E}">
+        <p14:creationId xmlns:p14="http://schemas.microsoft.com/office/powerpoint/2010/main" val="3769927107"/>
+      </p:ext>
+    </p:extLst>
+  </p:cSld>
+  <p:clrMapOvr>
+    <a:masterClrMapping/>
+  </p:clrMapOvr>
+</p:sld>
+</file>
+
+<file path=ppt/slides/slide3.xml><?xml version="1.0" encoding="utf-8"?>
+<p:sld xmlns:a="http://schemas.openxmlformats.org/drawingml/2006/main" xmlns:r="http://schemas.openxmlformats.org/officeDocument/2006/relationships" xmlns:p="http://schemas.openxmlformats.org/presentationml/2006/main">
+  <p:cSld>
+    <p:spTree>
+      <p:nvGrpSpPr>
+        <p:cNvPr id="1" name=""/>
+        <p:cNvGrpSpPr/>
+        <p:nvPr/>
+      </p:nvGrpSpPr>
+      <p:grpSpPr>
+        <a:xfrm>
+          <a:off x="0" y="0"/>
+          <a:ext cx="0" cy="0"/>
+          <a:chOff x="0" y="0"/>
+          <a:chExt cx="0" cy="0"/>
+        </a:xfrm>
+      </p:grpSpPr>
+      <p:sp>
+        <p:nvSpPr>
+          <p:cNvPr id="2" name="Title 1">
+            <a:extLst>
+              <a:ext uri="{FF2B5EF4-FFF2-40B4-BE49-F238E27FC236}">
+                <a16:creationId xmlns:a16="http://schemas.microsoft.com/office/drawing/2014/main" id="{DE0CD4A6-DD2E-5DF2-1E7A-3CC10388378A}"/>
+              </a:ext>
+            </a:extLst>
+          </p:cNvPr>
+          <p:cNvSpPr>
+            <a:spLocks noGrp="1"/>
+          </p:cNvSpPr>
+          <p:nvPr>
+            <p:ph type="title"/>
+          </p:nvPr>
+        </p:nvSpPr>
+        <p:spPr/>
+        <p:txBody>
+          <a:bodyPr/>
+          <a:lstStyle/>
+          <a:p>
+            <a:r>
+              <a:rPr lang="en-US" dirty="0"/>
+              <a:t>How Does React Work?</a:t>
+            </a:r>
+          </a:p>
+        </p:txBody>
+      </p:sp>
+      <p:sp>
+        <p:nvSpPr>
+          <p:cNvPr id="3" name="Content Placeholder 2">
+            <a:extLst>
+              <a:ext uri="{FF2B5EF4-FFF2-40B4-BE49-F238E27FC236}">
+                <a16:creationId xmlns:a16="http://schemas.microsoft.com/office/drawing/2014/main" id="{3657794F-23F3-26FD-CC67-AAE322DC1768}"/>
+              </a:ext>
+            </a:extLst>
+          </p:cNvPr>
+          <p:cNvSpPr>
+            <a:spLocks noGrp="1"/>
+          </p:cNvSpPr>
+          <p:nvPr>
+            <p:ph idx="1"/>
+          </p:nvPr>
+        </p:nvSpPr>
+        <p:spPr>
+          <a:xfrm>
+            <a:off x="581193" y="2180496"/>
+            <a:ext cx="4932102" cy="3678303"/>
+          </a:xfrm>
+        </p:spPr>
+        <p:txBody>
+          <a:bodyPr/>
+          <a:lstStyle/>
+          <a:p>
+            <a:r>
+              <a:rPr lang="en-US" dirty="0"/>
+              <a:t>React creates a virtual DOM in memory</a:t>
+            </a:r>
+          </a:p>
+          <a:p>
+            <a:pPr lvl="1"/>
+            <a:r>
+              <a:rPr lang="en-US" dirty="0"/>
+              <a:t>Instead of manipulating the browser’s DOM directly, React creates a virtual DOM in memory, where it does all the necessary manipulating, before making changes in the browser DOM</a:t>
+            </a:r>
+          </a:p>
+        </p:txBody>
+      </p:sp>
+      <p:pic>
+        <p:nvPicPr>
+          <p:cNvPr id="7" name="Picture 6">
+            <a:extLst>
+              <a:ext uri="{FF2B5EF4-FFF2-40B4-BE49-F238E27FC236}">
+                <a16:creationId xmlns:a16="http://schemas.microsoft.com/office/drawing/2014/main" id="{790DFA8A-953B-F0D5-304B-0BBAE13B8EE4}"/>
+              </a:ext>
+            </a:extLst>
+          </p:cNvPr>
+          <p:cNvPicPr>
+            <a:picLocks noChangeAspect="1"/>
+          </p:cNvPicPr>
+          <p:nvPr/>
+        </p:nvPicPr>
+        <p:blipFill>
+          <a:blip r:embed="rId2"/>
+          <a:stretch>
+            <a:fillRect/>
+          </a:stretch>
+        </p:blipFill>
+        <p:spPr>
+          <a:xfrm>
+            <a:off x="6096000" y="2914514"/>
+            <a:ext cx="4172532" cy="1943371"/>
+          </a:xfrm>
+          <a:prstGeom prst="rect">
+            <a:avLst/>
+          </a:prstGeom>
+        </p:spPr>
+      </p:pic>
+    </p:spTree>
+    <p:extLst>
+      <p:ext uri="{BB962C8B-B14F-4D97-AF65-F5344CB8AC3E}">
+        <p14:creationId xmlns:p14="http://schemas.microsoft.com/office/powerpoint/2010/main" val="901512706"/>
+      </p:ext>
+    </p:extLst>
+  </p:cSld>
+  <p:clrMapOvr>
+    <a:masterClrMapping/>
+  </p:clrMapOvr>
+</p:sld>
+</file>
+
+<file path=ppt/slides/slide4.xml><?xml version="1.0" encoding="utf-8"?>
+<p:sld xmlns:a="http://schemas.openxmlformats.org/drawingml/2006/main" xmlns:r="http://schemas.openxmlformats.org/officeDocument/2006/relationships" xmlns:p="http://schemas.openxmlformats.org/presentationml/2006/main">
+  <p:cSld>
+    <p:spTree>
+      <p:nvGrpSpPr>
+        <p:cNvPr id="1" name=""/>
+        <p:cNvGrpSpPr/>
+        <p:nvPr/>
+      </p:nvGrpSpPr>
+      <p:grpSpPr>
+        <a:xfrm>
+          <a:off x="0" y="0"/>
+          <a:ext cx="0" cy="0"/>
+          <a:chOff x="0" y="0"/>
+          <a:chExt cx="0" cy="0"/>
+        </a:xfrm>
+      </p:grpSpPr>
+      <p:sp>
+        <p:nvSpPr>
+          <p:cNvPr id="2" name="Title 1">
+            <a:extLst>
+              <a:ext uri="{FF2B5EF4-FFF2-40B4-BE49-F238E27FC236}">
+                <a16:creationId xmlns:a16="http://schemas.microsoft.com/office/drawing/2014/main" id="{A8990524-623B-0575-4BFF-61A1D601EAA8}"/>
+              </a:ext>
+            </a:extLst>
+          </p:cNvPr>
+          <p:cNvSpPr>
+            <a:spLocks noGrp="1"/>
+          </p:cNvSpPr>
+          <p:nvPr>
+            <p:ph type="title"/>
+          </p:nvPr>
+        </p:nvSpPr>
+        <p:spPr/>
+        <p:txBody>
+          <a:bodyPr/>
+          <a:lstStyle/>
+          <a:p>
+            <a:r>
+              <a:rPr lang="en-US" dirty="0"/>
+              <a:t>What we Need</a:t>
+            </a:r>
+          </a:p>
+        </p:txBody>
+      </p:sp>
+      <p:sp>
+        <p:nvSpPr>
+          <p:cNvPr id="3" name="Content Placeholder 2">
+            <a:extLst>
+              <a:ext uri="{FF2B5EF4-FFF2-40B4-BE49-F238E27FC236}">
+                <a16:creationId xmlns:a16="http://schemas.microsoft.com/office/drawing/2014/main" id="{DC82E14D-AABC-A444-62EC-94DEB522BC59}"/>
+              </a:ext>
+            </a:extLst>
+          </p:cNvPr>
+          <p:cNvSpPr>
+            <a:spLocks noGrp="1"/>
+          </p:cNvSpPr>
+          <p:nvPr>
+            <p:ph idx="1"/>
+          </p:nvPr>
+        </p:nvSpPr>
+        <p:spPr>
+          <a:xfrm>
+            <a:off x="581192" y="2126708"/>
+            <a:ext cx="3371075" cy="3678303"/>
+          </a:xfrm>
+        </p:spPr>
+        <p:txBody>
+          <a:bodyPr/>
+          <a:lstStyle/>
+          <a:p>
+            <a:r>
+              <a:rPr lang="en-US" dirty="0"/>
+              <a:t>NPM, included with Node.js</a:t>
+            </a:r>
+          </a:p>
+          <a:p>
+            <a:r>
+              <a:rPr lang="en-US" dirty="0" err="1"/>
+              <a:t>Vscode</a:t>
+            </a:r>
+            <a:endParaRPr lang="en-US" dirty="0"/>
+          </a:p>
+          <a:p>
+            <a:r>
+              <a:rPr lang="en-US" dirty="0"/>
+              <a:t>Vite</a:t>
+            </a:r>
+          </a:p>
+          <a:p>
+            <a:pPr lvl="1"/>
+            <a:r>
+              <a:rPr lang="en-US" dirty="0"/>
+              <a:t>Project names all lowercase/dashes</a:t>
+            </a:r>
+          </a:p>
+          <a:p>
+            <a:r>
+              <a:rPr lang="en-US" dirty="0"/>
+              <a:t>Recommended: </a:t>
+            </a:r>
+            <a:br>
+              <a:rPr lang="en-US" dirty="0"/>
+            </a:br>
+            <a:r>
+              <a:rPr lang="en-US" dirty="0"/>
+              <a:t>React Developer Tools browser extension</a:t>
+            </a:r>
+          </a:p>
+        </p:txBody>
+      </p:sp>
+      <p:pic>
+        <p:nvPicPr>
+          <p:cNvPr id="5" name="Picture 4">
+            <a:extLst>
+              <a:ext uri="{FF2B5EF4-FFF2-40B4-BE49-F238E27FC236}">
+                <a16:creationId xmlns:a16="http://schemas.microsoft.com/office/drawing/2014/main" id="{A4F7E017-B7EC-959E-7408-C51E6D17F58E}"/>
+              </a:ext>
+            </a:extLst>
+          </p:cNvPr>
+          <p:cNvPicPr>
+            <a:picLocks noChangeAspect="1"/>
+          </p:cNvPicPr>
+          <p:nvPr/>
+        </p:nvPicPr>
+        <p:blipFill>
+          <a:blip r:embed="rId2"/>
+          <a:stretch>
+            <a:fillRect/>
+          </a:stretch>
+        </p:blipFill>
+        <p:spPr>
+          <a:xfrm>
+            <a:off x="6157680" y="2256320"/>
+            <a:ext cx="3581900" cy="504895"/>
+          </a:xfrm>
+          <a:prstGeom prst="rect">
+            <a:avLst/>
+          </a:prstGeom>
+        </p:spPr>
+      </p:pic>
+      <p:pic>
+        <p:nvPicPr>
+          <p:cNvPr id="7" name="Picture 6">
+            <a:extLst>
+              <a:ext uri="{FF2B5EF4-FFF2-40B4-BE49-F238E27FC236}">
+                <a16:creationId xmlns:a16="http://schemas.microsoft.com/office/drawing/2014/main" id="{B9CEC70B-C25C-AB4B-AD0F-FAE10C7E2BCA}"/>
+              </a:ext>
+            </a:extLst>
+          </p:cNvPr>
+          <p:cNvPicPr>
+            <a:picLocks noChangeAspect="1"/>
+          </p:cNvPicPr>
+          <p:nvPr/>
+        </p:nvPicPr>
+        <p:blipFill>
+          <a:blip r:embed="rId3"/>
+          <a:stretch>
+            <a:fillRect/>
+          </a:stretch>
+        </p:blipFill>
+        <p:spPr>
+          <a:xfrm>
+            <a:off x="3952267" y="3116671"/>
+            <a:ext cx="3905795" cy="3429479"/>
+          </a:xfrm>
+          <a:prstGeom prst="rect">
+            <a:avLst/>
+          </a:prstGeom>
+        </p:spPr>
+      </p:pic>
+      <p:pic>
+        <p:nvPicPr>
+          <p:cNvPr id="11" name="Picture 10">
+            <a:extLst>
+              <a:ext uri="{FF2B5EF4-FFF2-40B4-BE49-F238E27FC236}">
+                <a16:creationId xmlns:a16="http://schemas.microsoft.com/office/drawing/2014/main" id="{9AAD11A9-B4A1-B4D6-B247-FD3DF2885CF6}"/>
+              </a:ext>
+            </a:extLst>
+          </p:cNvPr>
+          <p:cNvPicPr>
+            <a:picLocks noChangeAspect="1"/>
+          </p:cNvPicPr>
+          <p:nvPr/>
+        </p:nvPicPr>
+        <p:blipFill>
+          <a:blip r:embed="rId4"/>
+          <a:stretch>
+            <a:fillRect/>
+          </a:stretch>
+        </p:blipFill>
+        <p:spPr>
+          <a:xfrm>
+            <a:off x="8038277" y="3116671"/>
+            <a:ext cx="3753374" cy="1943371"/>
+          </a:xfrm>
+          <a:prstGeom prst="rect">
+            <a:avLst/>
+          </a:prstGeom>
+        </p:spPr>
+      </p:pic>
+    </p:spTree>
+    <p:extLst>
+      <p:ext uri="{BB962C8B-B14F-4D97-AF65-F5344CB8AC3E}">
+        <p14:creationId xmlns:p14="http://schemas.microsoft.com/office/powerpoint/2010/main" val="864873647"/>
+      </p:ext>
+    </p:extLst>
+  </p:cSld>
+  <p:clrMapOvr>
+    <a:masterClrMapping/>
+  </p:clrMapOvr>
+</p:sld>
+</file>
+
+<file path=ppt/slides/slide5.xml><?xml version="1.0" encoding="utf-8"?>
+<p:sld xmlns:a="http://schemas.openxmlformats.org/drawingml/2006/main" xmlns:r="http://schemas.openxmlformats.org/officeDocument/2006/relationships" xmlns:p="http://schemas.openxmlformats.org/presentationml/2006/main">
+  <p:cSld>
+    <p:spTree>
+      <p:nvGrpSpPr>
+        <p:cNvPr id="1" name="">
+          <a:extLst>
+            <a:ext uri="{FF2B5EF4-FFF2-40B4-BE49-F238E27FC236}">
+              <a16:creationId xmlns:a16="http://schemas.microsoft.com/office/drawing/2014/main" id="{E83D92F2-BD3F-5502-960E-3CFF3577844B}"/>
+            </a:ext>
+          </a:extLst>
+        </p:cNvPr>
+        <p:cNvGrpSpPr/>
+        <p:nvPr/>
+      </p:nvGrpSpPr>
+      <p:grpSpPr>
+        <a:xfrm>
+          <a:off x="0" y="0"/>
+          <a:ext cx="0" cy="0"/>
+          <a:chOff x="0" y="0"/>
+          <a:chExt cx="0" cy="0"/>
+        </a:xfrm>
+      </p:grpSpPr>
+      <p:sp>
+        <p:nvSpPr>
+          <p:cNvPr id="2" name="Title 1">
+            <a:extLst>
+              <a:ext uri="{FF2B5EF4-FFF2-40B4-BE49-F238E27FC236}">
+                <a16:creationId xmlns:a16="http://schemas.microsoft.com/office/drawing/2014/main" id="{475D234C-D59D-E997-1AA0-D508BFFD3CB6}"/>
+              </a:ext>
+            </a:extLst>
+          </p:cNvPr>
+          <p:cNvSpPr>
+            <a:spLocks noGrp="1"/>
+          </p:cNvSpPr>
+          <p:nvPr>
+            <p:ph type="title"/>
+          </p:nvPr>
+        </p:nvSpPr>
+        <p:spPr/>
+        <p:txBody>
+          <a:bodyPr/>
+          <a:lstStyle/>
+          <a:p>
+            <a:r>
+              <a:rPr lang="en-US" dirty="0"/>
+              <a:t>Challenge – Create Your First App</a:t>
+            </a:r>
+          </a:p>
+        </p:txBody>
+      </p:sp>
+      <p:sp>
+        <p:nvSpPr>
+          <p:cNvPr id="3" name="Content Placeholder 2">
+            <a:extLst>
+              <a:ext uri="{FF2B5EF4-FFF2-40B4-BE49-F238E27FC236}">
+                <a16:creationId xmlns:a16="http://schemas.microsoft.com/office/drawing/2014/main" id="{23F8E57B-9E41-4816-C2F2-1105A90F87A9}"/>
+              </a:ext>
+            </a:extLst>
+          </p:cNvPr>
+          <p:cNvSpPr>
+            <a:spLocks noGrp="1"/>
+          </p:cNvSpPr>
+          <p:nvPr>
+            <p:ph idx="1"/>
+          </p:nvPr>
+        </p:nvSpPr>
+        <p:spPr>
+          <a:xfrm>
+            <a:off x="581192" y="2475925"/>
+            <a:ext cx="5317584" cy="1681246"/>
+          </a:xfrm>
+        </p:spPr>
+        <p:txBody>
+          <a:bodyPr/>
+          <a:lstStyle/>
+          <a:p>
+            <a:r>
+              <a:rPr lang="en-US" dirty="0"/>
+              <a:t>Create a React project</a:t>
+            </a:r>
+          </a:p>
+        </p:txBody>
+      </p:sp>
+      <p:sp>
+        <p:nvSpPr>
+          <p:cNvPr id="6" name="TextBox 5">
+            <a:extLst>
+              <a:ext uri="{FF2B5EF4-FFF2-40B4-BE49-F238E27FC236}">
+                <a16:creationId xmlns:a16="http://schemas.microsoft.com/office/drawing/2014/main" id="{2DE50FF0-C783-F3C0-044D-2F094F317804}"/>
+              </a:ext>
+            </a:extLst>
+          </p:cNvPr>
+          <p:cNvSpPr txBox="1"/>
+          <p:nvPr/>
+        </p:nvSpPr>
+        <p:spPr>
+          <a:xfrm>
+            <a:off x="1228165" y="2402747"/>
+            <a:ext cx="756938" cy="369332"/>
+          </a:xfrm>
+          <a:prstGeom prst="rect">
+            <a:avLst/>
+          </a:prstGeom>
+          <a:noFill/>
+        </p:spPr>
+        <p:txBody>
+          <a:bodyPr wrap="none" rtlCol="0">
+            <a:spAutoFit/>
+          </a:bodyPr>
+          <a:lstStyle/>
+          <a:p>
+            <a:r>
+              <a:rPr lang="en-US" b="1" dirty="0"/>
+              <a:t>Goal:</a:t>
+            </a:r>
+          </a:p>
+        </p:txBody>
+      </p:sp>
+      <p:sp>
+        <p:nvSpPr>
+          <p:cNvPr id="7" name="TextBox 6">
+            <a:extLst>
+              <a:ext uri="{FF2B5EF4-FFF2-40B4-BE49-F238E27FC236}">
+                <a16:creationId xmlns:a16="http://schemas.microsoft.com/office/drawing/2014/main" id="{405306AE-2095-D0AE-E069-321DBC55370F}"/>
+              </a:ext>
+            </a:extLst>
+          </p:cNvPr>
+          <p:cNvSpPr txBox="1"/>
+          <p:nvPr/>
+        </p:nvSpPr>
+        <p:spPr>
+          <a:xfrm>
+            <a:off x="6949165" y="2402747"/>
+            <a:ext cx="4661643" cy="369332"/>
+          </a:xfrm>
+          <a:prstGeom prst="rect">
+            <a:avLst/>
+          </a:prstGeom>
+          <a:noFill/>
+        </p:spPr>
+        <p:txBody>
+          <a:bodyPr wrap="square" rtlCol="0">
+            <a:spAutoFit/>
+          </a:bodyPr>
+          <a:lstStyle/>
+          <a:p>
+            <a:r>
+              <a:rPr lang="en-US" b="1" dirty="0"/>
+              <a:t>Scenario:  			  </a:t>
+            </a:r>
+          </a:p>
+        </p:txBody>
+      </p:sp>
+      <p:sp>
+        <p:nvSpPr>
+          <p:cNvPr id="8" name="Content Placeholder 2">
+            <a:extLst>
+              <a:ext uri="{FF2B5EF4-FFF2-40B4-BE49-F238E27FC236}">
+                <a16:creationId xmlns:a16="http://schemas.microsoft.com/office/drawing/2014/main" id="{61B443B1-E14C-64AB-9E9D-75FFCF923C2B}"/>
+              </a:ext>
+            </a:extLst>
+          </p:cNvPr>
+          <p:cNvSpPr txBox="1">
+            <a:spLocks/>
+          </p:cNvSpPr>
+          <p:nvPr/>
+        </p:nvSpPr>
+        <p:spPr>
+          <a:xfrm>
+            <a:off x="6456103" y="3130666"/>
+            <a:ext cx="4661642" cy="1681246"/>
           </a:xfrm>
           <a:prstGeom prst="rect">
             <a:avLst/>
@@ -7243,2499 +12877,6 @@
           <a:p>
             <a:r>
               <a:rPr lang="en-US" dirty="0"/>
-              <a:t>Your organization needs to build a portal for service technicians. This portal should be able to view, modify, and delete work orders. This application will be written in React.</a:t>
-            </a:r>
-          </a:p>
-          <a:p>
-            <a:r>
-              <a:rPr lang="en-US" dirty="0"/>
-              <a:t>In the ‘Home’ component, create a header using semantic html.</a:t>
-            </a:r>
-          </a:p>
-          <a:p>
-            <a:r>
-              <a:rPr lang="en-US" dirty="0"/>
-              <a:t>Within the header element, include a welcome message that reads: “Welcome {username}! Today’s Date: DD/MM/YYYY” </a:t>
-            </a:r>
-          </a:p>
-          <a:p>
-            <a:r>
-              <a:rPr lang="en-US" dirty="0"/>
-              <a:t>Username should be a component variable that stores your own name, the date should be dynamically calculated</a:t>
-            </a:r>
-          </a:p>
-          <a:p>
-            <a:r>
-              <a:rPr lang="en-US" dirty="0"/>
-              <a:t>Style your component</a:t>
-            </a:r>
-            <a:br>
-              <a:rPr lang="en-US" dirty="0"/>
-            </a:br>
-            <a:endParaRPr lang="en-US" dirty="0"/>
-          </a:p>
-        </p:txBody>
-      </p:sp>
-    </p:spTree>
-    <p:extLst>
-      <p:ext uri="{BB962C8B-B14F-4D97-AF65-F5344CB8AC3E}">
-        <p14:creationId xmlns:p14="http://schemas.microsoft.com/office/powerpoint/2010/main" val="923394542"/>
-      </p:ext>
-    </p:extLst>
-  </p:cSld>
-  <p:clrMapOvr>
-    <a:masterClrMapping/>
-  </p:clrMapOvr>
-</p:sld>
-</file>
-
-<file path=ppt/slides/slide15.xml><?xml version="1.0" encoding="utf-8"?>
-<p:sld xmlns:a="http://schemas.openxmlformats.org/drawingml/2006/main" xmlns:r="http://schemas.openxmlformats.org/officeDocument/2006/relationships" xmlns:p="http://schemas.openxmlformats.org/presentationml/2006/main">
-  <p:cSld>
-    <p:spTree>
-      <p:nvGrpSpPr>
-        <p:cNvPr id="1" name=""/>
-        <p:cNvGrpSpPr/>
-        <p:nvPr/>
-      </p:nvGrpSpPr>
-      <p:grpSpPr>
-        <a:xfrm>
-          <a:off x="0" y="0"/>
-          <a:ext cx="0" cy="0"/>
-          <a:chOff x="0" y="0"/>
-          <a:chExt cx="0" cy="0"/>
-        </a:xfrm>
-      </p:grpSpPr>
-      <p:sp>
-        <p:nvSpPr>
-          <p:cNvPr id="2" name="Title 1">
-            <a:extLst>
-              <a:ext uri="{FF2B5EF4-FFF2-40B4-BE49-F238E27FC236}">
-                <a16:creationId xmlns:a16="http://schemas.microsoft.com/office/drawing/2014/main" id="{01C5EF81-D726-78E0-2499-8B2EA696FECD}"/>
-              </a:ext>
-            </a:extLst>
-          </p:cNvPr>
-          <p:cNvSpPr>
-            <a:spLocks noGrp="1"/>
-          </p:cNvSpPr>
-          <p:nvPr>
-            <p:ph type="title"/>
-          </p:nvPr>
-        </p:nvSpPr>
-        <p:spPr/>
-        <p:txBody>
-          <a:bodyPr/>
-          <a:lstStyle/>
-          <a:p>
-            <a:r>
-              <a:rPr lang="en-US" dirty="0"/>
-              <a:t>Props</a:t>
-            </a:r>
-          </a:p>
-        </p:txBody>
-      </p:sp>
-      <p:sp>
-        <p:nvSpPr>
-          <p:cNvPr id="3" name="Content Placeholder 2">
-            <a:extLst>
-              <a:ext uri="{FF2B5EF4-FFF2-40B4-BE49-F238E27FC236}">
-                <a16:creationId xmlns:a16="http://schemas.microsoft.com/office/drawing/2014/main" id="{C35245C2-04AC-9F7C-291A-201BD69055B4}"/>
-              </a:ext>
-            </a:extLst>
-          </p:cNvPr>
-          <p:cNvSpPr>
-            <a:spLocks noGrp="1"/>
-          </p:cNvSpPr>
-          <p:nvPr>
-            <p:ph idx="1"/>
-          </p:nvPr>
-        </p:nvSpPr>
-        <p:spPr>
-          <a:xfrm>
-            <a:off x="581193" y="2180496"/>
-            <a:ext cx="5175372" cy="3678303"/>
-          </a:xfrm>
-        </p:spPr>
-        <p:txBody>
-          <a:bodyPr/>
-          <a:lstStyle/>
-          <a:p>
-            <a:r>
-              <a:rPr lang="en-US" dirty="0"/>
-              <a:t>Short for properties</a:t>
-            </a:r>
-          </a:p>
-          <a:p>
-            <a:r>
-              <a:rPr lang="en-US" dirty="0"/>
-              <a:t>Child components can receive a ‘props’ object</a:t>
-            </a:r>
-          </a:p>
-          <a:p>
-            <a:pPr lvl="1"/>
-            <a:r>
-              <a:rPr lang="en-US" dirty="0"/>
-              <a:t>This object contains items passed from the parent</a:t>
-            </a:r>
-          </a:p>
-          <a:p>
-            <a:pPr lvl="1"/>
-            <a:r>
-              <a:rPr lang="en-US" dirty="0"/>
-              <a:t>These items can be objects, arrays, strings, numbers, and more </a:t>
-            </a:r>
-          </a:p>
-          <a:p>
-            <a:endParaRPr lang="en-US" dirty="0"/>
-          </a:p>
-        </p:txBody>
-      </p:sp>
-      <p:pic>
-        <p:nvPicPr>
-          <p:cNvPr id="5" name="Picture 4">
-            <a:extLst>
-              <a:ext uri="{FF2B5EF4-FFF2-40B4-BE49-F238E27FC236}">
-                <a16:creationId xmlns:a16="http://schemas.microsoft.com/office/drawing/2014/main" id="{F89AA80E-0263-FAF5-FB2C-7818C2A22A5A}"/>
-              </a:ext>
-            </a:extLst>
-          </p:cNvPr>
-          <p:cNvPicPr>
-            <a:picLocks noChangeAspect="1"/>
-          </p:cNvPicPr>
-          <p:nvPr/>
-        </p:nvPicPr>
-        <p:blipFill>
-          <a:blip r:embed="rId2"/>
-          <a:stretch>
-            <a:fillRect/>
-          </a:stretch>
-        </p:blipFill>
-        <p:spPr>
-          <a:xfrm>
-            <a:off x="6737810" y="2005677"/>
-            <a:ext cx="3724795" cy="1810003"/>
-          </a:xfrm>
-          <a:prstGeom prst="rect">
-            <a:avLst/>
-          </a:prstGeom>
-        </p:spPr>
-      </p:pic>
-      <p:pic>
-        <p:nvPicPr>
-          <p:cNvPr id="7" name="Picture 6">
-            <a:extLst>
-              <a:ext uri="{FF2B5EF4-FFF2-40B4-BE49-F238E27FC236}">
-                <a16:creationId xmlns:a16="http://schemas.microsoft.com/office/drawing/2014/main" id="{0397927B-9516-AD6C-2E60-F2E6508BFD04}"/>
-              </a:ext>
-            </a:extLst>
-          </p:cNvPr>
-          <p:cNvPicPr>
-            <a:picLocks noChangeAspect="1"/>
-          </p:cNvPicPr>
-          <p:nvPr/>
-        </p:nvPicPr>
-        <p:blipFill>
-          <a:blip r:embed="rId3"/>
-          <a:stretch>
-            <a:fillRect/>
-          </a:stretch>
-        </p:blipFill>
-        <p:spPr>
-          <a:xfrm>
-            <a:off x="6904522" y="4105401"/>
-            <a:ext cx="3391373" cy="2419688"/>
-          </a:xfrm>
-          <a:prstGeom prst="rect">
-            <a:avLst/>
-          </a:prstGeom>
-        </p:spPr>
-      </p:pic>
-    </p:spTree>
-    <p:extLst>
-      <p:ext uri="{BB962C8B-B14F-4D97-AF65-F5344CB8AC3E}">
-        <p14:creationId xmlns:p14="http://schemas.microsoft.com/office/powerpoint/2010/main" val="900187183"/>
-      </p:ext>
-    </p:extLst>
-  </p:cSld>
-  <p:clrMapOvr>
-    <a:masterClrMapping/>
-  </p:clrMapOvr>
-</p:sld>
-</file>
-
-<file path=ppt/slides/slide16.xml><?xml version="1.0" encoding="utf-8"?>
-<p:sld xmlns:a="http://schemas.openxmlformats.org/drawingml/2006/main" xmlns:r="http://schemas.openxmlformats.org/officeDocument/2006/relationships" xmlns:p="http://schemas.openxmlformats.org/presentationml/2006/main">
-  <p:cSld>
-    <p:spTree>
-      <p:nvGrpSpPr>
-        <p:cNvPr id="1" name=""/>
-        <p:cNvGrpSpPr/>
-        <p:nvPr/>
-      </p:nvGrpSpPr>
-      <p:grpSpPr>
-        <a:xfrm>
-          <a:off x="0" y="0"/>
-          <a:ext cx="0" cy="0"/>
-          <a:chOff x="0" y="0"/>
-          <a:chExt cx="0" cy="0"/>
-        </a:xfrm>
-      </p:grpSpPr>
-      <p:sp>
-        <p:nvSpPr>
-          <p:cNvPr id="2" name="Title 1">
-            <a:extLst>
-              <a:ext uri="{FF2B5EF4-FFF2-40B4-BE49-F238E27FC236}">
-                <a16:creationId xmlns:a16="http://schemas.microsoft.com/office/drawing/2014/main" id="{910DB054-6F18-D024-7E4F-50D0C21FB796}"/>
-              </a:ext>
-            </a:extLst>
-          </p:cNvPr>
-          <p:cNvSpPr>
-            <a:spLocks noGrp="1"/>
-          </p:cNvSpPr>
-          <p:nvPr>
-            <p:ph type="title"/>
-          </p:nvPr>
-        </p:nvSpPr>
-        <p:spPr/>
-        <p:txBody>
-          <a:bodyPr/>
-          <a:lstStyle/>
-          <a:p>
-            <a:r>
-              <a:rPr lang="en-US" dirty="0" err="1"/>
-              <a:t>Destructuring</a:t>
-            </a:r>
-            <a:r>
-              <a:rPr lang="en-US" dirty="0"/>
-              <a:t> Props</a:t>
-            </a:r>
-          </a:p>
-        </p:txBody>
-      </p:sp>
-      <p:sp>
-        <p:nvSpPr>
-          <p:cNvPr id="3" name="Content Placeholder 2">
-            <a:extLst>
-              <a:ext uri="{FF2B5EF4-FFF2-40B4-BE49-F238E27FC236}">
-                <a16:creationId xmlns:a16="http://schemas.microsoft.com/office/drawing/2014/main" id="{0F4EA587-F0A9-437C-0429-53B780C4F520}"/>
-              </a:ext>
-            </a:extLst>
-          </p:cNvPr>
-          <p:cNvSpPr>
-            <a:spLocks noGrp="1"/>
-          </p:cNvSpPr>
-          <p:nvPr>
-            <p:ph idx="1"/>
-          </p:nvPr>
-        </p:nvSpPr>
-        <p:spPr>
-          <a:xfrm>
-            <a:off x="943913" y="2908255"/>
-            <a:ext cx="4354490" cy="1130935"/>
-          </a:xfrm>
-        </p:spPr>
-        <p:txBody>
-          <a:bodyPr/>
-          <a:lstStyle/>
-          <a:p>
-            <a:r>
-              <a:rPr lang="en-US" dirty="0"/>
-              <a:t>We can pull out from the props object only what we need with </a:t>
-            </a:r>
-            <a:r>
-              <a:rPr lang="en-US" dirty="0" err="1"/>
-              <a:t>destructuring</a:t>
-            </a:r>
-            <a:endParaRPr lang="en-US" dirty="0"/>
-          </a:p>
-          <a:p>
-            <a:r>
-              <a:rPr lang="en-US" dirty="0"/>
-              <a:t>This is standard JavaScript (ES6 feature)</a:t>
-            </a:r>
-          </a:p>
-        </p:txBody>
-      </p:sp>
-      <p:pic>
-        <p:nvPicPr>
-          <p:cNvPr id="11" name="Picture 10">
-            <a:extLst>
-              <a:ext uri="{FF2B5EF4-FFF2-40B4-BE49-F238E27FC236}">
-                <a16:creationId xmlns:a16="http://schemas.microsoft.com/office/drawing/2014/main" id="{FC324A70-C563-3114-1238-7A1B0B870AB7}"/>
-              </a:ext>
-            </a:extLst>
-          </p:cNvPr>
-          <p:cNvPicPr>
-            <a:picLocks noChangeAspect="1"/>
-          </p:cNvPicPr>
-          <p:nvPr/>
-        </p:nvPicPr>
-        <p:blipFill>
-          <a:blip r:embed="rId2"/>
-          <a:stretch>
-            <a:fillRect/>
-          </a:stretch>
-        </p:blipFill>
-        <p:spPr>
-          <a:xfrm>
-            <a:off x="6195257" y="3265904"/>
-            <a:ext cx="4629796" cy="3124636"/>
-          </a:xfrm>
-          <a:prstGeom prst="rect">
-            <a:avLst/>
-          </a:prstGeom>
-        </p:spPr>
-      </p:pic>
-      <p:pic>
-        <p:nvPicPr>
-          <p:cNvPr id="13" name="Picture 12">
-            <a:extLst>
-              <a:ext uri="{FF2B5EF4-FFF2-40B4-BE49-F238E27FC236}">
-                <a16:creationId xmlns:a16="http://schemas.microsoft.com/office/drawing/2014/main" id="{C82BD620-473D-69E5-74BA-9823D6B9CCF2}"/>
-              </a:ext>
-            </a:extLst>
-          </p:cNvPr>
-          <p:cNvPicPr>
-            <a:picLocks noChangeAspect="1"/>
-          </p:cNvPicPr>
-          <p:nvPr/>
-        </p:nvPicPr>
-        <p:blipFill>
-          <a:blip r:embed="rId3"/>
-          <a:stretch>
-            <a:fillRect/>
-          </a:stretch>
-        </p:blipFill>
-        <p:spPr>
-          <a:xfrm>
-            <a:off x="6631749" y="2208436"/>
-            <a:ext cx="3562847" cy="924054"/>
-          </a:xfrm>
-          <a:prstGeom prst="rect">
-            <a:avLst/>
-          </a:prstGeom>
-        </p:spPr>
-      </p:pic>
-    </p:spTree>
-    <p:extLst>
-      <p:ext uri="{BB962C8B-B14F-4D97-AF65-F5344CB8AC3E}">
-        <p14:creationId xmlns:p14="http://schemas.microsoft.com/office/powerpoint/2010/main" val="1025800103"/>
-      </p:ext>
-    </p:extLst>
-  </p:cSld>
-  <p:clrMapOvr>
-    <a:masterClrMapping/>
-  </p:clrMapOvr>
-</p:sld>
-</file>
-
-<file path=ppt/slides/slide17.xml><?xml version="1.0" encoding="utf-8"?>
-<p:sld xmlns:a="http://schemas.openxmlformats.org/drawingml/2006/main" xmlns:r="http://schemas.openxmlformats.org/officeDocument/2006/relationships" xmlns:p="http://schemas.openxmlformats.org/presentationml/2006/main">
-  <p:cSld>
-    <p:spTree>
-      <p:nvGrpSpPr>
-        <p:cNvPr id="1" name="">
-          <a:extLst>
-            <a:ext uri="{FF2B5EF4-FFF2-40B4-BE49-F238E27FC236}">
-              <a16:creationId xmlns:a16="http://schemas.microsoft.com/office/drawing/2014/main" id="{6C663970-B580-3A35-3A9D-4A5EE22E502B}"/>
-            </a:ext>
-          </a:extLst>
-        </p:cNvPr>
-        <p:cNvGrpSpPr/>
-        <p:nvPr/>
-      </p:nvGrpSpPr>
-      <p:grpSpPr>
-        <a:xfrm>
-          <a:off x="0" y="0"/>
-          <a:ext cx="0" cy="0"/>
-          <a:chOff x="0" y="0"/>
-          <a:chExt cx="0" cy="0"/>
-        </a:xfrm>
-      </p:grpSpPr>
-      <p:sp>
-        <p:nvSpPr>
-          <p:cNvPr id="2" name="Title 1">
-            <a:extLst>
-              <a:ext uri="{FF2B5EF4-FFF2-40B4-BE49-F238E27FC236}">
-                <a16:creationId xmlns:a16="http://schemas.microsoft.com/office/drawing/2014/main" id="{CEE9B3CD-777A-23F4-8A44-017D8A5EF749}"/>
-              </a:ext>
-            </a:extLst>
-          </p:cNvPr>
-          <p:cNvSpPr>
-            <a:spLocks noGrp="1"/>
-          </p:cNvSpPr>
-          <p:nvPr>
-            <p:ph type="title"/>
-          </p:nvPr>
-        </p:nvSpPr>
-        <p:spPr/>
-        <p:txBody>
-          <a:bodyPr/>
-          <a:lstStyle/>
-          <a:p>
-            <a:r>
-              <a:rPr lang="en-US" dirty="0"/>
-              <a:t>Challenge – View an Incident</a:t>
-            </a:r>
-          </a:p>
-        </p:txBody>
-      </p:sp>
-      <p:sp>
-        <p:nvSpPr>
-          <p:cNvPr id="3" name="Content Placeholder 2">
-            <a:extLst>
-              <a:ext uri="{FF2B5EF4-FFF2-40B4-BE49-F238E27FC236}">
-                <a16:creationId xmlns:a16="http://schemas.microsoft.com/office/drawing/2014/main" id="{DEE1DCCD-078D-B123-DB79-BD4D98315F3C}"/>
-              </a:ext>
-            </a:extLst>
-          </p:cNvPr>
-          <p:cNvSpPr>
-            <a:spLocks noGrp="1"/>
-          </p:cNvSpPr>
-          <p:nvPr>
-            <p:ph idx="1"/>
-          </p:nvPr>
-        </p:nvSpPr>
-        <p:spPr>
-          <a:xfrm>
-            <a:off x="581192" y="2475925"/>
-            <a:ext cx="5317584" cy="1681246"/>
-          </a:xfrm>
-        </p:spPr>
-        <p:txBody>
-          <a:bodyPr/>
-          <a:lstStyle/>
-          <a:p>
-            <a:r>
-              <a:rPr lang="en-US" dirty="0"/>
-              <a:t>Create components to help manage incidents</a:t>
-            </a:r>
-          </a:p>
-        </p:txBody>
-      </p:sp>
-      <p:sp>
-        <p:nvSpPr>
-          <p:cNvPr id="6" name="TextBox 5">
-            <a:extLst>
-              <a:ext uri="{FF2B5EF4-FFF2-40B4-BE49-F238E27FC236}">
-                <a16:creationId xmlns:a16="http://schemas.microsoft.com/office/drawing/2014/main" id="{215E1F43-B795-CC7C-96F2-AD110F6D62D2}"/>
-              </a:ext>
-            </a:extLst>
-          </p:cNvPr>
-          <p:cNvSpPr txBox="1"/>
-          <p:nvPr/>
-        </p:nvSpPr>
-        <p:spPr>
-          <a:xfrm>
-            <a:off x="1228165" y="2402747"/>
-            <a:ext cx="756938" cy="369332"/>
-          </a:xfrm>
-          <a:prstGeom prst="rect">
-            <a:avLst/>
-          </a:prstGeom>
-          <a:noFill/>
-        </p:spPr>
-        <p:txBody>
-          <a:bodyPr wrap="none" rtlCol="0">
-            <a:spAutoFit/>
-          </a:bodyPr>
-          <a:lstStyle/>
-          <a:p>
-            <a:r>
-              <a:rPr lang="en-US" b="1" dirty="0"/>
-              <a:t>Goal:</a:t>
-            </a:r>
-          </a:p>
-        </p:txBody>
-      </p:sp>
-      <p:sp>
-        <p:nvSpPr>
-          <p:cNvPr id="7" name="TextBox 6">
-            <a:extLst>
-              <a:ext uri="{FF2B5EF4-FFF2-40B4-BE49-F238E27FC236}">
-                <a16:creationId xmlns:a16="http://schemas.microsoft.com/office/drawing/2014/main" id="{D5D4F60E-0B3C-786C-4B70-9146F5D2F5F2}"/>
-              </a:ext>
-            </a:extLst>
-          </p:cNvPr>
-          <p:cNvSpPr txBox="1"/>
-          <p:nvPr/>
-        </p:nvSpPr>
-        <p:spPr>
-          <a:xfrm>
-            <a:off x="6676991" y="2402747"/>
-            <a:ext cx="4933817" cy="369332"/>
-          </a:xfrm>
-          <a:prstGeom prst="rect">
-            <a:avLst/>
-          </a:prstGeom>
-          <a:noFill/>
-        </p:spPr>
-        <p:txBody>
-          <a:bodyPr wrap="square" rtlCol="0">
-            <a:spAutoFit/>
-          </a:bodyPr>
-          <a:lstStyle/>
-          <a:p>
-            <a:r>
-              <a:rPr lang="en-US" b="1" dirty="0"/>
-              <a:t>Scenario:  			   25 min</a:t>
-            </a:r>
-          </a:p>
-        </p:txBody>
-      </p:sp>
-      <p:sp>
-        <p:nvSpPr>
-          <p:cNvPr id="8" name="Content Placeholder 2">
-            <a:extLst>
-              <a:ext uri="{FF2B5EF4-FFF2-40B4-BE49-F238E27FC236}">
-                <a16:creationId xmlns:a16="http://schemas.microsoft.com/office/drawing/2014/main" id="{A0C29790-AE69-F5E8-B7DB-110ACFAB5F4C}"/>
-              </a:ext>
-            </a:extLst>
-          </p:cNvPr>
-          <p:cNvSpPr txBox="1">
-            <a:spLocks/>
-          </p:cNvSpPr>
-          <p:nvPr/>
-        </p:nvSpPr>
-        <p:spPr>
-          <a:xfrm>
-            <a:off x="5314644" y="3054587"/>
-            <a:ext cx="5740756" cy="2753931"/>
-          </a:xfrm>
-          <a:prstGeom prst="rect">
-            <a:avLst/>
-          </a:prstGeom>
-        </p:spPr>
-        <p:txBody>
-          <a:bodyPr vert="horz" lIns="91440" tIns="45720" rIns="91440" bIns="45720" rtlCol="0" anchor="ctr">
-            <a:normAutofit fontScale="92500" lnSpcReduction="20000"/>
-          </a:bodyPr>
-          <a:lstStyle>
-            <a:lvl1pPr marL="306000" indent="-306000" algn="l" defTabSz="457200" rtl="0" eaLnBrk="1" latinLnBrk="0" hangingPunct="1">
-              <a:spcBef>
-                <a:spcPct val="20000"/>
-              </a:spcBef>
-              <a:spcAft>
-                <a:spcPts val="600"/>
-              </a:spcAft>
-              <a:buClr>
-                <a:schemeClr val="accent2"/>
-              </a:buClr>
-              <a:buSzPct val="92000"/>
-              <a:buFont typeface="Wingdings 2" panose="05020102010507070707" pitchFamily="18" charset="2"/>
-              <a:buChar char=""/>
-              <a:defRPr sz="1800" kern="1200">
-                <a:solidFill>
-                  <a:schemeClr val="tx2"/>
-                </a:solidFill>
-                <a:latin typeface="+mn-lt"/>
-                <a:ea typeface="+mn-ea"/>
-                <a:cs typeface="+mn-cs"/>
-              </a:defRPr>
-            </a:lvl1pPr>
-            <a:lvl2pPr marL="630000" indent="-306000" algn="l" defTabSz="457200" rtl="0" eaLnBrk="1" latinLnBrk="0" hangingPunct="1">
-              <a:spcBef>
-                <a:spcPct val="20000"/>
-              </a:spcBef>
-              <a:spcAft>
-                <a:spcPts val="600"/>
-              </a:spcAft>
-              <a:buClr>
-                <a:schemeClr val="accent2"/>
-              </a:buClr>
-              <a:buSzPct val="92000"/>
-              <a:buFont typeface="Wingdings 2" panose="05020102010507070707" pitchFamily="18" charset="2"/>
-              <a:buChar char=""/>
-              <a:defRPr sz="1600" kern="1200">
-                <a:solidFill>
-                  <a:schemeClr val="tx2"/>
-                </a:solidFill>
-                <a:latin typeface="+mn-lt"/>
-                <a:ea typeface="+mn-ea"/>
-                <a:cs typeface="+mn-cs"/>
-              </a:defRPr>
-            </a:lvl2pPr>
-            <a:lvl3pPr marL="900000" indent="-270000" algn="l" defTabSz="457200" rtl="0" eaLnBrk="1" latinLnBrk="0" hangingPunct="1">
-              <a:spcBef>
-                <a:spcPct val="20000"/>
-              </a:spcBef>
-              <a:spcAft>
-                <a:spcPts val="600"/>
-              </a:spcAft>
-              <a:buClr>
-                <a:schemeClr val="accent2"/>
-              </a:buClr>
-              <a:buSzPct val="92000"/>
-              <a:buFont typeface="Wingdings 2" panose="05020102010507070707" pitchFamily="18" charset="2"/>
-              <a:buChar char=""/>
-              <a:defRPr sz="1400" kern="1200">
-                <a:solidFill>
-                  <a:schemeClr val="tx2"/>
-                </a:solidFill>
-                <a:latin typeface="+mn-lt"/>
-                <a:ea typeface="+mn-ea"/>
-                <a:cs typeface="+mn-cs"/>
-              </a:defRPr>
-            </a:lvl3pPr>
-            <a:lvl4pPr marL="1242000" indent="-234000" algn="l" defTabSz="457200" rtl="0" eaLnBrk="1" latinLnBrk="0" hangingPunct="1">
-              <a:spcBef>
-                <a:spcPct val="20000"/>
-              </a:spcBef>
-              <a:spcAft>
-                <a:spcPts val="600"/>
-              </a:spcAft>
-              <a:buClr>
-                <a:schemeClr val="accent2"/>
-              </a:buClr>
-              <a:buSzPct val="92000"/>
-              <a:buFont typeface="Wingdings 2" panose="05020102010507070707" pitchFamily="18" charset="2"/>
-              <a:buChar char=""/>
-              <a:defRPr sz="1200" kern="1200">
-                <a:solidFill>
-                  <a:schemeClr val="tx2"/>
-                </a:solidFill>
-                <a:latin typeface="+mn-lt"/>
-                <a:ea typeface="+mn-ea"/>
-                <a:cs typeface="+mn-cs"/>
-              </a:defRPr>
-            </a:lvl4pPr>
-            <a:lvl5pPr marL="1602000" indent="-234000" algn="l" defTabSz="457200" rtl="0" eaLnBrk="1" latinLnBrk="0" hangingPunct="1">
-              <a:spcBef>
-                <a:spcPct val="20000"/>
-              </a:spcBef>
-              <a:spcAft>
-                <a:spcPts val="600"/>
-              </a:spcAft>
-              <a:buClr>
-                <a:schemeClr val="accent2"/>
-              </a:buClr>
-              <a:buSzPct val="92000"/>
-              <a:buFont typeface="Wingdings 2" panose="05020102010507070707" pitchFamily="18" charset="2"/>
-              <a:buChar char=""/>
-              <a:defRPr sz="1200" kern="1200">
-                <a:solidFill>
-                  <a:schemeClr val="tx2"/>
-                </a:solidFill>
-                <a:latin typeface="+mn-lt"/>
-                <a:ea typeface="+mn-ea"/>
-                <a:cs typeface="+mn-cs"/>
-              </a:defRPr>
-            </a:lvl5pPr>
-            <a:lvl6pPr marL="1900000" indent="-228600" algn="l" defTabSz="457200" rtl="0" eaLnBrk="1" latinLnBrk="0" hangingPunct="1">
-              <a:spcBef>
-                <a:spcPct val="20000"/>
-              </a:spcBef>
-              <a:spcAft>
-                <a:spcPts val="600"/>
-              </a:spcAft>
-              <a:buClr>
-                <a:schemeClr val="accent2"/>
-              </a:buClr>
-              <a:buSzPct val="92000"/>
-              <a:buFont typeface="Wingdings 2" panose="05020102010507070707" pitchFamily="18" charset="2"/>
-              <a:buChar char=""/>
-              <a:defRPr sz="1200" kern="1200">
-                <a:solidFill>
-                  <a:schemeClr val="tx2"/>
-                </a:solidFill>
-                <a:latin typeface="+mn-lt"/>
-                <a:ea typeface="+mn-ea"/>
-                <a:cs typeface="+mn-cs"/>
-              </a:defRPr>
-            </a:lvl6pPr>
-            <a:lvl7pPr marL="2200000" indent="-228600" algn="l" defTabSz="457200" rtl="0" eaLnBrk="1" latinLnBrk="0" hangingPunct="1">
-              <a:spcBef>
-                <a:spcPct val="20000"/>
-              </a:spcBef>
-              <a:spcAft>
-                <a:spcPts val="600"/>
-              </a:spcAft>
-              <a:buClr>
-                <a:schemeClr val="accent2"/>
-              </a:buClr>
-              <a:buSzPct val="92000"/>
-              <a:buFont typeface="Wingdings 2" panose="05020102010507070707" pitchFamily="18" charset="2"/>
-              <a:buChar char=""/>
-              <a:defRPr sz="1200" kern="1200">
-                <a:solidFill>
-                  <a:schemeClr val="tx2"/>
-                </a:solidFill>
-                <a:latin typeface="+mn-lt"/>
-                <a:ea typeface="+mn-ea"/>
-                <a:cs typeface="+mn-cs"/>
-              </a:defRPr>
-            </a:lvl7pPr>
-            <a:lvl8pPr marL="2500000" indent="-228600" algn="l" defTabSz="457200" rtl="0" eaLnBrk="1" latinLnBrk="0" hangingPunct="1">
-              <a:spcBef>
-                <a:spcPct val="20000"/>
-              </a:spcBef>
-              <a:spcAft>
-                <a:spcPts val="600"/>
-              </a:spcAft>
-              <a:buClr>
-                <a:schemeClr val="accent2"/>
-              </a:buClr>
-              <a:buSzPct val="92000"/>
-              <a:buFont typeface="Wingdings 2" panose="05020102010507070707" pitchFamily="18" charset="2"/>
-              <a:buChar char=""/>
-              <a:defRPr sz="1200" kern="1200">
-                <a:solidFill>
-                  <a:schemeClr val="tx2"/>
-                </a:solidFill>
-                <a:latin typeface="+mn-lt"/>
-                <a:ea typeface="+mn-ea"/>
-                <a:cs typeface="+mn-cs"/>
-              </a:defRPr>
-            </a:lvl8pPr>
-            <a:lvl9pPr marL="2800000" indent="-228600" algn="l" defTabSz="457200" rtl="0" eaLnBrk="1" latinLnBrk="0" hangingPunct="1">
-              <a:spcBef>
-                <a:spcPct val="20000"/>
-              </a:spcBef>
-              <a:spcAft>
-                <a:spcPts val="600"/>
-              </a:spcAft>
-              <a:buClr>
-                <a:schemeClr val="accent2"/>
-              </a:buClr>
-              <a:buSzPct val="92000"/>
-              <a:buFont typeface="Wingdings 2" panose="05020102010507070707" pitchFamily="18" charset="2"/>
-              <a:buChar char=""/>
-              <a:defRPr sz="1200" kern="1200">
-                <a:solidFill>
-                  <a:schemeClr val="tx2"/>
-                </a:solidFill>
-                <a:latin typeface="+mn-lt"/>
-                <a:ea typeface="+mn-ea"/>
-                <a:cs typeface="+mn-cs"/>
-              </a:defRPr>
-            </a:lvl9pPr>
-          </a:lstStyle>
-          <a:p>
-            <a:r>
-              <a:rPr lang="en-US" dirty="0"/>
-              <a:t>Your organization needs to build a portal for service technicians. This portal should be able to view, modify, and delete incidents. This application will be written in React.</a:t>
-            </a:r>
-          </a:p>
-          <a:p>
-            <a:r>
-              <a:rPr lang="en-US" dirty="0"/>
-              <a:t>In the ‘Home’ component, under the header, nest a ‘</a:t>
-            </a:r>
-            <a:r>
-              <a:rPr lang="en-US" dirty="0" err="1"/>
-              <a:t>IncidentList</a:t>
-            </a:r>
-            <a:r>
-              <a:rPr lang="en-US" dirty="0"/>
-              <a:t>’ component. Then, inside of ‘</a:t>
-            </a:r>
-            <a:r>
-              <a:rPr lang="en-US" dirty="0" err="1"/>
-              <a:t>IncidentList</a:t>
-            </a:r>
-            <a:r>
-              <a:rPr lang="en-US" dirty="0"/>
-              <a:t>’, nest an ‘Incident’ component.</a:t>
-            </a:r>
-          </a:p>
-          <a:p>
-            <a:r>
-              <a:rPr lang="en-US" dirty="0"/>
-              <a:t>Import the JSON dummy data into ‘</a:t>
-            </a:r>
-            <a:r>
-              <a:rPr lang="en-US" dirty="0" err="1"/>
-              <a:t>IncidentList</a:t>
-            </a:r>
-            <a:r>
-              <a:rPr lang="en-US" dirty="0"/>
-              <a:t>’</a:t>
-            </a:r>
-          </a:p>
-          <a:p>
-            <a:r>
-              <a:rPr lang="en-US" dirty="0"/>
-              <a:t>Render the first incident record by passing the record data down via props to the ‘Case’ component</a:t>
-            </a:r>
-            <a:br>
-              <a:rPr lang="en-US" dirty="0"/>
-            </a:br>
-            <a:endParaRPr lang="en-US" dirty="0"/>
-          </a:p>
-        </p:txBody>
-      </p:sp>
-    </p:spTree>
-    <p:extLst>
-      <p:ext uri="{BB962C8B-B14F-4D97-AF65-F5344CB8AC3E}">
-        <p14:creationId xmlns:p14="http://schemas.microsoft.com/office/powerpoint/2010/main" val="3927732176"/>
-      </p:ext>
-    </p:extLst>
-  </p:cSld>
-  <p:clrMapOvr>
-    <a:masterClrMapping/>
-  </p:clrMapOvr>
-</p:sld>
-</file>
-
-<file path=ppt/slides/slide18.xml><?xml version="1.0" encoding="utf-8"?>
-<p:sld xmlns:a="http://schemas.openxmlformats.org/drawingml/2006/main" xmlns:r="http://schemas.openxmlformats.org/officeDocument/2006/relationships" xmlns:p="http://schemas.openxmlformats.org/presentationml/2006/main">
-  <p:cSld>
-    <p:spTree>
-      <p:nvGrpSpPr>
-        <p:cNvPr id="1" name=""/>
-        <p:cNvGrpSpPr/>
-        <p:nvPr/>
-      </p:nvGrpSpPr>
-      <p:grpSpPr>
-        <a:xfrm>
-          <a:off x="0" y="0"/>
-          <a:ext cx="0" cy="0"/>
-          <a:chOff x="0" y="0"/>
-          <a:chExt cx="0" cy="0"/>
-        </a:xfrm>
-      </p:grpSpPr>
-      <p:sp>
-        <p:nvSpPr>
-          <p:cNvPr id="2" name="Title 1">
-            <a:extLst>
-              <a:ext uri="{FF2B5EF4-FFF2-40B4-BE49-F238E27FC236}">
-                <a16:creationId xmlns:a16="http://schemas.microsoft.com/office/drawing/2014/main" id="{54D54031-2D95-205E-B81A-3800E5D2F3E4}"/>
-              </a:ext>
-            </a:extLst>
-          </p:cNvPr>
-          <p:cNvSpPr>
-            <a:spLocks noGrp="1"/>
-          </p:cNvSpPr>
-          <p:nvPr>
-            <p:ph type="title"/>
-          </p:nvPr>
-        </p:nvSpPr>
-        <p:spPr/>
-        <p:txBody>
-          <a:bodyPr/>
-          <a:lstStyle/>
-          <a:p>
-            <a:r>
-              <a:rPr lang="en-US" dirty="0"/>
-              <a:t>Lists</a:t>
-            </a:r>
-          </a:p>
-        </p:txBody>
-      </p:sp>
-      <p:sp>
-        <p:nvSpPr>
-          <p:cNvPr id="3" name="Content Placeholder 2">
-            <a:extLst>
-              <a:ext uri="{FF2B5EF4-FFF2-40B4-BE49-F238E27FC236}">
-                <a16:creationId xmlns:a16="http://schemas.microsoft.com/office/drawing/2014/main" id="{9180332D-03AE-5D81-20B0-21B34D330182}"/>
-              </a:ext>
-            </a:extLst>
-          </p:cNvPr>
-          <p:cNvSpPr>
-            <a:spLocks noGrp="1"/>
-          </p:cNvSpPr>
-          <p:nvPr>
-            <p:ph idx="1"/>
-          </p:nvPr>
-        </p:nvSpPr>
-        <p:spPr>
-          <a:xfrm>
-            <a:off x="581192" y="2180497"/>
-            <a:ext cx="11029615" cy="1248504"/>
-          </a:xfrm>
-        </p:spPr>
-        <p:txBody>
-          <a:bodyPr/>
-          <a:lstStyle/>
-          <a:p>
-            <a:r>
-              <a:rPr lang="en-US" dirty="0"/>
-              <a:t>The JavaScript map() array method is preferred for looping through a list and rendering content:</a:t>
-            </a:r>
-          </a:p>
-          <a:p>
-            <a:pPr lvl="1"/>
-            <a:r>
-              <a:rPr lang="en-US" dirty="0"/>
-              <a:t>A key is HIGHLY encouraged (or else you will get a warning) – A key allows React to update an item and refresh the component properly if it is updated or removed </a:t>
-            </a:r>
-          </a:p>
-        </p:txBody>
-      </p:sp>
-      <p:pic>
-        <p:nvPicPr>
-          <p:cNvPr id="5" name="Picture 4">
-            <a:extLst>
-              <a:ext uri="{FF2B5EF4-FFF2-40B4-BE49-F238E27FC236}">
-                <a16:creationId xmlns:a16="http://schemas.microsoft.com/office/drawing/2014/main" id="{124D1BD0-1119-8C20-CD4B-655713E110C2}"/>
-              </a:ext>
-            </a:extLst>
-          </p:cNvPr>
-          <p:cNvPicPr>
-            <a:picLocks noChangeAspect="1"/>
-          </p:cNvPicPr>
-          <p:nvPr/>
-        </p:nvPicPr>
-        <p:blipFill>
-          <a:blip r:embed="rId2"/>
-          <a:stretch>
-            <a:fillRect/>
-          </a:stretch>
-        </p:blipFill>
-        <p:spPr>
-          <a:xfrm>
-            <a:off x="1684227" y="3602597"/>
-            <a:ext cx="8823543" cy="2694294"/>
-          </a:xfrm>
-          <a:prstGeom prst="rect">
-            <a:avLst/>
-          </a:prstGeom>
-        </p:spPr>
-      </p:pic>
-    </p:spTree>
-    <p:extLst>
-      <p:ext uri="{BB962C8B-B14F-4D97-AF65-F5344CB8AC3E}">
-        <p14:creationId xmlns:p14="http://schemas.microsoft.com/office/powerpoint/2010/main" val="1895791079"/>
-      </p:ext>
-    </p:extLst>
-  </p:cSld>
-  <p:clrMapOvr>
-    <a:masterClrMapping/>
-  </p:clrMapOvr>
-</p:sld>
-</file>
-
-<file path=ppt/slides/slide19.xml><?xml version="1.0" encoding="utf-8"?>
-<p:sld xmlns:a="http://schemas.openxmlformats.org/drawingml/2006/main" xmlns:r="http://schemas.openxmlformats.org/officeDocument/2006/relationships" xmlns:p="http://schemas.openxmlformats.org/presentationml/2006/main">
-  <p:cSld>
-    <p:spTree>
-      <p:nvGrpSpPr>
-        <p:cNvPr id="1" name="">
-          <a:extLst>
-            <a:ext uri="{FF2B5EF4-FFF2-40B4-BE49-F238E27FC236}">
-              <a16:creationId xmlns:a16="http://schemas.microsoft.com/office/drawing/2014/main" id="{DDCA1431-1044-F8DC-F67B-8483993AE82E}"/>
-            </a:ext>
-          </a:extLst>
-        </p:cNvPr>
-        <p:cNvGrpSpPr/>
-        <p:nvPr/>
-      </p:nvGrpSpPr>
-      <p:grpSpPr>
-        <a:xfrm>
-          <a:off x="0" y="0"/>
-          <a:ext cx="0" cy="0"/>
-          <a:chOff x="0" y="0"/>
-          <a:chExt cx="0" cy="0"/>
-        </a:xfrm>
-      </p:grpSpPr>
-      <p:sp>
-        <p:nvSpPr>
-          <p:cNvPr id="2" name="Title 1">
-            <a:extLst>
-              <a:ext uri="{FF2B5EF4-FFF2-40B4-BE49-F238E27FC236}">
-                <a16:creationId xmlns:a16="http://schemas.microsoft.com/office/drawing/2014/main" id="{E716AE94-3F36-12C5-8548-C3DFAEE335E5}"/>
-              </a:ext>
-            </a:extLst>
-          </p:cNvPr>
-          <p:cNvSpPr>
-            <a:spLocks noGrp="1"/>
-          </p:cNvSpPr>
-          <p:nvPr>
-            <p:ph type="title"/>
-          </p:nvPr>
-        </p:nvSpPr>
-        <p:spPr/>
-        <p:txBody>
-          <a:bodyPr/>
-          <a:lstStyle/>
-          <a:p>
-            <a:r>
-              <a:rPr lang="en-US" dirty="0"/>
-              <a:t>Challenge – View All the incidents</a:t>
-            </a:r>
-          </a:p>
-        </p:txBody>
-      </p:sp>
-      <p:sp>
-        <p:nvSpPr>
-          <p:cNvPr id="3" name="Content Placeholder 2">
-            <a:extLst>
-              <a:ext uri="{FF2B5EF4-FFF2-40B4-BE49-F238E27FC236}">
-                <a16:creationId xmlns:a16="http://schemas.microsoft.com/office/drawing/2014/main" id="{C2F91159-254F-2A45-308C-9EFACD5920A2}"/>
-              </a:ext>
-            </a:extLst>
-          </p:cNvPr>
-          <p:cNvSpPr>
-            <a:spLocks noGrp="1"/>
-          </p:cNvSpPr>
-          <p:nvPr>
-            <p:ph idx="1"/>
-          </p:nvPr>
-        </p:nvSpPr>
-        <p:spPr>
-          <a:xfrm>
-            <a:off x="581192" y="2475925"/>
-            <a:ext cx="5317584" cy="1681246"/>
-          </a:xfrm>
-        </p:spPr>
-        <p:txBody>
-          <a:bodyPr/>
-          <a:lstStyle/>
-          <a:p>
-            <a:r>
-              <a:rPr lang="en-US" dirty="0"/>
-              <a:t>Edit your work so that all incidents display</a:t>
-            </a:r>
-          </a:p>
-        </p:txBody>
-      </p:sp>
-      <p:sp>
-        <p:nvSpPr>
-          <p:cNvPr id="6" name="TextBox 5">
-            <a:extLst>
-              <a:ext uri="{FF2B5EF4-FFF2-40B4-BE49-F238E27FC236}">
-                <a16:creationId xmlns:a16="http://schemas.microsoft.com/office/drawing/2014/main" id="{99137B85-329C-D7A2-FD80-98DDDAC248A8}"/>
-              </a:ext>
-            </a:extLst>
-          </p:cNvPr>
-          <p:cNvSpPr txBox="1"/>
-          <p:nvPr/>
-        </p:nvSpPr>
-        <p:spPr>
-          <a:xfrm>
-            <a:off x="1228165" y="2402747"/>
-            <a:ext cx="756938" cy="369332"/>
-          </a:xfrm>
-          <a:prstGeom prst="rect">
-            <a:avLst/>
-          </a:prstGeom>
-          <a:noFill/>
-        </p:spPr>
-        <p:txBody>
-          <a:bodyPr wrap="none" rtlCol="0">
-            <a:spAutoFit/>
-          </a:bodyPr>
-          <a:lstStyle/>
-          <a:p>
-            <a:r>
-              <a:rPr lang="en-US" b="1" dirty="0"/>
-              <a:t>Goal:</a:t>
-            </a:r>
-          </a:p>
-        </p:txBody>
-      </p:sp>
-      <p:sp>
-        <p:nvSpPr>
-          <p:cNvPr id="7" name="TextBox 6">
-            <a:extLst>
-              <a:ext uri="{FF2B5EF4-FFF2-40B4-BE49-F238E27FC236}">
-                <a16:creationId xmlns:a16="http://schemas.microsoft.com/office/drawing/2014/main" id="{9261B69C-A152-D3A6-CD68-1DA17F801EE2}"/>
-              </a:ext>
-            </a:extLst>
-          </p:cNvPr>
-          <p:cNvSpPr txBox="1"/>
-          <p:nvPr/>
-        </p:nvSpPr>
-        <p:spPr>
-          <a:xfrm>
-            <a:off x="6676991" y="2402747"/>
-            <a:ext cx="4933817" cy="369332"/>
-          </a:xfrm>
-          <a:prstGeom prst="rect">
-            <a:avLst/>
-          </a:prstGeom>
-          <a:noFill/>
-        </p:spPr>
-        <p:txBody>
-          <a:bodyPr wrap="square" rtlCol="0">
-            <a:spAutoFit/>
-          </a:bodyPr>
-          <a:lstStyle/>
-          <a:p>
-            <a:r>
-              <a:rPr lang="en-US" b="1" dirty="0"/>
-              <a:t>Scenario:  			   25 min</a:t>
-            </a:r>
-          </a:p>
-        </p:txBody>
-      </p:sp>
-      <p:sp>
-        <p:nvSpPr>
-          <p:cNvPr id="8" name="Content Placeholder 2">
-            <a:extLst>
-              <a:ext uri="{FF2B5EF4-FFF2-40B4-BE49-F238E27FC236}">
-                <a16:creationId xmlns:a16="http://schemas.microsoft.com/office/drawing/2014/main" id="{45AEE151-BC9C-8BDA-FA0B-94944123D0CA}"/>
-              </a:ext>
-            </a:extLst>
-          </p:cNvPr>
-          <p:cNvSpPr txBox="1">
-            <a:spLocks/>
-          </p:cNvSpPr>
-          <p:nvPr/>
-        </p:nvSpPr>
-        <p:spPr>
-          <a:xfrm>
-            <a:off x="5314644" y="3054587"/>
-            <a:ext cx="5740756" cy="2753931"/>
-          </a:xfrm>
-          <a:prstGeom prst="rect">
-            <a:avLst/>
-          </a:prstGeom>
-        </p:spPr>
-        <p:txBody>
-          <a:bodyPr vert="horz" lIns="91440" tIns="45720" rIns="91440" bIns="45720" rtlCol="0" anchor="ctr">
-            <a:normAutofit fontScale="92500"/>
-          </a:bodyPr>
-          <a:lstStyle>
-            <a:lvl1pPr marL="306000" indent="-306000" algn="l" defTabSz="457200" rtl="0" eaLnBrk="1" latinLnBrk="0" hangingPunct="1">
-              <a:spcBef>
-                <a:spcPct val="20000"/>
-              </a:spcBef>
-              <a:spcAft>
-                <a:spcPts val="600"/>
-              </a:spcAft>
-              <a:buClr>
-                <a:schemeClr val="accent2"/>
-              </a:buClr>
-              <a:buSzPct val="92000"/>
-              <a:buFont typeface="Wingdings 2" panose="05020102010507070707" pitchFamily="18" charset="2"/>
-              <a:buChar char=""/>
-              <a:defRPr sz="1800" kern="1200">
-                <a:solidFill>
-                  <a:schemeClr val="tx2"/>
-                </a:solidFill>
-                <a:latin typeface="+mn-lt"/>
-                <a:ea typeface="+mn-ea"/>
-                <a:cs typeface="+mn-cs"/>
-              </a:defRPr>
-            </a:lvl1pPr>
-            <a:lvl2pPr marL="630000" indent="-306000" algn="l" defTabSz="457200" rtl="0" eaLnBrk="1" latinLnBrk="0" hangingPunct="1">
-              <a:spcBef>
-                <a:spcPct val="20000"/>
-              </a:spcBef>
-              <a:spcAft>
-                <a:spcPts val="600"/>
-              </a:spcAft>
-              <a:buClr>
-                <a:schemeClr val="accent2"/>
-              </a:buClr>
-              <a:buSzPct val="92000"/>
-              <a:buFont typeface="Wingdings 2" panose="05020102010507070707" pitchFamily="18" charset="2"/>
-              <a:buChar char=""/>
-              <a:defRPr sz="1600" kern="1200">
-                <a:solidFill>
-                  <a:schemeClr val="tx2"/>
-                </a:solidFill>
-                <a:latin typeface="+mn-lt"/>
-                <a:ea typeface="+mn-ea"/>
-                <a:cs typeface="+mn-cs"/>
-              </a:defRPr>
-            </a:lvl2pPr>
-            <a:lvl3pPr marL="900000" indent="-270000" algn="l" defTabSz="457200" rtl="0" eaLnBrk="1" latinLnBrk="0" hangingPunct="1">
-              <a:spcBef>
-                <a:spcPct val="20000"/>
-              </a:spcBef>
-              <a:spcAft>
-                <a:spcPts val="600"/>
-              </a:spcAft>
-              <a:buClr>
-                <a:schemeClr val="accent2"/>
-              </a:buClr>
-              <a:buSzPct val="92000"/>
-              <a:buFont typeface="Wingdings 2" panose="05020102010507070707" pitchFamily="18" charset="2"/>
-              <a:buChar char=""/>
-              <a:defRPr sz="1400" kern="1200">
-                <a:solidFill>
-                  <a:schemeClr val="tx2"/>
-                </a:solidFill>
-                <a:latin typeface="+mn-lt"/>
-                <a:ea typeface="+mn-ea"/>
-                <a:cs typeface="+mn-cs"/>
-              </a:defRPr>
-            </a:lvl3pPr>
-            <a:lvl4pPr marL="1242000" indent="-234000" algn="l" defTabSz="457200" rtl="0" eaLnBrk="1" latinLnBrk="0" hangingPunct="1">
-              <a:spcBef>
-                <a:spcPct val="20000"/>
-              </a:spcBef>
-              <a:spcAft>
-                <a:spcPts val="600"/>
-              </a:spcAft>
-              <a:buClr>
-                <a:schemeClr val="accent2"/>
-              </a:buClr>
-              <a:buSzPct val="92000"/>
-              <a:buFont typeface="Wingdings 2" panose="05020102010507070707" pitchFamily="18" charset="2"/>
-              <a:buChar char=""/>
-              <a:defRPr sz="1200" kern="1200">
-                <a:solidFill>
-                  <a:schemeClr val="tx2"/>
-                </a:solidFill>
-                <a:latin typeface="+mn-lt"/>
-                <a:ea typeface="+mn-ea"/>
-                <a:cs typeface="+mn-cs"/>
-              </a:defRPr>
-            </a:lvl4pPr>
-            <a:lvl5pPr marL="1602000" indent="-234000" algn="l" defTabSz="457200" rtl="0" eaLnBrk="1" latinLnBrk="0" hangingPunct="1">
-              <a:spcBef>
-                <a:spcPct val="20000"/>
-              </a:spcBef>
-              <a:spcAft>
-                <a:spcPts val="600"/>
-              </a:spcAft>
-              <a:buClr>
-                <a:schemeClr val="accent2"/>
-              </a:buClr>
-              <a:buSzPct val="92000"/>
-              <a:buFont typeface="Wingdings 2" panose="05020102010507070707" pitchFamily="18" charset="2"/>
-              <a:buChar char=""/>
-              <a:defRPr sz="1200" kern="1200">
-                <a:solidFill>
-                  <a:schemeClr val="tx2"/>
-                </a:solidFill>
-                <a:latin typeface="+mn-lt"/>
-                <a:ea typeface="+mn-ea"/>
-                <a:cs typeface="+mn-cs"/>
-              </a:defRPr>
-            </a:lvl5pPr>
-            <a:lvl6pPr marL="1900000" indent="-228600" algn="l" defTabSz="457200" rtl="0" eaLnBrk="1" latinLnBrk="0" hangingPunct="1">
-              <a:spcBef>
-                <a:spcPct val="20000"/>
-              </a:spcBef>
-              <a:spcAft>
-                <a:spcPts val="600"/>
-              </a:spcAft>
-              <a:buClr>
-                <a:schemeClr val="accent2"/>
-              </a:buClr>
-              <a:buSzPct val="92000"/>
-              <a:buFont typeface="Wingdings 2" panose="05020102010507070707" pitchFamily="18" charset="2"/>
-              <a:buChar char=""/>
-              <a:defRPr sz="1200" kern="1200">
-                <a:solidFill>
-                  <a:schemeClr val="tx2"/>
-                </a:solidFill>
-                <a:latin typeface="+mn-lt"/>
-                <a:ea typeface="+mn-ea"/>
-                <a:cs typeface="+mn-cs"/>
-              </a:defRPr>
-            </a:lvl6pPr>
-            <a:lvl7pPr marL="2200000" indent="-228600" algn="l" defTabSz="457200" rtl="0" eaLnBrk="1" latinLnBrk="0" hangingPunct="1">
-              <a:spcBef>
-                <a:spcPct val="20000"/>
-              </a:spcBef>
-              <a:spcAft>
-                <a:spcPts val="600"/>
-              </a:spcAft>
-              <a:buClr>
-                <a:schemeClr val="accent2"/>
-              </a:buClr>
-              <a:buSzPct val="92000"/>
-              <a:buFont typeface="Wingdings 2" panose="05020102010507070707" pitchFamily="18" charset="2"/>
-              <a:buChar char=""/>
-              <a:defRPr sz="1200" kern="1200">
-                <a:solidFill>
-                  <a:schemeClr val="tx2"/>
-                </a:solidFill>
-                <a:latin typeface="+mn-lt"/>
-                <a:ea typeface="+mn-ea"/>
-                <a:cs typeface="+mn-cs"/>
-              </a:defRPr>
-            </a:lvl7pPr>
-            <a:lvl8pPr marL="2500000" indent="-228600" algn="l" defTabSz="457200" rtl="0" eaLnBrk="1" latinLnBrk="0" hangingPunct="1">
-              <a:spcBef>
-                <a:spcPct val="20000"/>
-              </a:spcBef>
-              <a:spcAft>
-                <a:spcPts val="600"/>
-              </a:spcAft>
-              <a:buClr>
-                <a:schemeClr val="accent2"/>
-              </a:buClr>
-              <a:buSzPct val="92000"/>
-              <a:buFont typeface="Wingdings 2" panose="05020102010507070707" pitchFamily="18" charset="2"/>
-              <a:buChar char=""/>
-              <a:defRPr sz="1200" kern="1200">
-                <a:solidFill>
-                  <a:schemeClr val="tx2"/>
-                </a:solidFill>
-                <a:latin typeface="+mn-lt"/>
-                <a:ea typeface="+mn-ea"/>
-                <a:cs typeface="+mn-cs"/>
-              </a:defRPr>
-            </a:lvl8pPr>
-            <a:lvl9pPr marL="2800000" indent="-228600" algn="l" defTabSz="457200" rtl="0" eaLnBrk="1" latinLnBrk="0" hangingPunct="1">
-              <a:spcBef>
-                <a:spcPct val="20000"/>
-              </a:spcBef>
-              <a:spcAft>
-                <a:spcPts val="600"/>
-              </a:spcAft>
-              <a:buClr>
-                <a:schemeClr val="accent2"/>
-              </a:buClr>
-              <a:buSzPct val="92000"/>
-              <a:buFont typeface="Wingdings 2" panose="05020102010507070707" pitchFamily="18" charset="2"/>
-              <a:buChar char=""/>
-              <a:defRPr sz="1200" kern="1200">
-                <a:solidFill>
-                  <a:schemeClr val="tx2"/>
-                </a:solidFill>
-                <a:latin typeface="+mn-lt"/>
-                <a:ea typeface="+mn-ea"/>
-                <a:cs typeface="+mn-cs"/>
-              </a:defRPr>
-            </a:lvl9pPr>
-          </a:lstStyle>
-          <a:p>
-            <a:r>
-              <a:rPr lang="en-US" dirty="0"/>
-              <a:t>Your organization needs to build a portal for service technicians. This portal should be able to view, modify, and delete incidents. This application will be written in React.</a:t>
-            </a:r>
-          </a:p>
-          <a:p>
-            <a:r>
-              <a:rPr lang="en-US" dirty="0"/>
-              <a:t>Modify your ‘</a:t>
-            </a:r>
-            <a:r>
-              <a:rPr lang="en-US" dirty="0" err="1"/>
-              <a:t>IncidentList</a:t>
-            </a:r>
-            <a:r>
-              <a:rPr lang="en-US" dirty="0"/>
-              <a:t>’ component so that it loops through the dummy data and displays all the incident records. </a:t>
-            </a:r>
-          </a:p>
-          <a:p>
-            <a:r>
-              <a:rPr lang="en-US" dirty="0"/>
-              <a:t>Style your components so each record is displayed on a card</a:t>
-            </a:r>
-            <a:br>
-              <a:rPr lang="en-US" dirty="0"/>
-            </a:br>
-            <a:endParaRPr lang="en-US" dirty="0"/>
-          </a:p>
-        </p:txBody>
-      </p:sp>
-      <p:pic>
-        <p:nvPicPr>
-          <p:cNvPr id="5" name="Picture 4">
-            <a:extLst>
-              <a:ext uri="{FF2B5EF4-FFF2-40B4-BE49-F238E27FC236}">
-                <a16:creationId xmlns:a16="http://schemas.microsoft.com/office/drawing/2014/main" id="{BA58AFF3-3C87-ACF1-1986-AE292BFC4E52}"/>
-              </a:ext>
-            </a:extLst>
-          </p:cNvPr>
-          <p:cNvPicPr>
-            <a:picLocks noChangeAspect="1"/>
-          </p:cNvPicPr>
-          <p:nvPr/>
-        </p:nvPicPr>
-        <p:blipFill>
-          <a:blip r:embed="rId2"/>
-          <a:stretch>
-            <a:fillRect/>
-          </a:stretch>
-        </p:blipFill>
-        <p:spPr>
-          <a:xfrm>
-            <a:off x="370608" y="4085922"/>
-            <a:ext cx="4536724" cy="1910326"/>
-          </a:xfrm>
-          <a:prstGeom prst="rect">
-            <a:avLst/>
-          </a:prstGeom>
-        </p:spPr>
-      </p:pic>
-    </p:spTree>
-    <p:extLst>
-      <p:ext uri="{BB962C8B-B14F-4D97-AF65-F5344CB8AC3E}">
-        <p14:creationId xmlns:p14="http://schemas.microsoft.com/office/powerpoint/2010/main" val="436625631"/>
-      </p:ext>
-    </p:extLst>
-  </p:cSld>
-  <p:clrMapOvr>
-    <a:masterClrMapping/>
-  </p:clrMapOvr>
-</p:sld>
-</file>
-
-<file path=ppt/slides/slide2.xml><?xml version="1.0" encoding="utf-8"?>
-<p:sld xmlns:a="http://schemas.openxmlformats.org/drawingml/2006/main" xmlns:r="http://schemas.openxmlformats.org/officeDocument/2006/relationships" xmlns:p="http://schemas.openxmlformats.org/presentationml/2006/main">
-  <p:cSld>
-    <p:bg>
-      <p:bgPr>
-        <a:solidFill>
-          <a:schemeClr val="bg1"/>
-        </a:solidFill>
-        <a:effectLst/>
-      </p:bgPr>
-    </p:bg>
-    <p:spTree>
-      <p:nvGrpSpPr>
-        <p:cNvPr id="1" name=""/>
-        <p:cNvGrpSpPr/>
-        <p:nvPr/>
-      </p:nvGrpSpPr>
-      <p:grpSpPr>
-        <a:xfrm>
-          <a:off x="0" y="0"/>
-          <a:ext cx="0" cy="0"/>
-          <a:chOff x="0" y="0"/>
-          <a:chExt cx="0" cy="0"/>
-        </a:xfrm>
-      </p:grpSpPr>
-      <p:sp useBgFill="1">
-        <p:nvSpPr>
-          <p:cNvPr id="10" name="Rectangle 9">
-            <a:extLst>
-              <a:ext uri="{FF2B5EF4-FFF2-40B4-BE49-F238E27FC236}">
-                <a16:creationId xmlns:a16="http://schemas.microsoft.com/office/drawing/2014/main" id="{F1ADD25B-0A33-4EF2-90F4-43139269318B}"/>
-              </a:ext>
-              <a:ext uri="{C183D7F6-B498-43B3-948B-1728B52AA6E4}">
-                <adec:decorative xmlns:adec="http://schemas.microsoft.com/office/drawing/2017/decorative" val="1"/>
-              </a:ext>
-            </a:extLst>
-          </p:cNvPr>
-          <p:cNvSpPr>
-            <a:spLocks noGrp="1" noRot="1" noChangeAspect="1" noMove="1" noResize="1" noEditPoints="1" noAdjustHandles="1" noChangeArrowheads="1" noChangeShapeType="1" noTextEdit="1"/>
-          </p:cNvSpPr>
-          <p:nvPr>
-            <p:extLst>
-              <p:ext uri="{386F3935-93C4-4BCD-93E2-E3B085C9AB24}">
-                <p16:designElem xmlns:p16="http://schemas.microsoft.com/office/powerpoint/2015/main" val="1"/>
-              </p:ext>
-            </p:extLst>
-          </p:nvPr>
-        </p:nvSpPr>
-        <p:spPr>
-          <a:xfrm>
-            <a:off x="0" y="614406"/>
-            <a:ext cx="12192000" cy="6243593"/>
-          </a:xfrm>
-          <a:prstGeom prst="rect">
-            <a:avLst/>
-          </a:prstGeom>
-          <a:ln>
-            <a:noFill/>
-          </a:ln>
-        </p:spPr>
-        <p:style>
-          <a:lnRef idx="2">
-            <a:schemeClr val="accent1">
-              <a:shade val="50000"/>
-            </a:schemeClr>
-          </a:lnRef>
-          <a:fillRef idx="1">
-            <a:schemeClr val="accent1"/>
-          </a:fillRef>
-          <a:effectRef idx="0">
-            <a:schemeClr val="accent1"/>
-          </a:effectRef>
-          <a:fontRef idx="minor">
-            <a:schemeClr val="lt1"/>
-          </a:fontRef>
-        </p:style>
-        <p:txBody>
-          <a:bodyPr rtlCol="0" anchor="ctr"/>
-          <a:lstStyle/>
-          <a:p>
-            <a:pPr algn="ctr"/>
-            <a:endParaRPr lang="en-US"/>
-          </a:p>
-        </p:txBody>
-      </p:sp>
-      <p:sp>
-        <p:nvSpPr>
-          <p:cNvPr id="12" name="Rectangle 11">
-            <a:extLst>
-              <a:ext uri="{FF2B5EF4-FFF2-40B4-BE49-F238E27FC236}">
-                <a16:creationId xmlns:a16="http://schemas.microsoft.com/office/drawing/2014/main" id="{74DB6F31-1B9E-4237-84A3-0825BFDF4616}"/>
-              </a:ext>
-              <a:ext uri="{C183D7F6-B498-43B3-948B-1728B52AA6E4}">
-                <adec:decorative xmlns:adec="http://schemas.microsoft.com/office/drawing/2017/decorative" val="1"/>
-              </a:ext>
-            </a:extLst>
-          </p:cNvPr>
-          <p:cNvSpPr>
-            <a:spLocks noGrp="1" noRot="1" noChangeAspect="1" noMove="1" noResize="1" noEditPoints="1" noAdjustHandles="1" noChangeArrowheads="1" noChangeShapeType="1" noTextEdit="1"/>
-          </p:cNvSpPr>
-          <p:nvPr>
-            <p:extLst>
-              <p:ext uri="{386F3935-93C4-4BCD-93E2-E3B085C9AB24}">
-                <p16:designElem xmlns:p16="http://schemas.microsoft.com/office/powerpoint/2015/main" val="1"/>
-              </p:ext>
-            </p:extLst>
-          </p:nvPr>
-        </p:nvSpPr>
-        <p:spPr>
-          <a:xfrm>
-            <a:off x="442377" y="614407"/>
-            <a:ext cx="3707477" cy="5611772"/>
-          </a:xfrm>
-          <a:prstGeom prst="rect">
-            <a:avLst/>
-          </a:prstGeom>
-          <a:solidFill>
-            <a:schemeClr val="accent1"/>
-          </a:solidFill>
-          <a:ln>
-            <a:noFill/>
-          </a:ln>
-          <a:effectLst/>
-        </p:spPr>
-        <p:style>
-          <a:lnRef idx="1">
-            <a:schemeClr val="accent1"/>
-          </a:lnRef>
-          <a:fillRef idx="3">
-            <a:schemeClr val="accent1"/>
-          </a:fillRef>
-          <a:effectRef idx="2">
-            <a:schemeClr val="accent1"/>
-          </a:effectRef>
-          <a:fontRef idx="minor">
-            <a:schemeClr val="lt1"/>
-          </a:fontRef>
-        </p:style>
-        <p:txBody>
-          <a:bodyPr/>
-          <a:lstStyle/>
-          <a:p>
-            <a:endParaRPr lang="en-US"/>
-          </a:p>
-        </p:txBody>
-      </p:sp>
-      <p:sp>
-        <p:nvSpPr>
-          <p:cNvPr id="2" name="Title 1">
-            <a:extLst>
-              <a:ext uri="{FF2B5EF4-FFF2-40B4-BE49-F238E27FC236}">
-                <a16:creationId xmlns:a16="http://schemas.microsoft.com/office/drawing/2014/main" id="{2B2FDC9B-E008-C5DA-8CAB-633216688A9B}"/>
-              </a:ext>
-            </a:extLst>
-          </p:cNvPr>
-          <p:cNvSpPr>
-            <a:spLocks noGrp="1"/>
-          </p:cNvSpPr>
-          <p:nvPr>
-            <p:ph type="title"/>
-          </p:nvPr>
-        </p:nvSpPr>
-        <p:spPr>
-          <a:xfrm>
-            <a:off x="601255" y="702156"/>
-            <a:ext cx="3409783" cy="1013800"/>
-          </a:xfrm>
-        </p:spPr>
-        <p:txBody>
-          <a:bodyPr>
-            <a:normAutofit/>
-          </a:bodyPr>
-          <a:lstStyle/>
-          <a:p>
-            <a:r>
-              <a:rPr lang="en-US" dirty="0"/>
-              <a:t>What is React?</a:t>
-            </a:r>
-          </a:p>
-        </p:txBody>
-      </p:sp>
-      <p:sp>
-        <p:nvSpPr>
-          <p:cNvPr id="3" name="Content Placeholder 2">
-            <a:extLst>
-              <a:ext uri="{FF2B5EF4-FFF2-40B4-BE49-F238E27FC236}">
-                <a16:creationId xmlns:a16="http://schemas.microsoft.com/office/drawing/2014/main" id="{C3D85CE1-91C2-05D6-C8B9-88412DDBD769}"/>
-              </a:ext>
-            </a:extLst>
-          </p:cNvPr>
-          <p:cNvSpPr>
-            <a:spLocks noGrp="1"/>
-          </p:cNvSpPr>
-          <p:nvPr>
-            <p:ph idx="1"/>
-          </p:nvPr>
-        </p:nvSpPr>
-        <p:spPr>
-          <a:xfrm>
-            <a:off x="601255" y="1964168"/>
-            <a:ext cx="3409782" cy="4036582"/>
-          </a:xfrm>
-        </p:spPr>
-        <p:txBody>
-          <a:bodyPr>
-            <a:normAutofit/>
-          </a:bodyPr>
-          <a:lstStyle/>
-          <a:p>
-            <a:r>
-              <a:rPr lang="en-US" dirty="0">
-                <a:solidFill>
-                  <a:schemeClr val="bg1"/>
-                </a:solidFill>
-              </a:rPr>
-              <a:t>Definition: </a:t>
-            </a:r>
-            <a:r>
-              <a:rPr lang="en-US" dirty="0">
-                <a:solidFill>
-                  <a:schemeClr val="accent2"/>
-                </a:solidFill>
-              </a:rPr>
-              <a:t>React</a:t>
-            </a:r>
-            <a:r>
-              <a:rPr lang="en-US" dirty="0">
-                <a:solidFill>
-                  <a:schemeClr val="bg1"/>
-                </a:solidFill>
-              </a:rPr>
-              <a:t> is a front-end JavaScript library</a:t>
-            </a:r>
-          </a:p>
-          <a:p>
-            <a:pPr lvl="1"/>
-            <a:r>
-              <a:rPr lang="en-US" dirty="0">
-                <a:solidFill>
-                  <a:schemeClr val="bg1"/>
-                </a:solidFill>
-              </a:rPr>
-              <a:t>React is also known as React.js or ReactJS</a:t>
-            </a:r>
-          </a:p>
-          <a:p>
-            <a:pPr lvl="1"/>
-            <a:r>
-              <a:rPr lang="en-US" dirty="0">
-                <a:solidFill>
-                  <a:schemeClr val="bg1"/>
-                </a:solidFill>
-              </a:rPr>
-              <a:t>React is a tool for building UI components</a:t>
-            </a:r>
-          </a:p>
-          <a:p>
-            <a:r>
-              <a:rPr lang="en-US" dirty="0" err="1">
-                <a:solidFill>
-                  <a:schemeClr val="bg1"/>
-                </a:solidFill>
-              </a:rPr>
-              <a:t>react.dev</a:t>
-            </a:r>
-            <a:r>
-              <a:rPr lang="en-US" dirty="0">
-                <a:solidFill>
-                  <a:schemeClr val="bg1"/>
-                </a:solidFill>
-              </a:rPr>
-              <a:t>/learn </a:t>
-            </a:r>
-          </a:p>
-        </p:txBody>
-      </p:sp>
-      <p:pic>
-        <p:nvPicPr>
-          <p:cNvPr id="5" name="Picture 4">
-            <a:extLst>
-              <a:ext uri="{FF2B5EF4-FFF2-40B4-BE49-F238E27FC236}">
-                <a16:creationId xmlns:a16="http://schemas.microsoft.com/office/drawing/2014/main" id="{61DACAEC-8645-F494-584E-E0B6A07EE975}"/>
-              </a:ext>
-            </a:extLst>
-          </p:cNvPr>
-          <p:cNvPicPr>
-            <a:picLocks noChangeAspect="1"/>
-          </p:cNvPicPr>
-          <p:nvPr/>
-        </p:nvPicPr>
-        <p:blipFill>
-          <a:blip r:embed="rId2"/>
-          <a:stretch>
-            <a:fillRect/>
-          </a:stretch>
-        </p:blipFill>
-        <p:spPr>
-          <a:xfrm>
-            <a:off x="4784250" y="718314"/>
-            <a:ext cx="6340790" cy="2710686"/>
-          </a:xfrm>
-          <a:prstGeom prst="rect">
-            <a:avLst/>
-          </a:prstGeom>
-        </p:spPr>
-      </p:pic>
-      <p:pic>
-        <p:nvPicPr>
-          <p:cNvPr id="7" name="Picture 6">
-            <a:extLst>
-              <a:ext uri="{FF2B5EF4-FFF2-40B4-BE49-F238E27FC236}">
-                <a16:creationId xmlns:a16="http://schemas.microsoft.com/office/drawing/2014/main" id="{30CE7030-0458-1D8B-C108-9447BDFFDCCD}"/>
-              </a:ext>
-            </a:extLst>
-          </p:cNvPr>
-          <p:cNvPicPr>
-            <a:picLocks noChangeAspect="1"/>
-          </p:cNvPicPr>
-          <p:nvPr/>
-        </p:nvPicPr>
-        <p:blipFill>
-          <a:blip r:embed="rId3"/>
-          <a:stretch>
-            <a:fillRect/>
-          </a:stretch>
-        </p:blipFill>
-        <p:spPr>
-          <a:xfrm>
-            <a:off x="4784251" y="3635363"/>
-            <a:ext cx="6340790" cy="2745804"/>
-          </a:xfrm>
-          <a:prstGeom prst="rect">
-            <a:avLst/>
-          </a:prstGeom>
-        </p:spPr>
-      </p:pic>
-    </p:spTree>
-    <p:extLst>
-      <p:ext uri="{BB962C8B-B14F-4D97-AF65-F5344CB8AC3E}">
-        <p14:creationId xmlns:p14="http://schemas.microsoft.com/office/powerpoint/2010/main" val="1314330982"/>
-      </p:ext>
-    </p:extLst>
-  </p:cSld>
-  <p:clrMapOvr>
-    <a:masterClrMapping/>
-  </p:clrMapOvr>
-</p:sld>
-</file>
-
-<file path=ppt/slides/slide3.xml><?xml version="1.0" encoding="utf-8"?>
-<p:sld xmlns:a="http://schemas.openxmlformats.org/drawingml/2006/main" xmlns:r="http://schemas.openxmlformats.org/officeDocument/2006/relationships" xmlns:p="http://schemas.openxmlformats.org/presentationml/2006/main">
-  <p:cSld>
-    <p:spTree>
-      <p:nvGrpSpPr>
-        <p:cNvPr id="1" name=""/>
-        <p:cNvGrpSpPr/>
-        <p:nvPr/>
-      </p:nvGrpSpPr>
-      <p:grpSpPr>
-        <a:xfrm>
-          <a:off x="0" y="0"/>
-          <a:ext cx="0" cy="0"/>
-          <a:chOff x="0" y="0"/>
-          <a:chExt cx="0" cy="0"/>
-        </a:xfrm>
-      </p:grpSpPr>
-      <p:sp>
-        <p:nvSpPr>
-          <p:cNvPr id="2" name="Title 1">
-            <a:extLst>
-              <a:ext uri="{FF2B5EF4-FFF2-40B4-BE49-F238E27FC236}">
-                <a16:creationId xmlns:a16="http://schemas.microsoft.com/office/drawing/2014/main" id="{DE0CD4A6-DD2E-5DF2-1E7A-3CC10388378A}"/>
-              </a:ext>
-            </a:extLst>
-          </p:cNvPr>
-          <p:cNvSpPr>
-            <a:spLocks noGrp="1"/>
-          </p:cNvSpPr>
-          <p:nvPr>
-            <p:ph type="title"/>
-          </p:nvPr>
-        </p:nvSpPr>
-        <p:spPr/>
-        <p:txBody>
-          <a:bodyPr/>
-          <a:lstStyle/>
-          <a:p>
-            <a:r>
-              <a:rPr lang="en-US" dirty="0"/>
-              <a:t>How Does React Work?</a:t>
-            </a:r>
-          </a:p>
-        </p:txBody>
-      </p:sp>
-      <p:sp>
-        <p:nvSpPr>
-          <p:cNvPr id="3" name="Content Placeholder 2">
-            <a:extLst>
-              <a:ext uri="{FF2B5EF4-FFF2-40B4-BE49-F238E27FC236}">
-                <a16:creationId xmlns:a16="http://schemas.microsoft.com/office/drawing/2014/main" id="{3657794F-23F3-26FD-CC67-AAE322DC1768}"/>
-              </a:ext>
-            </a:extLst>
-          </p:cNvPr>
-          <p:cNvSpPr>
-            <a:spLocks noGrp="1"/>
-          </p:cNvSpPr>
-          <p:nvPr>
-            <p:ph idx="1"/>
-          </p:nvPr>
-        </p:nvSpPr>
-        <p:spPr>
-          <a:xfrm>
-            <a:off x="581193" y="2180496"/>
-            <a:ext cx="4932102" cy="3678303"/>
-          </a:xfrm>
-        </p:spPr>
-        <p:txBody>
-          <a:bodyPr/>
-          <a:lstStyle/>
-          <a:p>
-            <a:r>
-              <a:rPr lang="en-US" dirty="0"/>
-              <a:t>React creates a virtual DOM in memory</a:t>
-            </a:r>
-          </a:p>
-          <a:p>
-            <a:pPr lvl="1"/>
-            <a:r>
-              <a:rPr lang="en-US" dirty="0"/>
-              <a:t>Instead of manipulating the browser’s DOM directly, React creates a virtual DOM in memory, where it does all the necessary manipulating, before making changes in the browser DOM</a:t>
-            </a:r>
-          </a:p>
-        </p:txBody>
-      </p:sp>
-      <p:pic>
-        <p:nvPicPr>
-          <p:cNvPr id="7" name="Picture 6">
-            <a:extLst>
-              <a:ext uri="{FF2B5EF4-FFF2-40B4-BE49-F238E27FC236}">
-                <a16:creationId xmlns:a16="http://schemas.microsoft.com/office/drawing/2014/main" id="{790DFA8A-953B-F0D5-304B-0BBAE13B8EE4}"/>
-              </a:ext>
-            </a:extLst>
-          </p:cNvPr>
-          <p:cNvPicPr>
-            <a:picLocks noChangeAspect="1"/>
-          </p:cNvPicPr>
-          <p:nvPr/>
-        </p:nvPicPr>
-        <p:blipFill>
-          <a:blip r:embed="rId2"/>
-          <a:stretch>
-            <a:fillRect/>
-          </a:stretch>
-        </p:blipFill>
-        <p:spPr>
-          <a:xfrm>
-            <a:off x="6096000" y="2914514"/>
-            <a:ext cx="4172532" cy="1943371"/>
-          </a:xfrm>
-          <a:prstGeom prst="rect">
-            <a:avLst/>
-          </a:prstGeom>
-        </p:spPr>
-      </p:pic>
-    </p:spTree>
-    <p:extLst>
-      <p:ext uri="{BB962C8B-B14F-4D97-AF65-F5344CB8AC3E}">
-        <p14:creationId xmlns:p14="http://schemas.microsoft.com/office/powerpoint/2010/main" val="901512706"/>
-      </p:ext>
-    </p:extLst>
-  </p:cSld>
-  <p:clrMapOvr>
-    <a:masterClrMapping/>
-  </p:clrMapOvr>
-</p:sld>
-</file>
-
-<file path=ppt/slides/slide4.xml><?xml version="1.0" encoding="utf-8"?>
-<p:sld xmlns:a="http://schemas.openxmlformats.org/drawingml/2006/main" xmlns:r="http://schemas.openxmlformats.org/officeDocument/2006/relationships" xmlns:p="http://schemas.openxmlformats.org/presentationml/2006/main">
-  <p:cSld>
-    <p:spTree>
-      <p:nvGrpSpPr>
-        <p:cNvPr id="1" name=""/>
-        <p:cNvGrpSpPr/>
-        <p:nvPr/>
-      </p:nvGrpSpPr>
-      <p:grpSpPr>
-        <a:xfrm>
-          <a:off x="0" y="0"/>
-          <a:ext cx="0" cy="0"/>
-          <a:chOff x="0" y="0"/>
-          <a:chExt cx="0" cy="0"/>
-        </a:xfrm>
-      </p:grpSpPr>
-      <p:sp>
-        <p:nvSpPr>
-          <p:cNvPr id="2" name="Title 1">
-            <a:extLst>
-              <a:ext uri="{FF2B5EF4-FFF2-40B4-BE49-F238E27FC236}">
-                <a16:creationId xmlns:a16="http://schemas.microsoft.com/office/drawing/2014/main" id="{A8990524-623B-0575-4BFF-61A1D601EAA8}"/>
-              </a:ext>
-            </a:extLst>
-          </p:cNvPr>
-          <p:cNvSpPr>
-            <a:spLocks noGrp="1"/>
-          </p:cNvSpPr>
-          <p:nvPr>
-            <p:ph type="title"/>
-          </p:nvPr>
-        </p:nvSpPr>
-        <p:spPr/>
-        <p:txBody>
-          <a:bodyPr/>
-          <a:lstStyle/>
-          <a:p>
-            <a:r>
-              <a:rPr lang="en-US" dirty="0"/>
-              <a:t>What we Need</a:t>
-            </a:r>
-          </a:p>
-        </p:txBody>
-      </p:sp>
-      <p:sp>
-        <p:nvSpPr>
-          <p:cNvPr id="3" name="Content Placeholder 2">
-            <a:extLst>
-              <a:ext uri="{FF2B5EF4-FFF2-40B4-BE49-F238E27FC236}">
-                <a16:creationId xmlns:a16="http://schemas.microsoft.com/office/drawing/2014/main" id="{DC82E14D-AABC-A444-62EC-94DEB522BC59}"/>
-              </a:ext>
-            </a:extLst>
-          </p:cNvPr>
-          <p:cNvSpPr>
-            <a:spLocks noGrp="1"/>
-          </p:cNvSpPr>
-          <p:nvPr>
-            <p:ph idx="1"/>
-          </p:nvPr>
-        </p:nvSpPr>
-        <p:spPr>
-          <a:xfrm>
-            <a:off x="581192" y="2126708"/>
-            <a:ext cx="3371075" cy="3678303"/>
-          </a:xfrm>
-        </p:spPr>
-        <p:txBody>
-          <a:bodyPr/>
-          <a:lstStyle/>
-          <a:p>
-            <a:r>
-              <a:rPr lang="en-US" dirty="0"/>
-              <a:t>NPM, included with Node.js</a:t>
-            </a:r>
-          </a:p>
-          <a:p>
-            <a:r>
-              <a:rPr lang="en-US" dirty="0" err="1"/>
-              <a:t>Vscode</a:t>
-            </a:r>
-            <a:endParaRPr lang="en-US" dirty="0"/>
-          </a:p>
-          <a:p>
-            <a:r>
-              <a:rPr lang="en-US" dirty="0"/>
-              <a:t>Vite</a:t>
-            </a:r>
-          </a:p>
-          <a:p>
-            <a:pPr lvl="1"/>
-            <a:r>
-              <a:rPr lang="en-US" dirty="0"/>
-              <a:t>Project names all lowercase/dashes</a:t>
-            </a:r>
-          </a:p>
-          <a:p>
-            <a:r>
-              <a:rPr lang="en-US" dirty="0"/>
-              <a:t>Recommended: </a:t>
-            </a:r>
-            <a:br>
-              <a:rPr lang="en-US" dirty="0"/>
-            </a:br>
-            <a:r>
-              <a:rPr lang="en-US" dirty="0"/>
-              <a:t>React Developer Tools browser extension</a:t>
-            </a:r>
-          </a:p>
-        </p:txBody>
-      </p:sp>
-      <p:pic>
-        <p:nvPicPr>
-          <p:cNvPr id="5" name="Picture 4">
-            <a:extLst>
-              <a:ext uri="{FF2B5EF4-FFF2-40B4-BE49-F238E27FC236}">
-                <a16:creationId xmlns:a16="http://schemas.microsoft.com/office/drawing/2014/main" id="{A4F7E017-B7EC-959E-7408-C51E6D17F58E}"/>
-              </a:ext>
-            </a:extLst>
-          </p:cNvPr>
-          <p:cNvPicPr>
-            <a:picLocks noChangeAspect="1"/>
-          </p:cNvPicPr>
-          <p:nvPr/>
-        </p:nvPicPr>
-        <p:blipFill>
-          <a:blip r:embed="rId2"/>
-          <a:stretch>
-            <a:fillRect/>
-          </a:stretch>
-        </p:blipFill>
-        <p:spPr>
-          <a:xfrm>
-            <a:off x="6157680" y="2256320"/>
-            <a:ext cx="3581900" cy="504895"/>
-          </a:xfrm>
-          <a:prstGeom prst="rect">
-            <a:avLst/>
-          </a:prstGeom>
-        </p:spPr>
-      </p:pic>
-      <p:pic>
-        <p:nvPicPr>
-          <p:cNvPr id="7" name="Picture 6">
-            <a:extLst>
-              <a:ext uri="{FF2B5EF4-FFF2-40B4-BE49-F238E27FC236}">
-                <a16:creationId xmlns:a16="http://schemas.microsoft.com/office/drawing/2014/main" id="{B9CEC70B-C25C-AB4B-AD0F-FAE10C7E2BCA}"/>
-              </a:ext>
-            </a:extLst>
-          </p:cNvPr>
-          <p:cNvPicPr>
-            <a:picLocks noChangeAspect="1"/>
-          </p:cNvPicPr>
-          <p:nvPr/>
-        </p:nvPicPr>
-        <p:blipFill>
-          <a:blip r:embed="rId3"/>
-          <a:stretch>
-            <a:fillRect/>
-          </a:stretch>
-        </p:blipFill>
-        <p:spPr>
-          <a:xfrm>
-            <a:off x="3952267" y="3116671"/>
-            <a:ext cx="3905795" cy="3429479"/>
-          </a:xfrm>
-          <a:prstGeom prst="rect">
-            <a:avLst/>
-          </a:prstGeom>
-        </p:spPr>
-      </p:pic>
-      <p:pic>
-        <p:nvPicPr>
-          <p:cNvPr id="11" name="Picture 10">
-            <a:extLst>
-              <a:ext uri="{FF2B5EF4-FFF2-40B4-BE49-F238E27FC236}">
-                <a16:creationId xmlns:a16="http://schemas.microsoft.com/office/drawing/2014/main" id="{9AAD11A9-B4A1-B4D6-B247-FD3DF2885CF6}"/>
-              </a:ext>
-            </a:extLst>
-          </p:cNvPr>
-          <p:cNvPicPr>
-            <a:picLocks noChangeAspect="1"/>
-          </p:cNvPicPr>
-          <p:nvPr/>
-        </p:nvPicPr>
-        <p:blipFill>
-          <a:blip r:embed="rId4"/>
-          <a:stretch>
-            <a:fillRect/>
-          </a:stretch>
-        </p:blipFill>
-        <p:spPr>
-          <a:xfrm>
-            <a:off x="8038277" y="3116671"/>
-            <a:ext cx="3753374" cy="1943371"/>
-          </a:xfrm>
-          <a:prstGeom prst="rect">
-            <a:avLst/>
-          </a:prstGeom>
-        </p:spPr>
-      </p:pic>
-    </p:spTree>
-    <p:extLst>
-      <p:ext uri="{BB962C8B-B14F-4D97-AF65-F5344CB8AC3E}">
-        <p14:creationId xmlns:p14="http://schemas.microsoft.com/office/powerpoint/2010/main" val="864873647"/>
-      </p:ext>
-    </p:extLst>
-  </p:cSld>
-  <p:clrMapOvr>
-    <a:masterClrMapping/>
-  </p:clrMapOvr>
-</p:sld>
-</file>
-
-<file path=ppt/slides/slide5.xml><?xml version="1.0" encoding="utf-8"?>
-<p:sld xmlns:a="http://schemas.openxmlformats.org/drawingml/2006/main" xmlns:r="http://schemas.openxmlformats.org/officeDocument/2006/relationships" xmlns:p="http://schemas.openxmlformats.org/presentationml/2006/main">
-  <p:cSld>
-    <p:spTree>
-      <p:nvGrpSpPr>
-        <p:cNvPr id="1" name="">
-          <a:extLst>
-            <a:ext uri="{FF2B5EF4-FFF2-40B4-BE49-F238E27FC236}">
-              <a16:creationId xmlns:a16="http://schemas.microsoft.com/office/drawing/2014/main" id="{E83D92F2-BD3F-5502-960E-3CFF3577844B}"/>
-            </a:ext>
-          </a:extLst>
-        </p:cNvPr>
-        <p:cNvGrpSpPr/>
-        <p:nvPr/>
-      </p:nvGrpSpPr>
-      <p:grpSpPr>
-        <a:xfrm>
-          <a:off x="0" y="0"/>
-          <a:ext cx="0" cy="0"/>
-          <a:chOff x="0" y="0"/>
-          <a:chExt cx="0" cy="0"/>
-        </a:xfrm>
-      </p:grpSpPr>
-      <p:sp>
-        <p:nvSpPr>
-          <p:cNvPr id="2" name="Title 1">
-            <a:extLst>
-              <a:ext uri="{FF2B5EF4-FFF2-40B4-BE49-F238E27FC236}">
-                <a16:creationId xmlns:a16="http://schemas.microsoft.com/office/drawing/2014/main" id="{475D234C-D59D-E997-1AA0-D508BFFD3CB6}"/>
-              </a:ext>
-            </a:extLst>
-          </p:cNvPr>
-          <p:cNvSpPr>
-            <a:spLocks noGrp="1"/>
-          </p:cNvSpPr>
-          <p:nvPr>
-            <p:ph type="title"/>
-          </p:nvPr>
-        </p:nvSpPr>
-        <p:spPr/>
-        <p:txBody>
-          <a:bodyPr/>
-          <a:lstStyle/>
-          <a:p>
-            <a:r>
-              <a:rPr lang="en-US" dirty="0"/>
-              <a:t>Challenge – Create Your First App</a:t>
-            </a:r>
-          </a:p>
-        </p:txBody>
-      </p:sp>
-      <p:sp>
-        <p:nvSpPr>
-          <p:cNvPr id="3" name="Content Placeholder 2">
-            <a:extLst>
-              <a:ext uri="{FF2B5EF4-FFF2-40B4-BE49-F238E27FC236}">
-                <a16:creationId xmlns:a16="http://schemas.microsoft.com/office/drawing/2014/main" id="{23F8E57B-9E41-4816-C2F2-1105A90F87A9}"/>
-              </a:ext>
-            </a:extLst>
-          </p:cNvPr>
-          <p:cNvSpPr>
-            <a:spLocks noGrp="1"/>
-          </p:cNvSpPr>
-          <p:nvPr>
-            <p:ph idx="1"/>
-          </p:nvPr>
-        </p:nvSpPr>
-        <p:spPr>
-          <a:xfrm>
-            <a:off x="581192" y="2475925"/>
-            <a:ext cx="5317584" cy="1681246"/>
-          </a:xfrm>
-        </p:spPr>
-        <p:txBody>
-          <a:bodyPr/>
-          <a:lstStyle/>
-          <a:p>
-            <a:r>
-              <a:rPr lang="en-US" dirty="0"/>
-              <a:t>Create a React project</a:t>
-            </a:r>
-          </a:p>
-        </p:txBody>
-      </p:sp>
-      <p:sp>
-        <p:nvSpPr>
-          <p:cNvPr id="6" name="TextBox 5">
-            <a:extLst>
-              <a:ext uri="{FF2B5EF4-FFF2-40B4-BE49-F238E27FC236}">
-                <a16:creationId xmlns:a16="http://schemas.microsoft.com/office/drawing/2014/main" id="{2DE50FF0-C783-F3C0-044D-2F094F317804}"/>
-              </a:ext>
-            </a:extLst>
-          </p:cNvPr>
-          <p:cNvSpPr txBox="1"/>
-          <p:nvPr/>
-        </p:nvSpPr>
-        <p:spPr>
-          <a:xfrm>
-            <a:off x="1228165" y="2402747"/>
-            <a:ext cx="756938" cy="369332"/>
-          </a:xfrm>
-          <a:prstGeom prst="rect">
-            <a:avLst/>
-          </a:prstGeom>
-          <a:noFill/>
-        </p:spPr>
-        <p:txBody>
-          <a:bodyPr wrap="none" rtlCol="0">
-            <a:spAutoFit/>
-          </a:bodyPr>
-          <a:lstStyle/>
-          <a:p>
-            <a:r>
-              <a:rPr lang="en-US" b="1" dirty="0"/>
-              <a:t>Goal:</a:t>
-            </a:r>
-          </a:p>
-        </p:txBody>
-      </p:sp>
-      <p:sp>
-        <p:nvSpPr>
-          <p:cNvPr id="7" name="TextBox 6">
-            <a:extLst>
-              <a:ext uri="{FF2B5EF4-FFF2-40B4-BE49-F238E27FC236}">
-                <a16:creationId xmlns:a16="http://schemas.microsoft.com/office/drawing/2014/main" id="{405306AE-2095-D0AE-E069-321DBC55370F}"/>
-              </a:ext>
-            </a:extLst>
-          </p:cNvPr>
-          <p:cNvSpPr txBox="1"/>
-          <p:nvPr/>
-        </p:nvSpPr>
-        <p:spPr>
-          <a:xfrm>
-            <a:off x="6949165" y="2402747"/>
-            <a:ext cx="4661643" cy="369332"/>
-          </a:xfrm>
-          <a:prstGeom prst="rect">
-            <a:avLst/>
-          </a:prstGeom>
-          <a:noFill/>
-        </p:spPr>
-        <p:txBody>
-          <a:bodyPr wrap="square" rtlCol="0">
-            <a:spAutoFit/>
-          </a:bodyPr>
-          <a:lstStyle/>
-          <a:p>
-            <a:r>
-              <a:rPr lang="en-US" b="1" dirty="0"/>
-              <a:t>Scenario:  			   5 min</a:t>
-            </a:r>
-          </a:p>
-        </p:txBody>
-      </p:sp>
-      <p:sp>
-        <p:nvSpPr>
-          <p:cNvPr id="8" name="Content Placeholder 2">
-            <a:extLst>
-              <a:ext uri="{FF2B5EF4-FFF2-40B4-BE49-F238E27FC236}">
-                <a16:creationId xmlns:a16="http://schemas.microsoft.com/office/drawing/2014/main" id="{61B443B1-E14C-64AB-9E9D-75FFCF923C2B}"/>
-              </a:ext>
-            </a:extLst>
-          </p:cNvPr>
-          <p:cNvSpPr txBox="1">
-            <a:spLocks/>
-          </p:cNvSpPr>
-          <p:nvPr/>
-        </p:nvSpPr>
-        <p:spPr>
-          <a:xfrm>
-            <a:off x="6456103" y="3130666"/>
-            <a:ext cx="4661642" cy="1681246"/>
-          </a:xfrm>
-          <a:prstGeom prst="rect">
-            <a:avLst/>
-          </a:prstGeom>
-        </p:spPr>
-        <p:txBody>
-          <a:bodyPr vert="horz" lIns="91440" tIns="45720" rIns="91440" bIns="45720" rtlCol="0" anchor="ctr">
-            <a:normAutofit fontScale="85000" lnSpcReduction="10000"/>
-          </a:bodyPr>
-          <a:lstStyle>
-            <a:lvl1pPr marL="306000" indent="-306000" algn="l" defTabSz="457200" rtl="0" eaLnBrk="1" latinLnBrk="0" hangingPunct="1">
-              <a:spcBef>
-                <a:spcPct val="20000"/>
-              </a:spcBef>
-              <a:spcAft>
-                <a:spcPts val="600"/>
-              </a:spcAft>
-              <a:buClr>
-                <a:schemeClr val="accent2"/>
-              </a:buClr>
-              <a:buSzPct val="92000"/>
-              <a:buFont typeface="Wingdings 2" panose="05020102010507070707" pitchFamily="18" charset="2"/>
-              <a:buChar char=""/>
-              <a:defRPr sz="1800" kern="1200">
-                <a:solidFill>
-                  <a:schemeClr val="tx2"/>
-                </a:solidFill>
-                <a:latin typeface="+mn-lt"/>
-                <a:ea typeface="+mn-ea"/>
-                <a:cs typeface="+mn-cs"/>
-              </a:defRPr>
-            </a:lvl1pPr>
-            <a:lvl2pPr marL="630000" indent="-306000" algn="l" defTabSz="457200" rtl="0" eaLnBrk="1" latinLnBrk="0" hangingPunct="1">
-              <a:spcBef>
-                <a:spcPct val="20000"/>
-              </a:spcBef>
-              <a:spcAft>
-                <a:spcPts val="600"/>
-              </a:spcAft>
-              <a:buClr>
-                <a:schemeClr val="accent2"/>
-              </a:buClr>
-              <a:buSzPct val="92000"/>
-              <a:buFont typeface="Wingdings 2" panose="05020102010507070707" pitchFamily="18" charset="2"/>
-              <a:buChar char=""/>
-              <a:defRPr sz="1600" kern="1200">
-                <a:solidFill>
-                  <a:schemeClr val="tx2"/>
-                </a:solidFill>
-                <a:latin typeface="+mn-lt"/>
-                <a:ea typeface="+mn-ea"/>
-                <a:cs typeface="+mn-cs"/>
-              </a:defRPr>
-            </a:lvl2pPr>
-            <a:lvl3pPr marL="900000" indent="-270000" algn="l" defTabSz="457200" rtl="0" eaLnBrk="1" latinLnBrk="0" hangingPunct="1">
-              <a:spcBef>
-                <a:spcPct val="20000"/>
-              </a:spcBef>
-              <a:spcAft>
-                <a:spcPts val="600"/>
-              </a:spcAft>
-              <a:buClr>
-                <a:schemeClr val="accent2"/>
-              </a:buClr>
-              <a:buSzPct val="92000"/>
-              <a:buFont typeface="Wingdings 2" panose="05020102010507070707" pitchFamily="18" charset="2"/>
-              <a:buChar char=""/>
-              <a:defRPr sz="1400" kern="1200">
-                <a:solidFill>
-                  <a:schemeClr val="tx2"/>
-                </a:solidFill>
-                <a:latin typeface="+mn-lt"/>
-                <a:ea typeface="+mn-ea"/>
-                <a:cs typeface="+mn-cs"/>
-              </a:defRPr>
-            </a:lvl3pPr>
-            <a:lvl4pPr marL="1242000" indent="-234000" algn="l" defTabSz="457200" rtl="0" eaLnBrk="1" latinLnBrk="0" hangingPunct="1">
-              <a:spcBef>
-                <a:spcPct val="20000"/>
-              </a:spcBef>
-              <a:spcAft>
-                <a:spcPts val="600"/>
-              </a:spcAft>
-              <a:buClr>
-                <a:schemeClr val="accent2"/>
-              </a:buClr>
-              <a:buSzPct val="92000"/>
-              <a:buFont typeface="Wingdings 2" panose="05020102010507070707" pitchFamily="18" charset="2"/>
-              <a:buChar char=""/>
-              <a:defRPr sz="1200" kern="1200">
-                <a:solidFill>
-                  <a:schemeClr val="tx2"/>
-                </a:solidFill>
-                <a:latin typeface="+mn-lt"/>
-                <a:ea typeface="+mn-ea"/>
-                <a:cs typeface="+mn-cs"/>
-              </a:defRPr>
-            </a:lvl4pPr>
-            <a:lvl5pPr marL="1602000" indent="-234000" algn="l" defTabSz="457200" rtl="0" eaLnBrk="1" latinLnBrk="0" hangingPunct="1">
-              <a:spcBef>
-                <a:spcPct val="20000"/>
-              </a:spcBef>
-              <a:spcAft>
-                <a:spcPts val="600"/>
-              </a:spcAft>
-              <a:buClr>
-                <a:schemeClr val="accent2"/>
-              </a:buClr>
-              <a:buSzPct val="92000"/>
-              <a:buFont typeface="Wingdings 2" panose="05020102010507070707" pitchFamily="18" charset="2"/>
-              <a:buChar char=""/>
-              <a:defRPr sz="1200" kern="1200">
-                <a:solidFill>
-                  <a:schemeClr val="tx2"/>
-                </a:solidFill>
-                <a:latin typeface="+mn-lt"/>
-                <a:ea typeface="+mn-ea"/>
-                <a:cs typeface="+mn-cs"/>
-              </a:defRPr>
-            </a:lvl5pPr>
-            <a:lvl6pPr marL="1900000" indent="-228600" algn="l" defTabSz="457200" rtl="0" eaLnBrk="1" latinLnBrk="0" hangingPunct="1">
-              <a:spcBef>
-                <a:spcPct val="20000"/>
-              </a:spcBef>
-              <a:spcAft>
-                <a:spcPts val="600"/>
-              </a:spcAft>
-              <a:buClr>
-                <a:schemeClr val="accent2"/>
-              </a:buClr>
-              <a:buSzPct val="92000"/>
-              <a:buFont typeface="Wingdings 2" panose="05020102010507070707" pitchFamily="18" charset="2"/>
-              <a:buChar char=""/>
-              <a:defRPr sz="1200" kern="1200">
-                <a:solidFill>
-                  <a:schemeClr val="tx2"/>
-                </a:solidFill>
-                <a:latin typeface="+mn-lt"/>
-                <a:ea typeface="+mn-ea"/>
-                <a:cs typeface="+mn-cs"/>
-              </a:defRPr>
-            </a:lvl6pPr>
-            <a:lvl7pPr marL="2200000" indent="-228600" algn="l" defTabSz="457200" rtl="0" eaLnBrk="1" latinLnBrk="0" hangingPunct="1">
-              <a:spcBef>
-                <a:spcPct val="20000"/>
-              </a:spcBef>
-              <a:spcAft>
-                <a:spcPts val="600"/>
-              </a:spcAft>
-              <a:buClr>
-                <a:schemeClr val="accent2"/>
-              </a:buClr>
-              <a:buSzPct val="92000"/>
-              <a:buFont typeface="Wingdings 2" panose="05020102010507070707" pitchFamily="18" charset="2"/>
-              <a:buChar char=""/>
-              <a:defRPr sz="1200" kern="1200">
-                <a:solidFill>
-                  <a:schemeClr val="tx2"/>
-                </a:solidFill>
-                <a:latin typeface="+mn-lt"/>
-                <a:ea typeface="+mn-ea"/>
-                <a:cs typeface="+mn-cs"/>
-              </a:defRPr>
-            </a:lvl7pPr>
-            <a:lvl8pPr marL="2500000" indent="-228600" algn="l" defTabSz="457200" rtl="0" eaLnBrk="1" latinLnBrk="0" hangingPunct="1">
-              <a:spcBef>
-                <a:spcPct val="20000"/>
-              </a:spcBef>
-              <a:spcAft>
-                <a:spcPts val="600"/>
-              </a:spcAft>
-              <a:buClr>
-                <a:schemeClr val="accent2"/>
-              </a:buClr>
-              <a:buSzPct val="92000"/>
-              <a:buFont typeface="Wingdings 2" panose="05020102010507070707" pitchFamily="18" charset="2"/>
-              <a:buChar char=""/>
-              <a:defRPr sz="1200" kern="1200">
-                <a:solidFill>
-                  <a:schemeClr val="tx2"/>
-                </a:solidFill>
-                <a:latin typeface="+mn-lt"/>
-                <a:ea typeface="+mn-ea"/>
-                <a:cs typeface="+mn-cs"/>
-              </a:defRPr>
-            </a:lvl8pPr>
-            <a:lvl9pPr marL="2800000" indent="-228600" algn="l" defTabSz="457200" rtl="0" eaLnBrk="1" latinLnBrk="0" hangingPunct="1">
-              <a:spcBef>
-                <a:spcPct val="20000"/>
-              </a:spcBef>
-              <a:spcAft>
-                <a:spcPts val="600"/>
-              </a:spcAft>
-              <a:buClr>
-                <a:schemeClr val="accent2"/>
-              </a:buClr>
-              <a:buSzPct val="92000"/>
-              <a:buFont typeface="Wingdings 2" panose="05020102010507070707" pitchFamily="18" charset="2"/>
-              <a:buChar char=""/>
-              <a:defRPr sz="1200" kern="1200">
-                <a:solidFill>
-                  <a:schemeClr val="tx2"/>
-                </a:solidFill>
-                <a:latin typeface="+mn-lt"/>
-                <a:ea typeface="+mn-ea"/>
-                <a:cs typeface="+mn-cs"/>
-              </a:defRPr>
-            </a:lvl9pPr>
-          </a:lstStyle>
-          <a:p>
-            <a:r>
-              <a:rPr lang="en-US" dirty="0"/>
               <a:t>Your organization needs to build a portal for service technicians. This portal should be able to view, modify, and delete incident records. This application will be written in React.</a:t>
             </a:r>
           </a:p>
@@ -9869,7 +13010,7 @@
             <a:pPr lvl="1"/>
             <a:r>
               <a:rPr lang="en-US" dirty="0"/>
-              <a:t>Camel-case naming</a:t>
+              <a:t>Pascal-case naming</a:t>
             </a:r>
           </a:p>
           <a:p>
@@ -10584,7 +13725,7 @@
           <a:p>
             <a:r>
               <a:rPr lang="en-US" b="1" dirty="0"/>
-              <a:t>Scenario:  			   10 min</a:t>
+              <a:t>Scenario:  			   </a:t>
             </a:r>
           </a:p>
         </p:txBody>

--- a/Week_2/React.pptx
+++ b/Week_2/React.pptx
@@ -28,12 +28,17 @@
     <p:sldId id="281" r:id="rId22"/>
     <p:sldId id="282" r:id="rId23"/>
     <p:sldId id="283" r:id="rId24"/>
-    <p:sldId id="284" r:id="rId25"/>
-    <p:sldId id="285" r:id="rId26"/>
+    <p:sldId id="285" r:id="rId25"/>
+    <p:sldId id="284" r:id="rId26"/>
     <p:sldId id="286" r:id="rId27"/>
     <p:sldId id="287" r:id="rId28"/>
     <p:sldId id="288" r:id="rId29"/>
     <p:sldId id="289" r:id="rId30"/>
+    <p:sldId id="290" r:id="rId31"/>
+    <p:sldId id="292" r:id="rId32"/>
+    <p:sldId id="291" r:id="rId33"/>
+    <p:sldId id="293" r:id="rId34"/>
+    <p:sldId id="294" r:id="rId35"/>
   </p:sldIdLst>
   <p:sldSz cx="12192000" cy="6858000"/>
   <p:notesSz cx="6858000" cy="9144000"/>
@@ -6329,6 +6334,36 @@
           </a:prstGeom>
         </p:spPr>
       </p:pic>
+      <p:pic>
+        <p:nvPicPr>
+          <p:cNvPr id="4" name="Picture 3">
+            <a:extLst>
+              <a:ext uri="{FF2B5EF4-FFF2-40B4-BE49-F238E27FC236}">
+                <a16:creationId xmlns:a16="http://schemas.microsoft.com/office/drawing/2014/main" id="{72010AB9-39DC-41AF-70C6-986685BA607C}"/>
+              </a:ext>
+            </a:extLst>
+          </p:cNvPr>
+          <p:cNvPicPr>
+            <a:picLocks noChangeAspect="1"/>
+          </p:cNvPicPr>
+          <p:nvPr/>
+        </p:nvPicPr>
+        <p:blipFill>
+          <a:blip r:embed="rId3"/>
+          <a:stretch>
+            <a:fillRect/>
+          </a:stretch>
+        </p:blipFill>
+        <p:spPr>
+          <a:xfrm>
+            <a:off x="940696" y="3766215"/>
+            <a:ext cx="5568393" cy="2771823"/>
+          </a:xfrm>
+          <a:prstGeom prst="rect">
+            <a:avLst/>
+          </a:prstGeom>
+        </p:spPr>
+      </p:pic>
     </p:spTree>
     <p:extLst>
       <p:ext uri="{BB962C8B-B14F-4D97-AF65-F5344CB8AC3E}">
@@ -10047,7 +10082,7 @@
           <p:cNvPr id="2" name="Title 1">
             <a:extLst>
               <a:ext uri="{FF2B5EF4-FFF2-40B4-BE49-F238E27FC236}">
-                <a16:creationId xmlns:a16="http://schemas.microsoft.com/office/drawing/2014/main" id="{34F24C51-BF7C-0C7E-8B22-346123C1D58E}"/>
+                <a16:creationId xmlns:a16="http://schemas.microsoft.com/office/drawing/2014/main" id="{54438627-39B0-81E8-E217-8D36A5360407}"/>
               </a:ext>
             </a:extLst>
           </p:cNvPr>
@@ -10065,7 +10100,7 @@
           <a:p>
             <a:r>
               <a:rPr lang="en-US" dirty="0"/>
-              <a:t>Passing Callback Functions to Child Components</a:t>
+              <a:t>Deleting Items From Lists</a:t>
             </a:r>
           </a:p>
         </p:txBody>
@@ -10075,7 +10110,7 @@
           <p:cNvPr id="3" name="Content Placeholder 2">
             <a:extLst>
               <a:ext uri="{FF2B5EF4-FFF2-40B4-BE49-F238E27FC236}">
-                <a16:creationId xmlns:a16="http://schemas.microsoft.com/office/drawing/2014/main" id="{88DDA8C7-B5EB-70ED-13C9-5641B98904FA}"/>
+                <a16:creationId xmlns:a16="http://schemas.microsoft.com/office/drawing/2014/main" id="{00A971B3-1B53-48ED-3CA2-468B766DC7EA}"/>
               </a:ext>
             </a:extLst>
           </p:cNvPr>
@@ -10088,64 +10123,35 @@
         </p:nvSpPr>
         <p:spPr>
           <a:xfrm>
-            <a:off x="581193" y="2180496"/>
-            <a:ext cx="4322502" cy="3678303"/>
-          </a:xfrm>
-        </p:spPr>
-        <p:txBody>
-          <a:bodyPr/>
+            <a:off x="640422" y="2343081"/>
+            <a:ext cx="10911153" cy="853649"/>
+          </a:xfrm>
+        </p:spPr>
+        <p:txBody>
+          <a:bodyPr>
+            <a:normAutofit fontScale="92500"/>
+          </a:bodyPr>
           <a:lstStyle/>
           <a:p>
             <a:r>
               <a:rPr lang="en-US" dirty="0"/>
-              <a:t>Notice how we pass in a callback function into the Incident component called ‘</a:t>
-            </a:r>
-            <a:r>
-              <a:rPr lang="en-US" dirty="0" err="1"/>
-              <a:t>handleClick</a:t>
-            </a:r>
-            <a:r>
-              <a:rPr lang="en-US" dirty="0"/>
-              <a:t>’</a:t>
-            </a:r>
-          </a:p>
-          <a:p>
-            <a:r>
-              <a:rPr lang="en-US" dirty="0"/>
-              <a:t>Then in our parent component, we can set the callback that will be performed for ‘</a:t>
-            </a:r>
-            <a:r>
-              <a:rPr lang="en-US" dirty="0" err="1"/>
-              <a:t>handleClick</a:t>
-            </a:r>
-            <a:r>
-              <a:rPr lang="en-US" dirty="0"/>
-              <a:t>’</a:t>
-            </a:r>
-          </a:p>
-          <a:p>
-            <a:pPr lvl="1"/>
-            <a:r>
-              <a:rPr lang="en-US" dirty="0"/>
-              <a:t>In this case, ‘</a:t>
-            </a:r>
-            <a:r>
-              <a:rPr lang="en-US" dirty="0" err="1"/>
-              <a:t>handleClick</a:t>
-            </a:r>
-            <a:r>
-              <a:rPr lang="en-US" dirty="0"/>
-              <a:t>’ will fire off another function local to the parent component </a:t>
+              <a:t>The JavaScript filter() function will return a new array where all items meet the criteria </a:t>
+            </a:r>
+          </a:p>
+          <a:p>
+            <a:r>
+              <a:rPr lang="en-US" dirty="0"/>
+              <a:t>In this example, we are getting a copy of the array will all items except for the incident where its ID was provided</a:t>
             </a:r>
           </a:p>
         </p:txBody>
       </p:sp>
       <p:pic>
         <p:nvPicPr>
-          <p:cNvPr id="5" name="Picture 4">
-            <a:extLst>
-              <a:ext uri="{FF2B5EF4-FFF2-40B4-BE49-F238E27FC236}">
-                <a16:creationId xmlns:a16="http://schemas.microsoft.com/office/drawing/2014/main" id="{7A3FB8CD-A14C-08A4-55AF-08B5A5A3B5AB}"/>
+          <p:cNvPr id="7" name="Picture 6">
+            <a:extLst>
+              <a:ext uri="{FF2B5EF4-FFF2-40B4-BE49-F238E27FC236}">
+                <a16:creationId xmlns:a16="http://schemas.microsoft.com/office/drawing/2014/main" id="{27D773C1-3F1D-6574-7846-6C0CAE4E7FC2}"/>
               </a:ext>
             </a:extLst>
           </p:cNvPr>
@@ -10162,38 +10168,8 @@
         </p:blipFill>
         <p:spPr>
           <a:xfrm>
-            <a:off x="5712269" y="5142043"/>
-            <a:ext cx="5172797" cy="1171739"/>
-          </a:xfrm>
-          <a:prstGeom prst="rect">
-            <a:avLst/>
-          </a:prstGeom>
-        </p:spPr>
-      </p:pic>
-      <p:pic>
-        <p:nvPicPr>
-          <p:cNvPr id="9" name="Picture 8">
-            <a:extLst>
-              <a:ext uri="{FF2B5EF4-FFF2-40B4-BE49-F238E27FC236}">
-                <a16:creationId xmlns:a16="http://schemas.microsoft.com/office/drawing/2014/main" id="{325A5988-DF64-D8AE-8ECA-42BD8942AEF9}"/>
-              </a:ext>
-            </a:extLst>
-          </p:cNvPr>
-          <p:cNvPicPr>
-            <a:picLocks noChangeAspect="1"/>
-          </p:cNvPicPr>
-          <p:nvPr/>
-        </p:nvPicPr>
-        <p:blipFill>
-          <a:blip r:embed="rId3"/>
-          <a:stretch>
-            <a:fillRect/>
-          </a:stretch>
-        </p:blipFill>
-        <p:spPr>
-          <a:xfrm>
-            <a:off x="5235074" y="2061971"/>
-            <a:ext cx="6335009" cy="2734057"/>
+            <a:off x="1238759" y="4080578"/>
+            <a:ext cx="9714477" cy="1399543"/>
           </a:xfrm>
           <a:prstGeom prst="rect">
             <a:avLst/>
@@ -10203,7 +10179,7 @@
     </p:spTree>
     <p:extLst>
       <p:ext uri="{BB962C8B-B14F-4D97-AF65-F5344CB8AC3E}">
-        <p14:creationId xmlns:p14="http://schemas.microsoft.com/office/powerpoint/2010/main" val="2016975729"/>
+        <p14:creationId xmlns:p14="http://schemas.microsoft.com/office/powerpoint/2010/main" val="2463026830"/>
       </p:ext>
     </p:extLst>
   </p:cSld>
@@ -10235,7 +10211,7 @@
           <p:cNvPr id="2" name="Title 1">
             <a:extLst>
               <a:ext uri="{FF2B5EF4-FFF2-40B4-BE49-F238E27FC236}">
-                <a16:creationId xmlns:a16="http://schemas.microsoft.com/office/drawing/2014/main" id="{54438627-39B0-81E8-E217-8D36A5360407}"/>
+                <a16:creationId xmlns:a16="http://schemas.microsoft.com/office/drawing/2014/main" id="{34F24C51-BF7C-0C7E-8B22-346123C1D58E}"/>
               </a:ext>
             </a:extLst>
           </p:cNvPr>
@@ -10253,7 +10229,7 @@
           <a:p>
             <a:r>
               <a:rPr lang="en-US" dirty="0"/>
-              <a:t>Deleting Items From Lists</a:t>
+              <a:t>Callback Props</a:t>
             </a:r>
           </a:p>
         </p:txBody>
@@ -10263,7 +10239,7 @@
           <p:cNvPr id="3" name="Content Placeholder 2">
             <a:extLst>
               <a:ext uri="{FF2B5EF4-FFF2-40B4-BE49-F238E27FC236}">
-                <a16:creationId xmlns:a16="http://schemas.microsoft.com/office/drawing/2014/main" id="{00A971B3-1B53-48ED-3CA2-468B766DC7EA}"/>
+                <a16:creationId xmlns:a16="http://schemas.microsoft.com/office/drawing/2014/main" id="{88DDA8C7-B5EB-70ED-13C9-5641B98904FA}"/>
               </a:ext>
             </a:extLst>
           </p:cNvPr>
@@ -10276,35 +10252,72 @@
         </p:nvSpPr>
         <p:spPr>
           <a:xfrm>
-            <a:off x="640422" y="2343081"/>
-            <a:ext cx="10911153" cy="853649"/>
+            <a:off x="581193" y="2180496"/>
+            <a:ext cx="4322502" cy="3678303"/>
           </a:xfrm>
         </p:spPr>
         <p:txBody>
           <a:bodyPr>
-            <a:normAutofit fontScale="92500"/>
+            <a:normAutofit lnSpcReduction="10000"/>
           </a:bodyPr>
           <a:lstStyle/>
           <a:p>
             <a:r>
               <a:rPr lang="en-US" dirty="0"/>
-              <a:t>The JavaScript filter() function will return a new array where all items meet the criteria </a:t>
-            </a:r>
-          </a:p>
-          <a:p>
-            <a:r>
-              <a:rPr lang="en-US" dirty="0"/>
-              <a:t>In this example, we are getting a copy of the array will all items except for the incident where its ID was provided</a:t>
+              <a:t>A callback prop is when we use a prop to pass down a function to a child component</a:t>
+            </a:r>
+          </a:p>
+          <a:p>
+            <a:r>
+              <a:rPr lang="en-US" dirty="0"/>
+              <a:t>Notice how we pass in a callback function into the Incident component called ‘</a:t>
+            </a:r>
+            <a:r>
+              <a:rPr lang="en-US" dirty="0" err="1"/>
+              <a:t>handleClick</a:t>
+            </a:r>
+            <a:r>
+              <a:rPr lang="en-US" dirty="0"/>
+              <a:t>’</a:t>
+            </a:r>
+          </a:p>
+          <a:p>
+            <a:r>
+              <a:rPr lang="en-US" dirty="0"/>
+              <a:t>Then in our parent component, we can set the callback that will be performed for ‘</a:t>
+            </a:r>
+            <a:r>
+              <a:rPr lang="en-US" dirty="0" err="1"/>
+              <a:t>handleClick</a:t>
+            </a:r>
+            <a:r>
+              <a:rPr lang="en-US" dirty="0"/>
+              <a:t>’</a:t>
+            </a:r>
+          </a:p>
+          <a:p>
+            <a:pPr lvl="1"/>
+            <a:r>
+              <a:rPr lang="en-US" dirty="0"/>
+              <a:t>In this case, ‘</a:t>
+            </a:r>
+            <a:r>
+              <a:rPr lang="en-US" dirty="0" err="1"/>
+              <a:t>handleClick</a:t>
+            </a:r>
+            <a:r>
+              <a:rPr lang="en-US" dirty="0"/>
+              <a:t>’ will fire off another function local to the parent component  </a:t>
             </a:r>
           </a:p>
         </p:txBody>
       </p:sp>
       <p:pic>
         <p:nvPicPr>
-          <p:cNvPr id="7" name="Picture 6">
-            <a:extLst>
-              <a:ext uri="{FF2B5EF4-FFF2-40B4-BE49-F238E27FC236}">
-                <a16:creationId xmlns:a16="http://schemas.microsoft.com/office/drawing/2014/main" id="{27D773C1-3F1D-6574-7846-6C0CAE4E7FC2}"/>
+          <p:cNvPr id="5" name="Picture 4">
+            <a:extLst>
+              <a:ext uri="{FF2B5EF4-FFF2-40B4-BE49-F238E27FC236}">
+                <a16:creationId xmlns:a16="http://schemas.microsoft.com/office/drawing/2014/main" id="{7A3FB8CD-A14C-08A4-55AF-08B5A5A3B5AB}"/>
               </a:ext>
             </a:extLst>
           </p:cNvPr>
@@ -10321,8 +10334,38 @@
         </p:blipFill>
         <p:spPr>
           <a:xfrm>
-            <a:off x="1238759" y="4080578"/>
-            <a:ext cx="9714477" cy="1399543"/>
+            <a:off x="5712269" y="5142043"/>
+            <a:ext cx="5172797" cy="1171739"/>
+          </a:xfrm>
+          <a:prstGeom prst="rect">
+            <a:avLst/>
+          </a:prstGeom>
+        </p:spPr>
+      </p:pic>
+      <p:pic>
+        <p:nvPicPr>
+          <p:cNvPr id="9" name="Picture 8">
+            <a:extLst>
+              <a:ext uri="{FF2B5EF4-FFF2-40B4-BE49-F238E27FC236}">
+                <a16:creationId xmlns:a16="http://schemas.microsoft.com/office/drawing/2014/main" id="{325A5988-DF64-D8AE-8ECA-42BD8942AEF9}"/>
+              </a:ext>
+            </a:extLst>
+          </p:cNvPr>
+          <p:cNvPicPr>
+            <a:picLocks noChangeAspect="1"/>
+          </p:cNvPicPr>
+          <p:nvPr/>
+        </p:nvPicPr>
+        <p:blipFill>
+          <a:blip r:embed="rId3"/>
+          <a:stretch>
+            <a:fillRect/>
+          </a:stretch>
+        </p:blipFill>
+        <p:spPr>
+          <a:xfrm>
+            <a:off x="5235074" y="2061971"/>
+            <a:ext cx="6335009" cy="2734057"/>
           </a:xfrm>
           <a:prstGeom prst="rect">
             <a:avLst/>
@@ -10332,7 +10375,7 @@
     </p:spTree>
     <p:extLst>
       <p:ext uri="{BB962C8B-B14F-4D97-AF65-F5344CB8AC3E}">
-        <p14:creationId xmlns:p14="http://schemas.microsoft.com/office/powerpoint/2010/main" val="2463026830"/>
+        <p14:creationId xmlns:p14="http://schemas.microsoft.com/office/powerpoint/2010/main" val="2016975729"/>
       </p:ext>
     </p:extLst>
   </p:cSld>
@@ -10739,10 +10782,10 @@
       </p:sp>
       <p:pic>
         <p:nvPicPr>
-          <p:cNvPr id="5" name="Picture 4">
-            <a:extLst>
-              <a:ext uri="{FF2B5EF4-FFF2-40B4-BE49-F238E27FC236}">
-                <a16:creationId xmlns:a16="http://schemas.microsoft.com/office/drawing/2014/main" id="{66856136-A0B5-745A-83A5-13A9CF71FD47}"/>
+          <p:cNvPr id="10" name="Picture 9">
+            <a:extLst>
+              <a:ext uri="{FF2B5EF4-FFF2-40B4-BE49-F238E27FC236}">
+                <a16:creationId xmlns:a16="http://schemas.microsoft.com/office/drawing/2014/main" id="{B479B7EB-1D52-33DB-E2EA-E2B4F93455A6}"/>
               </a:ext>
             </a:extLst>
           </p:cNvPr>
@@ -10759,8 +10802,8 @@
         </p:blipFill>
         <p:spPr>
           <a:xfrm>
-            <a:off x="1985103" y="4054749"/>
-            <a:ext cx="2463162" cy="2588408"/>
+            <a:off x="2230485" y="4230349"/>
+            <a:ext cx="1857634" cy="1971950"/>
           </a:xfrm>
           <a:prstGeom prst="rect">
             <a:avLst/>
@@ -10986,10 +11029,9 @@
           <a:p>
             <a:pPr algn="ctr"/>
             <a:r>
-              <a:rPr lang="en-US" dirty="0" err="1"/>
-              <a:t>IncidentList</a:t>
-            </a:r>
-            <a:endParaRPr lang="en-US" dirty="0"/>
+              <a:rPr lang="en-US" dirty="0"/>
+              <a:t>Welcome</a:t>
+            </a:r>
           </a:p>
         </p:txBody>
       </p:sp>
@@ -11065,15 +11107,15 @@
         </p:spPr>
         <p:style>
           <a:lnRef idx="2">
-            <a:schemeClr val="accent1">
+            <a:schemeClr val="accent2">
               <a:shade val="15000"/>
             </a:schemeClr>
           </a:lnRef>
           <a:fillRef idx="1">
-            <a:schemeClr val="accent1"/>
+            <a:schemeClr val="accent2"/>
           </a:fillRef>
           <a:effectRef idx="0">
-            <a:schemeClr val="accent1"/>
+            <a:schemeClr val="accent2"/>
           </a:effectRef>
           <a:fontRef idx="minor">
             <a:schemeClr val="lt1"/>
@@ -11085,9 +11127,10 @@
           <a:p>
             <a:pPr algn="ctr"/>
             <a:r>
-              <a:rPr lang="en-US" dirty="0"/>
-              <a:t>Home</a:t>
-            </a:r>
+              <a:rPr lang="en-US" dirty="0" err="1"/>
+              <a:t>IncidentList</a:t>
+            </a:r>
+            <a:endParaRPr lang="en-US" dirty="0"/>
           </a:p>
         </p:txBody>
       </p:sp>
@@ -11346,7 +11389,7 @@
         <p:spPr>
           <a:xfrm>
             <a:off x="6534120" y="2479007"/>
-            <a:ext cx="4537291" cy="3673457"/>
+            <a:ext cx="4537291" cy="1815087"/>
           </a:xfrm>
         </p:spPr>
         <p:txBody>
@@ -11375,6 +11418,55 @@
         <p:spPr>
           <a:xfrm>
             <a:off x="3317814" y="2479007"/>
+            <a:ext cx="1403122" cy="883227"/>
+          </a:xfrm>
+          <a:prstGeom prst="rect">
+            <a:avLst/>
+          </a:prstGeom>
+        </p:spPr>
+        <p:style>
+          <a:lnRef idx="2">
+            <a:schemeClr val="accent2">
+              <a:shade val="15000"/>
+            </a:schemeClr>
+          </a:lnRef>
+          <a:fillRef idx="1">
+            <a:schemeClr val="accent2"/>
+          </a:fillRef>
+          <a:effectRef idx="0">
+            <a:schemeClr val="accent2"/>
+          </a:effectRef>
+          <a:fontRef idx="minor">
+            <a:schemeClr val="lt1"/>
+          </a:fontRef>
+        </p:style>
+        <p:txBody>
+          <a:bodyPr rtlCol="0" anchor="ctr"/>
+          <a:lstStyle/>
+          <a:p>
+            <a:pPr algn="ctr"/>
+            <a:r>
+              <a:rPr lang="en-US" dirty="0"/>
+              <a:t>Home</a:t>
+            </a:r>
+          </a:p>
+        </p:txBody>
+      </p:sp>
+      <p:sp>
+        <p:nvSpPr>
+          <p:cNvPr id="7" name="Rectangle 6">
+            <a:extLst>
+              <a:ext uri="{FF2B5EF4-FFF2-40B4-BE49-F238E27FC236}">
+                <a16:creationId xmlns:a16="http://schemas.microsoft.com/office/drawing/2014/main" id="{25D56EBA-408B-F237-F878-49327D2A58A2}"/>
+              </a:ext>
+            </a:extLst>
+          </p:cNvPr>
+          <p:cNvSpPr/>
+          <p:nvPr/>
+        </p:nvSpPr>
+        <p:spPr>
+          <a:xfrm>
+            <a:off x="4429438" y="3663443"/>
             <a:ext cx="1403122" cy="883227"/>
           </a:xfrm>
           <a:prstGeom prst="rect">
@@ -11404,17 +11496,17 @@
             <a:pPr algn="ctr"/>
             <a:r>
               <a:rPr lang="en-US" dirty="0"/>
-              <a:t>Home</a:t>
-            </a:r>
-          </a:p>
-        </p:txBody>
-      </p:sp>
-      <p:sp>
-        <p:nvSpPr>
-          <p:cNvPr id="7" name="Rectangle 6">
-            <a:extLst>
-              <a:ext uri="{FF2B5EF4-FFF2-40B4-BE49-F238E27FC236}">
-                <a16:creationId xmlns:a16="http://schemas.microsoft.com/office/drawing/2014/main" id="{25D56EBA-408B-F237-F878-49327D2A58A2}"/>
+              <a:t>Welcome</a:t>
+            </a:r>
+          </a:p>
+        </p:txBody>
+      </p:sp>
+      <p:sp>
+        <p:nvSpPr>
+          <p:cNvPr id="8" name="Rectangle 7">
+            <a:extLst>
+              <a:ext uri="{FF2B5EF4-FFF2-40B4-BE49-F238E27FC236}">
+                <a16:creationId xmlns:a16="http://schemas.microsoft.com/office/drawing/2014/main" id="{FB5C7DE7-825D-B9F3-F981-8F1EEE651804}"/>
               </a:ext>
             </a:extLst>
           </p:cNvPr>
@@ -11423,7 +11515,7 @@
         </p:nvSpPr>
         <p:spPr>
           <a:xfrm>
-            <a:off x="4429438" y="3663443"/>
+            <a:off x="2286873" y="5142045"/>
             <a:ext cx="1403122" cy="883227"/>
           </a:xfrm>
           <a:prstGeom prst="rect">
@@ -11452,19 +11544,18 @@
           <a:p>
             <a:pPr algn="ctr"/>
             <a:r>
-              <a:rPr lang="en-US" dirty="0" err="1"/>
-              <a:t>IncidentList</a:t>
-            </a:r>
-            <a:endParaRPr lang="en-US" dirty="0"/>
-          </a:p>
-        </p:txBody>
-      </p:sp>
-      <p:sp>
-        <p:nvSpPr>
-          <p:cNvPr id="8" name="Rectangle 7">
-            <a:extLst>
-              <a:ext uri="{FF2B5EF4-FFF2-40B4-BE49-F238E27FC236}">
-                <a16:creationId xmlns:a16="http://schemas.microsoft.com/office/drawing/2014/main" id="{FB5C7DE7-825D-B9F3-F981-8F1EEE651804}"/>
+              <a:rPr lang="en-US" dirty="0"/>
+              <a:t>Incident</a:t>
+            </a:r>
+          </a:p>
+        </p:txBody>
+      </p:sp>
+      <p:sp>
+        <p:nvSpPr>
+          <p:cNvPr id="9" name="Rectangle 8">
+            <a:extLst>
+              <a:ext uri="{FF2B5EF4-FFF2-40B4-BE49-F238E27FC236}">
+                <a16:creationId xmlns:a16="http://schemas.microsoft.com/office/drawing/2014/main" id="{C7E0526C-5A7D-29F2-8759-C9030965C369}"/>
               </a:ext>
             </a:extLst>
           </p:cNvPr>
@@ -11473,7 +11564,7 @@
         </p:nvSpPr>
         <p:spPr>
           <a:xfrm>
-            <a:off x="2286873" y="5142045"/>
+            <a:off x="2286873" y="3663444"/>
             <a:ext cx="1403122" cy="883227"/>
           </a:xfrm>
           <a:prstGeom prst="rect">
@@ -11502,58 +11593,10 @@
           <a:p>
             <a:pPr algn="ctr"/>
             <a:r>
-              <a:rPr lang="en-US" dirty="0"/>
-              <a:t>Incident</a:t>
-            </a:r>
-          </a:p>
-        </p:txBody>
-      </p:sp>
-      <p:sp>
-        <p:nvSpPr>
-          <p:cNvPr id="9" name="Rectangle 8">
-            <a:extLst>
-              <a:ext uri="{FF2B5EF4-FFF2-40B4-BE49-F238E27FC236}">
-                <a16:creationId xmlns:a16="http://schemas.microsoft.com/office/drawing/2014/main" id="{C7E0526C-5A7D-29F2-8759-C9030965C369}"/>
-              </a:ext>
-            </a:extLst>
-          </p:cNvPr>
-          <p:cNvSpPr/>
-          <p:nvPr/>
-        </p:nvSpPr>
-        <p:spPr>
-          <a:xfrm>
-            <a:off x="2286873" y="3663444"/>
-            <a:ext cx="1403122" cy="883227"/>
-          </a:xfrm>
-          <a:prstGeom prst="rect">
-            <a:avLst/>
-          </a:prstGeom>
-        </p:spPr>
-        <p:style>
-          <a:lnRef idx="2">
-            <a:schemeClr val="accent1">
-              <a:shade val="15000"/>
-            </a:schemeClr>
-          </a:lnRef>
-          <a:fillRef idx="1">
-            <a:schemeClr val="accent1"/>
-          </a:fillRef>
-          <a:effectRef idx="0">
-            <a:schemeClr val="accent1"/>
-          </a:effectRef>
-          <a:fontRef idx="minor">
-            <a:schemeClr val="lt1"/>
-          </a:fontRef>
-        </p:style>
-        <p:txBody>
-          <a:bodyPr rtlCol="0" anchor="ctr"/>
-          <a:lstStyle/>
-          <a:p>
-            <a:pPr algn="ctr"/>
-            <a:r>
-              <a:rPr lang="en-US" dirty="0"/>
-              <a:t>Home</a:t>
-            </a:r>
+              <a:rPr lang="en-US" dirty="0" err="1"/>
+              <a:t>IncidentList</a:t>
+            </a:r>
+            <a:endParaRPr lang="en-US" dirty="0"/>
           </a:p>
         </p:txBody>
       </p:sp>
@@ -11686,6 +11729,36 @@
           </a:fontRef>
         </p:style>
       </p:cxnSp>
+      <p:pic>
+        <p:nvPicPr>
+          <p:cNvPr id="10" name="Picture 9">
+            <a:extLst>
+              <a:ext uri="{FF2B5EF4-FFF2-40B4-BE49-F238E27FC236}">
+                <a16:creationId xmlns:a16="http://schemas.microsoft.com/office/drawing/2014/main" id="{8446EA24-23AA-97ED-2C8B-D9326CD502BA}"/>
+              </a:ext>
+            </a:extLst>
+          </p:cNvPr>
+          <p:cNvPicPr>
+            <a:picLocks noChangeAspect="1"/>
+          </p:cNvPicPr>
+          <p:nvPr/>
+        </p:nvPicPr>
+        <p:blipFill>
+          <a:blip r:embed="rId2"/>
+          <a:stretch>
+            <a:fillRect/>
+          </a:stretch>
+        </p:blipFill>
+        <p:spPr>
+          <a:xfrm>
+            <a:off x="6669649" y="4294094"/>
+            <a:ext cx="4266232" cy="2156053"/>
+          </a:xfrm>
+          <a:prstGeom prst="rect">
+            <a:avLst/>
+          </a:prstGeom>
+        </p:spPr>
+      </p:pic>
     </p:spTree>
     <p:extLst>
       <p:ext uri="{BB962C8B-B14F-4D97-AF65-F5344CB8AC3E}">
@@ -11778,7 +11851,7 @@
           <a:p>
             <a:r>
               <a:rPr lang="en-US" dirty="0"/>
-              <a:t>Lift up the state of the Incident list so that changes are persisted</a:t>
+              <a:t>Lift the state of the Incident list so that changes are persisted</a:t>
             </a:r>
           </a:p>
         </p:txBody>
@@ -11869,8 +11942,8 @@
         </p:nvSpPr>
         <p:spPr>
           <a:xfrm>
-            <a:off x="6000244" y="2900119"/>
-            <a:ext cx="5740756" cy="2442846"/>
+            <a:off x="6096000" y="2858235"/>
+            <a:ext cx="5740756" cy="1884095"/>
           </a:xfrm>
           <a:prstGeom prst="rect">
             <a:avLst/>
@@ -12083,12 +12156,6 @@
           <a:p>
             <a:r>
               <a:rPr lang="en-US" dirty="0"/>
-              <a:t>Modify your ‘Incident’ component so that it has a delete button</a:t>
-            </a:r>
-          </a:p>
-          <a:p>
-            <a:r>
-              <a:rPr lang="en-US" dirty="0"/>
               <a:t>You will need to make edits to the Home and Incident list components:</a:t>
             </a:r>
           </a:p>
@@ -12096,7 +12163,7 @@
             <a:pPr lvl="1"/>
             <a:r>
               <a:rPr lang="en-US" dirty="0"/>
-              <a:t>Move state and the delete function to ‘Home’</a:t>
+              <a:t>Move state and ‘delete’ function to ‘Home’ component</a:t>
             </a:r>
           </a:p>
           <a:p>
@@ -12110,10 +12177,10 @@
       </p:sp>
       <p:pic>
         <p:nvPicPr>
-          <p:cNvPr id="5" name="Picture 4">
-            <a:extLst>
-              <a:ext uri="{FF2B5EF4-FFF2-40B4-BE49-F238E27FC236}">
-                <a16:creationId xmlns:a16="http://schemas.microsoft.com/office/drawing/2014/main" id="{FE6AE13A-2BFF-80B8-2166-4D4FD2A5D874}"/>
+          <p:cNvPr id="9" name="Picture 8">
+            <a:extLst>
+              <a:ext uri="{FF2B5EF4-FFF2-40B4-BE49-F238E27FC236}">
+                <a16:creationId xmlns:a16="http://schemas.microsoft.com/office/drawing/2014/main" id="{0F0AB8FD-4C62-7E2A-9BAB-EADC4650983D}"/>
               </a:ext>
             </a:extLst>
           </p:cNvPr>
@@ -12130,8 +12197,8 @@
         </p:blipFill>
         <p:spPr>
           <a:xfrm>
-            <a:off x="1985103" y="4054749"/>
-            <a:ext cx="2463162" cy="2588408"/>
+            <a:off x="2311167" y="4044749"/>
+            <a:ext cx="1857634" cy="1971950"/>
           </a:xfrm>
           <a:prstGeom prst="rect">
             <a:avLst/>
@@ -12270,6 +12337,2150 @@
     <p:extLst>
       <p:ext uri="{BB962C8B-B14F-4D97-AF65-F5344CB8AC3E}">
         <p14:creationId xmlns:p14="http://schemas.microsoft.com/office/powerpoint/2010/main" val="901512706"/>
+      </p:ext>
+    </p:extLst>
+  </p:cSld>
+  <p:clrMapOvr>
+    <a:masterClrMapping/>
+  </p:clrMapOvr>
+</p:sld>
+</file>
+
+<file path=ppt/slides/slide30.xml><?xml version="1.0" encoding="utf-8"?>
+<p:sld xmlns:a="http://schemas.openxmlformats.org/drawingml/2006/main" xmlns:r="http://schemas.openxmlformats.org/officeDocument/2006/relationships" xmlns:p="http://schemas.openxmlformats.org/presentationml/2006/main">
+  <p:cSld>
+    <p:spTree>
+      <p:nvGrpSpPr>
+        <p:cNvPr id="1" name=""/>
+        <p:cNvGrpSpPr/>
+        <p:nvPr/>
+      </p:nvGrpSpPr>
+      <p:grpSpPr>
+        <a:xfrm>
+          <a:off x="0" y="0"/>
+          <a:ext cx="0" cy="0"/>
+          <a:chOff x="0" y="0"/>
+          <a:chExt cx="0" cy="0"/>
+        </a:xfrm>
+      </p:grpSpPr>
+      <p:sp>
+        <p:nvSpPr>
+          <p:cNvPr id="2" name="Title 1">
+            <a:extLst>
+              <a:ext uri="{FF2B5EF4-FFF2-40B4-BE49-F238E27FC236}">
+                <a16:creationId xmlns:a16="http://schemas.microsoft.com/office/drawing/2014/main" id="{235C54EE-6EE6-8706-74C4-5E0D6F86D58C}"/>
+              </a:ext>
+            </a:extLst>
+          </p:cNvPr>
+          <p:cNvSpPr>
+            <a:spLocks noGrp="1"/>
+          </p:cNvSpPr>
+          <p:nvPr>
+            <p:ph type="title"/>
+          </p:nvPr>
+        </p:nvSpPr>
+        <p:spPr/>
+        <p:txBody>
+          <a:bodyPr/>
+          <a:lstStyle/>
+          <a:p>
+            <a:r>
+              <a:rPr lang="en-US" dirty="0" err="1"/>
+              <a:t>onCHange</a:t>
+            </a:r>
+            <a:r>
+              <a:rPr lang="en-US" dirty="0"/>
+              <a:t> &amp; Object State Updates</a:t>
+            </a:r>
+          </a:p>
+        </p:txBody>
+      </p:sp>
+      <p:sp>
+        <p:nvSpPr>
+          <p:cNvPr id="3" name="Content Placeholder 2">
+            <a:extLst>
+              <a:ext uri="{FF2B5EF4-FFF2-40B4-BE49-F238E27FC236}">
+                <a16:creationId xmlns:a16="http://schemas.microsoft.com/office/drawing/2014/main" id="{4FEC1A02-F6DB-AEC7-331A-10E6587F46D3}"/>
+              </a:ext>
+            </a:extLst>
+          </p:cNvPr>
+          <p:cNvSpPr>
+            <a:spLocks noGrp="1"/>
+          </p:cNvSpPr>
+          <p:nvPr>
+            <p:ph idx="1"/>
+          </p:nvPr>
+        </p:nvSpPr>
+        <p:spPr>
+          <a:xfrm>
+            <a:off x="593753" y="2477541"/>
+            <a:ext cx="4483867" cy="3678303"/>
+          </a:xfrm>
+        </p:spPr>
+        <p:txBody>
+          <a:bodyPr/>
+          <a:lstStyle/>
+          <a:p>
+            <a:r>
+              <a:rPr lang="en-US" dirty="0" err="1"/>
+              <a:t>onChange</a:t>
+            </a:r>
+            <a:r>
+              <a:rPr lang="en-US" dirty="0"/>
+              <a:t> allows us to call a JavaScript function on each keystroke for text input elements, or on each selection for dropdowns</a:t>
+            </a:r>
+          </a:p>
+          <a:p>
+            <a:r>
+              <a:rPr lang="en-US" dirty="0"/>
+              <a:t>We can use the event object to help us update state</a:t>
+            </a:r>
+          </a:p>
+          <a:p>
+            <a:pPr lvl="1"/>
+            <a:r>
+              <a:rPr lang="en-US" dirty="0"/>
+              <a:t>Notice that form is an object, so we use “{“ and “}” when updating the entry in the object:</a:t>
+            </a:r>
+          </a:p>
+          <a:p>
+            <a:pPr lvl="1"/>
+            <a:r>
+              <a:rPr lang="en-US" dirty="0"/>
+              <a:t> {…</a:t>
+            </a:r>
+            <a:r>
+              <a:rPr lang="en-US" dirty="0" err="1"/>
+              <a:t>prev</a:t>
+            </a:r>
+            <a:r>
+              <a:rPr lang="en-US" dirty="0"/>
+              <a:t>, [name]:value}</a:t>
+            </a:r>
+          </a:p>
+        </p:txBody>
+      </p:sp>
+      <p:pic>
+        <p:nvPicPr>
+          <p:cNvPr id="5" name="Picture 4">
+            <a:extLst>
+              <a:ext uri="{FF2B5EF4-FFF2-40B4-BE49-F238E27FC236}">
+                <a16:creationId xmlns:a16="http://schemas.microsoft.com/office/drawing/2014/main" id="{AD64D2CE-7EEA-134B-5C1B-675357DC24AA}"/>
+              </a:ext>
+            </a:extLst>
+          </p:cNvPr>
+          <p:cNvPicPr>
+            <a:picLocks noChangeAspect="1"/>
+          </p:cNvPicPr>
+          <p:nvPr/>
+        </p:nvPicPr>
+        <p:blipFill>
+          <a:blip r:embed="rId2"/>
+          <a:stretch>
+            <a:fillRect/>
+          </a:stretch>
+        </p:blipFill>
+        <p:spPr>
+          <a:xfrm>
+            <a:off x="5942642" y="2652604"/>
+            <a:ext cx="5668166" cy="1552792"/>
+          </a:xfrm>
+          <a:prstGeom prst="rect">
+            <a:avLst/>
+          </a:prstGeom>
+        </p:spPr>
+      </p:pic>
+      <p:pic>
+        <p:nvPicPr>
+          <p:cNvPr id="7" name="Picture 6">
+            <a:extLst>
+              <a:ext uri="{FF2B5EF4-FFF2-40B4-BE49-F238E27FC236}">
+                <a16:creationId xmlns:a16="http://schemas.microsoft.com/office/drawing/2014/main" id="{03767906-49CB-33E1-06FD-4BD255B13E53}"/>
+              </a:ext>
+            </a:extLst>
+          </p:cNvPr>
+          <p:cNvPicPr>
+            <a:picLocks noChangeAspect="1"/>
+          </p:cNvPicPr>
+          <p:nvPr/>
+        </p:nvPicPr>
+        <p:blipFill>
+          <a:blip r:embed="rId3"/>
+          <a:stretch>
+            <a:fillRect/>
+          </a:stretch>
+        </p:blipFill>
+        <p:spPr>
+          <a:xfrm>
+            <a:off x="3322901" y="2180496"/>
+            <a:ext cx="8287907" cy="219106"/>
+          </a:xfrm>
+          <a:prstGeom prst="rect">
+            <a:avLst/>
+          </a:prstGeom>
+        </p:spPr>
+      </p:pic>
+      <p:pic>
+        <p:nvPicPr>
+          <p:cNvPr id="9" name="Picture 8">
+            <a:extLst>
+              <a:ext uri="{FF2B5EF4-FFF2-40B4-BE49-F238E27FC236}">
+                <a16:creationId xmlns:a16="http://schemas.microsoft.com/office/drawing/2014/main" id="{930B96F5-007B-333A-40DA-59D0EC00C7FC}"/>
+              </a:ext>
+            </a:extLst>
+          </p:cNvPr>
+          <p:cNvPicPr>
+            <a:picLocks noChangeAspect="1"/>
+          </p:cNvPicPr>
+          <p:nvPr/>
+        </p:nvPicPr>
+        <p:blipFill>
+          <a:blip r:embed="rId4"/>
+          <a:stretch>
+            <a:fillRect/>
+          </a:stretch>
+        </p:blipFill>
+        <p:spPr>
+          <a:xfrm>
+            <a:off x="7114381" y="4369470"/>
+            <a:ext cx="4496427" cy="952633"/>
+          </a:xfrm>
+          <a:prstGeom prst="rect">
+            <a:avLst/>
+          </a:prstGeom>
+        </p:spPr>
+      </p:pic>
+      <p:pic>
+        <p:nvPicPr>
+          <p:cNvPr id="11" name="Picture 10">
+            <a:extLst>
+              <a:ext uri="{FF2B5EF4-FFF2-40B4-BE49-F238E27FC236}">
+                <a16:creationId xmlns:a16="http://schemas.microsoft.com/office/drawing/2014/main" id="{811926F2-6F20-EC29-2FE0-1E2C7AA3D3AB}"/>
+              </a:ext>
+            </a:extLst>
+          </p:cNvPr>
+          <p:cNvPicPr>
+            <a:picLocks noChangeAspect="1"/>
+          </p:cNvPicPr>
+          <p:nvPr/>
+        </p:nvPicPr>
+        <p:blipFill>
+          <a:blip r:embed="rId5"/>
+          <a:stretch>
+            <a:fillRect/>
+          </a:stretch>
+        </p:blipFill>
+        <p:spPr>
+          <a:xfrm>
+            <a:off x="7698784" y="5412521"/>
+            <a:ext cx="3105583" cy="1343212"/>
+          </a:xfrm>
+          <a:prstGeom prst="rect">
+            <a:avLst/>
+          </a:prstGeom>
+        </p:spPr>
+      </p:pic>
+    </p:spTree>
+    <p:extLst>
+      <p:ext uri="{BB962C8B-B14F-4D97-AF65-F5344CB8AC3E}">
+        <p14:creationId xmlns:p14="http://schemas.microsoft.com/office/powerpoint/2010/main" val="2238158455"/>
+      </p:ext>
+    </p:extLst>
+  </p:cSld>
+  <p:clrMapOvr>
+    <a:masterClrMapping/>
+  </p:clrMapOvr>
+</p:sld>
+</file>
+
+<file path=ppt/slides/slide31.xml><?xml version="1.0" encoding="utf-8"?>
+<p:sld xmlns:a="http://schemas.openxmlformats.org/drawingml/2006/main" xmlns:r="http://schemas.openxmlformats.org/officeDocument/2006/relationships" xmlns:p="http://schemas.openxmlformats.org/presentationml/2006/main">
+  <p:cSld>
+    <p:spTree>
+      <p:nvGrpSpPr>
+        <p:cNvPr id="1" name="">
+          <a:extLst>
+            <a:ext uri="{FF2B5EF4-FFF2-40B4-BE49-F238E27FC236}">
+              <a16:creationId xmlns:a16="http://schemas.microsoft.com/office/drawing/2014/main" id="{35E034F4-0E19-AB75-C3CA-4701BC6C2537}"/>
+            </a:ext>
+          </a:extLst>
+        </p:cNvPr>
+        <p:cNvGrpSpPr/>
+        <p:nvPr/>
+      </p:nvGrpSpPr>
+      <p:grpSpPr>
+        <a:xfrm>
+          <a:off x="0" y="0"/>
+          <a:ext cx="0" cy="0"/>
+          <a:chOff x="0" y="0"/>
+          <a:chExt cx="0" cy="0"/>
+        </a:xfrm>
+      </p:grpSpPr>
+      <p:sp>
+        <p:nvSpPr>
+          <p:cNvPr id="2" name="Title 1">
+            <a:extLst>
+              <a:ext uri="{FF2B5EF4-FFF2-40B4-BE49-F238E27FC236}">
+                <a16:creationId xmlns:a16="http://schemas.microsoft.com/office/drawing/2014/main" id="{F41C5A6A-19FD-D4F3-3BEC-C4C41EEC8809}"/>
+              </a:ext>
+            </a:extLst>
+          </p:cNvPr>
+          <p:cNvSpPr>
+            <a:spLocks noGrp="1"/>
+          </p:cNvSpPr>
+          <p:nvPr>
+            <p:ph type="title"/>
+          </p:nvPr>
+        </p:nvSpPr>
+        <p:spPr/>
+        <p:txBody>
+          <a:bodyPr/>
+          <a:lstStyle/>
+          <a:p>
+            <a:r>
+              <a:rPr lang="en-US" dirty="0"/>
+              <a:t>Challenge – Add Incident Records</a:t>
+            </a:r>
+          </a:p>
+        </p:txBody>
+      </p:sp>
+      <p:sp>
+        <p:nvSpPr>
+          <p:cNvPr id="3" name="Content Placeholder 2">
+            <a:extLst>
+              <a:ext uri="{FF2B5EF4-FFF2-40B4-BE49-F238E27FC236}">
+                <a16:creationId xmlns:a16="http://schemas.microsoft.com/office/drawing/2014/main" id="{0E19E0EF-1F62-CE90-C562-7FFC375EBE14}"/>
+              </a:ext>
+            </a:extLst>
+          </p:cNvPr>
+          <p:cNvSpPr>
+            <a:spLocks noGrp="1"/>
+          </p:cNvSpPr>
+          <p:nvPr>
+            <p:ph idx="1"/>
+          </p:nvPr>
+        </p:nvSpPr>
+        <p:spPr>
+          <a:xfrm>
+            <a:off x="581192" y="2475925"/>
+            <a:ext cx="5317584" cy="1681246"/>
+          </a:xfrm>
+        </p:spPr>
+        <p:txBody>
+          <a:bodyPr/>
+          <a:lstStyle/>
+          <a:p>
+            <a:r>
+              <a:rPr lang="en-US" dirty="0"/>
+              <a:t>Create a form to add incidents</a:t>
+            </a:r>
+          </a:p>
+        </p:txBody>
+      </p:sp>
+      <p:sp>
+        <p:nvSpPr>
+          <p:cNvPr id="6" name="TextBox 5">
+            <a:extLst>
+              <a:ext uri="{FF2B5EF4-FFF2-40B4-BE49-F238E27FC236}">
+                <a16:creationId xmlns:a16="http://schemas.microsoft.com/office/drawing/2014/main" id="{39F79173-8D1D-10D2-FED7-AA8C956FC95D}"/>
+              </a:ext>
+            </a:extLst>
+          </p:cNvPr>
+          <p:cNvSpPr txBox="1"/>
+          <p:nvPr/>
+        </p:nvSpPr>
+        <p:spPr>
+          <a:xfrm>
+            <a:off x="1228165" y="2402747"/>
+            <a:ext cx="756938" cy="369332"/>
+          </a:xfrm>
+          <a:prstGeom prst="rect">
+            <a:avLst/>
+          </a:prstGeom>
+          <a:noFill/>
+        </p:spPr>
+        <p:txBody>
+          <a:bodyPr wrap="none" rtlCol="0">
+            <a:spAutoFit/>
+          </a:bodyPr>
+          <a:lstStyle/>
+          <a:p>
+            <a:r>
+              <a:rPr lang="en-US" b="1" dirty="0"/>
+              <a:t>Goal:</a:t>
+            </a:r>
+          </a:p>
+        </p:txBody>
+      </p:sp>
+      <p:sp>
+        <p:nvSpPr>
+          <p:cNvPr id="7" name="TextBox 6">
+            <a:extLst>
+              <a:ext uri="{FF2B5EF4-FFF2-40B4-BE49-F238E27FC236}">
+                <a16:creationId xmlns:a16="http://schemas.microsoft.com/office/drawing/2014/main" id="{9F839857-33C8-7325-8290-16B1EDBA5B5F}"/>
+              </a:ext>
+            </a:extLst>
+          </p:cNvPr>
+          <p:cNvSpPr txBox="1"/>
+          <p:nvPr/>
+        </p:nvSpPr>
+        <p:spPr>
+          <a:xfrm>
+            <a:off x="6676991" y="2402747"/>
+            <a:ext cx="4933817" cy="369332"/>
+          </a:xfrm>
+          <a:prstGeom prst="rect">
+            <a:avLst/>
+          </a:prstGeom>
+          <a:noFill/>
+        </p:spPr>
+        <p:txBody>
+          <a:bodyPr wrap="square" rtlCol="0">
+            <a:spAutoFit/>
+          </a:bodyPr>
+          <a:lstStyle/>
+          <a:p>
+            <a:r>
+              <a:rPr lang="en-US" b="1" dirty="0"/>
+              <a:t>Scenario:  			</a:t>
+            </a:r>
+          </a:p>
+        </p:txBody>
+      </p:sp>
+      <p:sp>
+        <p:nvSpPr>
+          <p:cNvPr id="8" name="Content Placeholder 2">
+            <a:extLst>
+              <a:ext uri="{FF2B5EF4-FFF2-40B4-BE49-F238E27FC236}">
+                <a16:creationId xmlns:a16="http://schemas.microsoft.com/office/drawing/2014/main" id="{ADFC556C-5069-1F07-0B7E-A81B7E8C31E7}"/>
+              </a:ext>
+            </a:extLst>
+          </p:cNvPr>
+          <p:cNvSpPr txBox="1">
+            <a:spLocks/>
+          </p:cNvSpPr>
+          <p:nvPr/>
+        </p:nvSpPr>
+        <p:spPr>
+          <a:xfrm>
+            <a:off x="6096000" y="2858235"/>
+            <a:ext cx="5740756" cy="2206824"/>
+          </a:xfrm>
+          <a:prstGeom prst="rect">
+            <a:avLst/>
+          </a:prstGeom>
+        </p:spPr>
+        <p:txBody>
+          <a:bodyPr vert="horz" lIns="91440" tIns="45720" rIns="91440" bIns="45720" rtlCol="0" anchor="ctr">
+            <a:normAutofit lnSpcReduction="10000"/>
+          </a:bodyPr>
+          <a:lstStyle>
+            <a:lvl1pPr marL="306000" indent="-306000" algn="l" defTabSz="457200" rtl="0" eaLnBrk="1" latinLnBrk="0" hangingPunct="1">
+              <a:spcBef>
+                <a:spcPct val="20000"/>
+              </a:spcBef>
+              <a:spcAft>
+                <a:spcPts val="600"/>
+              </a:spcAft>
+              <a:buClr>
+                <a:schemeClr val="accent2"/>
+              </a:buClr>
+              <a:buSzPct val="92000"/>
+              <a:buFont typeface="Wingdings 2" panose="05020102010507070707" pitchFamily="18" charset="2"/>
+              <a:buChar char=""/>
+              <a:defRPr sz="1800" kern="1200">
+                <a:solidFill>
+                  <a:schemeClr val="tx2"/>
+                </a:solidFill>
+                <a:latin typeface="+mn-lt"/>
+                <a:ea typeface="+mn-ea"/>
+                <a:cs typeface="+mn-cs"/>
+              </a:defRPr>
+            </a:lvl1pPr>
+            <a:lvl2pPr marL="630000" indent="-306000" algn="l" defTabSz="457200" rtl="0" eaLnBrk="1" latinLnBrk="0" hangingPunct="1">
+              <a:spcBef>
+                <a:spcPct val="20000"/>
+              </a:spcBef>
+              <a:spcAft>
+                <a:spcPts val="600"/>
+              </a:spcAft>
+              <a:buClr>
+                <a:schemeClr val="accent2"/>
+              </a:buClr>
+              <a:buSzPct val="92000"/>
+              <a:buFont typeface="Wingdings 2" panose="05020102010507070707" pitchFamily="18" charset="2"/>
+              <a:buChar char=""/>
+              <a:defRPr sz="1600" kern="1200">
+                <a:solidFill>
+                  <a:schemeClr val="tx2"/>
+                </a:solidFill>
+                <a:latin typeface="+mn-lt"/>
+                <a:ea typeface="+mn-ea"/>
+                <a:cs typeface="+mn-cs"/>
+              </a:defRPr>
+            </a:lvl2pPr>
+            <a:lvl3pPr marL="900000" indent="-270000" algn="l" defTabSz="457200" rtl="0" eaLnBrk="1" latinLnBrk="0" hangingPunct="1">
+              <a:spcBef>
+                <a:spcPct val="20000"/>
+              </a:spcBef>
+              <a:spcAft>
+                <a:spcPts val="600"/>
+              </a:spcAft>
+              <a:buClr>
+                <a:schemeClr val="accent2"/>
+              </a:buClr>
+              <a:buSzPct val="92000"/>
+              <a:buFont typeface="Wingdings 2" panose="05020102010507070707" pitchFamily="18" charset="2"/>
+              <a:buChar char=""/>
+              <a:defRPr sz="1400" kern="1200">
+                <a:solidFill>
+                  <a:schemeClr val="tx2"/>
+                </a:solidFill>
+                <a:latin typeface="+mn-lt"/>
+                <a:ea typeface="+mn-ea"/>
+                <a:cs typeface="+mn-cs"/>
+              </a:defRPr>
+            </a:lvl3pPr>
+            <a:lvl4pPr marL="1242000" indent="-234000" algn="l" defTabSz="457200" rtl="0" eaLnBrk="1" latinLnBrk="0" hangingPunct="1">
+              <a:spcBef>
+                <a:spcPct val="20000"/>
+              </a:spcBef>
+              <a:spcAft>
+                <a:spcPts val="600"/>
+              </a:spcAft>
+              <a:buClr>
+                <a:schemeClr val="accent2"/>
+              </a:buClr>
+              <a:buSzPct val="92000"/>
+              <a:buFont typeface="Wingdings 2" panose="05020102010507070707" pitchFamily="18" charset="2"/>
+              <a:buChar char=""/>
+              <a:defRPr sz="1200" kern="1200">
+                <a:solidFill>
+                  <a:schemeClr val="tx2"/>
+                </a:solidFill>
+                <a:latin typeface="+mn-lt"/>
+                <a:ea typeface="+mn-ea"/>
+                <a:cs typeface="+mn-cs"/>
+              </a:defRPr>
+            </a:lvl4pPr>
+            <a:lvl5pPr marL="1602000" indent="-234000" algn="l" defTabSz="457200" rtl="0" eaLnBrk="1" latinLnBrk="0" hangingPunct="1">
+              <a:spcBef>
+                <a:spcPct val="20000"/>
+              </a:spcBef>
+              <a:spcAft>
+                <a:spcPts val="600"/>
+              </a:spcAft>
+              <a:buClr>
+                <a:schemeClr val="accent2"/>
+              </a:buClr>
+              <a:buSzPct val="92000"/>
+              <a:buFont typeface="Wingdings 2" panose="05020102010507070707" pitchFamily="18" charset="2"/>
+              <a:buChar char=""/>
+              <a:defRPr sz="1200" kern="1200">
+                <a:solidFill>
+                  <a:schemeClr val="tx2"/>
+                </a:solidFill>
+                <a:latin typeface="+mn-lt"/>
+                <a:ea typeface="+mn-ea"/>
+                <a:cs typeface="+mn-cs"/>
+              </a:defRPr>
+            </a:lvl5pPr>
+            <a:lvl6pPr marL="1900000" indent="-228600" algn="l" defTabSz="457200" rtl="0" eaLnBrk="1" latinLnBrk="0" hangingPunct="1">
+              <a:spcBef>
+                <a:spcPct val="20000"/>
+              </a:spcBef>
+              <a:spcAft>
+                <a:spcPts val="600"/>
+              </a:spcAft>
+              <a:buClr>
+                <a:schemeClr val="accent2"/>
+              </a:buClr>
+              <a:buSzPct val="92000"/>
+              <a:buFont typeface="Wingdings 2" panose="05020102010507070707" pitchFamily="18" charset="2"/>
+              <a:buChar char=""/>
+              <a:defRPr sz="1200" kern="1200">
+                <a:solidFill>
+                  <a:schemeClr val="tx2"/>
+                </a:solidFill>
+                <a:latin typeface="+mn-lt"/>
+                <a:ea typeface="+mn-ea"/>
+                <a:cs typeface="+mn-cs"/>
+              </a:defRPr>
+            </a:lvl6pPr>
+            <a:lvl7pPr marL="2200000" indent="-228600" algn="l" defTabSz="457200" rtl="0" eaLnBrk="1" latinLnBrk="0" hangingPunct="1">
+              <a:spcBef>
+                <a:spcPct val="20000"/>
+              </a:spcBef>
+              <a:spcAft>
+                <a:spcPts val="600"/>
+              </a:spcAft>
+              <a:buClr>
+                <a:schemeClr val="accent2"/>
+              </a:buClr>
+              <a:buSzPct val="92000"/>
+              <a:buFont typeface="Wingdings 2" panose="05020102010507070707" pitchFamily="18" charset="2"/>
+              <a:buChar char=""/>
+              <a:defRPr sz="1200" kern="1200">
+                <a:solidFill>
+                  <a:schemeClr val="tx2"/>
+                </a:solidFill>
+                <a:latin typeface="+mn-lt"/>
+                <a:ea typeface="+mn-ea"/>
+                <a:cs typeface="+mn-cs"/>
+              </a:defRPr>
+            </a:lvl7pPr>
+            <a:lvl8pPr marL="2500000" indent="-228600" algn="l" defTabSz="457200" rtl="0" eaLnBrk="1" latinLnBrk="0" hangingPunct="1">
+              <a:spcBef>
+                <a:spcPct val="20000"/>
+              </a:spcBef>
+              <a:spcAft>
+                <a:spcPts val="600"/>
+              </a:spcAft>
+              <a:buClr>
+                <a:schemeClr val="accent2"/>
+              </a:buClr>
+              <a:buSzPct val="92000"/>
+              <a:buFont typeface="Wingdings 2" panose="05020102010507070707" pitchFamily="18" charset="2"/>
+              <a:buChar char=""/>
+              <a:defRPr sz="1200" kern="1200">
+                <a:solidFill>
+                  <a:schemeClr val="tx2"/>
+                </a:solidFill>
+                <a:latin typeface="+mn-lt"/>
+                <a:ea typeface="+mn-ea"/>
+                <a:cs typeface="+mn-cs"/>
+              </a:defRPr>
+            </a:lvl8pPr>
+            <a:lvl9pPr marL="2800000" indent="-228600" algn="l" defTabSz="457200" rtl="0" eaLnBrk="1" latinLnBrk="0" hangingPunct="1">
+              <a:spcBef>
+                <a:spcPct val="20000"/>
+              </a:spcBef>
+              <a:spcAft>
+                <a:spcPts val="600"/>
+              </a:spcAft>
+              <a:buClr>
+                <a:schemeClr val="accent2"/>
+              </a:buClr>
+              <a:buSzPct val="92000"/>
+              <a:buFont typeface="Wingdings 2" panose="05020102010507070707" pitchFamily="18" charset="2"/>
+              <a:buChar char=""/>
+              <a:defRPr sz="1200" kern="1200">
+                <a:solidFill>
+                  <a:schemeClr val="tx2"/>
+                </a:solidFill>
+                <a:latin typeface="+mn-lt"/>
+                <a:ea typeface="+mn-ea"/>
+                <a:cs typeface="+mn-cs"/>
+              </a:defRPr>
+            </a:lvl9pPr>
+          </a:lstStyle>
+          <a:p>
+            <a:r>
+              <a:rPr lang="en-US" dirty="0"/>
+              <a:t>You will need to make edits to the Home and Incident list components:</a:t>
+            </a:r>
+          </a:p>
+          <a:p>
+            <a:pPr lvl="1"/>
+            <a:r>
+              <a:rPr lang="en-US" dirty="0"/>
+              <a:t>Create a form on the ‘</a:t>
+            </a:r>
+            <a:r>
+              <a:rPr lang="en-US" dirty="0" err="1"/>
+              <a:t>IncidentList</a:t>
+            </a:r>
+            <a:r>
+              <a:rPr lang="en-US" dirty="0"/>
+              <a:t>’ component. Use state to store the values of the form</a:t>
+            </a:r>
+          </a:p>
+          <a:p>
+            <a:pPr lvl="1"/>
+            <a:r>
+              <a:rPr lang="en-US" dirty="0"/>
+              <a:t>Chain a callback function from Incident list component to the Home component – this callback function should save the new incident to the state that holds the list within the ‘Home’ component</a:t>
+            </a:r>
+          </a:p>
+        </p:txBody>
+      </p:sp>
+      <p:pic>
+        <p:nvPicPr>
+          <p:cNvPr id="5" name="Picture 4">
+            <a:extLst>
+              <a:ext uri="{FF2B5EF4-FFF2-40B4-BE49-F238E27FC236}">
+                <a16:creationId xmlns:a16="http://schemas.microsoft.com/office/drawing/2014/main" id="{A00A9C59-E6E2-547A-5BB1-5467DEED87E1}"/>
+              </a:ext>
+            </a:extLst>
+          </p:cNvPr>
+          <p:cNvPicPr>
+            <a:picLocks noChangeAspect="1"/>
+          </p:cNvPicPr>
+          <p:nvPr/>
+        </p:nvPicPr>
+        <p:blipFill>
+          <a:blip r:embed="rId2"/>
+          <a:stretch>
+            <a:fillRect/>
+          </a:stretch>
+        </p:blipFill>
+        <p:spPr>
+          <a:xfrm>
+            <a:off x="256528" y="3775011"/>
+            <a:ext cx="5966911" cy="2284257"/>
+          </a:xfrm>
+          <a:prstGeom prst="rect">
+            <a:avLst/>
+          </a:prstGeom>
+        </p:spPr>
+      </p:pic>
+    </p:spTree>
+    <p:extLst>
+      <p:ext uri="{BB962C8B-B14F-4D97-AF65-F5344CB8AC3E}">
+        <p14:creationId xmlns:p14="http://schemas.microsoft.com/office/powerpoint/2010/main" val="1494979656"/>
+      </p:ext>
+    </p:extLst>
+  </p:cSld>
+  <p:clrMapOvr>
+    <a:masterClrMapping/>
+  </p:clrMapOvr>
+</p:sld>
+</file>
+
+<file path=ppt/slides/slide32.xml><?xml version="1.0" encoding="utf-8"?>
+<p:sld xmlns:a="http://schemas.openxmlformats.org/drawingml/2006/main" xmlns:r="http://schemas.openxmlformats.org/officeDocument/2006/relationships" xmlns:p="http://schemas.openxmlformats.org/presentationml/2006/main">
+  <p:cSld>
+    <p:bg>
+      <p:bgPr>
+        <a:solidFill>
+          <a:schemeClr val="bg1"/>
+        </a:solidFill>
+        <a:effectLst/>
+      </p:bgPr>
+    </p:bg>
+    <p:spTree>
+      <p:nvGrpSpPr>
+        <p:cNvPr id="1" name=""/>
+        <p:cNvGrpSpPr/>
+        <p:nvPr/>
+      </p:nvGrpSpPr>
+      <p:grpSpPr>
+        <a:xfrm>
+          <a:off x="0" y="0"/>
+          <a:ext cx="0" cy="0"/>
+          <a:chOff x="0" y="0"/>
+          <a:chExt cx="0" cy="0"/>
+        </a:xfrm>
+      </p:grpSpPr>
+      <p:sp useBgFill="1">
+        <p:nvSpPr>
+          <p:cNvPr id="9" name="Rectangle 8">
+            <a:extLst>
+              <a:ext uri="{FF2B5EF4-FFF2-40B4-BE49-F238E27FC236}">
+                <a16:creationId xmlns:a16="http://schemas.microsoft.com/office/drawing/2014/main" id="{F1ADD25B-0A33-4EF2-90F4-43139269318B}"/>
+              </a:ext>
+              <a:ext uri="{C183D7F6-B498-43B3-948B-1728B52AA6E4}">
+                <adec:decorative xmlns:adec="http://schemas.microsoft.com/office/drawing/2017/decorative" val="1"/>
+              </a:ext>
+            </a:extLst>
+          </p:cNvPr>
+          <p:cNvSpPr>
+            <a:spLocks noGrp="1" noRot="1" noChangeAspect="1" noMove="1" noResize="1" noEditPoints="1" noAdjustHandles="1" noChangeArrowheads="1" noChangeShapeType="1" noTextEdit="1"/>
+          </p:cNvSpPr>
+          <p:nvPr>
+            <p:extLst>
+              <p:ext uri="{386F3935-93C4-4BCD-93E2-E3B085C9AB24}">
+                <p16:designElem xmlns:p16="http://schemas.microsoft.com/office/powerpoint/2015/main" val="1"/>
+              </p:ext>
+            </p:extLst>
+          </p:nvPr>
+        </p:nvSpPr>
+        <p:spPr>
+          <a:xfrm>
+            <a:off x="0" y="614406"/>
+            <a:ext cx="12192000" cy="6243593"/>
+          </a:xfrm>
+          <a:prstGeom prst="rect">
+            <a:avLst/>
+          </a:prstGeom>
+          <a:ln>
+            <a:noFill/>
+          </a:ln>
+        </p:spPr>
+        <p:style>
+          <a:lnRef idx="2">
+            <a:schemeClr val="accent1">
+              <a:shade val="50000"/>
+            </a:schemeClr>
+          </a:lnRef>
+          <a:fillRef idx="1">
+            <a:schemeClr val="accent1"/>
+          </a:fillRef>
+          <a:effectRef idx="0">
+            <a:schemeClr val="accent1"/>
+          </a:effectRef>
+          <a:fontRef idx="minor">
+            <a:schemeClr val="lt1"/>
+          </a:fontRef>
+        </p:style>
+        <p:txBody>
+          <a:bodyPr rtlCol="0" anchor="ctr"/>
+          <a:lstStyle/>
+          <a:p>
+            <a:pPr algn="ctr"/>
+            <a:endParaRPr lang="en-US"/>
+          </a:p>
+        </p:txBody>
+      </p:sp>
+      <p:sp>
+        <p:nvSpPr>
+          <p:cNvPr id="11" name="Rectangle 10">
+            <a:extLst>
+              <a:ext uri="{FF2B5EF4-FFF2-40B4-BE49-F238E27FC236}">
+                <a16:creationId xmlns:a16="http://schemas.microsoft.com/office/drawing/2014/main" id="{74DB6F31-1B9E-4237-84A3-0825BFDF4616}"/>
+              </a:ext>
+              <a:ext uri="{C183D7F6-B498-43B3-948B-1728B52AA6E4}">
+                <adec:decorative xmlns:adec="http://schemas.microsoft.com/office/drawing/2017/decorative" val="1"/>
+              </a:ext>
+            </a:extLst>
+          </p:cNvPr>
+          <p:cNvSpPr>
+            <a:spLocks noGrp="1" noRot="1" noChangeAspect="1" noMove="1" noResize="1" noEditPoints="1" noAdjustHandles="1" noChangeArrowheads="1" noChangeShapeType="1" noTextEdit="1"/>
+          </p:cNvSpPr>
+          <p:nvPr>
+            <p:extLst>
+              <p:ext uri="{386F3935-93C4-4BCD-93E2-E3B085C9AB24}">
+                <p16:designElem xmlns:p16="http://schemas.microsoft.com/office/powerpoint/2015/main" val="1"/>
+              </p:ext>
+            </p:extLst>
+          </p:nvPr>
+        </p:nvSpPr>
+        <p:spPr>
+          <a:xfrm>
+            <a:off x="442377" y="614407"/>
+            <a:ext cx="3707477" cy="5611772"/>
+          </a:xfrm>
+          <a:prstGeom prst="rect">
+            <a:avLst/>
+          </a:prstGeom>
+          <a:solidFill>
+            <a:schemeClr val="accent1"/>
+          </a:solidFill>
+          <a:ln>
+            <a:noFill/>
+          </a:ln>
+          <a:effectLst/>
+        </p:spPr>
+        <p:style>
+          <a:lnRef idx="1">
+            <a:schemeClr val="accent1"/>
+          </a:lnRef>
+          <a:fillRef idx="3">
+            <a:schemeClr val="accent1"/>
+          </a:fillRef>
+          <a:effectRef idx="2">
+            <a:schemeClr val="accent1"/>
+          </a:effectRef>
+          <a:fontRef idx="minor">
+            <a:schemeClr val="lt1"/>
+          </a:fontRef>
+        </p:style>
+        <p:txBody>
+          <a:bodyPr/>
+          <a:lstStyle/>
+          <a:p>
+            <a:endParaRPr lang="en-US"/>
+          </a:p>
+        </p:txBody>
+      </p:sp>
+      <p:sp>
+        <p:nvSpPr>
+          <p:cNvPr id="2" name="Title 1">
+            <a:extLst>
+              <a:ext uri="{FF2B5EF4-FFF2-40B4-BE49-F238E27FC236}">
+                <a16:creationId xmlns:a16="http://schemas.microsoft.com/office/drawing/2014/main" id="{B6D95863-3E73-CE84-4375-6F61B3AB642F}"/>
+              </a:ext>
+            </a:extLst>
+          </p:cNvPr>
+          <p:cNvSpPr>
+            <a:spLocks noGrp="1"/>
+          </p:cNvSpPr>
+          <p:nvPr>
+            <p:ph type="title"/>
+          </p:nvPr>
+        </p:nvSpPr>
+        <p:spPr>
+          <a:xfrm>
+            <a:off x="601255" y="702156"/>
+            <a:ext cx="3409783" cy="1013800"/>
+          </a:xfrm>
+        </p:spPr>
+        <p:txBody>
+          <a:bodyPr>
+            <a:normAutofit/>
+          </a:bodyPr>
+          <a:lstStyle/>
+          <a:p>
+            <a:r>
+              <a:rPr lang="en-US" dirty="0"/>
+              <a:t>What Are Hooks?</a:t>
+            </a:r>
+          </a:p>
+        </p:txBody>
+      </p:sp>
+      <p:sp>
+        <p:nvSpPr>
+          <p:cNvPr id="3" name="Content Placeholder 2">
+            <a:extLst>
+              <a:ext uri="{FF2B5EF4-FFF2-40B4-BE49-F238E27FC236}">
+                <a16:creationId xmlns:a16="http://schemas.microsoft.com/office/drawing/2014/main" id="{FEB593F9-D61B-5814-8009-51A7C925D920}"/>
+              </a:ext>
+            </a:extLst>
+          </p:cNvPr>
+          <p:cNvSpPr>
+            <a:spLocks noGrp="1"/>
+          </p:cNvSpPr>
+          <p:nvPr>
+            <p:ph idx="1"/>
+          </p:nvPr>
+        </p:nvSpPr>
+        <p:spPr>
+          <a:xfrm>
+            <a:off x="601255" y="1964168"/>
+            <a:ext cx="3409782" cy="4036582"/>
+          </a:xfrm>
+        </p:spPr>
+        <p:txBody>
+          <a:bodyPr>
+            <a:normAutofit/>
+          </a:bodyPr>
+          <a:lstStyle/>
+          <a:p>
+            <a:r>
+              <a:rPr lang="en-US" dirty="0">
+                <a:solidFill>
+                  <a:schemeClr val="bg1"/>
+                </a:solidFill>
+              </a:rPr>
+              <a:t>Definition: React </a:t>
+            </a:r>
+            <a:r>
+              <a:rPr lang="en-US" dirty="0">
+                <a:solidFill>
+                  <a:schemeClr val="accent2"/>
+                </a:solidFill>
+              </a:rPr>
+              <a:t>Hooks</a:t>
+            </a:r>
+            <a:r>
+              <a:rPr lang="en-US" dirty="0">
+                <a:solidFill>
+                  <a:schemeClr val="bg1"/>
+                </a:solidFill>
+              </a:rPr>
+              <a:t> are a special types of functions that let us ‘hook into’ React features like state, lifecycle, and context from functional components.</a:t>
+            </a:r>
+          </a:p>
+          <a:p>
+            <a:r>
+              <a:rPr lang="en-US" dirty="0">
+                <a:solidFill>
+                  <a:schemeClr val="bg1"/>
+                </a:solidFill>
+              </a:rPr>
+              <a:t>Before hooks, class components were the only way to alter state or hook into the lifecycle of a component. </a:t>
+            </a:r>
+          </a:p>
+          <a:p>
+            <a:r>
+              <a:rPr lang="en-US" dirty="0">
+                <a:solidFill>
+                  <a:schemeClr val="bg1"/>
+                </a:solidFill>
+              </a:rPr>
+              <a:t>Always called at the top level of a component.</a:t>
+            </a:r>
+          </a:p>
+        </p:txBody>
+      </p:sp>
+      <p:graphicFrame>
+        <p:nvGraphicFramePr>
+          <p:cNvPr id="4" name="Table 3">
+            <a:extLst>
+              <a:ext uri="{FF2B5EF4-FFF2-40B4-BE49-F238E27FC236}">
+                <a16:creationId xmlns:a16="http://schemas.microsoft.com/office/drawing/2014/main" id="{D2F637A1-3C49-1993-E516-A3AD94BE2B16}"/>
+              </a:ext>
+            </a:extLst>
+          </p:cNvPr>
+          <p:cNvGraphicFramePr>
+            <a:graphicFrameLocks noGrp="1"/>
+          </p:cNvGraphicFramePr>
+          <p:nvPr>
+            <p:extLst>
+              <p:ext uri="{D42A27DB-BD31-4B8C-83A1-F6EECF244321}">
+                <p14:modId xmlns:p14="http://schemas.microsoft.com/office/powerpoint/2010/main" val="1671780275"/>
+              </p:ext>
+            </p:extLst>
+          </p:nvPr>
+        </p:nvGraphicFramePr>
+        <p:xfrm>
+          <a:off x="4446758" y="853739"/>
+          <a:ext cx="6998514" cy="5133108"/>
+        </p:xfrm>
+        <a:graphic>
+          <a:graphicData uri="http://schemas.openxmlformats.org/drawingml/2006/table">
+            <a:tbl>
+              <a:tblPr>
+                <a:tableStyleId>{284E427A-3D55-4303-BF80-6455036E1DE7}</a:tableStyleId>
+              </a:tblPr>
+              <a:tblGrid>
+                <a:gridCol w="1890321">
+                  <a:extLst>
+                    <a:ext uri="{9D8B030D-6E8A-4147-A177-3AD203B41FA5}">
+                      <a16:colId xmlns:a16="http://schemas.microsoft.com/office/drawing/2014/main" val="1736950255"/>
+                    </a:ext>
+                  </a:extLst>
+                </a:gridCol>
+                <a:gridCol w="5108193">
+                  <a:extLst>
+                    <a:ext uri="{9D8B030D-6E8A-4147-A177-3AD203B41FA5}">
+                      <a16:colId xmlns:a16="http://schemas.microsoft.com/office/drawing/2014/main" val="1154258762"/>
+                    </a:ext>
+                  </a:extLst>
+                </a:gridCol>
+              </a:tblGrid>
+              <a:tr h="474296">
+                <a:tc>
+                  <a:txBody>
+                    <a:bodyPr/>
+                    <a:lstStyle/>
+                    <a:p>
+                      <a:pPr>
+                        <a:buNone/>
+                      </a:pPr>
+                      <a:r>
+                        <a:rPr lang="en-US" sz="1600" b="1" cap="none" spc="0" dirty="0">
+                          <a:solidFill>
+                            <a:schemeClr val="tx1"/>
+                          </a:solidFill>
+                        </a:rPr>
+                        <a:t>Hook</a:t>
+                      </a:r>
+                    </a:p>
+                  </a:txBody>
+                  <a:tcPr marL="104069" marR="104069" marT="72848" marB="72848" anchor="ctr"/>
+                </a:tc>
+                <a:tc>
+                  <a:txBody>
+                    <a:bodyPr/>
+                    <a:lstStyle/>
+                    <a:p>
+                      <a:pPr>
+                        <a:buNone/>
+                      </a:pPr>
+                      <a:r>
+                        <a:rPr lang="en-US" sz="1600" b="1" cap="none" spc="0" dirty="0">
+                          <a:solidFill>
+                            <a:schemeClr val="tx1"/>
+                          </a:solidFill>
+                        </a:rPr>
+                        <a:t>Purpose</a:t>
+                      </a:r>
+                    </a:p>
+                  </a:txBody>
+                  <a:tcPr marL="104069" marR="104069" marT="72848" marB="72848" anchor="ctr"/>
+                </a:tc>
+                <a:extLst>
+                  <a:ext uri="{0D108BD9-81ED-4DB2-BD59-A6C34878D82A}">
+                    <a16:rowId xmlns:a16="http://schemas.microsoft.com/office/drawing/2014/main" val="44947544"/>
+                  </a:ext>
+                </a:extLst>
+              </a:tr>
+              <a:tr h="474296">
+                <a:tc>
+                  <a:txBody>
+                    <a:bodyPr/>
+                    <a:lstStyle/>
+                    <a:p>
+                      <a:pPr>
+                        <a:buNone/>
+                      </a:pPr>
+                      <a:r>
+                        <a:rPr lang="en-US" sz="1600" cap="none" spc="0">
+                          <a:solidFill>
+                            <a:schemeClr val="tx1"/>
+                          </a:solidFill>
+                        </a:rPr>
+                        <a:t>useState</a:t>
+                      </a:r>
+                    </a:p>
+                  </a:txBody>
+                  <a:tcPr marL="104069" marR="104069" marT="72848" marB="72848" anchor="ctr"/>
+                </a:tc>
+                <a:tc>
+                  <a:txBody>
+                    <a:bodyPr/>
+                    <a:lstStyle/>
+                    <a:p>
+                      <a:pPr>
+                        <a:buNone/>
+                      </a:pPr>
+                      <a:r>
+                        <a:rPr lang="en-US" sz="1600" cap="none" spc="0">
+                          <a:solidFill>
+                            <a:schemeClr val="tx1"/>
+                          </a:solidFill>
+                        </a:rPr>
+                        <a:t>Adds state to a functional component.</a:t>
+                      </a:r>
+                    </a:p>
+                  </a:txBody>
+                  <a:tcPr marL="104069" marR="104069" marT="72848" marB="72848" anchor="ctr"/>
+                </a:tc>
+                <a:extLst>
+                  <a:ext uri="{0D108BD9-81ED-4DB2-BD59-A6C34878D82A}">
+                    <a16:rowId xmlns:a16="http://schemas.microsoft.com/office/drawing/2014/main" val="975992652"/>
+                  </a:ext>
+                </a:extLst>
+              </a:tr>
+              <a:tr h="742044">
+                <a:tc>
+                  <a:txBody>
+                    <a:bodyPr/>
+                    <a:lstStyle/>
+                    <a:p>
+                      <a:pPr>
+                        <a:buNone/>
+                      </a:pPr>
+                      <a:r>
+                        <a:rPr lang="en-US" sz="1600" cap="none" spc="0">
+                          <a:solidFill>
+                            <a:schemeClr val="tx1"/>
+                          </a:solidFill>
+                        </a:rPr>
+                        <a:t>useEffect</a:t>
+                      </a:r>
+                    </a:p>
+                  </a:txBody>
+                  <a:tcPr marL="104069" marR="104069" marT="72848" marB="72848" anchor="ctr"/>
+                </a:tc>
+                <a:tc>
+                  <a:txBody>
+                    <a:bodyPr/>
+                    <a:lstStyle/>
+                    <a:p>
+                      <a:pPr>
+                        <a:buNone/>
+                      </a:pPr>
+                      <a:r>
+                        <a:rPr lang="en-US" sz="1600" cap="none" spc="0">
+                          <a:solidFill>
+                            <a:schemeClr val="tx1"/>
+                          </a:solidFill>
+                        </a:rPr>
+                        <a:t>Handles side effects like data fetching or subscriptions (replaces lifecycle methods).</a:t>
+                      </a:r>
+                    </a:p>
+                  </a:txBody>
+                  <a:tcPr marL="104069" marR="104069" marT="72848" marB="72848" anchor="ctr"/>
+                </a:tc>
+                <a:extLst>
+                  <a:ext uri="{0D108BD9-81ED-4DB2-BD59-A6C34878D82A}">
+                    <a16:rowId xmlns:a16="http://schemas.microsoft.com/office/drawing/2014/main" val="3290658792"/>
+                  </a:ext>
+                </a:extLst>
+              </a:tr>
+              <a:tr h="742044">
+                <a:tc>
+                  <a:txBody>
+                    <a:bodyPr/>
+                    <a:lstStyle/>
+                    <a:p>
+                      <a:pPr>
+                        <a:buNone/>
+                      </a:pPr>
+                      <a:r>
+                        <a:rPr lang="en-US" sz="1600" cap="none" spc="0" dirty="0" err="1">
+                          <a:solidFill>
+                            <a:schemeClr val="tx1"/>
+                          </a:solidFill>
+                        </a:rPr>
+                        <a:t>useReducer</a:t>
+                      </a:r>
+                      <a:endParaRPr lang="en-US" sz="1600" cap="none" spc="0" dirty="0">
+                        <a:solidFill>
+                          <a:schemeClr val="tx1"/>
+                        </a:solidFill>
+                      </a:endParaRPr>
+                    </a:p>
+                  </a:txBody>
+                  <a:tcPr marL="104069" marR="104069" marT="72848" marB="72848" anchor="ctr"/>
+                </a:tc>
+                <a:tc>
+                  <a:txBody>
+                    <a:bodyPr/>
+                    <a:lstStyle/>
+                    <a:p>
+                      <a:pPr>
+                        <a:buNone/>
+                      </a:pPr>
+                      <a:r>
+                        <a:rPr lang="en-US" sz="1600" cap="none" spc="0">
+                          <a:solidFill>
+                            <a:schemeClr val="tx1"/>
+                          </a:solidFill>
+                        </a:rPr>
+                        <a:t>Manages complex state logic with a reducer function.</a:t>
+                      </a:r>
+                    </a:p>
+                  </a:txBody>
+                  <a:tcPr marL="104069" marR="104069" marT="72848" marB="72848" anchor="ctr"/>
+                </a:tc>
+                <a:extLst>
+                  <a:ext uri="{0D108BD9-81ED-4DB2-BD59-A6C34878D82A}">
+                    <a16:rowId xmlns:a16="http://schemas.microsoft.com/office/drawing/2014/main" val="3887480763"/>
+                  </a:ext>
+                </a:extLst>
+              </a:tr>
+              <a:tr h="742044">
+                <a:tc>
+                  <a:txBody>
+                    <a:bodyPr/>
+                    <a:lstStyle/>
+                    <a:p>
+                      <a:pPr>
+                        <a:buNone/>
+                      </a:pPr>
+                      <a:r>
+                        <a:rPr lang="en-US" sz="1600" cap="none" spc="0">
+                          <a:solidFill>
+                            <a:schemeClr val="tx1"/>
+                          </a:solidFill>
+                        </a:rPr>
+                        <a:t>useContext</a:t>
+                      </a:r>
+                    </a:p>
+                  </a:txBody>
+                  <a:tcPr marL="104069" marR="104069" marT="72848" marB="72848" anchor="ctr"/>
+                </a:tc>
+                <a:tc>
+                  <a:txBody>
+                    <a:bodyPr/>
+                    <a:lstStyle/>
+                    <a:p>
+                      <a:pPr>
+                        <a:buNone/>
+                      </a:pPr>
+                      <a:r>
+                        <a:rPr lang="en-US" sz="1600" cap="none" spc="0">
+                          <a:solidFill>
+                            <a:schemeClr val="tx1"/>
+                          </a:solidFill>
+                        </a:rPr>
+                        <a:t>Accesses context values without wrapping in a Consumer.</a:t>
+                      </a:r>
+                    </a:p>
+                  </a:txBody>
+                  <a:tcPr marL="104069" marR="104069" marT="72848" marB="72848" anchor="ctr"/>
+                </a:tc>
+                <a:extLst>
+                  <a:ext uri="{0D108BD9-81ED-4DB2-BD59-A6C34878D82A}">
+                    <a16:rowId xmlns:a16="http://schemas.microsoft.com/office/drawing/2014/main" val="2665596874"/>
+                  </a:ext>
+                </a:extLst>
+              </a:tr>
+              <a:tr h="742044">
+                <a:tc>
+                  <a:txBody>
+                    <a:bodyPr/>
+                    <a:lstStyle/>
+                    <a:p>
+                      <a:pPr>
+                        <a:buNone/>
+                      </a:pPr>
+                      <a:r>
+                        <a:rPr lang="en-US" sz="1600" cap="none" spc="0">
+                          <a:solidFill>
+                            <a:schemeClr val="tx1"/>
+                          </a:solidFill>
+                        </a:rPr>
+                        <a:t>useRef</a:t>
+                      </a:r>
+                    </a:p>
+                  </a:txBody>
+                  <a:tcPr marL="104069" marR="104069" marT="72848" marB="72848" anchor="ctr"/>
+                </a:tc>
+                <a:tc>
+                  <a:txBody>
+                    <a:bodyPr/>
+                    <a:lstStyle/>
+                    <a:p>
+                      <a:pPr>
+                        <a:buNone/>
+                      </a:pPr>
+                      <a:r>
+                        <a:rPr lang="en-US" sz="1600" cap="none" spc="0">
+                          <a:solidFill>
+                            <a:schemeClr val="tx1"/>
+                          </a:solidFill>
+                        </a:rPr>
+                        <a:t>Stores mutable values or references to DOM elements.</a:t>
+                      </a:r>
+                    </a:p>
+                  </a:txBody>
+                  <a:tcPr marL="104069" marR="104069" marT="72848" marB="72848" anchor="ctr"/>
+                </a:tc>
+                <a:extLst>
+                  <a:ext uri="{0D108BD9-81ED-4DB2-BD59-A6C34878D82A}">
+                    <a16:rowId xmlns:a16="http://schemas.microsoft.com/office/drawing/2014/main" val="1358057560"/>
+                  </a:ext>
+                </a:extLst>
+              </a:tr>
+              <a:tr h="474296">
+                <a:tc>
+                  <a:txBody>
+                    <a:bodyPr/>
+                    <a:lstStyle/>
+                    <a:p>
+                      <a:pPr>
+                        <a:buNone/>
+                      </a:pPr>
+                      <a:r>
+                        <a:rPr lang="en-US" sz="1600" cap="none" spc="0">
+                          <a:solidFill>
+                            <a:schemeClr val="tx1"/>
+                          </a:solidFill>
+                        </a:rPr>
+                        <a:t>useMemo</a:t>
+                      </a:r>
+                    </a:p>
+                  </a:txBody>
+                  <a:tcPr marL="104069" marR="104069" marT="72848" marB="72848" anchor="ctr"/>
+                </a:tc>
+                <a:tc>
+                  <a:txBody>
+                    <a:bodyPr/>
+                    <a:lstStyle/>
+                    <a:p>
+                      <a:pPr>
+                        <a:buNone/>
+                      </a:pPr>
+                      <a:r>
+                        <a:rPr lang="en-US" sz="1600" cap="none" spc="0" dirty="0" err="1">
+                          <a:solidFill>
+                            <a:schemeClr val="tx1"/>
+                          </a:solidFill>
+                        </a:rPr>
+                        <a:t>Memoizes</a:t>
+                      </a:r>
+                      <a:r>
+                        <a:rPr lang="en-US" sz="1600" cap="none" spc="0" dirty="0">
+                          <a:solidFill>
+                            <a:schemeClr val="tx1"/>
+                          </a:solidFill>
+                        </a:rPr>
+                        <a:t> results of expensive calculations.</a:t>
+                      </a:r>
+                    </a:p>
+                  </a:txBody>
+                  <a:tcPr marL="104069" marR="104069" marT="72848" marB="72848" anchor="ctr"/>
+                </a:tc>
+                <a:extLst>
+                  <a:ext uri="{0D108BD9-81ED-4DB2-BD59-A6C34878D82A}">
+                    <a16:rowId xmlns:a16="http://schemas.microsoft.com/office/drawing/2014/main" val="864241328"/>
+                  </a:ext>
+                </a:extLst>
+              </a:tr>
+              <a:tr h="742044">
+                <a:tc>
+                  <a:txBody>
+                    <a:bodyPr/>
+                    <a:lstStyle/>
+                    <a:p>
+                      <a:pPr>
+                        <a:buNone/>
+                      </a:pPr>
+                      <a:r>
+                        <a:rPr lang="en-US" sz="1600" cap="none" spc="0">
+                          <a:solidFill>
+                            <a:schemeClr val="tx1"/>
+                          </a:solidFill>
+                        </a:rPr>
+                        <a:t>useCallback</a:t>
+                      </a:r>
+                    </a:p>
+                  </a:txBody>
+                  <a:tcPr marL="104069" marR="104069" marT="72848" marB="72848" anchor="ctr"/>
+                </a:tc>
+                <a:tc>
+                  <a:txBody>
+                    <a:bodyPr/>
+                    <a:lstStyle/>
+                    <a:p>
+                      <a:pPr>
+                        <a:buNone/>
+                      </a:pPr>
+                      <a:r>
+                        <a:rPr lang="en-US" sz="1600" cap="none" spc="0" dirty="0" err="1">
+                          <a:solidFill>
+                            <a:schemeClr val="tx1"/>
+                          </a:solidFill>
+                        </a:rPr>
+                        <a:t>Memoizes</a:t>
+                      </a:r>
+                      <a:r>
+                        <a:rPr lang="en-US" sz="1600" cap="none" spc="0" dirty="0">
+                          <a:solidFill>
+                            <a:schemeClr val="tx1"/>
+                          </a:solidFill>
+                        </a:rPr>
+                        <a:t> functions to prevent unnecessary re-renders.</a:t>
+                      </a:r>
+                    </a:p>
+                  </a:txBody>
+                  <a:tcPr marL="104069" marR="104069" marT="72848" marB="72848" anchor="ctr"/>
+                </a:tc>
+                <a:extLst>
+                  <a:ext uri="{0D108BD9-81ED-4DB2-BD59-A6C34878D82A}">
+                    <a16:rowId xmlns:a16="http://schemas.microsoft.com/office/drawing/2014/main" val="720699285"/>
+                  </a:ext>
+                </a:extLst>
+              </a:tr>
+            </a:tbl>
+          </a:graphicData>
+        </a:graphic>
+      </p:graphicFrame>
+      <p:sp>
+        <p:nvSpPr>
+          <p:cNvPr id="5" name="TextBox 4">
+            <a:extLst>
+              <a:ext uri="{FF2B5EF4-FFF2-40B4-BE49-F238E27FC236}">
+                <a16:creationId xmlns:a16="http://schemas.microsoft.com/office/drawing/2014/main" id="{71B7909A-3E8C-6E4E-D049-6E4FB7BEB83D}"/>
+              </a:ext>
+            </a:extLst>
+          </p:cNvPr>
+          <p:cNvSpPr txBox="1"/>
+          <p:nvPr/>
+        </p:nvSpPr>
+        <p:spPr>
+          <a:xfrm>
+            <a:off x="5474822" y="6053091"/>
+            <a:ext cx="4577087" cy="369332"/>
+          </a:xfrm>
+          <a:prstGeom prst="rect">
+            <a:avLst/>
+          </a:prstGeom>
+          <a:noFill/>
+        </p:spPr>
+        <p:txBody>
+          <a:bodyPr wrap="none" rtlCol="0">
+            <a:spAutoFit/>
+          </a:bodyPr>
+          <a:lstStyle/>
+          <a:p>
+            <a:r>
+              <a:rPr lang="en-US" dirty="0" err="1">
+                <a:solidFill>
+                  <a:schemeClr val="accent2"/>
+                </a:solidFill>
+              </a:rPr>
+              <a:t>Memoize</a:t>
+            </a:r>
+            <a:r>
+              <a:rPr lang="en-US" dirty="0"/>
+              <a:t> – caching the result of a computation</a:t>
+            </a:r>
+          </a:p>
+        </p:txBody>
+      </p:sp>
+    </p:spTree>
+    <p:extLst>
+      <p:ext uri="{BB962C8B-B14F-4D97-AF65-F5344CB8AC3E}">
+        <p14:creationId xmlns:p14="http://schemas.microsoft.com/office/powerpoint/2010/main" val="1279509301"/>
+      </p:ext>
+    </p:extLst>
+  </p:cSld>
+  <p:clrMapOvr>
+    <a:masterClrMapping/>
+  </p:clrMapOvr>
+</p:sld>
+</file>
+
+<file path=ppt/slides/slide33.xml><?xml version="1.0" encoding="utf-8"?>
+<p:sld xmlns:a="http://schemas.openxmlformats.org/drawingml/2006/main" xmlns:r="http://schemas.openxmlformats.org/officeDocument/2006/relationships" xmlns:p="http://schemas.openxmlformats.org/presentationml/2006/main">
+  <p:cSld>
+    <p:spTree>
+      <p:nvGrpSpPr>
+        <p:cNvPr id="1" name=""/>
+        <p:cNvGrpSpPr/>
+        <p:nvPr/>
+      </p:nvGrpSpPr>
+      <p:grpSpPr>
+        <a:xfrm>
+          <a:off x="0" y="0"/>
+          <a:ext cx="0" cy="0"/>
+          <a:chOff x="0" y="0"/>
+          <a:chExt cx="0" cy="0"/>
+        </a:xfrm>
+      </p:grpSpPr>
+      <p:sp>
+        <p:nvSpPr>
+          <p:cNvPr id="2" name="Title 1">
+            <a:extLst>
+              <a:ext uri="{FF2B5EF4-FFF2-40B4-BE49-F238E27FC236}">
+                <a16:creationId xmlns:a16="http://schemas.microsoft.com/office/drawing/2014/main" id="{715F36A2-C4F9-4EEC-49BD-36E0427155B5}"/>
+              </a:ext>
+            </a:extLst>
+          </p:cNvPr>
+          <p:cNvSpPr>
+            <a:spLocks noGrp="1"/>
+          </p:cNvSpPr>
+          <p:nvPr>
+            <p:ph type="title"/>
+          </p:nvPr>
+        </p:nvSpPr>
+        <p:spPr/>
+        <p:txBody>
+          <a:bodyPr/>
+          <a:lstStyle/>
+          <a:p>
+            <a:r>
+              <a:rPr lang="en-US" dirty="0"/>
+              <a:t>Reducer</a:t>
+            </a:r>
+          </a:p>
+        </p:txBody>
+      </p:sp>
+      <p:sp>
+        <p:nvSpPr>
+          <p:cNvPr id="3" name="Content Placeholder 2">
+            <a:extLst>
+              <a:ext uri="{FF2B5EF4-FFF2-40B4-BE49-F238E27FC236}">
+                <a16:creationId xmlns:a16="http://schemas.microsoft.com/office/drawing/2014/main" id="{EA33735C-5C68-57F9-A7BC-5F57B40402D7}"/>
+              </a:ext>
+            </a:extLst>
+          </p:cNvPr>
+          <p:cNvSpPr>
+            <a:spLocks noGrp="1"/>
+          </p:cNvSpPr>
+          <p:nvPr>
+            <p:ph idx="1"/>
+          </p:nvPr>
+        </p:nvSpPr>
+        <p:spPr>
+          <a:xfrm>
+            <a:off x="581193" y="2180496"/>
+            <a:ext cx="4268714" cy="3678303"/>
+          </a:xfrm>
+        </p:spPr>
+        <p:txBody>
+          <a:bodyPr/>
+          <a:lstStyle/>
+          <a:p>
+            <a:r>
+              <a:rPr lang="en-US" dirty="0"/>
+              <a:t>Definition: </a:t>
+            </a:r>
+            <a:r>
+              <a:rPr lang="en-US" dirty="0">
+                <a:solidFill>
+                  <a:schemeClr val="accent2"/>
+                </a:solidFill>
+              </a:rPr>
+              <a:t>Reducers</a:t>
+            </a:r>
+            <a:r>
+              <a:rPr lang="en-US" dirty="0"/>
+              <a:t> are a hook that allow us to centralize state logic </a:t>
+            </a:r>
+          </a:p>
+          <a:p>
+            <a:pPr lvl="1"/>
+            <a:r>
+              <a:rPr lang="en-US" dirty="0"/>
+              <a:t>In more complex applications, this helps avoid bugs and is easier to maintain</a:t>
+            </a:r>
+          </a:p>
+          <a:p>
+            <a:pPr lvl="1"/>
+            <a:r>
+              <a:rPr lang="en-US" dirty="0"/>
+              <a:t>Scalable </a:t>
+            </a:r>
+          </a:p>
+        </p:txBody>
+      </p:sp>
+      <p:pic>
+        <p:nvPicPr>
+          <p:cNvPr id="5" name="Picture 4">
+            <a:extLst>
+              <a:ext uri="{FF2B5EF4-FFF2-40B4-BE49-F238E27FC236}">
+                <a16:creationId xmlns:a16="http://schemas.microsoft.com/office/drawing/2014/main" id="{60133FF1-CF87-0187-3233-84159A8415BF}"/>
+              </a:ext>
+            </a:extLst>
+          </p:cNvPr>
+          <p:cNvPicPr>
+            <a:picLocks noChangeAspect="1"/>
+          </p:cNvPicPr>
+          <p:nvPr/>
+        </p:nvPicPr>
+        <p:blipFill>
+          <a:blip r:embed="rId2"/>
+          <a:stretch>
+            <a:fillRect/>
+          </a:stretch>
+        </p:blipFill>
+        <p:spPr>
+          <a:xfrm>
+            <a:off x="5169108" y="2745280"/>
+            <a:ext cx="6354062" cy="2191056"/>
+          </a:xfrm>
+          <a:prstGeom prst="rect">
+            <a:avLst/>
+          </a:prstGeom>
+        </p:spPr>
+      </p:pic>
+      <p:pic>
+        <p:nvPicPr>
+          <p:cNvPr id="7" name="Picture 6">
+            <a:extLst>
+              <a:ext uri="{FF2B5EF4-FFF2-40B4-BE49-F238E27FC236}">
+                <a16:creationId xmlns:a16="http://schemas.microsoft.com/office/drawing/2014/main" id="{B6F65114-180C-292F-06E8-CFD2A24B684D}"/>
+              </a:ext>
+            </a:extLst>
+          </p:cNvPr>
+          <p:cNvPicPr>
+            <a:picLocks noChangeAspect="1"/>
+          </p:cNvPicPr>
+          <p:nvPr/>
+        </p:nvPicPr>
+        <p:blipFill>
+          <a:blip r:embed="rId3"/>
+          <a:stretch>
+            <a:fillRect/>
+          </a:stretch>
+        </p:blipFill>
+        <p:spPr>
+          <a:xfrm>
+            <a:off x="5459662" y="2403923"/>
+            <a:ext cx="5772956" cy="257211"/>
+          </a:xfrm>
+          <a:prstGeom prst="rect">
+            <a:avLst/>
+          </a:prstGeom>
+        </p:spPr>
+      </p:pic>
+      <p:pic>
+        <p:nvPicPr>
+          <p:cNvPr id="9" name="Picture 8">
+            <a:extLst>
+              <a:ext uri="{FF2B5EF4-FFF2-40B4-BE49-F238E27FC236}">
+                <a16:creationId xmlns:a16="http://schemas.microsoft.com/office/drawing/2014/main" id="{047C1DA8-DE8E-6C29-4B8F-32762D4BD8C9}"/>
+              </a:ext>
+            </a:extLst>
+          </p:cNvPr>
+          <p:cNvPicPr>
+            <a:picLocks noChangeAspect="1"/>
+          </p:cNvPicPr>
+          <p:nvPr/>
+        </p:nvPicPr>
+        <p:blipFill>
+          <a:blip r:embed="rId4"/>
+          <a:stretch>
+            <a:fillRect/>
+          </a:stretch>
+        </p:blipFill>
+        <p:spPr>
+          <a:xfrm>
+            <a:off x="6096000" y="2042364"/>
+            <a:ext cx="3972479" cy="276264"/>
+          </a:xfrm>
+          <a:prstGeom prst="rect">
+            <a:avLst/>
+          </a:prstGeom>
+        </p:spPr>
+      </p:pic>
+      <p:pic>
+        <p:nvPicPr>
+          <p:cNvPr id="11" name="Picture 10">
+            <a:extLst>
+              <a:ext uri="{FF2B5EF4-FFF2-40B4-BE49-F238E27FC236}">
+                <a16:creationId xmlns:a16="http://schemas.microsoft.com/office/drawing/2014/main" id="{E5179113-6C9B-EEE8-DE91-6006974C9C9C}"/>
+              </a:ext>
+            </a:extLst>
+          </p:cNvPr>
+          <p:cNvPicPr>
+            <a:picLocks noChangeAspect="1"/>
+          </p:cNvPicPr>
+          <p:nvPr/>
+        </p:nvPicPr>
+        <p:blipFill>
+          <a:blip r:embed="rId5"/>
+          <a:stretch>
+            <a:fillRect/>
+          </a:stretch>
+        </p:blipFill>
+        <p:spPr>
+          <a:xfrm>
+            <a:off x="6021715" y="5020482"/>
+            <a:ext cx="4648849" cy="1676634"/>
+          </a:xfrm>
+          <a:prstGeom prst="rect">
+            <a:avLst/>
+          </a:prstGeom>
+        </p:spPr>
+      </p:pic>
+    </p:spTree>
+    <p:extLst>
+      <p:ext uri="{BB962C8B-B14F-4D97-AF65-F5344CB8AC3E}">
+        <p14:creationId xmlns:p14="http://schemas.microsoft.com/office/powerpoint/2010/main" val="1396285918"/>
+      </p:ext>
+    </p:extLst>
+  </p:cSld>
+  <p:clrMapOvr>
+    <a:masterClrMapping/>
+  </p:clrMapOvr>
+</p:sld>
+</file>
+
+<file path=ppt/slides/slide34.xml><?xml version="1.0" encoding="utf-8"?>
+<p:sld xmlns:a="http://schemas.openxmlformats.org/drawingml/2006/main" xmlns:r="http://schemas.openxmlformats.org/officeDocument/2006/relationships" xmlns:p="http://schemas.openxmlformats.org/presentationml/2006/main">
+  <p:cSld>
+    <p:spTree>
+      <p:nvGrpSpPr>
+        <p:cNvPr id="1" name="">
+          <a:extLst>
+            <a:ext uri="{FF2B5EF4-FFF2-40B4-BE49-F238E27FC236}">
+              <a16:creationId xmlns:a16="http://schemas.microsoft.com/office/drawing/2014/main" id="{41B77ADF-D27F-33BE-5743-EE5EF2C74336}"/>
+            </a:ext>
+          </a:extLst>
+        </p:cNvPr>
+        <p:cNvGrpSpPr/>
+        <p:nvPr/>
+      </p:nvGrpSpPr>
+      <p:grpSpPr>
+        <a:xfrm>
+          <a:off x="0" y="0"/>
+          <a:ext cx="0" cy="0"/>
+          <a:chOff x="0" y="0"/>
+          <a:chExt cx="0" cy="0"/>
+        </a:xfrm>
+      </p:grpSpPr>
+      <p:sp>
+        <p:nvSpPr>
+          <p:cNvPr id="2" name="Title 1">
+            <a:extLst>
+              <a:ext uri="{FF2B5EF4-FFF2-40B4-BE49-F238E27FC236}">
+                <a16:creationId xmlns:a16="http://schemas.microsoft.com/office/drawing/2014/main" id="{F3A4D9A9-30D5-B4F2-AACD-2B5D1B01D9C8}"/>
+              </a:ext>
+            </a:extLst>
+          </p:cNvPr>
+          <p:cNvSpPr>
+            <a:spLocks noGrp="1"/>
+          </p:cNvSpPr>
+          <p:nvPr>
+            <p:ph type="title"/>
+          </p:nvPr>
+        </p:nvSpPr>
+        <p:spPr/>
+        <p:txBody>
+          <a:bodyPr/>
+          <a:lstStyle/>
+          <a:p>
+            <a:r>
+              <a:rPr lang="en-US" dirty="0"/>
+              <a:t>Challenge – Refactor</a:t>
+            </a:r>
+          </a:p>
+        </p:txBody>
+      </p:sp>
+      <p:sp>
+        <p:nvSpPr>
+          <p:cNvPr id="3" name="Content Placeholder 2">
+            <a:extLst>
+              <a:ext uri="{FF2B5EF4-FFF2-40B4-BE49-F238E27FC236}">
+                <a16:creationId xmlns:a16="http://schemas.microsoft.com/office/drawing/2014/main" id="{96EEC6BF-02D0-0105-3E31-6F4CABDA4286}"/>
+              </a:ext>
+            </a:extLst>
+          </p:cNvPr>
+          <p:cNvSpPr>
+            <a:spLocks noGrp="1"/>
+          </p:cNvSpPr>
+          <p:nvPr>
+            <p:ph idx="1"/>
+          </p:nvPr>
+        </p:nvSpPr>
+        <p:spPr>
+          <a:xfrm>
+            <a:off x="581192" y="2475925"/>
+            <a:ext cx="5317584" cy="1681246"/>
+          </a:xfrm>
+        </p:spPr>
+        <p:txBody>
+          <a:bodyPr/>
+          <a:lstStyle/>
+          <a:p>
+            <a:r>
+              <a:rPr lang="en-US" dirty="0"/>
+              <a:t>Refactor your code to use a reducer</a:t>
+            </a:r>
+          </a:p>
+        </p:txBody>
+      </p:sp>
+      <p:sp>
+        <p:nvSpPr>
+          <p:cNvPr id="6" name="TextBox 5">
+            <a:extLst>
+              <a:ext uri="{FF2B5EF4-FFF2-40B4-BE49-F238E27FC236}">
+                <a16:creationId xmlns:a16="http://schemas.microsoft.com/office/drawing/2014/main" id="{1B650ECD-28EE-4EFA-4A24-E44B28C3C6B4}"/>
+              </a:ext>
+            </a:extLst>
+          </p:cNvPr>
+          <p:cNvSpPr txBox="1"/>
+          <p:nvPr/>
+        </p:nvSpPr>
+        <p:spPr>
+          <a:xfrm>
+            <a:off x="1228165" y="2402747"/>
+            <a:ext cx="756938" cy="369332"/>
+          </a:xfrm>
+          <a:prstGeom prst="rect">
+            <a:avLst/>
+          </a:prstGeom>
+          <a:noFill/>
+        </p:spPr>
+        <p:txBody>
+          <a:bodyPr wrap="none" rtlCol="0">
+            <a:spAutoFit/>
+          </a:bodyPr>
+          <a:lstStyle/>
+          <a:p>
+            <a:r>
+              <a:rPr lang="en-US" b="1" dirty="0"/>
+              <a:t>Goal:</a:t>
+            </a:r>
+          </a:p>
+        </p:txBody>
+      </p:sp>
+      <p:sp>
+        <p:nvSpPr>
+          <p:cNvPr id="7" name="TextBox 6">
+            <a:extLst>
+              <a:ext uri="{FF2B5EF4-FFF2-40B4-BE49-F238E27FC236}">
+                <a16:creationId xmlns:a16="http://schemas.microsoft.com/office/drawing/2014/main" id="{1E4D0E0D-5434-0B36-82C9-5502986F3E34}"/>
+              </a:ext>
+            </a:extLst>
+          </p:cNvPr>
+          <p:cNvSpPr txBox="1"/>
+          <p:nvPr/>
+        </p:nvSpPr>
+        <p:spPr>
+          <a:xfrm>
+            <a:off x="6676991" y="2402747"/>
+            <a:ext cx="4933817" cy="369332"/>
+          </a:xfrm>
+          <a:prstGeom prst="rect">
+            <a:avLst/>
+          </a:prstGeom>
+          <a:noFill/>
+        </p:spPr>
+        <p:txBody>
+          <a:bodyPr wrap="square" rtlCol="0">
+            <a:spAutoFit/>
+          </a:bodyPr>
+          <a:lstStyle/>
+          <a:p>
+            <a:r>
+              <a:rPr lang="en-US" b="1" dirty="0"/>
+              <a:t>Scenario:  			</a:t>
+            </a:r>
+          </a:p>
+        </p:txBody>
+      </p:sp>
+      <p:sp>
+        <p:nvSpPr>
+          <p:cNvPr id="8" name="Content Placeholder 2">
+            <a:extLst>
+              <a:ext uri="{FF2B5EF4-FFF2-40B4-BE49-F238E27FC236}">
+                <a16:creationId xmlns:a16="http://schemas.microsoft.com/office/drawing/2014/main" id="{3903A15F-4170-F5BE-4CA7-AFA1DD7114EF}"/>
+              </a:ext>
+            </a:extLst>
+          </p:cNvPr>
+          <p:cNvSpPr txBox="1">
+            <a:spLocks/>
+          </p:cNvSpPr>
+          <p:nvPr/>
+        </p:nvSpPr>
+        <p:spPr>
+          <a:xfrm>
+            <a:off x="6033247" y="2982510"/>
+            <a:ext cx="5740756" cy="2206824"/>
+          </a:xfrm>
+          <a:prstGeom prst="rect">
+            <a:avLst/>
+          </a:prstGeom>
+        </p:spPr>
+        <p:txBody>
+          <a:bodyPr vert="horz" lIns="91440" tIns="45720" rIns="91440" bIns="45720" rtlCol="0" anchor="ctr">
+            <a:normAutofit/>
+          </a:bodyPr>
+          <a:lstStyle>
+            <a:lvl1pPr marL="306000" indent="-306000" algn="l" defTabSz="457200" rtl="0" eaLnBrk="1" latinLnBrk="0" hangingPunct="1">
+              <a:spcBef>
+                <a:spcPct val="20000"/>
+              </a:spcBef>
+              <a:spcAft>
+                <a:spcPts val="600"/>
+              </a:spcAft>
+              <a:buClr>
+                <a:schemeClr val="accent2"/>
+              </a:buClr>
+              <a:buSzPct val="92000"/>
+              <a:buFont typeface="Wingdings 2" panose="05020102010507070707" pitchFamily="18" charset="2"/>
+              <a:buChar char=""/>
+              <a:defRPr sz="1800" kern="1200">
+                <a:solidFill>
+                  <a:schemeClr val="tx2"/>
+                </a:solidFill>
+                <a:latin typeface="+mn-lt"/>
+                <a:ea typeface="+mn-ea"/>
+                <a:cs typeface="+mn-cs"/>
+              </a:defRPr>
+            </a:lvl1pPr>
+            <a:lvl2pPr marL="630000" indent="-306000" algn="l" defTabSz="457200" rtl="0" eaLnBrk="1" latinLnBrk="0" hangingPunct="1">
+              <a:spcBef>
+                <a:spcPct val="20000"/>
+              </a:spcBef>
+              <a:spcAft>
+                <a:spcPts val="600"/>
+              </a:spcAft>
+              <a:buClr>
+                <a:schemeClr val="accent2"/>
+              </a:buClr>
+              <a:buSzPct val="92000"/>
+              <a:buFont typeface="Wingdings 2" panose="05020102010507070707" pitchFamily="18" charset="2"/>
+              <a:buChar char=""/>
+              <a:defRPr sz="1600" kern="1200">
+                <a:solidFill>
+                  <a:schemeClr val="tx2"/>
+                </a:solidFill>
+                <a:latin typeface="+mn-lt"/>
+                <a:ea typeface="+mn-ea"/>
+                <a:cs typeface="+mn-cs"/>
+              </a:defRPr>
+            </a:lvl2pPr>
+            <a:lvl3pPr marL="900000" indent="-270000" algn="l" defTabSz="457200" rtl="0" eaLnBrk="1" latinLnBrk="0" hangingPunct="1">
+              <a:spcBef>
+                <a:spcPct val="20000"/>
+              </a:spcBef>
+              <a:spcAft>
+                <a:spcPts val="600"/>
+              </a:spcAft>
+              <a:buClr>
+                <a:schemeClr val="accent2"/>
+              </a:buClr>
+              <a:buSzPct val="92000"/>
+              <a:buFont typeface="Wingdings 2" panose="05020102010507070707" pitchFamily="18" charset="2"/>
+              <a:buChar char=""/>
+              <a:defRPr sz="1400" kern="1200">
+                <a:solidFill>
+                  <a:schemeClr val="tx2"/>
+                </a:solidFill>
+                <a:latin typeface="+mn-lt"/>
+                <a:ea typeface="+mn-ea"/>
+                <a:cs typeface="+mn-cs"/>
+              </a:defRPr>
+            </a:lvl3pPr>
+            <a:lvl4pPr marL="1242000" indent="-234000" algn="l" defTabSz="457200" rtl="0" eaLnBrk="1" latinLnBrk="0" hangingPunct="1">
+              <a:spcBef>
+                <a:spcPct val="20000"/>
+              </a:spcBef>
+              <a:spcAft>
+                <a:spcPts val="600"/>
+              </a:spcAft>
+              <a:buClr>
+                <a:schemeClr val="accent2"/>
+              </a:buClr>
+              <a:buSzPct val="92000"/>
+              <a:buFont typeface="Wingdings 2" panose="05020102010507070707" pitchFamily="18" charset="2"/>
+              <a:buChar char=""/>
+              <a:defRPr sz="1200" kern="1200">
+                <a:solidFill>
+                  <a:schemeClr val="tx2"/>
+                </a:solidFill>
+                <a:latin typeface="+mn-lt"/>
+                <a:ea typeface="+mn-ea"/>
+                <a:cs typeface="+mn-cs"/>
+              </a:defRPr>
+            </a:lvl4pPr>
+            <a:lvl5pPr marL="1602000" indent="-234000" algn="l" defTabSz="457200" rtl="0" eaLnBrk="1" latinLnBrk="0" hangingPunct="1">
+              <a:spcBef>
+                <a:spcPct val="20000"/>
+              </a:spcBef>
+              <a:spcAft>
+                <a:spcPts val="600"/>
+              </a:spcAft>
+              <a:buClr>
+                <a:schemeClr val="accent2"/>
+              </a:buClr>
+              <a:buSzPct val="92000"/>
+              <a:buFont typeface="Wingdings 2" panose="05020102010507070707" pitchFamily="18" charset="2"/>
+              <a:buChar char=""/>
+              <a:defRPr sz="1200" kern="1200">
+                <a:solidFill>
+                  <a:schemeClr val="tx2"/>
+                </a:solidFill>
+                <a:latin typeface="+mn-lt"/>
+                <a:ea typeface="+mn-ea"/>
+                <a:cs typeface="+mn-cs"/>
+              </a:defRPr>
+            </a:lvl5pPr>
+            <a:lvl6pPr marL="1900000" indent="-228600" algn="l" defTabSz="457200" rtl="0" eaLnBrk="1" latinLnBrk="0" hangingPunct="1">
+              <a:spcBef>
+                <a:spcPct val="20000"/>
+              </a:spcBef>
+              <a:spcAft>
+                <a:spcPts val="600"/>
+              </a:spcAft>
+              <a:buClr>
+                <a:schemeClr val="accent2"/>
+              </a:buClr>
+              <a:buSzPct val="92000"/>
+              <a:buFont typeface="Wingdings 2" panose="05020102010507070707" pitchFamily="18" charset="2"/>
+              <a:buChar char=""/>
+              <a:defRPr sz="1200" kern="1200">
+                <a:solidFill>
+                  <a:schemeClr val="tx2"/>
+                </a:solidFill>
+                <a:latin typeface="+mn-lt"/>
+                <a:ea typeface="+mn-ea"/>
+                <a:cs typeface="+mn-cs"/>
+              </a:defRPr>
+            </a:lvl6pPr>
+            <a:lvl7pPr marL="2200000" indent="-228600" algn="l" defTabSz="457200" rtl="0" eaLnBrk="1" latinLnBrk="0" hangingPunct="1">
+              <a:spcBef>
+                <a:spcPct val="20000"/>
+              </a:spcBef>
+              <a:spcAft>
+                <a:spcPts val="600"/>
+              </a:spcAft>
+              <a:buClr>
+                <a:schemeClr val="accent2"/>
+              </a:buClr>
+              <a:buSzPct val="92000"/>
+              <a:buFont typeface="Wingdings 2" panose="05020102010507070707" pitchFamily="18" charset="2"/>
+              <a:buChar char=""/>
+              <a:defRPr sz="1200" kern="1200">
+                <a:solidFill>
+                  <a:schemeClr val="tx2"/>
+                </a:solidFill>
+                <a:latin typeface="+mn-lt"/>
+                <a:ea typeface="+mn-ea"/>
+                <a:cs typeface="+mn-cs"/>
+              </a:defRPr>
+            </a:lvl7pPr>
+            <a:lvl8pPr marL="2500000" indent="-228600" algn="l" defTabSz="457200" rtl="0" eaLnBrk="1" latinLnBrk="0" hangingPunct="1">
+              <a:spcBef>
+                <a:spcPct val="20000"/>
+              </a:spcBef>
+              <a:spcAft>
+                <a:spcPts val="600"/>
+              </a:spcAft>
+              <a:buClr>
+                <a:schemeClr val="accent2"/>
+              </a:buClr>
+              <a:buSzPct val="92000"/>
+              <a:buFont typeface="Wingdings 2" panose="05020102010507070707" pitchFamily="18" charset="2"/>
+              <a:buChar char=""/>
+              <a:defRPr sz="1200" kern="1200">
+                <a:solidFill>
+                  <a:schemeClr val="tx2"/>
+                </a:solidFill>
+                <a:latin typeface="+mn-lt"/>
+                <a:ea typeface="+mn-ea"/>
+                <a:cs typeface="+mn-cs"/>
+              </a:defRPr>
+            </a:lvl8pPr>
+            <a:lvl9pPr marL="2800000" indent="-228600" algn="l" defTabSz="457200" rtl="0" eaLnBrk="1" latinLnBrk="0" hangingPunct="1">
+              <a:spcBef>
+                <a:spcPct val="20000"/>
+              </a:spcBef>
+              <a:spcAft>
+                <a:spcPts val="600"/>
+              </a:spcAft>
+              <a:buClr>
+                <a:schemeClr val="accent2"/>
+              </a:buClr>
+              <a:buSzPct val="92000"/>
+              <a:buFont typeface="Wingdings 2" panose="05020102010507070707" pitchFamily="18" charset="2"/>
+              <a:buChar char=""/>
+              <a:defRPr sz="1200" kern="1200">
+                <a:solidFill>
+                  <a:schemeClr val="tx2"/>
+                </a:solidFill>
+                <a:latin typeface="+mn-lt"/>
+                <a:ea typeface="+mn-ea"/>
+                <a:cs typeface="+mn-cs"/>
+              </a:defRPr>
+            </a:lvl9pPr>
+          </a:lstStyle>
+          <a:p>
+            <a:r>
+              <a:rPr lang="en-US" dirty="0"/>
+              <a:t>You will need to make edits to the Home component:</a:t>
+            </a:r>
+          </a:p>
+          <a:p>
+            <a:pPr lvl="1"/>
+            <a:r>
+              <a:rPr lang="en-US" dirty="0"/>
+              <a:t>Make the reducer function</a:t>
+            </a:r>
+          </a:p>
+          <a:p>
+            <a:pPr lvl="1"/>
+            <a:r>
+              <a:rPr lang="en-US" dirty="0"/>
+              <a:t>Swap out </a:t>
+            </a:r>
+            <a:r>
+              <a:rPr lang="en-US" dirty="0" err="1"/>
+              <a:t>useState</a:t>
+            </a:r>
+            <a:r>
+              <a:rPr lang="en-US" dirty="0"/>
+              <a:t> for </a:t>
+            </a:r>
+            <a:r>
+              <a:rPr lang="en-US" dirty="0" err="1"/>
+              <a:t>useReducer</a:t>
+            </a:r>
+            <a:r>
+              <a:rPr lang="en-US" dirty="0"/>
+              <a:t> when working with the incident list</a:t>
+            </a:r>
+          </a:p>
+          <a:p>
+            <a:pPr lvl="1"/>
+            <a:r>
+              <a:rPr lang="en-US" dirty="0"/>
+              <a:t>Edit your functions to call the dispatch method rather than ‘</a:t>
+            </a:r>
+            <a:r>
+              <a:rPr lang="en-US" dirty="0" err="1"/>
+              <a:t>setIncidents</a:t>
+            </a:r>
+            <a:r>
+              <a:rPr lang="en-US" dirty="0"/>
+              <a:t>’</a:t>
+            </a:r>
+          </a:p>
+        </p:txBody>
+      </p:sp>
+    </p:spTree>
+    <p:extLst>
+      <p:ext uri="{BB962C8B-B14F-4D97-AF65-F5344CB8AC3E}">
+        <p14:creationId xmlns:p14="http://schemas.microsoft.com/office/powerpoint/2010/main" val="2984384506"/>
       </p:ext>
     </p:extLst>
   </p:cSld>

--- a/Week_2/React.pptx
+++ b/Week_2/React.pptx
@@ -39,6 +39,15 @@
     <p:sldId id="291" r:id="rId33"/>
     <p:sldId id="293" r:id="rId34"/>
     <p:sldId id="294" r:id="rId35"/>
+    <p:sldId id="295" r:id="rId36"/>
+    <p:sldId id="297" r:id="rId37"/>
+    <p:sldId id="296" r:id="rId38"/>
+    <p:sldId id="303" r:id="rId39"/>
+    <p:sldId id="298" r:id="rId40"/>
+    <p:sldId id="299" r:id="rId41"/>
+    <p:sldId id="300" r:id="rId42"/>
+    <p:sldId id="301" r:id="rId43"/>
+    <p:sldId id="302" r:id="rId44"/>
   </p:sldIdLst>
   <p:sldSz cx="12192000" cy="6858000"/>
   <p:notesSz cx="6858000" cy="9144000"/>
@@ -9507,7 +9516,7 @@
         <p:spPr>
           <a:xfrm>
             <a:off x="581193" y="2180496"/>
-            <a:ext cx="5514808" cy="3678303"/>
+            <a:ext cx="5514808" cy="4220304"/>
           </a:xfrm>
         </p:spPr>
         <p:txBody>
@@ -9551,14 +9560,20 @@
               <a:t>When state changes, React automatically re-renders the component (and any children that depend on the state) so the UI stays in sync with data</a:t>
             </a:r>
           </a:p>
+          <a:p>
+            <a:r>
+              <a:rPr lang="en-US" dirty="0"/>
+              <a:t>State should always be declared at the top of the component function</a:t>
+            </a:r>
+          </a:p>
         </p:txBody>
       </p:sp>
       <p:pic>
         <p:nvPicPr>
-          <p:cNvPr id="5" name="Picture 4">
-            <a:extLst>
-              <a:ext uri="{FF2B5EF4-FFF2-40B4-BE49-F238E27FC236}">
-                <a16:creationId xmlns:a16="http://schemas.microsoft.com/office/drawing/2014/main" id="{D0218A49-D737-AFEB-6AEE-38DB38C53C55}"/>
+          <p:cNvPr id="7" name="Picture 6">
+            <a:extLst>
+              <a:ext uri="{FF2B5EF4-FFF2-40B4-BE49-F238E27FC236}">
+                <a16:creationId xmlns:a16="http://schemas.microsoft.com/office/drawing/2014/main" id="{2FD9F3C8-0DB5-1735-A0C6-EC72B12472F6}"/>
               </a:ext>
             </a:extLst>
           </p:cNvPr>
@@ -9575,8 +9590,8 @@
         </p:blipFill>
         <p:spPr>
           <a:xfrm>
-            <a:off x="6348065" y="3169807"/>
-            <a:ext cx="4982270" cy="2476846"/>
+            <a:off x="6892170" y="2534191"/>
+            <a:ext cx="3894059" cy="325549"/>
           </a:xfrm>
           <a:prstGeom prst="rect">
             <a:avLst/>
@@ -9585,10 +9600,10 @@
       </p:pic>
       <p:pic>
         <p:nvPicPr>
-          <p:cNvPr id="7" name="Picture 6">
-            <a:extLst>
-              <a:ext uri="{FF2B5EF4-FFF2-40B4-BE49-F238E27FC236}">
-                <a16:creationId xmlns:a16="http://schemas.microsoft.com/office/drawing/2014/main" id="{2FD9F3C8-0DB5-1735-A0C6-EC72B12472F6}"/>
+          <p:cNvPr id="9" name="Picture 8">
+            <a:extLst>
+              <a:ext uri="{FF2B5EF4-FFF2-40B4-BE49-F238E27FC236}">
+                <a16:creationId xmlns:a16="http://schemas.microsoft.com/office/drawing/2014/main" id="{CAEA66AB-35B6-3102-808F-73E54BDA8995}"/>
               </a:ext>
             </a:extLst>
           </p:cNvPr>
@@ -9605,8 +9620,8 @@
         </p:blipFill>
         <p:spPr>
           <a:xfrm>
-            <a:off x="6892170" y="2534191"/>
-            <a:ext cx="3894059" cy="325549"/>
+            <a:off x="6336415" y="3121836"/>
+            <a:ext cx="5576694" cy="2566843"/>
           </a:xfrm>
           <a:prstGeom prst="rect">
             <a:avLst/>
@@ -12170,7 +12185,7 @@
             <a:pPr lvl="1"/>
             <a:r>
               <a:rPr lang="en-US" dirty="0"/>
-              <a:t>Chain a callback function from Incident list component to the Home component – this wires up the delete function</a:t>
+              <a:t>Chain a callback prop function from Incident list component to the Home component – this wires up the delete function</a:t>
             </a:r>
           </a:p>
         </p:txBody>
@@ -12418,7 +12433,9 @@
           </a:xfrm>
         </p:spPr>
         <p:txBody>
-          <a:bodyPr/>
+          <a:bodyPr>
+            <a:normAutofit lnSpcReduction="10000"/>
+          </a:bodyPr>
           <a:lstStyle/>
           <a:p>
             <a:r>
@@ -12458,14 +12475,36 @@
               <a:t>, [name]:value}</a:t>
             </a:r>
           </a:p>
+          <a:p>
+            <a:pPr lvl="1"/>
+            <a:r>
+              <a:rPr lang="en-US" dirty="0"/>
+              <a:t>If it was an array:</a:t>
+            </a:r>
+          </a:p>
+          <a:p>
+            <a:pPr lvl="2"/>
+            <a:r>
+              <a:rPr lang="en-US" dirty="0"/>
+              <a:t>[…</a:t>
+            </a:r>
+            <a:r>
+              <a:rPr lang="en-US" dirty="0" err="1"/>
+              <a:t>stateOfArray</a:t>
+            </a:r>
+            <a:r>
+              <a:rPr lang="en-US" dirty="0"/>
+              <a:t>, incident]</a:t>
+            </a:r>
+          </a:p>
         </p:txBody>
       </p:sp>
       <p:pic>
         <p:nvPicPr>
-          <p:cNvPr id="5" name="Picture 4">
-            <a:extLst>
-              <a:ext uri="{FF2B5EF4-FFF2-40B4-BE49-F238E27FC236}">
-                <a16:creationId xmlns:a16="http://schemas.microsoft.com/office/drawing/2014/main" id="{AD64D2CE-7EEA-134B-5C1B-675357DC24AA}"/>
+          <p:cNvPr id="7" name="Picture 6">
+            <a:extLst>
+              <a:ext uri="{FF2B5EF4-FFF2-40B4-BE49-F238E27FC236}">
+                <a16:creationId xmlns:a16="http://schemas.microsoft.com/office/drawing/2014/main" id="{03767906-49CB-33E1-06FD-4BD255B13E53}"/>
               </a:ext>
             </a:extLst>
           </p:cNvPr>
@@ -12482,8 +12521,8 @@
         </p:blipFill>
         <p:spPr>
           <a:xfrm>
-            <a:off x="5942642" y="2652604"/>
-            <a:ext cx="5668166" cy="1552792"/>
+            <a:off x="3322901" y="2180496"/>
+            <a:ext cx="8287907" cy="219106"/>
           </a:xfrm>
           <a:prstGeom prst="rect">
             <a:avLst/>
@@ -12492,10 +12531,10 @@
       </p:pic>
       <p:pic>
         <p:nvPicPr>
-          <p:cNvPr id="7" name="Picture 6">
-            <a:extLst>
-              <a:ext uri="{FF2B5EF4-FFF2-40B4-BE49-F238E27FC236}">
-                <a16:creationId xmlns:a16="http://schemas.microsoft.com/office/drawing/2014/main" id="{03767906-49CB-33E1-06FD-4BD255B13E53}"/>
+          <p:cNvPr id="9" name="Picture 8">
+            <a:extLst>
+              <a:ext uri="{FF2B5EF4-FFF2-40B4-BE49-F238E27FC236}">
+                <a16:creationId xmlns:a16="http://schemas.microsoft.com/office/drawing/2014/main" id="{930B96F5-007B-333A-40DA-59D0EC00C7FC}"/>
               </a:ext>
             </a:extLst>
           </p:cNvPr>
@@ -12512,8 +12551,8 @@
         </p:blipFill>
         <p:spPr>
           <a:xfrm>
-            <a:off x="3322901" y="2180496"/>
-            <a:ext cx="8287907" cy="219106"/>
+            <a:off x="7114381" y="4369470"/>
+            <a:ext cx="4496427" cy="952633"/>
           </a:xfrm>
           <a:prstGeom prst="rect">
             <a:avLst/>
@@ -12522,10 +12561,10 @@
       </p:pic>
       <p:pic>
         <p:nvPicPr>
-          <p:cNvPr id="9" name="Picture 8">
-            <a:extLst>
-              <a:ext uri="{FF2B5EF4-FFF2-40B4-BE49-F238E27FC236}">
-                <a16:creationId xmlns:a16="http://schemas.microsoft.com/office/drawing/2014/main" id="{930B96F5-007B-333A-40DA-59D0EC00C7FC}"/>
+          <p:cNvPr id="11" name="Picture 10">
+            <a:extLst>
+              <a:ext uri="{FF2B5EF4-FFF2-40B4-BE49-F238E27FC236}">
+                <a16:creationId xmlns:a16="http://schemas.microsoft.com/office/drawing/2014/main" id="{811926F2-6F20-EC29-2FE0-1E2C7AA3D3AB}"/>
               </a:ext>
             </a:extLst>
           </p:cNvPr>
@@ -12542,8 +12581,8 @@
         </p:blipFill>
         <p:spPr>
           <a:xfrm>
-            <a:off x="7114381" y="4369470"/>
-            <a:ext cx="4496427" cy="952633"/>
+            <a:off x="7698784" y="5412521"/>
+            <a:ext cx="3105583" cy="1343212"/>
           </a:xfrm>
           <a:prstGeom prst="rect">
             <a:avLst/>
@@ -12552,10 +12591,10 @@
       </p:pic>
       <p:pic>
         <p:nvPicPr>
-          <p:cNvPr id="11" name="Picture 10">
-            <a:extLst>
-              <a:ext uri="{FF2B5EF4-FFF2-40B4-BE49-F238E27FC236}">
-                <a16:creationId xmlns:a16="http://schemas.microsoft.com/office/drawing/2014/main" id="{811926F2-6F20-EC29-2FE0-1E2C7AA3D3AB}"/>
+          <p:cNvPr id="13" name="Picture 12">
+            <a:extLst>
+              <a:ext uri="{FF2B5EF4-FFF2-40B4-BE49-F238E27FC236}">
+                <a16:creationId xmlns:a16="http://schemas.microsoft.com/office/drawing/2014/main" id="{29AC9B52-9A78-8440-C16C-8F96C61C4DEC}"/>
               </a:ext>
             </a:extLst>
           </p:cNvPr>
@@ -12572,8 +12611,8 @@
         </p:blipFill>
         <p:spPr>
           <a:xfrm>
-            <a:off x="7698784" y="5412521"/>
-            <a:ext cx="3105583" cy="1343212"/>
+            <a:off x="5368028" y="2722456"/>
+            <a:ext cx="6230219" cy="1324160"/>
           </a:xfrm>
           <a:prstGeom prst="rect">
             <a:avLst/>
@@ -12999,7 +13038,7 @@
             <a:pPr lvl="1"/>
             <a:r>
               <a:rPr lang="en-US" dirty="0"/>
-              <a:t>Chain a callback function from Incident list component to the Home component – this callback function should save the new incident to the state that holds the list within the ‘Home’ component</a:t>
+              <a:t>Chain a callback prop function from Incident list component to the Home component – this callback function should save the new incident to the state that holds the list within the ‘Home’ component</a:t>
             </a:r>
           </a:p>
         </p:txBody>
@@ -13870,7 +13909,7 @@
         <p:spPr>
           <a:xfrm>
             <a:off x="581193" y="2180496"/>
-            <a:ext cx="4268714" cy="3678303"/>
+            <a:ext cx="4268714" cy="3975348"/>
           </a:xfrm>
         </p:spPr>
         <p:txBody>
@@ -13891,7 +13930,7 @@
             </a:r>
             <a:r>
               <a:rPr lang="en-US" dirty="0"/>
-              <a:t> are a hook that allow us to centralize state logic </a:t>
+              <a:t> are a hook that allow us to centralize state management logic </a:t>
             </a:r>
           </a:p>
           <a:p>
@@ -13906,16 +13945,23 @@
             <a:r>
               <a:rPr lang="en-US" dirty="0"/>
               <a:t>Scalable </a:t>
+            </a:r>
+          </a:p>
+          <a:p>
+            <a:pPr lvl="1"/>
+            <a:r>
+              <a:rPr lang="en-US" dirty="0"/>
+              <a:t>Reducers should be placed under imports, but before the component function</a:t>
             </a:r>
           </a:p>
         </p:txBody>
       </p:sp>
       <p:pic>
         <p:nvPicPr>
-          <p:cNvPr id="5" name="Picture 4">
-            <a:extLst>
-              <a:ext uri="{FF2B5EF4-FFF2-40B4-BE49-F238E27FC236}">
-                <a16:creationId xmlns:a16="http://schemas.microsoft.com/office/drawing/2014/main" id="{60133FF1-CF87-0187-3233-84159A8415BF}"/>
+          <p:cNvPr id="11" name="Picture 10">
+            <a:extLst>
+              <a:ext uri="{FF2B5EF4-FFF2-40B4-BE49-F238E27FC236}">
+                <a16:creationId xmlns:a16="http://schemas.microsoft.com/office/drawing/2014/main" id="{E5179113-6C9B-EEE8-DE91-6006974C9C9C}"/>
               </a:ext>
             </a:extLst>
           </p:cNvPr>
@@ -13932,8 +13978,8 @@
         </p:blipFill>
         <p:spPr>
           <a:xfrm>
-            <a:off x="5169108" y="2745280"/>
-            <a:ext cx="6354062" cy="2191056"/>
+            <a:off x="6675363" y="5553268"/>
+            <a:ext cx="3341551" cy="1205149"/>
           </a:xfrm>
           <a:prstGeom prst="rect">
             <a:avLst/>
@@ -13942,10 +13988,10 @@
       </p:pic>
       <p:pic>
         <p:nvPicPr>
-          <p:cNvPr id="7" name="Picture 6">
-            <a:extLst>
-              <a:ext uri="{FF2B5EF4-FFF2-40B4-BE49-F238E27FC236}">
-                <a16:creationId xmlns:a16="http://schemas.microsoft.com/office/drawing/2014/main" id="{B6F65114-180C-292F-06E8-CFD2A24B684D}"/>
+          <p:cNvPr id="15" name="Picture 14">
+            <a:extLst>
+              <a:ext uri="{FF2B5EF4-FFF2-40B4-BE49-F238E27FC236}">
+                <a16:creationId xmlns:a16="http://schemas.microsoft.com/office/drawing/2014/main" id="{1E8D81F2-090B-5077-C12E-E517AA0E1299}"/>
               </a:ext>
             </a:extLst>
           </p:cNvPr>
@@ -13962,68 +14008,8 @@
         </p:blipFill>
         <p:spPr>
           <a:xfrm>
-            <a:off x="5459662" y="2403923"/>
-            <a:ext cx="5772956" cy="257211"/>
-          </a:xfrm>
-          <a:prstGeom prst="rect">
-            <a:avLst/>
-          </a:prstGeom>
-        </p:spPr>
-      </p:pic>
-      <p:pic>
-        <p:nvPicPr>
-          <p:cNvPr id="9" name="Picture 8">
-            <a:extLst>
-              <a:ext uri="{FF2B5EF4-FFF2-40B4-BE49-F238E27FC236}">
-                <a16:creationId xmlns:a16="http://schemas.microsoft.com/office/drawing/2014/main" id="{047C1DA8-DE8E-6C29-4B8F-32762D4BD8C9}"/>
-              </a:ext>
-            </a:extLst>
-          </p:cNvPr>
-          <p:cNvPicPr>
-            <a:picLocks noChangeAspect="1"/>
-          </p:cNvPicPr>
-          <p:nvPr/>
-        </p:nvPicPr>
-        <p:blipFill>
-          <a:blip r:embed="rId4"/>
-          <a:stretch>
-            <a:fillRect/>
-          </a:stretch>
-        </p:blipFill>
-        <p:spPr>
-          <a:xfrm>
-            <a:off x="6096000" y="2042364"/>
-            <a:ext cx="3972479" cy="276264"/>
-          </a:xfrm>
-          <a:prstGeom prst="rect">
-            <a:avLst/>
-          </a:prstGeom>
-        </p:spPr>
-      </p:pic>
-      <p:pic>
-        <p:nvPicPr>
-          <p:cNvPr id="11" name="Picture 10">
-            <a:extLst>
-              <a:ext uri="{FF2B5EF4-FFF2-40B4-BE49-F238E27FC236}">
-                <a16:creationId xmlns:a16="http://schemas.microsoft.com/office/drawing/2014/main" id="{E5179113-6C9B-EEE8-DE91-6006974C9C9C}"/>
-              </a:ext>
-            </a:extLst>
-          </p:cNvPr>
-          <p:cNvPicPr>
-            <a:picLocks noChangeAspect="1"/>
-          </p:cNvPicPr>
-          <p:nvPr/>
-        </p:nvPicPr>
-        <p:blipFill>
-          <a:blip r:embed="rId5"/>
-          <a:stretch>
-            <a:fillRect/>
-          </a:stretch>
-        </p:blipFill>
-        <p:spPr>
-          <a:xfrm>
-            <a:off x="6021715" y="5020482"/>
-            <a:ext cx="4648849" cy="1676634"/>
+            <a:off x="5354324" y="1984896"/>
+            <a:ext cx="5983628" cy="3483681"/>
           </a:xfrm>
           <a:prstGeom prst="rect">
             <a:avLst/>
@@ -14490,6 +14476,1220 @@
 </p:sld>
 </file>
 
+<file path=ppt/slides/slide35.xml><?xml version="1.0" encoding="utf-8"?>
+<p:sld xmlns:a="http://schemas.openxmlformats.org/drawingml/2006/main" xmlns:r="http://schemas.openxmlformats.org/officeDocument/2006/relationships" xmlns:p="http://schemas.openxmlformats.org/presentationml/2006/main">
+  <p:cSld>
+    <p:spTree>
+      <p:nvGrpSpPr>
+        <p:cNvPr id="1" name=""/>
+        <p:cNvGrpSpPr/>
+        <p:nvPr/>
+      </p:nvGrpSpPr>
+      <p:grpSpPr>
+        <a:xfrm>
+          <a:off x="0" y="0"/>
+          <a:ext cx="0" cy="0"/>
+          <a:chOff x="0" y="0"/>
+          <a:chExt cx="0" cy="0"/>
+        </a:xfrm>
+      </p:grpSpPr>
+      <p:sp>
+        <p:nvSpPr>
+          <p:cNvPr id="2" name="Title 1">
+            <a:extLst>
+              <a:ext uri="{FF2B5EF4-FFF2-40B4-BE49-F238E27FC236}">
+                <a16:creationId xmlns:a16="http://schemas.microsoft.com/office/drawing/2014/main" id="{EE73004E-0643-3754-9DF2-B190310C6CC0}"/>
+              </a:ext>
+            </a:extLst>
+          </p:cNvPr>
+          <p:cNvSpPr>
+            <a:spLocks noGrp="1"/>
+          </p:cNvSpPr>
+          <p:nvPr>
+            <p:ph type="title"/>
+          </p:nvPr>
+        </p:nvSpPr>
+        <p:spPr/>
+        <p:txBody>
+          <a:bodyPr/>
+          <a:lstStyle/>
+          <a:p>
+            <a:r>
+              <a:rPr lang="en-US" dirty="0"/>
+              <a:t>Effect</a:t>
+            </a:r>
+          </a:p>
+        </p:txBody>
+      </p:sp>
+      <p:sp>
+        <p:nvSpPr>
+          <p:cNvPr id="3" name="Content Placeholder 2">
+            <a:extLst>
+              <a:ext uri="{FF2B5EF4-FFF2-40B4-BE49-F238E27FC236}">
+                <a16:creationId xmlns:a16="http://schemas.microsoft.com/office/drawing/2014/main" id="{D8D9A913-4839-C8B4-CA21-8068CFB650BF}"/>
+              </a:ext>
+            </a:extLst>
+          </p:cNvPr>
+          <p:cNvSpPr>
+            <a:spLocks noGrp="1"/>
+          </p:cNvSpPr>
+          <p:nvPr>
+            <p:ph idx="1"/>
+          </p:nvPr>
+        </p:nvSpPr>
+        <p:spPr>
+          <a:xfrm>
+            <a:off x="581192" y="2108778"/>
+            <a:ext cx="5210007" cy="4265128"/>
+          </a:xfrm>
+        </p:spPr>
+        <p:txBody>
+          <a:bodyPr>
+            <a:normAutofit/>
+          </a:bodyPr>
+          <a:lstStyle/>
+          <a:p>
+            <a:r>
+              <a:rPr lang="en-US" dirty="0"/>
+              <a:t>Definition: </a:t>
+            </a:r>
+            <a:r>
+              <a:rPr lang="en-US" dirty="0" err="1">
+                <a:solidFill>
+                  <a:schemeClr val="accent2"/>
+                </a:solidFill>
+              </a:rPr>
+              <a:t>useEffect</a:t>
+            </a:r>
+            <a:r>
+              <a:rPr lang="en-US" dirty="0"/>
+              <a:t> is a hook that lets us perform ‘side effects’ in functional components.</a:t>
+            </a:r>
+          </a:p>
+          <a:p>
+            <a:r>
+              <a:rPr lang="en-US" dirty="0"/>
+              <a:t>Definition: A </a:t>
+            </a:r>
+            <a:r>
+              <a:rPr lang="en-US" dirty="0">
+                <a:solidFill>
+                  <a:schemeClr val="accent2"/>
+                </a:solidFill>
+              </a:rPr>
+              <a:t>Side Effect </a:t>
+            </a:r>
+            <a:r>
+              <a:rPr lang="en-US" dirty="0"/>
+              <a:t>is any action that happens outside the normal flow of rendering:</a:t>
+            </a:r>
+          </a:p>
+          <a:p>
+            <a:pPr lvl="1"/>
+            <a:r>
+              <a:rPr lang="en-US" dirty="0"/>
+              <a:t>Fetching data from an API</a:t>
+            </a:r>
+          </a:p>
+          <a:p>
+            <a:pPr lvl="1"/>
+            <a:r>
+              <a:rPr lang="en-US" dirty="0"/>
+              <a:t>Setting up subscriptions or event listeners</a:t>
+            </a:r>
+          </a:p>
+          <a:p>
+            <a:pPr lvl="1"/>
+            <a:r>
+              <a:rPr lang="en-US" dirty="0"/>
+              <a:t>Updating the DOM manually</a:t>
+            </a:r>
+          </a:p>
+          <a:p>
+            <a:pPr lvl="1"/>
+            <a:r>
+              <a:rPr lang="en-US" dirty="0"/>
+              <a:t>Stating/stopping timers</a:t>
+            </a:r>
+          </a:p>
+          <a:p>
+            <a:r>
+              <a:rPr lang="en-US" dirty="0" err="1"/>
+              <a:t>useEffect</a:t>
+            </a:r>
+            <a:r>
+              <a:rPr lang="en-US" dirty="0"/>
+              <a:t> accepts two arguments: </a:t>
+            </a:r>
+          </a:p>
+          <a:p>
+            <a:pPr lvl="1"/>
+            <a:r>
+              <a:rPr lang="en-US" dirty="0"/>
+              <a:t>1. A function to run when it is triggered</a:t>
+            </a:r>
+          </a:p>
+          <a:p>
+            <a:pPr lvl="1"/>
+            <a:r>
+              <a:rPr lang="en-US" dirty="0"/>
+              <a:t>2. An array of dependencies that when changed, cause the </a:t>
+            </a:r>
+            <a:r>
+              <a:rPr lang="en-US" dirty="0" err="1"/>
+              <a:t>useEffect</a:t>
+            </a:r>
+            <a:r>
+              <a:rPr lang="en-US" dirty="0"/>
+              <a:t> to run again (props or states)</a:t>
+            </a:r>
+          </a:p>
+        </p:txBody>
+      </p:sp>
+      <p:pic>
+        <p:nvPicPr>
+          <p:cNvPr id="5" name="Picture 4">
+            <a:extLst>
+              <a:ext uri="{FF2B5EF4-FFF2-40B4-BE49-F238E27FC236}">
+                <a16:creationId xmlns:a16="http://schemas.microsoft.com/office/drawing/2014/main" id="{6468C0BE-BA78-0B90-7970-8770280444C4}"/>
+              </a:ext>
+            </a:extLst>
+          </p:cNvPr>
+          <p:cNvPicPr>
+            <a:picLocks noChangeAspect="1"/>
+          </p:cNvPicPr>
+          <p:nvPr/>
+        </p:nvPicPr>
+        <p:blipFill>
+          <a:blip r:embed="rId2"/>
+          <a:stretch>
+            <a:fillRect/>
+          </a:stretch>
+        </p:blipFill>
+        <p:spPr>
+          <a:xfrm>
+            <a:off x="6889652" y="2265703"/>
+            <a:ext cx="3124636" cy="1124107"/>
+          </a:xfrm>
+          <a:prstGeom prst="rect">
+            <a:avLst/>
+          </a:prstGeom>
+        </p:spPr>
+      </p:pic>
+      <p:pic>
+        <p:nvPicPr>
+          <p:cNvPr id="7" name="Picture 6">
+            <a:extLst>
+              <a:ext uri="{FF2B5EF4-FFF2-40B4-BE49-F238E27FC236}">
+                <a16:creationId xmlns:a16="http://schemas.microsoft.com/office/drawing/2014/main" id="{0701EDAC-53DA-DEB1-64D2-704643384B34}"/>
+              </a:ext>
+            </a:extLst>
+          </p:cNvPr>
+          <p:cNvPicPr>
+            <a:picLocks noChangeAspect="1"/>
+          </p:cNvPicPr>
+          <p:nvPr/>
+        </p:nvPicPr>
+        <p:blipFill>
+          <a:blip r:embed="rId3"/>
+          <a:stretch>
+            <a:fillRect/>
+          </a:stretch>
+        </p:blipFill>
+        <p:spPr>
+          <a:xfrm>
+            <a:off x="6096000" y="3293937"/>
+            <a:ext cx="4410691" cy="1105054"/>
+          </a:xfrm>
+          <a:prstGeom prst="rect">
+            <a:avLst/>
+          </a:prstGeom>
+        </p:spPr>
+      </p:pic>
+      <p:pic>
+        <p:nvPicPr>
+          <p:cNvPr id="9" name="Picture 8">
+            <a:extLst>
+              <a:ext uri="{FF2B5EF4-FFF2-40B4-BE49-F238E27FC236}">
+                <a16:creationId xmlns:a16="http://schemas.microsoft.com/office/drawing/2014/main" id="{A93B5DD2-E3F2-10E8-AE9A-5DB198411356}"/>
+              </a:ext>
+            </a:extLst>
+          </p:cNvPr>
+          <p:cNvPicPr>
+            <a:picLocks noChangeAspect="1"/>
+          </p:cNvPicPr>
+          <p:nvPr/>
+        </p:nvPicPr>
+        <p:blipFill>
+          <a:blip r:embed="rId4"/>
+          <a:stretch>
+            <a:fillRect/>
+          </a:stretch>
+        </p:blipFill>
+        <p:spPr>
+          <a:xfrm>
+            <a:off x="5679018" y="4791813"/>
+            <a:ext cx="5782482" cy="1486107"/>
+          </a:xfrm>
+          <a:prstGeom prst="rect">
+            <a:avLst/>
+          </a:prstGeom>
+        </p:spPr>
+      </p:pic>
+    </p:spTree>
+    <p:extLst>
+      <p:ext uri="{BB962C8B-B14F-4D97-AF65-F5344CB8AC3E}">
+        <p14:creationId xmlns:p14="http://schemas.microsoft.com/office/powerpoint/2010/main" val="3881402846"/>
+      </p:ext>
+    </p:extLst>
+  </p:cSld>
+  <p:clrMapOvr>
+    <a:masterClrMapping/>
+  </p:clrMapOvr>
+</p:sld>
+</file>
+
+<file path=ppt/slides/slide36.xml><?xml version="1.0" encoding="utf-8"?>
+<p:sld xmlns:a="http://schemas.openxmlformats.org/drawingml/2006/main" xmlns:r="http://schemas.openxmlformats.org/officeDocument/2006/relationships" xmlns:p="http://schemas.openxmlformats.org/presentationml/2006/main">
+  <p:cSld>
+    <p:spTree>
+      <p:nvGrpSpPr>
+        <p:cNvPr id="1" name=""/>
+        <p:cNvGrpSpPr/>
+        <p:nvPr/>
+      </p:nvGrpSpPr>
+      <p:grpSpPr>
+        <a:xfrm>
+          <a:off x="0" y="0"/>
+          <a:ext cx="0" cy="0"/>
+          <a:chOff x="0" y="0"/>
+          <a:chExt cx="0" cy="0"/>
+        </a:xfrm>
+      </p:grpSpPr>
+      <p:sp>
+        <p:nvSpPr>
+          <p:cNvPr id="2" name="Title 1">
+            <a:extLst>
+              <a:ext uri="{FF2B5EF4-FFF2-40B4-BE49-F238E27FC236}">
+                <a16:creationId xmlns:a16="http://schemas.microsoft.com/office/drawing/2014/main" id="{762630F8-10E3-A01A-881C-13DFAE1F5AF3}"/>
+              </a:ext>
+            </a:extLst>
+          </p:cNvPr>
+          <p:cNvSpPr>
+            <a:spLocks noGrp="1"/>
+          </p:cNvSpPr>
+          <p:nvPr>
+            <p:ph type="title"/>
+          </p:nvPr>
+        </p:nvSpPr>
+        <p:spPr/>
+        <p:txBody>
+          <a:bodyPr/>
+          <a:lstStyle/>
+          <a:p>
+            <a:r>
+              <a:rPr lang="en-US" dirty="0"/>
+              <a:t>Async Code with Effects</a:t>
+            </a:r>
+          </a:p>
+        </p:txBody>
+      </p:sp>
+      <p:sp>
+        <p:nvSpPr>
+          <p:cNvPr id="3" name="Content Placeholder 2">
+            <a:extLst>
+              <a:ext uri="{FF2B5EF4-FFF2-40B4-BE49-F238E27FC236}">
+                <a16:creationId xmlns:a16="http://schemas.microsoft.com/office/drawing/2014/main" id="{CEAFD915-80FF-438F-E697-AAB538C9F74B}"/>
+              </a:ext>
+            </a:extLst>
+          </p:cNvPr>
+          <p:cNvSpPr>
+            <a:spLocks noGrp="1"/>
+          </p:cNvSpPr>
+          <p:nvPr>
+            <p:ph idx="1"/>
+          </p:nvPr>
+        </p:nvSpPr>
+        <p:spPr>
+          <a:xfrm>
+            <a:off x="1391684" y="2159714"/>
+            <a:ext cx="4528690" cy="3678303"/>
+          </a:xfrm>
+        </p:spPr>
+        <p:txBody>
+          <a:bodyPr/>
+          <a:lstStyle/>
+          <a:p>
+            <a:r>
+              <a:rPr lang="en-US" dirty="0"/>
+              <a:t>The callback function provided to </a:t>
+            </a:r>
+            <a:r>
+              <a:rPr lang="en-US" dirty="0" err="1"/>
+              <a:t>useEffect</a:t>
+            </a:r>
+            <a:r>
+              <a:rPr lang="en-US" dirty="0"/>
+              <a:t> can NOT be asynchronous</a:t>
+            </a:r>
+          </a:p>
+          <a:p>
+            <a:r>
+              <a:rPr lang="en-US" dirty="0"/>
+              <a:t>Instead, we place an </a:t>
+            </a:r>
+            <a:r>
+              <a:rPr lang="en-US" dirty="0" err="1"/>
+              <a:t>asnyc</a:t>
+            </a:r>
+            <a:r>
+              <a:rPr lang="en-US" dirty="0"/>
+              <a:t> inner function inside of the callback, and then call that</a:t>
+            </a:r>
+          </a:p>
+        </p:txBody>
+      </p:sp>
+      <p:pic>
+        <p:nvPicPr>
+          <p:cNvPr id="5" name="Picture 4">
+            <a:extLst>
+              <a:ext uri="{FF2B5EF4-FFF2-40B4-BE49-F238E27FC236}">
+                <a16:creationId xmlns:a16="http://schemas.microsoft.com/office/drawing/2014/main" id="{2C9F9C06-D984-9B77-C9D6-9A1130E7A7D2}"/>
+              </a:ext>
+            </a:extLst>
+          </p:cNvPr>
+          <p:cNvPicPr>
+            <a:picLocks noChangeAspect="1"/>
+          </p:cNvPicPr>
+          <p:nvPr/>
+        </p:nvPicPr>
+        <p:blipFill>
+          <a:blip r:embed="rId2"/>
+          <a:stretch>
+            <a:fillRect/>
+          </a:stretch>
+        </p:blipFill>
+        <p:spPr>
+          <a:xfrm>
+            <a:off x="6569190" y="1993496"/>
+            <a:ext cx="3715268" cy="4448796"/>
+          </a:xfrm>
+          <a:prstGeom prst="rect">
+            <a:avLst/>
+          </a:prstGeom>
+        </p:spPr>
+      </p:pic>
+    </p:spTree>
+    <p:extLst>
+      <p:ext uri="{BB962C8B-B14F-4D97-AF65-F5344CB8AC3E}">
+        <p14:creationId xmlns:p14="http://schemas.microsoft.com/office/powerpoint/2010/main" val="2378025077"/>
+      </p:ext>
+    </p:extLst>
+  </p:cSld>
+  <p:clrMapOvr>
+    <a:masterClrMapping/>
+  </p:clrMapOvr>
+</p:sld>
+</file>
+
+<file path=ppt/slides/slide37.xml><?xml version="1.0" encoding="utf-8"?>
+<p:sld xmlns:a="http://schemas.openxmlformats.org/drawingml/2006/main" xmlns:r="http://schemas.openxmlformats.org/officeDocument/2006/relationships" xmlns:p="http://schemas.openxmlformats.org/presentationml/2006/main">
+  <p:cSld>
+    <p:spTree>
+      <p:nvGrpSpPr>
+        <p:cNvPr id="1" name=""/>
+        <p:cNvGrpSpPr/>
+        <p:nvPr/>
+      </p:nvGrpSpPr>
+      <p:grpSpPr>
+        <a:xfrm>
+          <a:off x="0" y="0"/>
+          <a:ext cx="0" cy="0"/>
+          <a:chOff x="0" y="0"/>
+          <a:chExt cx="0" cy="0"/>
+        </a:xfrm>
+      </p:grpSpPr>
+      <p:sp>
+        <p:nvSpPr>
+          <p:cNvPr id="2" name="Title 1">
+            <a:extLst>
+              <a:ext uri="{FF2B5EF4-FFF2-40B4-BE49-F238E27FC236}">
+                <a16:creationId xmlns:a16="http://schemas.microsoft.com/office/drawing/2014/main" id="{A8592F4B-D717-36D4-A066-CB87EC32BB7A}"/>
+              </a:ext>
+            </a:extLst>
+          </p:cNvPr>
+          <p:cNvSpPr>
+            <a:spLocks noGrp="1"/>
+          </p:cNvSpPr>
+          <p:nvPr>
+            <p:ph type="title"/>
+          </p:nvPr>
+        </p:nvSpPr>
+        <p:spPr/>
+        <p:txBody>
+          <a:bodyPr/>
+          <a:lstStyle/>
+          <a:p>
+            <a:r>
+              <a:rPr lang="en-US" dirty="0"/>
+              <a:t>Effect Optimization</a:t>
+            </a:r>
+          </a:p>
+        </p:txBody>
+      </p:sp>
+      <p:sp>
+        <p:nvSpPr>
+          <p:cNvPr id="3" name="Content Placeholder 2">
+            <a:extLst>
+              <a:ext uri="{FF2B5EF4-FFF2-40B4-BE49-F238E27FC236}">
+                <a16:creationId xmlns:a16="http://schemas.microsoft.com/office/drawing/2014/main" id="{9AE67DA9-FA34-EA4E-1623-6A8980E6B8D6}"/>
+              </a:ext>
+            </a:extLst>
+          </p:cNvPr>
+          <p:cNvSpPr>
+            <a:spLocks noGrp="1"/>
+          </p:cNvSpPr>
+          <p:nvPr>
+            <p:ph idx="1"/>
+          </p:nvPr>
+        </p:nvSpPr>
+        <p:spPr>
+          <a:xfrm>
+            <a:off x="581192" y="2180497"/>
+            <a:ext cx="4379115" cy="3934374"/>
+          </a:xfrm>
+        </p:spPr>
+        <p:txBody>
+          <a:bodyPr/>
+          <a:lstStyle/>
+          <a:p>
+            <a:r>
+              <a:rPr lang="en-US" dirty="0"/>
+              <a:t>Certain effects should be ‘cleaned up’ after they are no longer needed</a:t>
+            </a:r>
+          </a:p>
+          <a:p>
+            <a:r>
+              <a:rPr lang="en-US" dirty="0"/>
+              <a:t>This reduces the chance we will have a memory leak</a:t>
+            </a:r>
+          </a:p>
+          <a:p>
+            <a:r>
+              <a:rPr lang="en-US" dirty="0"/>
+              <a:t>Timeouts, subscriptions, event listeners, and any effect that doesn’t need to continuously be available to the application should be disposed </a:t>
+            </a:r>
+          </a:p>
+          <a:p>
+            <a:r>
+              <a:rPr lang="en-US" dirty="0"/>
+              <a:t>Use the </a:t>
+            </a:r>
+            <a:r>
+              <a:rPr lang="en-US" dirty="0" err="1"/>
+              <a:t>AbortContoller</a:t>
+            </a:r>
+            <a:r>
+              <a:rPr lang="en-US" dirty="0"/>
+              <a:t> browser API to cancel fetch requests no longer needed</a:t>
+            </a:r>
+          </a:p>
+        </p:txBody>
+      </p:sp>
+      <p:pic>
+        <p:nvPicPr>
+          <p:cNvPr id="7" name="Picture 6">
+            <a:extLst>
+              <a:ext uri="{FF2B5EF4-FFF2-40B4-BE49-F238E27FC236}">
+                <a16:creationId xmlns:a16="http://schemas.microsoft.com/office/drawing/2014/main" id="{218EEFB4-1786-AD32-2F49-3806926DECBA}"/>
+              </a:ext>
+            </a:extLst>
+          </p:cNvPr>
+          <p:cNvPicPr>
+            <a:picLocks noChangeAspect="1"/>
+          </p:cNvPicPr>
+          <p:nvPr/>
+        </p:nvPicPr>
+        <p:blipFill>
+          <a:blip r:embed="rId2"/>
+          <a:stretch>
+            <a:fillRect/>
+          </a:stretch>
+        </p:blipFill>
+        <p:spPr>
+          <a:xfrm>
+            <a:off x="5158655" y="2180496"/>
+            <a:ext cx="6258798" cy="3934374"/>
+          </a:xfrm>
+          <a:prstGeom prst="rect">
+            <a:avLst/>
+          </a:prstGeom>
+        </p:spPr>
+      </p:pic>
+    </p:spTree>
+    <p:extLst>
+      <p:ext uri="{BB962C8B-B14F-4D97-AF65-F5344CB8AC3E}">
+        <p14:creationId xmlns:p14="http://schemas.microsoft.com/office/powerpoint/2010/main" val="76544017"/>
+      </p:ext>
+    </p:extLst>
+  </p:cSld>
+  <p:clrMapOvr>
+    <a:masterClrMapping/>
+  </p:clrMapOvr>
+</p:sld>
+</file>
+
+<file path=ppt/slides/slide38.xml><?xml version="1.0" encoding="utf-8"?>
+<p:sld xmlns:a="http://schemas.openxmlformats.org/drawingml/2006/main" xmlns:r="http://schemas.openxmlformats.org/officeDocument/2006/relationships" xmlns:p="http://schemas.openxmlformats.org/presentationml/2006/main">
+  <p:cSld>
+    <p:spTree>
+      <p:nvGrpSpPr>
+        <p:cNvPr id="1" name=""/>
+        <p:cNvGrpSpPr/>
+        <p:nvPr/>
+      </p:nvGrpSpPr>
+      <p:grpSpPr>
+        <a:xfrm>
+          <a:off x="0" y="0"/>
+          <a:ext cx="0" cy="0"/>
+          <a:chOff x="0" y="0"/>
+          <a:chExt cx="0" cy="0"/>
+        </a:xfrm>
+      </p:grpSpPr>
+      <p:sp>
+        <p:nvSpPr>
+          <p:cNvPr id="2" name="Title 1">
+            <a:extLst>
+              <a:ext uri="{FF2B5EF4-FFF2-40B4-BE49-F238E27FC236}">
+                <a16:creationId xmlns:a16="http://schemas.microsoft.com/office/drawing/2014/main" id="{F6B370E6-9458-968A-8D5F-62CDA3BD65B7}"/>
+              </a:ext>
+            </a:extLst>
+          </p:cNvPr>
+          <p:cNvSpPr>
+            <a:spLocks noGrp="1"/>
+          </p:cNvSpPr>
+          <p:nvPr>
+            <p:ph type="title"/>
+          </p:nvPr>
+        </p:nvSpPr>
+        <p:spPr/>
+        <p:txBody>
+          <a:bodyPr/>
+          <a:lstStyle/>
+          <a:p>
+            <a:r>
+              <a:rPr lang="en-US" dirty="0"/>
+              <a:t>Storing Api Keys</a:t>
+            </a:r>
+          </a:p>
+        </p:txBody>
+      </p:sp>
+      <p:sp>
+        <p:nvSpPr>
+          <p:cNvPr id="3" name="Content Placeholder 2">
+            <a:extLst>
+              <a:ext uri="{FF2B5EF4-FFF2-40B4-BE49-F238E27FC236}">
+                <a16:creationId xmlns:a16="http://schemas.microsoft.com/office/drawing/2014/main" id="{0FEE2D75-270C-A30F-89BD-131056F788A3}"/>
+              </a:ext>
+            </a:extLst>
+          </p:cNvPr>
+          <p:cNvSpPr>
+            <a:spLocks noGrp="1"/>
+          </p:cNvSpPr>
+          <p:nvPr>
+            <p:ph idx="1"/>
+          </p:nvPr>
+        </p:nvSpPr>
+        <p:spPr>
+          <a:xfrm>
+            <a:off x="581192" y="2180496"/>
+            <a:ext cx="3895115" cy="3678303"/>
+          </a:xfrm>
+        </p:spPr>
+        <p:txBody>
+          <a:bodyPr/>
+          <a:lstStyle/>
+          <a:p>
+            <a:r>
+              <a:rPr lang="en-US" dirty="0"/>
+              <a:t>Create a file that is only the file extension ‘.env’</a:t>
+            </a:r>
+          </a:p>
+          <a:p>
+            <a:r>
+              <a:rPr lang="en-US" dirty="0"/>
+              <a:t>In the file define your data</a:t>
+            </a:r>
+          </a:p>
+          <a:p>
+            <a:r>
+              <a:rPr lang="en-US" dirty="0"/>
+              <a:t>Import it where you need it</a:t>
+            </a:r>
+          </a:p>
+          <a:p>
+            <a:r>
+              <a:rPr lang="en-US" dirty="0"/>
+              <a:t>Don’t forget to add environment variables to your </a:t>
+            </a:r>
+            <a:r>
+              <a:rPr lang="en-US" dirty="0" err="1"/>
+              <a:t>gitignore</a:t>
+            </a:r>
+            <a:endParaRPr lang="en-US" dirty="0"/>
+          </a:p>
+        </p:txBody>
+      </p:sp>
+      <p:pic>
+        <p:nvPicPr>
+          <p:cNvPr id="5" name="Picture 4">
+            <a:extLst>
+              <a:ext uri="{FF2B5EF4-FFF2-40B4-BE49-F238E27FC236}">
+                <a16:creationId xmlns:a16="http://schemas.microsoft.com/office/drawing/2014/main" id="{CF775CF2-26C3-57F9-A8B1-477BFC527EE0}"/>
+              </a:ext>
+            </a:extLst>
+          </p:cNvPr>
+          <p:cNvPicPr>
+            <a:picLocks noChangeAspect="1"/>
+          </p:cNvPicPr>
+          <p:nvPr/>
+        </p:nvPicPr>
+        <p:blipFill>
+          <a:blip r:embed="rId2"/>
+          <a:stretch>
+            <a:fillRect/>
+          </a:stretch>
+        </p:blipFill>
+        <p:spPr>
+          <a:xfrm>
+            <a:off x="6629693" y="2177381"/>
+            <a:ext cx="2172003" cy="1076475"/>
+          </a:xfrm>
+          <a:prstGeom prst="rect">
+            <a:avLst/>
+          </a:prstGeom>
+        </p:spPr>
+      </p:pic>
+      <p:pic>
+        <p:nvPicPr>
+          <p:cNvPr id="7" name="Picture 6">
+            <a:extLst>
+              <a:ext uri="{FF2B5EF4-FFF2-40B4-BE49-F238E27FC236}">
+                <a16:creationId xmlns:a16="http://schemas.microsoft.com/office/drawing/2014/main" id="{59DD13B4-5950-EB06-4483-78CD5A7AACDF}"/>
+              </a:ext>
+            </a:extLst>
+          </p:cNvPr>
+          <p:cNvPicPr>
+            <a:picLocks noChangeAspect="1"/>
+          </p:cNvPicPr>
+          <p:nvPr/>
+        </p:nvPicPr>
+        <p:blipFill>
+          <a:blip r:embed="rId3"/>
+          <a:stretch>
+            <a:fillRect/>
+          </a:stretch>
+        </p:blipFill>
+        <p:spPr>
+          <a:xfrm>
+            <a:off x="5813414" y="3513263"/>
+            <a:ext cx="3804560" cy="608730"/>
+          </a:xfrm>
+          <a:prstGeom prst="rect">
+            <a:avLst/>
+          </a:prstGeom>
+        </p:spPr>
+      </p:pic>
+      <p:pic>
+        <p:nvPicPr>
+          <p:cNvPr id="9" name="Picture 8">
+            <a:extLst>
+              <a:ext uri="{FF2B5EF4-FFF2-40B4-BE49-F238E27FC236}">
+                <a16:creationId xmlns:a16="http://schemas.microsoft.com/office/drawing/2014/main" id="{2076590B-1872-FF39-0817-8A017CFD3684}"/>
+              </a:ext>
+            </a:extLst>
+          </p:cNvPr>
+          <p:cNvPicPr>
+            <a:picLocks noChangeAspect="1"/>
+          </p:cNvPicPr>
+          <p:nvPr/>
+        </p:nvPicPr>
+        <p:blipFill>
+          <a:blip r:embed="rId4"/>
+          <a:stretch>
+            <a:fillRect/>
+          </a:stretch>
+        </p:blipFill>
+        <p:spPr>
+          <a:xfrm>
+            <a:off x="5001987" y="4608897"/>
+            <a:ext cx="5733075" cy="442266"/>
+          </a:xfrm>
+          <a:prstGeom prst="rect">
+            <a:avLst/>
+          </a:prstGeom>
+        </p:spPr>
+      </p:pic>
+      <p:pic>
+        <p:nvPicPr>
+          <p:cNvPr id="11" name="Picture 10">
+            <a:extLst>
+              <a:ext uri="{FF2B5EF4-FFF2-40B4-BE49-F238E27FC236}">
+                <a16:creationId xmlns:a16="http://schemas.microsoft.com/office/drawing/2014/main" id="{6BF91883-3EAF-DA95-3DC6-AE2603D0EDAB}"/>
+              </a:ext>
+            </a:extLst>
+          </p:cNvPr>
+          <p:cNvPicPr>
+            <a:picLocks noChangeAspect="1"/>
+          </p:cNvPicPr>
+          <p:nvPr/>
+        </p:nvPicPr>
+        <p:blipFill>
+          <a:blip r:embed="rId5"/>
+          <a:stretch>
+            <a:fillRect/>
+          </a:stretch>
+        </p:blipFill>
+        <p:spPr>
+          <a:xfrm>
+            <a:off x="5235324" y="5328735"/>
+            <a:ext cx="4960740" cy="1181129"/>
+          </a:xfrm>
+          <a:prstGeom prst="rect">
+            <a:avLst/>
+          </a:prstGeom>
+        </p:spPr>
+      </p:pic>
+    </p:spTree>
+    <p:extLst>
+      <p:ext uri="{BB962C8B-B14F-4D97-AF65-F5344CB8AC3E}">
+        <p14:creationId xmlns:p14="http://schemas.microsoft.com/office/powerpoint/2010/main" val="1216215830"/>
+      </p:ext>
+    </p:extLst>
+  </p:cSld>
+  <p:clrMapOvr>
+    <a:masterClrMapping/>
+  </p:clrMapOvr>
+</p:sld>
+</file>
+
+<file path=ppt/slides/slide39.xml><?xml version="1.0" encoding="utf-8"?>
+<p:sld xmlns:a="http://schemas.openxmlformats.org/drawingml/2006/main" xmlns:r="http://schemas.openxmlformats.org/officeDocument/2006/relationships" xmlns:p="http://schemas.openxmlformats.org/presentationml/2006/main">
+  <p:cSld>
+    <p:spTree>
+      <p:nvGrpSpPr>
+        <p:cNvPr id="1" name="">
+          <a:extLst>
+            <a:ext uri="{FF2B5EF4-FFF2-40B4-BE49-F238E27FC236}">
+              <a16:creationId xmlns:a16="http://schemas.microsoft.com/office/drawing/2014/main" id="{818DD061-04CE-FD0C-CB7D-2D37A96D0E37}"/>
+            </a:ext>
+          </a:extLst>
+        </p:cNvPr>
+        <p:cNvGrpSpPr/>
+        <p:nvPr/>
+      </p:nvGrpSpPr>
+      <p:grpSpPr>
+        <a:xfrm>
+          <a:off x="0" y="0"/>
+          <a:ext cx="0" cy="0"/>
+          <a:chOff x="0" y="0"/>
+          <a:chExt cx="0" cy="0"/>
+        </a:xfrm>
+      </p:grpSpPr>
+      <p:sp>
+        <p:nvSpPr>
+          <p:cNvPr id="2" name="Title 1">
+            <a:extLst>
+              <a:ext uri="{FF2B5EF4-FFF2-40B4-BE49-F238E27FC236}">
+                <a16:creationId xmlns:a16="http://schemas.microsoft.com/office/drawing/2014/main" id="{D487A829-C52B-2FF5-C5F4-0397DD8F6C46}"/>
+              </a:ext>
+            </a:extLst>
+          </p:cNvPr>
+          <p:cNvSpPr>
+            <a:spLocks noGrp="1"/>
+          </p:cNvSpPr>
+          <p:nvPr>
+            <p:ph type="title"/>
+          </p:nvPr>
+        </p:nvSpPr>
+        <p:spPr/>
+        <p:txBody>
+          <a:bodyPr/>
+          <a:lstStyle/>
+          <a:p>
+            <a:r>
+              <a:rPr lang="en-US" dirty="0"/>
+              <a:t>Challenge – Create an Effect</a:t>
+            </a:r>
+          </a:p>
+        </p:txBody>
+      </p:sp>
+      <p:sp>
+        <p:nvSpPr>
+          <p:cNvPr id="3" name="Content Placeholder 2">
+            <a:extLst>
+              <a:ext uri="{FF2B5EF4-FFF2-40B4-BE49-F238E27FC236}">
+                <a16:creationId xmlns:a16="http://schemas.microsoft.com/office/drawing/2014/main" id="{7FE63EC5-1348-83E0-5715-4FEDE5A62854}"/>
+              </a:ext>
+            </a:extLst>
+          </p:cNvPr>
+          <p:cNvSpPr>
+            <a:spLocks noGrp="1"/>
+          </p:cNvSpPr>
+          <p:nvPr>
+            <p:ph idx="1"/>
+          </p:nvPr>
+        </p:nvSpPr>
+        <p:spPr>
+          <a:xfrm>
+            <a:off x="581192" y="2475925"/>
+            <a:ext cx="5317584" cy="1681246"/>
+          </a:xfrm>
+        </p:spPr>
+        <p:txBody>
+          <a:bodyPr/>
+          <a:lstStyle/>
+          <a:p>
+            <a:r>
+              <a:rPr lang="en-US" dirty="0"/>
+              <a:t>Create an Effect</a:t>
+            </a:r>
+          </a:p>
+        </p:txBody>
+      </p:sp>
+      <p:sp>
+        <p:nvSpPr>
+          <p:cNvPr id="6" name="TextBox 5">
+            <a:extLst>
+              <a:ext uri="{FF2B5EF4-FFF2-40B4-BE49-F238E27FC236}">
+                <a16:creationId xmlns:a16="http://schemas.microsoft.com/office/drawing/2014/main" id="{F2BC923F-4A73-49B8-5C29-ACC71E401140}"/>
+              </a:ext>
+            </a:extLst>
+          </p:cNvPr>
+          <p:cNvSpPr txBox="1"/>
+          <p:nvPr/>
+        </p:nvSpPr>
+        <p:spPr>
+          <a:xfrm>
+            <a:off x="1228165" y="2402747"/>
+            <a:ext cx="756938" cy="369332"/>
+          </a:xfrm>
+          <a:prstGeom prst="rect">
+            <a:avLst/>
+          </a:prstGeom>
+          <a:noFill/>
+        </p:spPr>
+        <p:txBody>
+          <a:bodyPr wrap="none" rtlCol="0">
+            <a:spAutoFit/>
+          </a:bodyPr>
+          <a:lstStyle/>
+          <a:p>
+            <a:r>
+              <a:rPr lang="en-US" b="1" dirty="0"/>
+              <a:t>Goal:</a:t>
+            </a:r>
+          </a:p>
+        </p:txBody>
+      </p:sp>
+      <p:sp>
+        <p:nvSpPr>
+          <p:cNvPr id="7" name="TextBox 6">
+            <a:extLst>
+              <a:ext uri="{FF2B5EF4-FFF2-40B4-BE49-F238E27FC236}">
+                <a16:creationId xmlns:a16="http://schemas.microsoft.com/office/drawing/2014/main" id="{97F0D2F0-D27B-EA3E-4C97-BCF8A751AC28}"/>
+              </a:ext>
+            </a:extLst>
+          </p:cNvPr>
+          <p:cNvSpPr txBox="1"/>
+          <p:nvPr/>
+        </p:nvSpPr>
+        <p:spPr>
+          <a:xfrm>
+            <a:off x="6676991" y="2402747"/>
+            <a:ext cx="4933817" cy="369332"/>
+          </a:xfrm>
+          <a:prstGeom prst="rect">
+            <a:avLst/>
+          </a:prstGeom>
+          <a:noFill/>
+        </p:spPr>
+        <p:txBody>
+          <a:bodyPr wrap="square" rtlCol="0">
+            <a:spAutoFit/>
+          </a:bodyPr>
+          <a:lstStyle/>
+          <a:p>
+            <a:r>
+              <a:rPr lang="en-US" b="1" dirty="0"/>
+              <a:t>Scenario:  			</a:t>
+            </a:r>
+          </a:p>
+        </p:txBody>
+      </p:sp>
+      <p:sp>
+        <p:nvSpPr>
+          <p:cNvPr id="8" name="Content Placeholder 2">
+            <a:extLst>
+              <a:ext uri="{FF2B5EF4-FFF2-40B4-BE49-F238E27FC236}">
+                <a16:creationId xmlns:a16="http://schemas.microsoft.com/office/drawing/2014/main" id="{C1013C81-6BB3-B8C1-76CF-AB318556C875}"/>
+              </a:ext>
+            </a:extLst>
+          </p:cNvPr>
+          <p:cNvSpPr txBox="1">
+            <a:spLocks/>
+          </p:cNvSpPr>
+          <p:nvPr/>
+        </p:nvSpPr>
+        <p:spPr>
+          <a:xfrm>
+            <a:off x="5898776" y="2982510"/>
+            <a:ext cx="5875227" cy="1103412"/>
+          </a:xfrm>
+          <a:prstGeom prst="rect">
+            <a:avLst/>
+          </a:prstGeom>
+        </p:spPr>
+        <p:txBody>
+          <a:bodyPr vert="horz" lIns="91440" tIns="45720" rIns="91440" bIns="45720" rtlCol="0" anchor="ctr">
+            <a:normAutofit/>
+          </a:bodyPr>
+          <a:lstStyle>
+            <a:lvl1pPr marL="306000" indent="-306000" algn="l" defTabSz="457200" rtl="0" eaLnBrk="1" latinLnBrk="0" hangingPunct="1">
+              <a:spcBef>
+                <a:spcPct val="20000"/>
+              </a:spcBef>
+              <a:spcAft>
+                <a:spcPts val="600"/>
+              </a:spcAft>
+              <a:buClr>
+                <a:schemeClr val="accent2"/>
+              </a:buClr>
+              <a:buSzPct val="92000"/>
+              <a:buFont typeface="Wingdings 2" panose="05020102010507070707" pitchFamily="18" charset="2"/>
+              <a:buChar char=""/>
+              <a:defRPr sz="1800" kern="1200">
+                <a:solidFill>
+                  <a:schemeClr val="tx2"/>
+                </a:solidFill>
+                <a:latin typeface="+mn-lt"/>
+                <a:ea typeface="+mn-ea"/>
+                <a:cs typeface="+mn-cs"/>
+              </a:defRPr>
+            </a:lvl1pPr>
+            <a:lvl2pPr marL="630000" indent="-306000" algn="l" defTabSz="457200" rtl="0" eaLnBrk="1" latinLnBrk="0" hangingPunct="1">
+              <a:spcBef>
+                <a:spcPct val="20000"/>
+              </a:spcBef>
+              <a:spcAft>
+                <a:spcPts val="600"/>
+              </a:spcAft>
+              <a:buClr>
+                <a:schemeClr val="accent2"/>
+              </a:buClr>
+              <a:buSzPct val="92000"/>
+              <a:buFont typeface="Wingdings 2" panose="05020102010507070707" pitchFamily="18" charset="2"/>
+              <a:buChar char=""/>
+              <a:defRPr sz="1600" kern="1200">
+                <a:solidFill>
+                  <a:schemeClr val="tx2"/>
+                </a:solidFill>
+                <a:latin typeface="+mn-lt"/>
+                <a:ea typeface="+mn-ea"/>
+                <a:cs typeface="+mn-cs"/>
+              </a:defRPr>
+            </a:lvl2pPr>
+            <a:lvl3pPr marL="900000" indent="-270000" algn="l" defTabSz="457200" rtl="0" eaLnBrk="1" latinLnBrk="0" hangingPunct="1">
+              <a:spcBef>
+                <a:spcPct val="20000"/>
+              </a:spcBef>
+              <a:spcAft>
+                <a:spcPts val="600"/>
+              </a:spcAft>
+              <a:buClr>
+                <a:schemeClr val="accent2"/>
+              </a:buClr>
+              <a:buSzPct val="92000"/>
+              <a:buFont typeface="Wingdings 2" panose="05020102010507070707" pitchFamily="18" charset="2"/>
+              <a:buChar char=""/>
+              <a:defRPr sz="1400" kern="1200">
+                <a:solidFill>
+                  <a:schemeClr val="tx2"/>
+                </a:solidFill>
+                <a:latin typeface="+mn-lt"/>
+                <a:ea typeface="+mn-ea"/>
+                <a:cs typeface="+mn-cs"/>
+              </a:defRPr>
+            </a:lvl3pPr>
+            <a:lvl4pPr marL="1242000" indent="-234000" algn="l" defTabSz="457200" rtl="0" eaLnBrk="1" latinLnBrk="0" hangingPunct="1">
+              <a:spcBef>
+                <a:spcPct val="20000"/>
+              </a:spcBef>
+              <a:spcAft>
+                <a:spcPts val="600"/>
+              </a:spcAft>
+              <a:buClr>
+                <a:schemeClr val="accent2"/>
+              </a:buClr>
+              <a:buSzPct val="92000"/>
+              <a:buFont typeface="Wingdings 2" panose="05020102010507070707" pitchFamily="18" charset="2"/>
+              <a:buChar char=""/>
+              <a:defRPr sz="1200" kern="1200">
+                <a:solidFill>
+                  <a:schemeClr val="tx2"/>
+                </a:solidFill>
+                <a:latin typeface="+mn-lt"/>
+                <a:ea typeface="+mn-ea"/>
+                <a:cs typeface="+mn-cs"/>
+              </a:defRPr>
+            </a:lvl4pPr>
+            <a:lvl5pPr marL="1602000" indent="-234000" algn="l" defTabSz="457200" rtl="0" eaLnBrk="1" latinLnBrk="0" hangingPunct="1">
+              <a:spcBef>
+                <a:spcPct val="20000"/>
+              </a:spcBef>
+              <a:spcAft>
+                <a:spcPts val="600"/>
+              </a:spcAft>
+              <a:buClr>
+                <a:schemeClr val="accent2"/>
+              </a:buClr>
+              <a:buSzPct val="92000"/>
+              <a:buFont typeface="Wingdings 2" panose="05020102010507070707" pitchFamily="18" charset="2"/>
+              <a:buChar char=""/>
+              <a:defRPr sz="1200" kern="1200">
+                <a:solidFill>
+                  <a:schemeClr val="tx2"/>
+                </a:solidFill>
+                <a:latin typeface="+mn-lt"/>
+                <a:ea typeface="+mn-ea"/>
+                <a:cs typeface="+mn-cs"/>
+              </a:defRPr>
+            </a:lvl5pPr>
+            <a:lvl6pPr marL="1900000" indent="-228600" algn="l" defTabSz="457200" rtl="0" eaLnBrk="1" latinLnBrk="0" hangingPunct="1">
+              <a:spcBef>
+                <a:spcPct val="20000"/>
+              </a:spcBef>
+              <a:spcAft>
+                <a:spcPts val="600"/>
+              </a:spcAft>
+              <a:buClr>
+                <a:schemeClr val="accent2"/>
+              </a:buClr>
+              <a:buSzPct val="92000"/>
+              <a:buFont typeface="Wingdings 2" panose="05020102010507070707" pitchFamily="18" charset="2"/>
+              <a:buChar char=""/>
+              <a:defRPr sz="1200" kern="1200">
+                <a:solidFill>
+                  <a:schemeClr val="tx2"/>
+                </a:solidFill>
+                <a:latin typeface="+mn-lt"/>
+                <a:ea typeface="+mn-ea"/>
+                <a:cs typeface="+mn-cs"/>
+              </a:defRPr>
+            </a:lvl6pPr>
+            <a:lvl7pPr marL="2200000" indent="-228600" algn="l" defTabSz="457200" rtl="0" eaLnBrk="1" latinLnBrk="0" hangingPunct="1">
+              <a:spcBef>
+                <a:spcPct val="20000"/>
+              </a:spcBef>
+              <a:spcAft>
+                <a:spcPts val="600"/>
+              </a:spcAft>
+              <a:buClr>
+                <a:schemeClr val="accent2"/>
+              </a:buClr>
+              <a:buSzPct val="92000"/>
+              <a:buFont typeface="Wingdings 2" panose="05020102010507070707" pitchFamily="18" charset="2"/>
+              <a:buChar char=""/>
+              <a:defRPr sz="1200" kern="1200">
+                <a:solidFill>
+                  <a:schemeClr val="tx2"/>
+                </a:solidFill>
+                <a:latin typeface="+mn-lt"/>
+                <a:ea typeface="+mn-ea"/>
+                <a:cs typeface="+mn-cs"/>
+              </a:defRPr>
+            </a:lvl7pPr>
+            <a:lvl8pPr marL="2500000" indent="-228600" algn="l" defTabSz="457200" rtl="0" eaLnBrk="1" latinLnBrk="0" hangingPunct="1">
+              <a:spcBef>
+                <a:spcPct val="20000"/>
+              </a:spcBef>
+              <a:spcAft>
+                <a:spcPts val="600"/>
+              </a:spcAft>
+              <a:buClr>
+                <a:schemeClr val="accent2"/>
+              </a:buClr>
+              <a:buSzPct val="92000"/>
+              <a:buFont typeface="Wingdings 2" panose="05020102010507070707" pitchFamily="18" charset="2"/>
+              <a:buChar char=""/>
+              <a:defRPr sz="1200" kern="1200">
+                <a:solidFill>
+                  <a:schemeClr val="tx2"/>
+                </a:solidFill>
+                <a:latin typeface="+mn-lt"/>
+                <a:ea typeface="+mn-ea"/>
+                <a:cs typeface="+mn-cs"/>
+              </a:defRPr>
+            </a:lvl8pPr>
+            <a:lvl9pPr marL="2800000" indent="-228600" algn="l" defTabSz="457200" rtl="0" eaLnBrk="1" latinLnBrk="0" hangingPunct="1">
+              <a:spcBef>
+                <a:spcPct val="20000"/>
+              </a:spcBef>
+              <a:spcAft>
+                <a:spcPts val="600"/>
+              </a:spcAft>
+              <a:buClr>
+                <a:schemeClr val="accent2"/>
+              </a:buClr>
+              <a:buSzPct val="92000"/>
+              <a:buFont typeface="Wingdings 2" panose="05020102010507070707" pitchFamily="18" charset="2"/>
+              <a:buChar char=""/>
+              <a:defRPr sz="1200" kern="1200">
+                <a:solidFill>
+                  <a:schemeClr val="tx2"/>
+                </a:solidFill>
+                <a:latin typeface="+mn-lt"/>
+                <a:ea typeface="+mn-ea"/>
+                <a:cs typeface="+mn-cs"/>
+              </a:defRPr>
+            </a:lvl9pPr>
+          </a:lstStyle>
+          <a:p>
+            <a:r>
+              <a:rPr lang="en-US" dirty="0"/>
+              <a:t>You will need to make edits to the Welcome component:</a:t>
+            </a:r>
+          </a:p>
+          <a:p>
+            <a:pPr lvl="1"/>
+            <a:r>
+              <a:rPr lang="en-US" dirty="0"/>
+              <a:t>Utilize </a:t>
+            </a:r>
+            <a:r>
+              <a:rPr lang="en-US" dirty="0" err="1"/>
+              <a:t>useEffect</a:t>
+            </a:r>
+            <a:r>
+              <a:rPr lang="en-US" dirty="0"/>
+              <a:t> to display a joke under the text ‘Welcome’ </a:t>
+            </a:r>
+          </a:p>
+        </p:txBody>
+      </p:sp>
+    </p:spTree>
+    <p:extLst>
+      <p:ext uri="{BB962C8B-B14F-4D97-AF65-F5344CB8AC3E}">
+        <p14:creationId xmlns:p14="http://schemas.microsoft.com/office/powerpoint/2010/main" val="2618546052"/>
+      </p:ext>
+    </p:extLst>
+  </p:cSld>
+  <p:clrMapOvr>
+    <a:masterClrMapping/>
+  </p:clrMapOvr>
+</p:sld>
+</file>
+
 <file path=ppt/slides/slide4.xml><?xml version="1.0" encoding="utf-8"?>
 <p:sld xmlns:a="http://schemas.openxmlformats.org/drawingml/2006/main" xmlns:r="http://schemas.openxmlformats.org/officeDocument/2006/relationships" xmlns:p="http://schemas.openxmlformats.org/presentationml/2006/main">
   <p:cSld>
@@ -14695,6 +15895,1129 @@
     <p:extLst>
       <p:ext uri="{BB962C8B-B14F-4D97-AF65-F5344CB8AC3E}">
         <p14:creationId xmlns:p14="http://schemas.microsoft.com/office/powerpoint/2010/main" val="864873647"/>
+      </p:ext>
+    </p:extLst>
+  </p:cSld>
+  <p:clrMapOvr>
+    <a:masterClrMapping/>
+  </p:clrMapOvr>
+</p:sld>
+</file>
+
+<file path=ppt/slides/slide40.xml><?xml version="1.0" encoding="utf-8"?>
+<p:sld xmlns:a="http://schemas.openxmlformats.org/drawingml/2006/main" xmlns:r="http://schemas.openxmlformats.org/officeDocument/2006/relationships" xmlns:p="http://schemas.openxmlformats.org/presentationml/2006/main">
+  <p:cSld>
+    <p:spTree>
+      <p:nvGrpSpPr>
+        <p:cNvPr id="1" name=""/>
+        <p:cNvGrpSpPr/>
+        <p:nvPr/>
+      </p:nvGrpSpPr>
+      <p:grpSpPr>
+        <a:xfrm>
+          <a:off x="0" y="0"/>
+          <a:ext cx="0" cy="0"/>
+          <a:chOff x="0" y="0"/>
+          <a:chExt cx="0" cy="0"/>
+        </a:xfrm>
+      </p:grpSpPr>
+      <p:sp>
+        <p:nvSpPr>
+          <p:cNvPr id="2" name="Title 1">
+            <a:extLst>
+              <a:ext uri="{FF2B5EF4-FFF2-40B4-BE49-F238E27FC236}">
+                <a16:creationId xmlns:a16="http://schemas.microsoft.com/office/drawing/2014/main" id="{2B163E94-7C05-46D5-B6AF-0F7A622839CE}"/>
+              </a:ext>
+            </a:extLst>
+          </p:cNvPr>
+          <p:cNvSpPr>
+            <a:spLocks noGrp="1"/>
+          </p:cNvSpPr>
+          <p:nvPr>
+            <p:ph type="title"/>
+          </p:nvPr>
+        </p:nvSpPr>
+        <p:spPr/>
+        <p:txBody>
+          <a:bodyPr/>
+          <a:lstStyle/>
+          <a:p>
+            <a:r>
+              <a:rPr lang="en-US" dirty="0"/>
+              <a:t>Context</a:t>
+            </a:r>
+          </a:p>
+        </p:txBody>
+      </p:sp>
+      <p:sp>
+        <p:nvSpPr>
+          <p:cNvPr id="3" name="Content Placeholder 2">
+            <a:extLst>
+              <a:ext uri="{FF2B5EF4-FFF2-40B4-BE49-F238E27FC236}">
+                <a16:creationId xmlns:a16="http://schemas.microsoft.com/office/drawing/2014/main" id="{3571AB53-8347-A7A3-3122-EA578667591F}"/>
+              </a:ext>
+            </a:extLst>
+          </p:cNvPr>
+          <p:cNvSpPr>
+            <a:spLocks noGrp="1"/>
+          </p:cNvSpPr>
+          <p:nvPr>
+            <p:ph idx="1"/>
+          </p:nvPr>
+        </p:nvSpPr>
+        <p:spPr>
+          <a:xfrm>
+            <a:off x="581193" y="2180496"/>
+            <a:ext cx="5181654" cy="3678303"/>
+          </a:xfrm>
+        </p:spPr>
+        <p:txBody>
+          <a:bodyPr/>
+          <a:lstStyle/>
+          <a:p>
+            <a:r>
+              <a:rPr lang="en-US" dirty="0"/>
+              <a:t>The </a:t>
+            </a:r>
+            <a:r>
+              <a:rPr lang="en-US" dirty="0" err="1"/>
+              <a:t>useContext</a:t>
+            </a:r>
+            <a:r>
+              <a:rPr lang="en-US" dirty="0"/>
+              <a:t> hook allows a component to access the current value of a context without having to receive it through props</a:t>
+            </a:r>
+          </a:p>
+          <a:p>
+            <a:pPr lvl="1"/>
+            <a:r>
+              <a:rPr lang="en-US" dirty="0"/>
+              <a:t>This avoids ‘prop-drilling’ </a:t>
+            </a:r>
+          </a:p>
+          <a:p>
+            <a:r>
+              <a:rPr lang="en-US" dirty="0"/>
+              <a:t>The value of a context may be any JavaScript datatype</a:t>
+            </a:r>
+          </a:p>
+          <a:p>
+            <a:r>
+              <a:rPr lang="en-US" dirty="0"/>
+              <a:t>This is a separate file from your components </a:t>
+            </a:r>
+          </a:p>
+        </p:txBody>
+      </p:sp>
+      <p:pic>
+        <p:nvPicPr>
+          <p:cNvPr id="5" name="Picture 4">
+            <a:extLst>
+              <a:ext uri="{FF2B5EF4-FFF2-40B4-BE49-F238E27FC236}">
+                <a16:creationId xmlns:a16="http://schemas.microsoft.com/office/drawing/2014/main" id="{6ED396A3-C691-6CD3-3422-FBB4F5672035}"/>
+              </a:ext>
+            </a:extLst>
+          </p:cNvPr>
+          <p:cNvPicPr>
+            <a:picLocks noChangeAspect="1"/>
+          </p:cNvPicPr>
+          <p:nvPr/>
+        </p:nvPicPr>
+        <p:blipFill>
+          <a:blip r:embed="rId2"/>
+          <a:stretch>
+            <a:fillRect/>
+          </a:stretch>
+        </p:blipFill>
+        <p:spPr>
+          <a:xfrm>
+            <a:off x="6893615" y="3851639"/>
+            <a:ext cx="3848637" cy="638264"/>
+          </a:xfrm>
+          <a:prstGeom prst="rect">
+            <a:avLst/>
+          </a:prstGeom>
+        </p:spPr>
+      </p:pic>
+      <p:sp>
+        <p:nvSpPr>
+          <p:cNvPr id="6" name="TextBox 5">
+            <a:extLst>
+              <a:ext uri="{FF2B5EF4-FFF2-40B4-BE49-F238E27FC236}">
+                <a16:creationId xmlns:a16="http://schemas.microsoft.com/office/drawing/2014/main" id="{29FBEFC0-A802-44AB-2F39-A71E0BE43A40}"/>
+              </a:ext>
+            </a:extLst>
+          </p:cNvPr>
+          <p:cNvSpPr txBox="1"/>
+          <p:nvPr/>
+        </p:nvSpPr>
+        <p:spPr>
+          <a:xfrm>
+            <a:off x="6893615" y="3429000"/>
+            <a:ext cx="1814920" cy="369332"/>
+          </a:xfrm>
+          <a:prstGeom prst="rect">
+            <a:avLst/>
+          </a:prstGeom>
+          <a:noFill/>
+        </p:spPr>
+        <p:txBody>
+          <a:bodyPr wrap="none" rtlCol="0">
+            <a:spAutoFit/>
+          </a:bodyPr>
+          <a:lstStyle/>
+          <a:p>
+            <a:r>
+              <a:rPr lang="en-US" dirty="0"/>
+              <a:t>ThemeContext.js</a:t>
+            </a:r>
+          </a:p>
+        </p:txBody>
+      </p:sp>
+    </p:spTree>
+    <p:extLst>
+      <p:ext uri="{BB962C8B-B14F-4D97-AF65-F5344CB8AC3E}">
+        <p14:creationId xmlns:p14="http://schemas.microsoft.com/office/powerpoint/2010/main" val="2858158941"/>
+      </p:ext>
+    </p:extLst>
+  </p:cSld>
+  <p:clrMapOvr>
+    <a:masterClrMapping/>
+  </p:clrMapOvr>
+</p:sld>
+</file>
+
+<file path=ppt/slides/slide41.xml><?xml version="1.0" encoding="utf-8"?>
+<p:sld xmlns:a="http://schemas.openxmlformats.org/drawingml/2006/main" xmlns:r="http://schemas.openxmlformats.org/officeDocument/2006/relationships" xmlns:p="http://schemas.openxmlformats.org/presentationml/2006/main">
+  <p:cSld>
+    <p:spTree>
+      <p:nvGrpSpPr>
+        <p:cNvPr id="1" name="">
+          <a:extLst>
+            <a:ext uri="{FF2B5EF4-FFF2-40B4-BE49-F238E27FC236}">
+              <a16:creationId xmlns:a16="http://schemas.microsoft.com/office/drawing/2014/main" id="{10ABC3E1-1D5F-BDFB-779B-B37C94631D5C}"/>
+            </a:ext>
+          </a:extLst>
+        </p:cNvPr>
+        <p:cNvGrpSpPr/>
+        <p:nvPr/>
+      </p:nvGrpSpPr>
+      <p:grpSpPr>
+        <a:xfrm>
+          <a:off x="0" y="0"/>
+          <a:ext cx="0" cy="0"/>
+          <a:chOff x="0" y="0"/>
+          <a:chExt cx="0" cy="0"/>
+        </a:xfrm>
+      </p:grpSpPr>
+      <p:sp>
+        <p:nvSpPr>
+          <p:cNvPr id="2" name="Title 1">
+            <a:extLst>
+              <a:ext uri="{FF2B5EF4-FFF2-40B4-BE49-F238E27FC236}">
+                <a16:creationId xmlns:a16="http://schemas.microsoft.com/office/drawing/2014/main" id="{1F599BA8-A81B-1079-5762-1FE18F6BBBAB}"/>
+              </a:ext>
+            </a:extLst>
+          </p:cNvPr>
+          <p:cNvSpPr>
+            <a:spLocks noGrp="1"/>
+          </p:cNvSpPr>
+          <p:nvPr>
+            <p:ph type="title"/>
+          </p:nvPr>
+        </p:nvSpPr>
+        <p:spPr/>
+        <p:txBody>
+          <a:bodyPr/>
+          <a:lstStyle/>
+          <a:p>
+            <a:r>
+              <a:rPr lang="en-US" dirty="0"/>
+              <a:t>Publishing Context</a:t>
+            </a:r>
+          </a:p>
+        </p:txBody>
+      </p:sp>
+      <p:sp>
+        <p:nvSpPr>
+          <p:cNvPr id="3" name="Content Placeholder 2">
+            <a:extLst>
+              <a:ext uri="{FF2B5EF4-FFF2-40B4-BE49-F238E27FC236}">
+                <a16:creationId xmlns:a16="http://schemas.microsoft.com/office/drawing/2014/main" id="{A4C1065F-C066-ACC8-1CEC-C083442A0FC6}"/>
+              </a:ext>
+            </a:extLst>
+          </p:cNvPr>
+          <p:cNvSpPr>
+            <a:spLocks noGrp="1"/>
+          </p:cNvSpPr>
+          <p:nvPr>
+            <p:ph idx="1"/>
+          </p:nvPr>
+        </p:nvSpPr>
+        <p:spPr>
+          <a:xfrm>
+            <a:off x="581193" y="2180496"/>
+            <a:ext cx="5181654" cy="3678303"/>
+          </a:xfrm>
+        </p:spPr>
+        <p:txBody>
+          <a:bodyPr/>
+          <a:lstStyle/>
+          <a:p>
+            <a:r>
+              <a:rPr lang="en-US" dirty="0"/>
+              <a:t>We apply our context as a provider</a:t>
+            </a:r>
+          </a:p>
+          <a:p>
+            <a:r>
+              <a:rPr lang="en-US" dirty="0"/>
+              <a:t>The mandatory ‘value’ attribute will pass our context data down to any subscribing components</a:t>
+            </a:r>
+          </a:p>
+          <a:p>
+            <a:endParaRPr lang="en-US" dirty="0"/>
+          </a:p>
+        </p:txBody>
+      </p:sp>
+      <p:sp>
+        <p:nvSpPr>
+          <p:cNvPr id="6" name="TextBox 5">
+            <a:extLst>
+              <a:ext uri="{FF2B5EF4-FFF2-40B4-BE49-F238E27FC236}">
+                <a16:creationId xmlns:a16="http://schemas.microsoft.com/office/drawing/2014/main" id="{8B0BEBD2-9339-1981-DFCE-01DF51BD1049}"/>
+              </a:ext>
+            </a:extLst>
+          </p:cNvPr>
+          <p:cNvSpPr txBox="1"/>
+          <p:nvPr/>
+        </p:nvSpPr>
+        <p:spPr>
+          <a:xfrm>
+            <a:off x="5560456" y="1995830"/>
+            <a:ext cx="868699" cy="369332"/>
+          </a:xfrm>
+          <a:prstGeom prst="rect">
+            <a:avLst/>
+          </a:prstGeom>
+          <a:noFill/>
+        </p:spPr>
+        <p:txBody>
+          <a:bodyPr wrap="none" rtlCol="0">
+            <a:spAutoFit/>
+          </a:bodyPr>
+          <a:lstStyle/>
+          <a:p>
+            <a:r>
+              <a:rPr lang="en-US" dirty="0" err="1"/>
+              <a:t>App.jsx</a:t>
+            </a:r>
+            <a:endParaRPr lang="en-US" dirty="0"/>
+          </a:p>
+        </p:txBody>
+      </p:sp>
+      <p:pic>
+        <p:nvPicPr>
+          <p:cNvPr id="8" name="Picture 7">
+            <a:extLst>
+              <a:ext uri="{FF2B5EF4-FFF2-40B4-BE49-F238E27FC236}">
+                <a16:creationId xmlns:a16="http://schemas.microsoft.com/office/drawing/2014/main" id="{F0EDB72C-2416-6F7C-3808-B33E0A73EA75}"/>
+              </a:ext>
+            </a:extLst>
+          </p:cNvPr>
+          <p:cNvPicPr>
+            <a:picLocks noChangeAspect="1"/>
+          </p:cNvPicPr>
+          <p:nvPr/>
+        </p:nvPicPr>
+        <p:blipFill>
+          <a:blip r:embed="rId2"/>
+          <a:stretch>
+            <a:fillRect/>
+          </a:stretch>
+        </p:blipFill>
+        <p:spPr>
+          <a:xfrm>
+            <a:off x="6531935" y="2017669"/>
+            <a:ext cx="4167787" cy="4590074"/>
+          </a:xfrm>
+          <a:prstGeom prst="rect">
+            <a:avLst/>
+          </a:prstGeom>
+        </p:spPr>
+      </p:pic>
+    </p:spTree>
+    <p:extLst>
+      <p:ext uri="{BB962C8B-B14F-4D97-AF65-F5344CB8AC3E}">
+        <p14:creationId xmlns:p14="http://schemas.microsoft.com/office/powerpoint/2010/main" val="3539439327"/>
+      </p:ext>
+    </p:extLst>
+  </p:cSld>
+  <p:clrMapOvr>
+    <a:masterClrMapping/>
+  </p:clrMapOvr>
+</p:sld>
+</file>
+
+<file path=ppt/slides/slide42.xml><?xml version="1.0" encoding="utf-8"?>
+<p:sld xmlns:a="http://schemas.openxmlformats.org/drawingml/2006/main" xmlns:r="http://schemas.openxmlformats.org/officeDocument/2006/relationships" xmlns:p="http://schemas.openxmlformats.org/presentationml/2006/main">
+  <p:cSld>
+    <p:spTree>
+      <p:nvGrpSpPr>
+        <p:cNvPr id="1" name=""/>
+        <p:cNvGrpSpPr/>
+        <p:nvPr/>
+      </p:nvGrpSpPr>
+      <p:grpSpPr>
+        <a:xfrm>
+          <a:off x="0" y="0"/>
+          <a:ext cx="0" cy="0"/>
+          <a:chOff x="0" y="0"/>
+          <a:chExt cx="0" cy="0"/>
+        </a:xfrm>
+      </p:grpSpPr>
+      <p:sp>
+        <p:nvSpPr>
+          <p:cNvPr id="2" name="Title 1">
+            <a:extLst>
+              <a:ext uri="{FF2B5EF4-FFF2-40B4-BE49-F238E27FC236}">
+                <a16:creationId xmlns:a16="http://schemas.microsoft.com/office/drawing/2014/main" id="{F7697DBA-223E-2B1E-CA94-A65EFE0E88B0}"/>
+              </a:ext>
+            </a:extLst>
+          </p:cNvPr>
+          <p:cNvSpPr>
+            <a:spLocks noGrp="1"/>
+          </p:cNvSpPr>
+          <p:nvPr>
+            <p:ph type="title"/>
+          </p:nvPr>
+        </p:nvSpPr>
+        <p:spPr/>
+        <p:txBody>
+          <a:bodyPr/>
+          <a:lstStyle/>
+          <a:p>
+            <a:r>
+              <a:rPr lang="en-US" dirty="0"/>
+              <a:t>Subscribing To Context</a:t>
+            </a:r>
+          </a:p>
+        </p:txBody>
+      </p:sp>
+      <p:sp>
+        <p:nvSpPr>
+          <p:cNvPr id="3" name="Content Placeholder 2">
+            <a:extLst>
+              <a:ext uri="{FF2B5EF4-FFF2-40B4-BE49-F238E27FC236}">
+                <a16:creationId xmlns:a16="http://schemas.microsoft.com/office/drawing/2014/main" id="{2FC841B8-6E52-11A3-844C-AD6814D71978}"/>
+              </a:ext>
+            </a:extLst>
+          </p:cNvPr>
+          <p:cNvSpPr>
+            <a:spLocks noGrp="1"/>
+          </p:cNvSpPr>
+          <p:nvPr>
+            <p:ph idx="1"/>
+          </p:nvPr>
+        </p:nvSpPr>
+        <p:spPr>
+          <a:xfrm>
+            <a:off x="581193" y="2180496"/>
+            <a:ext cx="4490538" cy="3678303"/>
+          </a:xfrm>
+        </p:spPr>
+        <p:txBody>
+          <a:bodyPr/>
+          <a:lstStyle/>
+          <a:p>
+            <a:r>
+              <a:rPr lang="en-US" dirty="0"/>
+              <a:t>We import </a:t>
+            </a:r>
+            <a:r>
+              <a:rPr lang="en-US" dirty="0" err="1"/>
+              <a:t>useContext</a:t>
+            </a:r>
+            <a:r>
+              <a:rPr lang="en-US" dirty="0"/>
+              <a:t> along with our context ‘.</a:t>
+            </a:r>
+            <a:r>
+              <a:rPr lang="en-US" dirty="0" err="1"/>
+              <a:t>js’</a:t>
+            </a:r>
+            <a:r>
+              <a:rPr lang="en-US" dirty="0"/>
+              <a:t> file</a:t>
+            </a:r>
+          </a:p>
+          <a:p>
+            <a:r>
+              <a:rPr lang="en-US" dirty="0"/>
+              <a:t>We call </a:t>
+            </a:r>
+            <a:r>
+              <a:rPr lang="en-US" dirty="0" err="1"/>
+              <a:t>useContext</a:t>
+            </a:r>
+            <a:r>
+              <a:rPr lang="en-US" dirty="0"/>
+              <a:t> using our imported </a:t>
+            </a:r>
+            <a:r>
+              <a:rPr lang="en-US" dirty="0" err="1"/>
+              <a:t>ThemeContext</a:t>
+            </a:r>
+            <a:r>
+              <a:rPr lang="en-US" dirty="0"/>
+              <a:t> reference to get our theme</a:t>
+            </a:r>
+          </a:p>
+          <a:p>
+            <a:r>
+              <a:rPr lang="en-US" dirty="0"/>
+              <a:t>We could use that data in many ways, such as dynamically building class lists on components</a:t>
+            </a:r>
+          </a:p>
+        </p:txBody>
+      </p:sp>
+      <p:pic>
+        <p:nvPicPr>
+          <p:cNvPr id="5" name="Picture 4">
+            <a:extLst>
+              <a:ext uri="{FF2B5EF4-FFF2-40B4-BE49-F238E27FC236}">
+                <a16:creationId xmlns:a16="http://schemas.microsoft.com/office/drawing/2014/main" id="{BC39CB6B-4571-19DC-C0F2-B5E0B6CB5A78}"/>
+              </a:ext>
+            </a:extLst>
+          </p:cNvPr>
+          <p:cNvPicPr>
+            <a:picLocks noChangeAspect="1"/>
+          </p:cNvPicPr>
+          <p:nvPr/>
+        </p:nvPicPr>
+        <p:blipFill>
+          <a:blip r:embed="rId2"/>
+          <a:stretch>
+            <a:fillRect/>
+          </a:stretch>
+        </p:blipFill>
+        <p:spPr>
+          <a:xfrm>
+            <a:off x="5377435" y="2180496"/>
+            <a:ext cx="6233372" cy="645945"/>
+          </a:xfrm>
+          <a:prstGeom prst="rect">
+            <a:avLst/>
+          </a:prstGeom>
+        </p:spPr>
+      </p:pic>
+      <p:pic>
+        <p:nvPicPr>
+          <p:cNvPr id="7" name="Picture 6">
+            <a:extLst>
+              <a:ext uri="{FF2B5EF4-FFF2-40B4-BE49-F238E27FC236}">
+                <a16:creationId xmlns:a16="http://schemas.microsoft.com/office/drawing/2014/main" id="{3AC1E504-E9E2-2316-940D-E6FD87702731}"/>
+              </a:ext>
+            </a:extLst>
+          </p:cNvPr>
+          <p:cNvPicPr>
+            <a:picLocks noChangeAspect="1"/>
+          </p:cNvPicPr>
+          <p:nvPr/>
+        </p:nvPicPr>
+        <p:blipFill>
+          <a:blip r:embed="rId3"/>
+          <a:stretch>
+            <a:fillRect/>
+          </a:stretch>
+        </p:blipFill>
+        <p:spPr>
+          <a:xfrm>
+            <a:off x="5131326" y="3195605"/>
+            <a:ext cx="6725589" cy="466790"/>
+          </a:xfrm>
+          <a:prstGeom prst="rect">
+            <a:avLst/>
+          </a:prstGeom>
+        </p:spPr>
+      </p:pic>
+      <p:pic>
+        <p:nvPicPr>
+          <p:cNvPr id="9" name="Picture 8">
+            <a:extLst>
+              <a:ext uri="{FF2B5EF4-FFF2-40B4-BE49-F238E27FC236}">
+                <a16:creationId xmlns:a16="http://schemas.microsoft.com/office/drawing/2014/main" id="{05EF1DA1-A8F4-3620-D427-02E29445DFCB}"/>
+              </a:ext>
+            </a:extLst>
+          </p:cNvPr>
+          <p:cNvPicPr>
+            <a:picLocks noChangeAspect="1"/>
+          </p:cNvPicPr>
+          <p:nvPr/>
+        </p:nvPicPr>
+        <p:blipFill>
+          <a:blip r:embed="rId4"/>
+          <a:stretch>
+            <a:fillRect/>
+          </a:stretch>
+        </p:blipFill>
+        <p:spPr>
+          <a:xfrm>
+            <a:off x="6340814" y="4019647"/>
+            <a:ext cx="4124901" cy="1667108"/>
+          </a:xfrm>
+          <a:prstGeom prst="rect">
+            <a:avLst/>
+          </a:prstGeom>
+        </p:spPr>
+      </p:pic>
+    </p:spTree>
+    <p:extLst>
+      <p:ext uri="{BB962C8B-B14F-4D97-AF65-F5344CB8AC3E}">
+        <p14:creationId xmlns:p14="http://schemas.microsoft.com/office/powerpoint/2010/main" val="2987655003"/>
+      </p:ext>
+    </p:extLst>
+  </p:cSld>
+  <p:clrMapOvr>
+    <a:masterClrMapping/>
+  </p:clrMapOvr>
+</p:sld>
+</file>
+
+<file path=ppt/slides/slide43.xml><?xml version="1.0" encoding="utf-8"?>
+<p:sld xmlns:a="http://schemas.openxmlformats.org/drawingml/2006/main" xmlns:r="http://schemas.openxmlformats.org/officeDocument/2006/relationships" xmlns:p="http://schemas.openxmlformats.org/presentationml/2006/main">
+  <p:cSld>
+    <p:spTree>
+      <p:nvGrpSpPr>
+        <p:cNvPr id="1" name="">
+          <a:extLst>
+            <a:ext uri="{FF2B5EF4-FFF2-40B4-BE49-F238E27FC236}">
+              <a16:creationId xmlns:a16="http://schemas.microsoft.com/office/drawing/2014/main" id="{9CFEB54B-0B04-6A31-FFEB-138BA02C8E7B}"/>
+            </a:ext>
+          </a:extLst>
+        </p:cNvPr>
+        <p:cNvGrpSpPr/>
+        <p:nvPr/>
+      </p:nvGrpSpPr>
+      <p:grpSpPr>
+        <a:xfrm>
+          <a:off x="0" y="0"/>
+          <a:ext cx="0" cy="0"/>
+          <a:chOff x="0" y="0"/>
+          <a:chExt cx="0" cy="0"/>
+        </a:xfrm>
+      </p:grpSpPr>
+      <p:sp>
+        <p:nvSpPr>
+          <p:cNvPr id="2" name="Title 1">
+            <a:extLst>
+              <a:ext uri="{FF2B5EF4-FFF2-40B4-BE49-F238E27FC236}">
+                <a16:creationId xmlns:a16="http://schemas.microsoft.com/office/drawing/2014/main" id="{63280B92-43A0-71C9-E4F1-F99B9CCF1D59}"/>
+              </a:ext>
+            </a:extLst>
+          </p:cNvPr>
+          <p:cNvSpPr>
+            <a:spLocks noGrp="1"/>
+          </p:cNvSpPr>
+          <p:nvPr>
+            <p:ph type="title"/>
+          </p:nvPr>
+        </p:nvSpPr>
+        <p:spPr/>
+        <p:txBody>
+          <a:bodyPr/>
+          <a:lstStyle/>
+          <a:p>
+            <a:r>
+              <a:rPr lang="en-US" dirty="0"/>
+              <a:t>Challenge – Implement Dark Mode </a:t>
+            </a:r>
+          </a:p>
+        </p:txBody>
+      </p:sp>
+      <p:sp>
+        <p:nvSpPr>
+          <p:cNvPr id="3" name="Content Placeholder 2">
+            <a:extLst>
+              <a:ext uri="{FF2B5EF4-FFF2-40B4-BE49-F238E27FC236}">
+                <a16:creationId xmlns:a16="http://schemas.microsoft.com/office/drawing/2014/main" id="{47480F05-7243-C409-3024-BECC96F12C75}"/>
+              </a:ext>
+            </a:extLst>
+          </p:cNvPr>
+          <p:cNvSpPr>
+            <a:spLocks noGrp="1"/>
+          </p:cNvSpPr>
+          <p:nvPr>
+            <p:ph idx="1"/>
+          </p:nvPr>
+        </p:nvSpPr>
+        <p:spPr>
+          <a:xfrm>
+            <a:off x="581192" y="1963269"/>
+            <a:ext cx="5317584" cy="1681246"/>
+          </a:xfrm>
+        </p:spPr>
+        <p:txBody>
+          <a:bodyPr/>
+          <a:lstStyle/>
+          <a:p>
+            <a:r>
+              <a:rPr lang="en-US" dirty="0"/>
+              <a:t>Implement a </a:t>
+            </a:r>
+            <a:r>
+              <a:rPr lang="en-US" dirty="0" err="1"/>
+              <a:t>darkmode</a:t>
+            </a:r>
+            <a:r>
+              <a:rPr lang="en-US" dirty="0"/>
+              <a:t> feature using </a:t>
+            </a:r>
+            <a:r>
+              <a:rPr lang="en-US" dirty="0" err="1"/>
+              <a:t>useContext</a:t>
+            </a:r>
+            <a:endParaRPr lang="en-US" dirty="0"/>
+          </a:p>
+        </p:txBody>
+      </p:sp>
+      <p:sp>
+        <p:nvSpPr>
+          <p:cNvPr id="6" name="TextBox 5">
+            <a:extLst>
+              <a:ext uri="{FF2B5EF4-FFF2-40B4-BE49-F238E27FC236}">
+                <a16:creationId xmlns:a16="http://schemas.microsoft.com/office/drawing/2014/main" id="{3A4BDF25-4283-E54F-6FDA-60057A6BB539}"/>
+              </a:ext>
+            </a:extLst>
+          </p:cNvPr>
+          <p:cNvSpPr txBox="1"/>
+          <p:nvPr/>
+        </p:nvSpPr>
+        <p:spPr>
+          <a:xfrm>
+            <a:off x="1228165" y="1890091"/>
+            <a:ext cx="756938" cy="369332"/>
+          </a:xfrm>
+          <a:prstGeom prst="rect">
+            <a:avLst/>
+          </a:prstGeom>
+          <a:noFill/>
+        </p:spPr>
+        <p:txBody>
+          <a:bodyPr wrap="none" rtlCol="0">
+            <a:spAutoFit/>
+          </a:bodyPr>
+          <a:lstStyle/>
+          <a:p>
+            <a:r>
+              <a:rPr lang="en-US" b="1" dirty="0"/>
+              <a:t>Goal:</a:t>
+            </a:r>
+          </a:p>
+        </p:txBody>
+      </p:sp>
+      <p:sp>
+        <p:nvSpPr>
+          <p:cNvPr id="7" name="TextBox 6">
+            <a:extLst>
+              <a:ext uri="{FF2B5EF4-FFF2-40B4-BE49-F238E27FC236}">
+                <a16:creationId xmlns:a16="http://schemas.microsoft.com/office/drawing/2014/main" id="{4D595A56-F9AD-400C-9999-AE124E65AED3}"/>
+              </a:ext>
+            </a:extLst>
+          </p:cNvPr>
+          <p:cNvSpPr txBox="1"/>
+          <p:nvPr/>
+        </p:nvSpPr>
+        <p:spPr>
+          <a:xfrm>
+            <a:off x="6676991" y="1890091"/>
+            <a:ext cx="4933817" cy="369332"/>
+          </a:xfrm>
+          <a:prstGeom prst="rect">
+            <a:avLst/>
+          </a:prstGeom>
+          <a:noFill/>
+        </p:spPr>
+        <p:txBody>
+          <a:bodyPr wrap="square" rtlCol="0">
+            <a:spAutoFit/>
+          </a:bodyPr>
+          <a:lstStyle/>
+          <a:p>
+            <a:r>
+              <a:rPr lang="en-US" b="1" dirty="0"/>
+              <a:t>Scenario:  			</a:t>
+            </a:r>
+          </a:p>
+        </p:txBody>
+      </p:sp>
+      <p:sp>
+        <p:nvSpPr>
+          <p:cNvPr id="8" name="Content Placeholder 2">
+            <a:extLst>
+              <a:ext uri="{FF2B5EF4-FFF2-40B4-BE49-F238E27FC236}">
+                <a16:creationId xmlns:a16="http://schemas.microsoft.com/office/drawing/2014/main" id="{D5A1BDEE-BA0A-757B-724F-4ADED0862BFD}"/>
+              </a:ext>
+            </a:extLst>
+          </p:cNvPr>
+          <p:cNvSpPr txBox="1">
+            <a:spLocks/>
+          </p:cNvSpPr>
+          <p:nvPr/>
+        </p:nvSpPr>
+        <p:spPr>
+          <a:xfrm>
+            <a:off x="5898776" y="1709549"/>
+            <a:ext cx="5875227" cy="3678865"/>
+          </a:xfrm>
+          <a:prstGeom prst="rect">
+            <a:avLst/>
+          </a:prstGeom>
+        </p:spPr>
+        <p:txBody>
+          <a:bodyPr vert="horz" lIns="91440" tIns="45720" rIns="91440" bIns="45720" rtlCol="0" anchor="ctr">
+            <a:normAutofit/>
+          </a:bodyPr>
+          <a:lstStyle>
+            <a:lvl1pPr marL="306000" indent="-306000" algn="l" defTabSz="457200" rtl="0" eaLnBrk="1" latinLnBrk="0" hangingPunct="1">
+              <a:spcBef>
+                <a:spcPct val="20000"/>
+              </a:spcBef>
+              <a:spcAft>
+                <a:spcPts val="600"/>
+              </a:spcAft>
+              <a:buClr>
+                <a:schemeClr val="accent2"/>
+              </a:buClr>
+              <a:buSzPct val="92000"/>
+              <a:buFont typeface="Wingdings 2" panose="05020102010507070707" pitchFamily="18" charset="2"/>
+              <a:buChar char=""/>
+              <a:defRPr sz="1800" kern="1200">
+                <a:solidFill>
+                  <a:schemeClr val="tx2"/>
+                </a:solidFill>
+                <a:latin typeface="+mn-lt"/>
+                <a:ea typeface="+mn-ea"/>
+                <a:cs typeface="+mn-cs"/>
+              </a:defRPr>
+            </a:lvl1pPr>
+            <a:lvl2pPr marL="630000" indent="-306000" algn="l" defTabSz="457200" rtl="0" eaLnBrk="1" latinLnBrk="0" hangingPunct="1">
+              <a:spcBef>
+                <a:spcPct val="20000"/>
+              </a:spcBef>
+              <a:spcAft>
+                <a:spcPts val="600"/>
+              </a:spcAft>
+              <a:buClr>
+                <a:schemeClr val="accent2"/>
+              </a:buClr>
+              <a:buSzPct val="92000"/>
+              <a:buFont typeface="Wingdings 2" panose="05020102010507070707" pitchFamily="18" charset="2"/>
+              <a:buChar char=""/>
+              <a:defRPr sz="1600" kern="1200">
+                <a:solidFill>
+                  <a:schemeClr val="tx2"/>
+                </a:solidFill>
+                <a:latin typeface="+mn-lt"/>
+                <a:ea typeface="+mn-ea"/>
+                <a:cs typeface="+mn-cs"/>
+              </a:defRPr>
+            </a:lvl2pPr>
+            <a:lvl3pPr marL="900000" indent="-270000" algn="l" defTabSz="457200" rtl="0" eaLnBrk="1" latinLnBrk="0" hangingPunct="1">
+              <a:spcBef>
+                <a:spcPct val="20000"/>
+              </a:spcBef>
+              <a:spcAft>
+                <a:spcPts val="600"/>
+              </a:spcAft>
+              <a:buClr>
+                <a:schemeClr val="accent2"/>
+              </a:buClr>
+              <a:buSzPct val="92000"/>
+              <a:buFont typeface="Wingdings 2" panose="05020102010507070707" pitchFamily="18" charset="2"/>
+              <a:buChar char=""/>
+              <a:defRPr sz="1400" kern="1200">
+                <a:solidFill>
+                  <a:schemeClr val="tx2"/>
+                </a:solidFill>
+                <a:latin typeface="+mn-lt"/>
+                <a:ea typeface="+mn-ea"/>
+                <a:cs typeface="+mn-cs"/>
+              </a:defRPr>
+            </a:lvl3pPr>
+            <a:lvl4pPr marL="1242000" indent="-234000" algn="l" defTabSz="457200" rtl="0" eaLnBrk="1" latinLnBrk="0" hangingPunct="1">
+              <a:spcBef>
+                <a:spcPct val="20000"/>
+              </a:spcBef>
+              <a:spcAft>
+                <a:spcPts val="600"/>
+              </a:spcAft>
+              <a:buClr>
+                <a:schemeClr val="accent2"/>
+              </a:buClr>
+              <a:buSzPct val="92000"/>
+              <a:buFont typeface="Wingdings 2" panose="05020102010507070707" pitchFamily="18" charset="2"/>
+              <a:buChar char=""/>
+              <a:defRPr sz="1200" kern="1200">
+                <a:solidFill>
+                  <a:schemeClr val="tx2"/>
+                </a:solidFill>
+                <a:latin typeface="+mn-lt"/>
+                <a:ea typeface="+mn-ea"/>
+                <a:cs typeface="+mn-cs"/>
+              </a:defRPr>
+            </a:lvl4pPr>
+            <a:lvl5pPr marL="1602000" indent="-234000" algn="l" defTabSz="457200" rtl="0" eaLnBrk="1" latinLnBrk="0" hangingPunct="1">
+              <a:spcBef>
+                <a:spcPct val="20000"/>
+              </a:spcBef>
+              <a:spcAft>
+                <a:spcPts val="600"/>
+              </a:spcAft>
+              <a:buClr>
+                <a:schemeClr val="accent2"/>
+              </a:buClr>
+              <a:buSzPct val="92000"/>
+              <a:buFont typeface="Wingdings 2" panose="05020102010507070707" pitchFamily="18" charset="2"/>
+              <a:buChar char=""/>
+              <a:defRPr sz="1200" kern="1200">
+                <a:solidFill>
+                  <a:schemeClr val="tx2"/>
+                </a:solidFill>
+                <a:latin typeface="+mn-lt"/>
+                <a:ea typeface="+mn-ea"/>
+                <a:cs typeface="+mn-cs"/>
+              </a:defRPr>
+            </a:lvl5pPr>
+            <a:lvl6pPr marL="1900000" indent="-228600" algn="l" defTabSz="457200" rtl="0" eaLnBrk="1" latinLnBrk="0" hangingPunct="1">
+              <a:spcBef>
+                <a:spcPct val="20000"/>
+              </a:spcBef>
+              <a:spcAft>
+                <a:spcPts val="600"/>
+              </a:spcAft>
+              <a:buClr>
+                <a:schemeClr val="accent2"/>
+              </a:buClr>
+              <a:buSzPct val="92000"/>
+              <a:buFont typeface="Wingdings 2" panose="05020102010507070707" pitchFamily="18" charset="2"/>
+              <a:buChar char=""/>
+              <a:defRPr sz="1200" kern="1200">
+                <a:solidFill>
+                  <a:schemeClr val="tx2"/>
+                </a:solidFill>
+                <a:latin typeface="+mn-lt"/>
+                <a:ea typeface="+mn-ea"/>
+                <a:cs typeface="+mn-cs"/>
+              </a:defRPr>
+            </a:lvl6pPr>
+            <a:lvl7pPr marL="2200000" indent="-228600" algn="l" defTabSz="457200" rtl="0" eaLnBrk="1" latinLnBrk="0" hangingPunct="1">
+              <a:spcBef>
+                <a:spcPct val="20000"/>
+              </a:spcBef>
+              <a:spcAft>
+                <a:spcPts val="600"/>
+              </a:spcAft>
+              <a:buClr>
+                <a:schemeClr val="accent2"/>
+              </a:buClr>
+              <a:buSzPct val="92000"/>
+              <a:buFont typeface="Wingdings 2" panose="05020102010507070707" pitchFamily="18" charset="2"/>
+              <a:buChar char=""/>
+              <a:defRPr sz="1200" kern="1200">
+                <a:solidFill>
+                  <a:schemeClr val="tx2"/>
+                </a:solidFill>
+                <a:latin typeface="+mn-lt"/>
+                <a:ea typeface="+mn-ea"/>
+                <a:cs typeface="+mn-cs"/>
+              </a:defRPr>
+            </a:lvl7pPr>
+            <a:lvl8pPr marL="2500000" indent="-228600" algn="l" defTabSz="457200" rtl="0" eaLnBrk="1" latinLnBrk="0" hangingPunct="1">
+              <a:spcBef>
+                <a:spcPct val="20000"/>
+              </a:spcBef>
+              <a:spcAft>
+                <a:spcPts val="600"/>
+              </a:spcAft>
+              <a:buClr>
+                <a:schemeClr val="accent2"/>
+              </a:buClr>
+              <a:buSzPct val="92000"/>
+              <a:buFont typeface="Wingdings 2" panose="05020102010507070707" pitchFamily="18" charset="2"/>
+              <a:buChar char=""/>
+              <a:defRPr sz="1200" kern="1200">
+                <a:solidFill>
+                  <a:schemeClr val="tx2"/>
+                </a:solidFill>
+                <a:latin typeface="+mn-lt"/>
+                <a:ea typeface="+mn-ea"/>
+                <a:cs typeface="+mn-cs"/>
+              </a:defRPr>
+            </a:lvl8pPr>
+            <a:lvl9pPr marL="2800000" indent="-228600" algn="l" defTabSz="457200" rtl="0" eaLnBrk="1" latinLnBrk="0" hangingPunct="1">
+              <a:spcBef>
+                <a:spcPct val="20000"/>
+              </a:spcBef>
+              <a:spcAft>
+                <a:spcPts val="600"/>
+              </a:spcAft>
+              <a:buClr>
+                <a:schemeClr val="accent2"/>
+              </a:buClr>
+              <a:buSzPct val="92000"/>
+              <a:buFont typeface="Wingdings 2" panose="05020102010507070707" pitchFamily="18" charset="2"/>
+              <a:buChar char=""/>
+              <a:defRPr sz="1200" kern="1200">
+                <a:solidFill>
+                  <a:schemeClr val="tx2"/>
+                </a:solidFill>
+                <a:latin typeface="+mn-lt"/>
+                <a:ea typeface="+mn-ea"/>
+                <a:cs typeface="+mn-cs"/>
+              </a:defRPr>
+            </a:lvl9pPr>
+          </a:lstStyle>
+          <a:p>
+            <a:r>
+              <a:rPr lang="en-US" dirty="0"/>
+              <a:t>You will need to make edits to App, Home, Welcome, and </a:t>
+            </a:r>
+            <a:r>
+              <a:rPr lang="en-US" dirty="0" err="1"/>
+              <a:t>IncidentList</a:t>
+            </a:r>
+            <a:r>
+              <a:rPr lang="en-US" dirty="0"/>
+              <a:t> </a:t>
+            </a:r>
+          </a:p>
+          <a:p>
+            <a:r>
+              <a:rPr lang="en-US" dirty="0"/>
+              <a:t>You should ‘publish’ your command to toggle dark mode from your ‘Home’ component </a:t>
+            </a:r>
+          </a:p>
+          <a:p>
+            <a:r>
+              <a:rPr lang="en-US" dirty="0"/>
+              <a:t>Both the Welcome &amp; </a:t>
+            </a:r>
+            <a:r>
+              <a:rPr lang="en-US" dirty="0" err="1"/>
+              <a:t>IncidentList</a:t>
+            </a:r>
+            <a:r>
+              <a:rPr lang="en-US" dirty="0"/>
+              <a:t> components should change their style to reflect </a:t>
+            </a:r>
+            <a:r>
+              <a:rPr lang="en-US" dirty="0" err="1"/>
+              <a:t>darkmode</a:t>
+            </a:r>
+            <a:endParaRPr lang="en-US" dirty="0"/>
+          </a:p>
+        </p:txBody>
+      </p:sp>
+      <p:pic>
+        <p:nvPicPr>
+          <p:cNvPr id="5" name="Picture 4">
+            <a:extLst>
+              <a:ext uri="{FF2B5EF4-FFF2-40B4-BE49-F238E27FC236}">
+                <a16:creationId xmlns:a16="http://schemas.microsoft.com/office/drawing/2014/main" id="{B32C6353-03FF-5595-6E37-4247F78C1EAE}"/>
+              </a:ext>
+            </a:extLst>
+          </p:cNvPr>
+          <p:cNvPicPr>
+            <a:picLocks noChangeAspect="1"/>
+          </p:cNvPicPr>
+          <p:nvPr/>
+        </p:nvPicPr>
+        <p:blipFill>
+          <a:blip r:embed="rId2"/>
+          <a:stretch>
+            <a:fillRect/>
+          </a:stretch>
+        </p:blipFill>
+        <p:spPr>
+          <a:xfrm>
+            <a:off x="1795868" y="4598578"/>
+            <a:ext cx="7286488" cy="1068451"/>
+          </a:xfrm>
+          <a:prstGeom prst="rect">
+            <a:avLst/>
+          </a:prstGeom>
+        </p:spPr>
+      </p:pic>
+      <p:sp>
+        <p:nvSpPr>
+          <p:cNvPr id="9" name="TextBox 8">
+            <a:extLst>
+              <a:ext uri="{FF2B5EF4-FFF2-40B4-BE49-F238E27FC236}">
+                <a16:creationId xmlns:a16="http://schemas.microsoft.com/office/drawing/2014/main" id="{CA201E34-E2BA-5A40-378B-CEF890C456F1}"/>
+              </a:ext>
+            </a:extLst>
+          </p:cNvPr>
+          <p:cNvSpPr txBox="1"/>
+          <p:nvPr/>
+        </p:nvSpPr>
+        <p:spPr>
+          <a:xfrm rot="19946307">
+            <a:off x="15408" y="4256629"/>
+            <a:ext cx="3386248" cy="369332"/>
+          </a:xfrm>
+          <a:prstGeom prst="rect">
+            <a:avLst/>
+          </a:prstGeom>
+          <a:noFill/>
+        </p:spPr>
+        <p:txBody>
+          <a:bodyPr wrap="none" rtlCol="0">
+            <a:spAutoFit/>
+          </a:bodyPr>
+          <a:lstStyle/>
+          <a:p>
+            <a:r>
+              <a:rPr lang="en-US" dirty="0"/>
+              <a:t>Don’t forget about callback props!</a:t>
+            </a:r>
+          </a:p>
+        </p:txBody>
+      </p:sp>
+      <p:pic>
+        <p:nvPicPr>
+          <p:cNvPr id="11" name="Picture 10">
+            <a:extLst>
+              <a:ext uri="{FF2B5EF4-FFF2-40B4-BE49-F238E27FC236}">
+                <a16:creationId xmlns:a16="http://schemas.microsoft.com/office/drawing/2014/main" id="{9BC57B57-F363-FCE8-64C0-6566BED270ED}"/>
+              </a:ext>
+            </a:extLst>
+          </p:cNvPr>
+          <p:cNvPicPr>
+            <a:picLocks noChangeAspect="1"/>
+          </p:cNvPicPr>
+          <p:nvPr/>
+        </p:nvPicPr>
+        <p:blipFill>
+          <a:blip r:embed="rId3"/>
+          <a:stretch>
+            <a:fillRect/>
+          </a:stretch>
+        </p:blipFill>
+        <p:spPr>
+          <a:xfrm>
+            <a:off x="1606634" y="5719840"/>
+            <a:ext cx="7664957" cy="1088772"/>
+          </a:xfrm>
+          <a:prstGeom prst="rect">
+            <a:avLst/>
+          </a:prstGeom>
+        </p:spPr>
+      </p:pic>
+    </p:spTree>
+    <p:extLst>
+      <p:ext uri="{BB962C8B-B14F-4D97-AF65-F5344CB8AC3E}">
+        <p14:creationId xmlns:p14="http://schemas.microsoft.com/office/powerpoint/2010/main" val="3476056970"/>
       </p:ext>
     </p:extLst>
   </p:cSld>

--- a/Week_2/React.pptx
+++ b/Week_2/React.pptx
@@ -48,6 +48,18 @@
     <p:sldId id="300" r:id="rId42"/>
     <p:sldId id="301" r:id="rId43"/>
     <p:sldId id="302" r:id="rId44"/>
+    <p:sldId id="304" r:id="rId45"/>
+    <p:sldId id="305" r:id="rId46"/>
+    <p:sldId id="306" r:id="rId47"/>
+    <p:sldId id="308" r:id="rId48"/>
+    <p:sldId id="307" r:id="rId49"/>
+    <p:sldId id="310" r:id="rId50"/>
+    <p:sldId id="309" r:id="rId51"/>
+    <p:sldId id="312" r:id="rId52"/>
+    <p:sldId id="311" r:id="rId53"/>
+    <p:sldId id="313" r:id="rId54"/>
+    <p:sldId id="314" r:id="rId55"/>
+    <p:sldId id="315" r:id="rId56"/>
   </p:sldIdLst>
   <p:sldSz cx="12192000" cy="6858000"/>
   <p:notesSz cx="6858000" cy="9144000"/>
@@ -2632,7 +2644,7 @@
             <a:fld id="{B61BEF0D-F0BB-DE4B-95CE-6DB70DBA9567}" type="datetimeFigureOut">
               <a:rPr lang="en-US" dirty="0"/>
               <a:pPr/>
-              <a:t>9/29/2025</a:t>
+              <a:t>10/2/2025</a:t>
             </a:fld>
             <a:endParaRPr lang="en-US" dirty="0"/>
           </a:p>
@@ -2894,7 +2906,7 @@
             <a:fld id="{B61BEF0D-F0BB-DE4B-95CE-6DB70DBA9567}" type="datetimeFigureOut">
               <a:rPr lang="en-US" dirty="0"/>
               <a:pPr/>
-              <a:t>9/29/2025</a:t>
+              <a:t>10/2/2025</a:t>
             </a:fld>
             <a:endParaRPr lang="en-US" dirty="0"/>
           </a:p>
@@ -3129,7 +3141,7 @@
             <a:fld id="{B61BEF0D-F0BB-DE4B-95CE-6DB70DBA9567}" type="datetimeFigureOut">
               <a:rPr lang="en-US" dirty="0"/>
               <a:pPr/>
-              <a:t>9/29/2025</a:t>
+              <a:t>10/2/2025</a:t>
             </a:fld>
             <a:endParaRPr lang="en-US" dirty="0"/>
           </a:p>
@@ -3369,7 +3381,7 @@
             <a:fld id="{B61BEF0D-F0BB-DE4B-95CE-6DB70DBA9567}" type="datetimeFigureOut">
               <a:rPr lang="en-US" dirty="0"/>
               <a:pPr/>
-              <a:t>9/29/2025</a:t>
+              <a:t>10/2/2025</a:t>
             </a:fld>
             <a:endParaRPr lang="en-US" dirty="0"/>
           </a:p>
@@ -3677,7 +3689,7 @@
             <a:fld id="{B61BEF0D-F0BB-DE4B-95CE-6DB70DBA9567}" type="datetimeFigureOut">
               <a:rPr lang="en-US" dirty="0"/>
               <a:pPr/>
-              <a:t>9/29/2025</a:t>
+              <a:t>10/2/2025</a:t>
             </a:fld>
             <a:endParaRPr lang="en-US" dirty="0"/>
           </a:p>
@@ -3978,7 +3990,7 @@
             <a:fld id="{B61BEF0D-F0BB-DE4B-95CE-6DB70DBA9567}" type="datetimeFigureOut">
               <a:rPr lang="en-US" dirty="0"/>
               <a:pPr/>
-              <a:t>9/29/2025</a:t>
+              <a:t>10/2/2025</a:t>
             </a:fld>
             <a:endParaRPr lang="en-US" dirty="0"/>
           </a:p>
@@ -4399,7 +4411,7 @@
             <a:fld id="{B61BEF0D-F0BB-DE4B-95CE-6DB70DBA9567}" type="datetimeFigureOut">
               <a:rPr lang="en-US" dirty="0"/>
               <a:pPr/>
-              <a:t>9/29/2025</a:t>
+              <a:t>10/2/2025</a:t>
             </a:fld>
             <a:endParaRPr lang="en-US" dirty="0"/>
           </a:p>
@@ -4562,7 +4574,7 @@
             <a:fld id="{B61BEF0D-F0BB-DE4B-95CE-6DB70DBA9567}" type="datetimeFigureOut">
               <a:rPr lang="en-US" dirty="0"/>
               <a:pPr/>
-              <a:t>9/29/2025</a:t>
+              <a:t>10/2/2025</a:t>
             </a:fld>
             <a:endParaRPr lang="en-US" dirty="0"/>
           </a:p>
@@ -4659,7 +4671,7 @@
             <a:fld id="{B61BEF0D-F0BB-DE4B-95CE-6DB70DBA9567}" type="datetimeFigureOut">
               <a:rPr lang="en-US" dirty="0"/>
               <a:pPr/>
-              <a:t>9/29/2025</a:t>
+              <a:t>10/2/2025</a:t>
             </a:fld>
             <a:endParaRPr lang="en-US" dirty="0"/>
           </a:p>
@@ -5037,7 +5049,7 @@
             <a:fld id="{B61BEF0D-F0BB-DE4B-95CE-6DB70DBA9567}" type="datetimeFigureOut">
               <a:rPr lang="en-US" dirty="0"/>
               <a:pPr/>
-              <a:t>9/29/2025</a:t>
+              <a:t>10/2/2025</a:t>
             </a:fld>
             <a:endParaRPr lang="en-US" dirty="0"/>
           </a:p>
@@ -5323,7 +5335,7 @@
             <a:fld id="{B61BEF0D-F0BB-DE4B-95CE-6DB70DBA9567}" type="datetimeFigureOut">
               <a:rPr lang="en-US" dirty="0"/>
               <a:pPr/>
-              <a:t>9/29/2025</a:t>
+              <a:t>10/2/2025</a:t>
             </a:fld>
             <a:endParaRPr lang="en-US" dirty="0"/>
           </a:p>
@@ -5562,7 +5574,7 @@
             <a:fld id="{B61BEF0D-F0BB-DE4B-95CE-6DB70DBA9567}" type="datetimeFigureOut">
               <a:rPr lang="en-US" dirty="0"/>
               <a:pPr/>
-              <a:t>9/29/2025</a:t>
+              <a:t>10/2/2025</a:t>
             </a:fld>
             <a:endParaRPr lang="en-US" dirty="0"/>
           </a:p>
@@ -11413,7 +11425,15 @@
           <a:p>
             <a:r>
               <a:rPr lang="en-US" dirty="0"/>
-              <a:t>If state is instead placed at ‘Home’, then if we modify the incident list, then that change will persist even if we reload the component</a:t>
+              <a:t>If state is instead placed at ‘Home’, then if we modify the incident list, then that change will persist even as the ‘</a:t>
+            </a:r>
+            <a:r>
+              <a:rPr lang="en-US" dirty="0" err="1"/>
+              <a:t>IncidentList</a:t>
+            </a:r>
+            <a:r>
+              <a:rPr lang="en-US" dirty="0"/>
+              <a:t>’ component may reload</a:t>
             </a:r>
           </a:p>
         </p:txBody>
@@ -14736,6 +14756,36 @@
           </a:prstGeom>
         </p:spPr>
       </p:pic>
+      <p:pic>
+        <p:nvPicPr>
+          <p:cNvPr id="10" name="Picture 9">
+            <a:extLst>
+              <a:ext uri="{FF2B5EF4-FFF2-40B4-BE49-F238E27FC236}">
+                <a16:creationId xmlns:a16="http://schemas.microsoft.com/office/drawing/2014/main" id="{C977517B-4485-896C-CA16-BCA0EFA8608F}"/>
+              </a:ext>
+            </a:extLst>
+          </p:cNvPr>
+          <p:cNvPicPr>
+            <a:picLocks noChangeAspect="1"/>
+          </p:cNvPicPr>
+          <p:nvPr/>
+        </p:nvPicPr>
+        <p:blipFill>
+          <a:blip r:embed="rId3"/>
+          <a:stretch>
+            <a:fillRect/>
+          </a:stretch>
+        </p:blipFill>
+        <p:spPr>
+          <a:xfrm>
+            <a:off x="6096000" y="3341874"/>
+            <a:ext cx="4410691" cy="1105054"/>
+          </a:xfrm>
+          <a:prstGeom prst="rect">
+            <a:avLst/>
+          </a:prstGeom>
+        </p:spPr>
+      </p:pic>
     </p:spTree>
     <p:extLst>
       <p:ext uri="{BB962C8B-B14F-4D97-AF65-F5344CB8AC3E}">
@@ -17027,6 +17077,1919 @@
 </p:sld>
 </file>
 
+<file path=ppt/slides/slide44.xml><?xml version="1.0" encoding="utf-8"?>
+<p:sld xmlns:a="http://schemas.openxmlformats.org/drawingml/2006/main" xmlns:r="http://schemas.openxmlformats.org/officeDocument/2006/relationships" xmlns:p="http://schemas.openxmlformats.org/presentationml/2006/main">
+  <p:cSld>
+    <p:spTree>
+      <p:nvGrpSpPr>
+        <p:cNvPr id="1" name=""/>
+        <p:cNvGrpSpPr/>
+        <p:nvPr/>
+      </p:nvGrpSpPr>
+      <p:grpSpPr>
+        <a:xfrm>
+          <a:off x="0" y="0"/>
+          <a:ext cx="0" cy="0"/>
+          <a:chOff x="0" y="0"/>
+          <a:chExt cx="0" cy="0"/>
+        </a:xfrm>
+      </p:grpSpPr>
+      <p:sp>
+        <p:nvSpPr>
+          <p:cNvPr id="2" name="Title 1">
+            <a:extLst>
+              <a:ext uri="{FF2B5EF4-FFF2-40B4-BE49-F238E27FC236}">
+                <a16:creationId xmlns:a16="http://schemas.microsoft.com/office/drawing/2014/main" id="{C6FD3597-F820-CE15-CF46-E9C4E2C9A53A}"/>
+              </a:ext>
+            </a:extLst>
+          </p:cNvPr>
+          <p:cNvSpPr>
+            <a:spLocks noGrp="1"/>
+          </p:cNvSpPr>
+          <p:nvPr>
+            <p:ph type="title"/>
+          </p:nvPr>
+        </p:nvSpPr>
+        <p:spPr/>
+        <p:txBody>
+          <a:bodyPr/>
+          <a:lstStyle/>
+          <a:p>
+            <a:r>
+              <a:rPr lang="en-US" dirty="0"/>
+              <a:t>MVC</a:t>
+            </a:r>
+          </a:p>
+        </p:txBody>
+      </p:sp>
+      <p:sp>
+        <p:nvSpPr>
+          <p:cNvPr id="4" name="Content Placeholder 2">
+            <a:extLst>
+              <a:ext uri="{FF2B5EF4-FFF2-40B4-BE49-F238E27FC236}">
+                <a16:creationId xmlns:a16="http://schemas.microsoft.com/office/drawing/2014/main" id="{1A779465-8321-A3A5-379A-9BEA713DCBB4}"/>
+              </a:ext>
+            </a:extLst>
+          </p:cNvPr>
+          <p:cNvSpPr txBox="1">
+            <a:spLocks/>
+          </p:cNvSpPr>
+          <p:nvPr/>
+        </p:nvSpPr>
+        <p:spPr>
+          <a:xfrm>
+            <a:off x="914400" y="2243248"/>
+            <a:ext cx="10696408" cy="3678303"/>
+          </a:xfrm>
+          <a:prstGeom prst="rect">
+            <a:avLst/>
+          </a:prstGeom>
+        </p:spPr>
+        <p:txBody>
+          <a:bodyPr vert="horz" lIns="91440" tIns="45720" rIns="91440" bIns="45720" rtlCol="0" anchor="ctr">
+            <a:normAutofit/>
+          </a:bodyPr>
+          <a:lstStyle>
+            <a:lvl1pPr marL="306000" indent="-306000" algn="l" defTabSz="457200" rtl="0" eaLnBrk="1" latinLnBrk="0" hangingPunct="1">
+              <a:spcBef>
+                <a:spcPct val="20000"/>
+              </a:spcBef>
+              <a:spcAft>
+                <a:spcPts val="600"/>
+              </a:spcAft>
+              <a:buClr>
+                <a:schemeClr val="accent2"/>
+              </a:buClr>
+              <a:buSzPct val="92000"/>
+              <a:buFont typeface="Wingdings 2" panose="05020102010507070707" pitchFamily="18" charset="2"/>
+              <a:buChar char=""/>
+              <a:defRPr sz="1800" kern="1200">
+                <a:solidFill>
+                  <a:schemeClr val="tx2"/>
+                </a:solidFill>
+                <a:latin typeface="+mn-lt"/>
+                <a:ea typeface="+mn-ea"/>
+                <a:cs typeface="+mn-cs"/>
+              </a:defRPr>
+            </a:lvl1pPr>
+            <a:lvl2pPr marL="630000" indent="-306000" algn="l" defTabSz="457200" rtl="0" eaLnBrk="1" latinLnBrk="0" hangingPunct="1">
+              <a:spcBef>
+                <a:spcPct val="20000"/>
+              </a:spcBef>
+              <a:spcAft>
+                <a:spcPts val="600"/>
+              </a:spcAft>
+              <a:buClr>
+                <a:schemeClr val="accent2"/>
+              </a:buClr>
+              <a:buSzPct val="92000"/>
+              <a:buFont typeface="Wingdings 2" panose="05020102010507070707" pitchFamily="18" charset="2"/>
+              <a:buChar char=""/>
+              <a:defRPr sz="1600" kern="1200">
+                <a:solidFill>
+                  <a:schemeClr val="tx2"/>
+                </a:solidFill>
+                <a:latin typeface="+mn-lt"/>
+                <a:ea typeface="+mn-ea"/>
+                <a:cs typeface="+mn-cs"/>
+              </a:defRPr>
+            </a:lvl2pPr>
+            <a:lvl3pPr marL="900000" indent="-270000" algn="l" defTabSz="457200" rtl="0" eaLnBrk="1" latinLnBrk="0" hangingPunct="1">
+              <a:spcBef>
+                <a:spcPct val="20000"/>
+              </a:spcBef>
+              <a:spcAft>
+                <a:spcPts val="600"/>
+              </a:spcAft>
+              <a:buClr>
+                <a:schemeClr val="accent2"/>
+              </a:buClr>
+              <a:buSzPct val="92000"/>
+              <a:buFont typeface="Wingdings 2" panose="05020102010507070707" pitchFamily="18" charset="2"/>
+              <a:buChar char=""/>
+              <a:defRPr sz="1400" kern="1200">
+                <a:solidFill>
+                  <a:schemeClr val="tx2"/>
+                </a:solidFill>
+                <a:latin typeface="+mn-lt"/>
+                <a:ea typeface="+mn-ea"/>
+                <a:cs typeface="+mn-cs"/>
+              </a:defRPr>
+            </a:lvl3pPr>
+            <a:lvl4pPr marL="1242000" indent="-234000" algn="l" defTabSz="457200" rtl="0" eaLnBrk="1" latinLnBrk="0" hangingPunct="1">
+              <a:spcBef>
+                <a:spcPct val="20000"/>
+              </a:spcBef>
+              <a:spcAft>
+                <a:spcPts val="600"/>
+              </a:spcAft>
+              <a:buClr>
+                <a:schemeClr val="accent2"/>
+              </a:buClr>
+              <a:buSzPct val="92000"/>
+              <a:buFont typeface="Wingdings 2" panose="05020102010507070707" pitchFamily="18" charset="2"/>
+              <a:buChar char=""/>
+              <a:defRPr sz="1200" kern="1200">
+                <a:solidFill>
+                  <a:schemeClr val="tx2"/>
+                </a:solidFill>
+                <a:latin typeface="+mn-lt"/>
+                <a:ea typeface="+mn-ea"/>
+                <a:cs typeface="+mn-cs"/>
+              </a:defRPr>
+            </a:lvl4pPr>
+            <a:lvl5pPr marL="1602000" indent="-234000" algn="l" defTabSz="457200" rtl="0" eaLnBrk="1" latinLnBrk="0" hangingPunct="1">
+              <a:spcBef>
+                <a:spcPct val="20000"/>
+              </a:spcBef>
+              <a:spcAft>
+                <a:spcPts val="600"/>
+              </a:spcAft>
+              <a:buClr>
+                <a:schemeClr val="accent2"/>
+              </a:buClr>
+              <a:buSzPct val="92000"/>
+              <a:buFont typeface="Wingdings 2" panose="05020102010507070707" pitchFamily="18" charset="2"/>
+              <a:buChar char=""/>
+              <a:defRPr sz="1200" kern="1200">
+                <a:solidFill>
+                  <a:schemeClr val="tx2"/>
+                </a:solidFill>
+                <a:latin typeface="+mn-lt"/>
+                <a:ea typeface="+mn-ea"/>
+                <a:cs typeface="+mn-cs"/>
+              </a:defRPr>
+            </a:lvl5pPr>
+            <a:lvl6pPr marL="1900000" indent="-228600" algn="l" defTabSz="457200" rtl="0" eaLnBrk="1" latinLnBrk="0" hangingPunct="1">
+              <a:spcBef>
+                <a:spcPct val="20000"/>
+              </a:spcBef>
+              <a:spcAft>
+                <a:spcPts val="600"/>
+              </a:spcAft>
+              <a:buClr>
+                <a:schemeClr val="accent2"/>
+              </a:buClr>
+              <a:buSzPct val="92000"/>
+              <a:buFont typeface="Wingdings 2" panose="05020102010507070707" pitchFamily="18" charset="2"/>
+              <a:buChar char=""/>
+              <a:defRPr sz="1200" kern="1200">
+                <a:solidFill>
+                  <a:schemeClr val="tx2"/>
+                </a:solidFill>
+                <a:latin typeface="+mn-lt"/>
+                <a:ea typeface="+mn-ea"/>
+                <a:cs typeface="+mn-cs"/>
+              </a:defRPr>
+            </a:lvl6pPr>
+            <a:lvl7pPr marL="2200000" indent="-228600" algn="l" defTabSz="457200" rtl="0" eaLnBrk="1" latinLnBrk="0" hangingPunct="1">
+              <a:spcBef>
+                <a:spcPct val="20000"/>
+              </a:spcBef>
+              <a:spcAft>
+                <a:spcPts val="600"/>
+              </a:spcAft>
+              <a:buClr>
+                <a:schemeClr val="accent2"/>
+              </a:buClr>
+              <a:buSzPct val="92000"/>
+              <a:buFont typeface="Wingdings 2" panose="05020102010507070707" pitchFamily="18" charset="2"/>
+              <a:buChar char=""/>
+              <a:defRPr sz="1200" kern="1200">
+                <a:solidFill>
+                  <a:schemeClr val="tx2"/>
+                </a:solidFill>
+                <a:latin typeface="+mn-lt"/>
+                <a:ea typeface="+mn-ea"/>
+                <a:cs typeface="+mn-cs"/>
+              </a:defRPr>
+            </a:lvl7pPr>
+            <a:lvl8pPr marL="2500000" indent="-228600" algn="l" defTabSz="457200" rtl="0" eaLnBrk="1" latinLnBrk="0" hangingPunct="1">
+              <a:spcBef>
+                <a:spcPct val="20000"/>
+              </a:spcBef>
+              <a:spcAft>
+                <a:spcPts val="600"/>
+              </a:spcAft>
+              <a:buClr>
+                <a:schemeClr val="accent2"/>
+              </a:buClr>
+              <a:buSzPct val="92000"/>
+              <a:buFont typeface="Wingdings 2" panose="05020102010507070707" pitchFamily="18" charset="2"/>
+              <a:buChar char=""/>
+              <a:defRPr sz="1200" kern="1200">
+                <a:solidFill>
+                  <a:schemeClr val="tx2"/>
+                </a:solidFill>
+                <a:latin typeface="+mn-lt"/>
+                <a:ea typeface="+mn-ea"/>
+                <a:cs typeface="+mn-cs"/>
+              </a:defRPr>
+            </a:lvl8pPr>
+            <a:lvl9pPr marL="2800000" indent="-228600" algn="l" defTabSz="457200" rtl="0" eaLnBrk="1" latinLnBrk="0" hangingPunct="1">
+              <a:spcBef>
+                <a:spcPct val="20000"/>
+              </a:spcBef>
+              <a:spcAft>
+                <a:spcPts val="600"/>
+              </a:spcAft>
+              <a:buClr>
+                <a:schemeClr val="accent2"/>
+              </a:buClr>
+              <a:buSzPct val="92000"/>
+              <a:buFont typeface="Wingdings 2" panose="05020102010507070707" pitchFamily="18" charset="2"/>
+              <a:buChar char=""/>
+              <a:defRPr sz="1200" kern="1200">
+                <a:solidFill>
+                  <a:schemeClr val="tx2"/>
+                </a:solidFill>
+                <a:latin typeface="+mn-lt"/>
+                <a:ea typeface="+mn-ea"/>
+                <a:cs typeface="+mn-cs"/>
+              </a:defRPr>
+            </a:lvl9pPr>
+          </a:lstStyle>
+          <a:p>
+            <a:r>
+              <a:rPr lang="en-US" dirty="0"/>
+              <a:t>Definition: </a:t>
+            </a:r>
+            <a:r>
+              <a:rPr lang="en-US" dirty="0">
+                <a:solidFill>
+                  <a:schemeClr val="accent2"/>
+                </a:solidFill>
+              </a:rPr>
+              <a:t>Model View Controller (MVC) </a:t>
+            </a:r>
+            <a:r>
+              <a:rPr lang="en-US" dirty="0">
+                <a:solidFill>
+                  <a:schemeClr val="tx1"/>
+                </a:solidFill>
+              </a:rPr>
+              <a:t>is a classic architectural design pattern used to structure applications. </a:t>
+            </a:r>
+          </a:p>
+          <a:p>
+            <a:pPr lvl="1"/>
+            <a:r>
+              <a:rPr lang="en-US" dirty="0">
+                <a:solidFill>
+                  <a:schemeClr val="accent2"/>
+                </a:solidFill>
+              </a:rPr>
+              <a:t>Model</a:t>
+            </a:r>
+            <a:r>
+              <a:rPr lang="en-US" dirty="0">
+                <a:solidFill>
+                  <a:schemeClr val="tx1"/>
+                </a:solidFill>
+              </a:rPr>
+              <a:t> – The data and business logic of an application</a:t>
+            </a:r>
+          </a:p>
+          <a:p>
+            <a:pPr lvl="1"/>
+            <a:r>
+              <a:rPr lang="en-US" dirty="0">
+                <a:solidFill>
+                  <a:schemeClr val="accent2"/>
+                </a:solidFill>
+              </a:rPr>
+              <a:t>View</a:t>
+            </a:r>
+            <a:r>
+              <a:rPr lang="en-US" dirty="0">
+                <a:solidFill>
+                  <a:schemeClr val="tx1"/>
+                </a:solidFill>
+              </a:rPr>
+              <a:t> – The UI</a:t>
+            </a:r>
+          </a:p>
+          <a:p>
+            <a:pPr lvl="1"/>
+            <a:r>
+              <a:rPr lang="en-US" dirty="0">
+                <a:solidFill>
+                  <a:schemeClr val="accent2"/>
+                </a:solidFill>
+              </a:rPr>
+              <a:t>Controller</a:t>
+            </a:r>
+            <a:r>
+              <a:rPr lang="en-US" dirty="0">
+                <a:solidFill>
+                  <a:schemeClr val="tx1"/>
+                </a:solidFill>
+              </a:rPr>
+              <a:t> – The middleman between the model and view, often handling user input</a:t>
+            </a:r>
+            <a:endParaRPr lang="en-US" dirty="0">
+              <a:solidFill>
+                <a:schemeClr val="accent2"/>
+              </a:solidFill>
+            </a:endParaRPr>
+          </a:p>
+        </p:txBody>
+      </p:sp>
+    </p:spTree>
+    <p:extLst>
+      <p:ext uri="{BB962C8B-B14F-4D97-AF65-F5344CB8AC3E}">
+        <p14:creationId xmlns:p14="http://schemas.microsoft.com/office/powerpoint/2010/main" val="1655144454"/>
+      </p:ext>
+    </p:extLst>
+  </p:cSld>
+  <p:clrMapOvr>
+    <a:masterClrMapping/>
+  </p:clrMapOvr>
+</p:sld>
+</file>
+
+<file path=ppt/slides/slide45.xml><?xml version="1.0" encoding="utf-8"?>
+<p:sld xmlns:a="http://schemas.openxmlformats.org/drawingml/2006/main" xmlns:r="http://schemas.openxmlformats.org/officeDocument/2006/relationships" xmlns:p="http://schemas.openxmlformats.org/presentationml/2006/main">
+  <p:cSld>
+    <p:spTree>
+      <p:nvGrpSpPr>
+        <p:cNvPr id="1" name=""/>
+        <p:cNvGrpSpPr/>
+        <p:nvPr/>
+      </p:nvGrpSpPr>
+      <p:grpSpPr>
+        <a:xfrm>
+          <a:off x="0" y="0"/>
+          <a:ext cx="0" cy="0"/>
+          <a:chOff x="0" y="0"/>
+          <a:chExt cx="0" cy="0"/>
+        </a:xfrm>
+      </p:grpSpPr>
+      <p:sp>
+        <p:nvSpPr>
+          <p:cNvPr id="2" name="Title 1">
+            <a:extLst>
+              <a:ext uri="{FF2B5EF4-FFF2-40B4-BE49-F238E27FC236}">
+                <a16:creationId xmlns:a16="http://schemas.microsoft.com/office/drawing/2014/main" id="{2D1A7E6B-545C-B91E-1784-1B8AE8B3795D}"/>
+              </a:ext>
+            </a:extLst>
+          </p:cNvPr>
+          <p:cNvSpPr>
+            <a:spLocks noGrp="1"/>
+          </p:cNvSpPr>
+          <p:nvPr>
+            <p:ph type="title"/>
+          </p:nvPr>
+        </p:nvSpPr>
+        <p:spPr/>
+        <p:txBody>
+          <a:bodyPr/>
+          <a:lstStyle/>
+          <a:p>
+            <a:r>
+              <a:rPr lang="en-US" dirty="0"/>
+              <a:t>What is React Router? What is Deep linking?</a:t>
+            </a:r>
+          </a:p>
+        </p:txBody>
+      </p:sp>
+      <p:sp>
+        <p:nvSpPr>
+          <p:cNvPr id="4" name="Content Placeholder 2">
+            <a:extLst>
+              <a:ext uri="{FF2B5EF4-FFF2-40B4-BE49-F238E27FC236}">
+                <a16:creationId xmlns:a16="http://schemas.microsoft.com/office/drawing/2014/main" id="{377F7FAB-49DF-A039-C8FE-2835C650BE41}"/>
+              </a:ext>
+            </a:extLst>
+          </p:cNvPr>
+          <p:cNvSpPr>
+            <a:spLocks noGrp="1"/>
+          </p:cNvSpPr>
+          <p:nvPr>
+            <p:ph idx="1"/>
+          </p:nvPr>
+        </p:nvSpPr>
+        <p:spPr>
+          <a:xfrm>
+            <a:off x="581192" y="1894353"/>
+            <a:ext cx="5389302" cy="3974619"/>
+          </a:xfrm>
+        </p:spPr>
+        <p:txBody>
+          <a:bodyPr/>
+          <a:lstStyle/>
+          <a:p>
+            <a:r>
+              <a:rPr lang="en-US" dirty="0"/>
+              <a:t>Definition: </a:t>
+            </a:r>
+            <a:r>
+              <a:rPr lang="en-US" dirty="0">
+                <a:solidFill>
+                  <a:schemeClr val="accent2"/>
+                </a:solidFill>
+              </a:rPr>
+              <a:t>React Router </a:t>
+            </a:r>
+            <a:r>
+              <a:rPr lang="en-US" dirty="0"/>
+              <a:t>is a library that provides easy navigation between different views.</a:t>
+            </a:r>
+          </a:p>
+          <a:p>
+            <a:pPr lvl="1"/>
+            <a:r>
+              <a:rPr lang="en-US" dirty="0"/>
+              <a:t>This enabled deep linking</a:t>
+            </a:r>
+          </a:p>
+          <a:p>
+            <a:pPr lvl="1"/>
+            <a:r>
+              <a:rPr lang="en-US" dirty="0"/>
+              <a:t>Handle URL parameters and query strings</a:t>
+            </a:r>
+          </a:p>
+          <a:p>
+            <a:pPr lvl="1"/>
+            <a:r>
+              <a:rPr lang="en-US" dirty="0"/>
+              <a:t>Manage browser history &amp; navigation</a:t>
+            </a:r>
+          </a:p>
+          <a:p>
+            <a:pPr lvl="1"/>
+            <a:r>
+              <a:rPr lang="en-US" dirty="0"/>
+              <a:t>Create nested routes and layouts</a:t>
+            </a:r>
+          </a:p>
+          <a:p>
+            <a:pPr lvl="1"/>
+            <a:r>
+              <a:rPr lang="en-US" dirty="0"/>
+              <a:t>Implement protected routes for authentication</a:t>
+            </a:r>
+          </a:p>
+        </p:txBody>
+      </p:sp>
+      <p:sp>
+        <p:nvSpPr>
+          <p:cNvPr id="5" name="Content Placeholder 2">
+            <a:extLst>
+              <a:ext uri="{FF2B5EF4-FFF2-40B4-BE49-F238E27FC236}">
+                <a16:creationId xmlns:a16="http://schemas.microsoft.com/office/drawing/2014/main" id="{CC3D5F76-B2C3-5605-B374-F0F18426EE53}"/>
+              </a:ext>
+            </a:extLst>
+          </p:cNvPr>
+          <p:cNvSpPr txBox="1">
+            <a:spLocks/>
+          </p:cNvSpPr>
+          <p:nvPr/>
+        </p:nvSpPr>
+        <p:spPr>
+          <a:xfrm>
+            <a:off x="6096000" y="2763866"/>
+            <a:ext cx="5389300" cy="3391978"/>
+          </a:xfrm>
+          <a:prstGeom prst="rect">
+            <a:avLst/>
+          </a:prstGeom>
+        </p:spPr>
+        <p:txBody>
+          <a:bodyPr vert="horz" lIns="91440" tIns="45720" rIns="91440" bIns="45720" rtlCol="0" anchor="ctr">
+            <a:normAutofit fontScale="92500" lnSpcReduction="20000"/>
+          </a:bodyPr>
+          <a:lstStyle>
+            <a:lvl1pPr marL="306000" indent="-306000" algn="l" defTabSz="457200" rtl="0" eaLnBrk="1" latinLnBrk="0" hangingPunct="1">
+              <a:spcBef>
+                <a:spcPct val="20000"/>
+              </a:spcBef>
+              <a:spcAft>
+                <a:spcPts val="600"/>
+              </a:spcAft>
+              <a:buClr>
+                <a:schemeClr val="accent2"/>
+              </a:buClr>
+              <a:buSzPct val="92000"/>
+              <a:buFont typeface="Wingdings 2" panose="05020102010507070707" pitchFamily="18" charset="2"/>
+              <a:buChar char=""/>
+              <a:defRPr sz="1800" kern="1200">
+                <a:solidFill>
+                  <a:schemeClr val="tx2"/>
+                </a:solidFill>
+                <a:latin typeface="+mn-lt"/>
+                <a:ea typeface="+mn-ea"/>
+                <a:cs typeface="+mn-cs"/>
+              </a:defRPr>
+            </a:lvl1pPr>
+            <a:lvl2pPr marL="630000" indent="-306000" algn="l" defTabSz="457200" rtl="0" eaLnBrk="1" latinLnBrk="0" hangingPunct="1">
+              <a:spcBef>
+                <a:spcPct val="20000"/>
+              </a:spcBef>
+              <a:spcAft>
+                <a:spcPts val="600"/>
+              </a:spcAft>
+              <a:buClr>
+                <a:schemeClr val="accent2"/>
+              </a:buClr>
+              <a:buSzPct val="92000"/>
+              <a:buFont typeface="Wingdings 2" panose="05020102010507070707" pitchFamily="18" charset="2"/>
+              <a:buChar char=""/>
+              <a:defRPr sz="1600" kern="1200">
+                <a:solidFill>
+                  <a:schemeClr val="tx2"/>
+                </a:solidFill>
+                <a:latin typeface="+mn-lt"/>
+                <a:ea typeface="+mn-ea"/>
+                <a:cs typeface="+mn-cs"/>
+              </a:defRPr>
+            </a:lvl2pPr>
+            <a:lvl3pPr marL="900000" indent="-270000" algn="l" defTabSz="457200" rtl="0" eaLnBrk="1" latinLnBrk="0" hangingPunct="1">
+              <a:spcBef>
+                <a:spcPct val="20000"/>
+              </a:spcBef>
+              <a:spcAft>
+                <a:spcPts val="600"/>
+              </a:spcAft>
+              <a:buClr>
+                <a:schemeClr val="accent2"/>
+              </a:buClr>
+              <a:buSzPct val="92000"/>
+              <a:buFont typeface="Wingdings 2" panose="05020102010507070707" pitchFamily="18" charset="2"/>
+              <a:buChar char=""/>
+              <a:defRPr sz="1400" kern="1200">
+                <a:solidFill>
+                  <a:schemeClr val="tx2"/>
+                </a:solidFill>
+                <a:latin typeface="+mn-lt"/>
+                <a:ea typeface="+mn-ea"/>
+                <a:cs typeface="+mn-cs"/>
+              </a:defRPr>
+            </a:lvl3pPr>
+            <a:lvl4pPr marL="1242000" indent="-234000" algn="l" defTabSz="457200" rtl="0" eaLnBrk="1" latinLnBrk="0" hangingPunct="1">
+              <a:spcBef>
+                <a:spcPct val="20000"/>
+              </a:spcBef>
+              <a:spcAft>
+                <a:spcPts val="600"/>
+              </a:spcAft>
+              <a:buClr>
+                <a:schemeClr val="accent2"/>
+              </a:buClr>
+              <a:buSzPct val="92000"/>
+              <a:buFont typeface="Wingdings 2" panose="05020102010507070707" pitchFamily="18" charset="2"/>
+              <a:buChar char=""/>
+              <a:defRPr sz="1200" kern="1200">
+                <a:solidFill>
+                  <a:schemeClr val="tx2"/>
+                </a:solidFill>
+                <a:latin typeface="+mn-lt"/>
+                <a:ea typeface="+mn-ea"/>
+                <a:cs typeface="+mn-cs"/>
+              </a:defRPr>
+            </a:lvl4pPr>
+            <a:lvl5pPr marL="1602000" indent="-234000" algn="l" defTabSz="457200" rtl="0" eaLnBrk="1" latinLnBrk="0" hangingPunct="1">
+              <a:spcBef>
+                <a:spcPct val="20000"/>
+              </a:spcBef>
+              <a:spcAft>
+                <a:spcPts val="600"/>
+              </a:spcAft>
+              <a:buClr>
+                <a:schemeClr val="accent2"/>
+              </a:buClr>
+              <a:buSzPct val="92000"/>
+              <a:buFont typeface="Wingdings 2" panose="05020102010507070707" pitchFamily="18" charset="2"/>
+              <a:buChar char=""/>
+              <a:defRPr sz="1200" kern="1200">
+                <a:solidFill>
+                  <a:schemeClr val="tx2"/>
+                </a:solidFill>
+                <a:latin typeface="+mn-lt"/>
+                <a:ea typeface="+mn-ea"/>
+                <a:cs typeface="+mn-cs"/>
+              </a:defRPr>
+            </a:lvl5pPr>
+            <a:lvl6pPr marL="1900000" indent="-228600" algn="l" defTabSz="457200" rtl="0" eaLnBrk="1" latinLnBrk="0" hangingPunct="1">
+              <a:spcBef>
+                <a:spcPct val="20000"/>
+              </a:spcBef>
+              <a:spcAft>
+                <a:spcPts val="600"/>
+              </a:spcAft>
+              <a:buClr>
+                <a:schemeClr val="accent2"/>
+              </a:buClr>
+              <a:buSzPct val="92000"/>
+              <a:buFont typeface="Wingdings 2" panose="05020102010507070707" pitchFamily="18" charset="2"/>
+              <a:buChar char=""/>
+              <a:defRPr sz="1200" kern="1200">
+                <a:solidFill>
+                  <a:schemeClr val="tx2"/>
+                </a:solidFill>
+                <a:latin typeface="+mn-lt"/>
+                <a:ea typeface="+mn-ea"/>
+                <a:cs typeface="+mn-cs"/>
+              </a:defRPr>
+            </a:lvl6pPr>
+            <a:lvl7pPr marL="2200000" indent="-228600" algn="l" defTabSz="457200" rtl="0" eaLnBrk="1" latinLnBrk="0" hangingPunct="1">
+              <a:spcBef>
+                <a:spcPct val="20000"/>
+              </a:spcBef>
+              <a:spcAft>
+                <a:spcPts val="600"/>
+              </a:spcAft>
+              <a:buClr>
+                <a:schemeClr val="accent2"/>
+              </a:buClr>
+              <a:buSzPct val="92000"/>
+              <a:buFont typeface="Wingdings 2" panose="05020102010507070707" pitchFamily="18" charset="2"/>
+              <a:buChar char=""/>
+              <a:defRPr sz="1200" kern="1200">
+                <a:solidFill>
+                  <a:schemeClr val="tx2"/>
+                </a:solidFill>
+                <a:latin typeface="+mn-lt"/>
+                <a:ea typeface="+mn-ea"/>
+                <a:cs typeface="+mn-cs"/>
+              </a:defRPr>
+            </a:lvl7pPr>
+            <a:lvl8pPr marL="2500000" indent="-228600" algn="l" defTabSz="457200" rtl="0" eaLnBrk="1" latinLnBrk="0" hangingPunct="1">
+              <a:spcBef>
+                <a:spcPct val="20000"/>
+              </a:spcBef>
+              <a:spcAft>
+                <a:spcPts val="600"/>
+              </a:spcAft>
+              <a:buClr>
+                <a:schemeClr val="accent2"/>
+              </a:buClr>
+              <a:buSzPct val="92000"/>
+              <a:buFont typeface="Wingdings 2" panose="05020102010507070707" pitchFamily="18" charset="2"/>
+              <a:buChar char=""/>
+              <a:defRPr sz="1200" kern="1200">
+                <a:solidFill>
+                  <a:schemeClr val="tx2"/>
+                </a:solidFill>
+                <a:latin typeface="+mn-lt"/>
+                <a:ea typeface="+mn-ea"/>
+                <a:cs typeface="+mn-cs"/>
+              </a:defRPr>
+            </a:lvl8pPr>
+            <a:lvl9pPr marL="2800000" indent="-228600" algn="l" defTabSz="457200" rtl="0" eaLnBrk="1" latinLnBrk="0" hangingPunct="1">
+              <a:spcBef>
+                <a:spcPct val="20000"/>
+              </a:spcBef>
+              <a:spcAft>
+                <a:spcPts val="600"/>
+              </a:spcAft>
+              <a:buClr>
+                <a:schemeClr val="accent2"/>
+              </a:buClr>
+              <a:buSzPct val="92000"/>
+              <a:buFont typeface="Wingdings 2" panose="05020102010507070707" pitchFamily="18" charset="2"/>
+              <a:buChar char=""/>
+              <a:defRPr sz="1200" kern="1200">
+                <a:solidFill>
+                  <a:schemeClr val="tx2"/>
+                </a:solidFill>
+                <a:latin typeface="+mn-lt"/>
+                <a:ea typeface="+mn-ea"/>
+                <a:cs typeface="+mn-cs"/>
+              </a:defRPr>
+            </a:lvl9pPr>
+          </a:lstStyle>
+          <a:p>
+            <a:r>
+              <a:rPr lang="en-US" dirty="0"/>
+              <a:t>Definition: </a:t>
+            </a:r>
+            <a:r>
+              <a:rPr lang="en-US" dirty="0">
+                <a:solidFill>
+                  <a:schemeClr val="accent2"/>
+                </a:solidFill>
+              </a:rPr>
+              <a:t>Deep Linking </a:t>
+            </a:r>
+            <a:r>
+              <a:rPr lang="en-US" dirty="0">
+                <a:solidFill>
+                  <a:schemeClr val="tx1"/>
+                </a:solidFill>
+              </a:rPr>
+              <a:t>is the practice of using hyperlinks to send users directly to specific content within our applications </a:t>
+            </a:r>
+          </a:p>
+          <a:p>
+            <a:r>
+              <a:rPr lang="en-US" dirty="0"/>
+              <a:t>1-2 levels deep: most apps</a:t>
+            </a:r>
+          </a:p>
+          <a:p>
+            <a:pPr lvl="1"/>
+            <a:r>
+              <a:rPr lang="en-US" dirty="0"/>
+              <a:t>/dashboard</a:t>
+            </a:r>
+          </a:p>
+          <a:p>
+            <a:pPr lvl="1"/>
+            <a:r>
+              <a:rPr lang="en-US" dirty="0"/>
+              <a:t>/products/45</a:t>
+            </a:r>
+          </a:p>
+          <a:p>
+            <a:r>
+              <a:rPr lang="en-US" dirty="0"/>
+              <a:t>3-4 levels deeps: common for structured apps</a:t>
+            </a:r>
+          </a:p>
+          <a:p>
+            <a:pPr lvl="1"/>
+            <a:r>
+              <a:rPr lang="en-US" dirty="0"/>
+              <a:t>/dashboard/reports/weekly</a:t>
+            </a:r>
+          </a:p>
+          <a:p>
+            <a:pPr lvl="1"/>
+            <a:r>
+              <a:rPr lang="en-US" dirty="0"/>
+              <a:t>/shop/products/46/reviews</a:t>
+            </a:r>
+          </a:p>
+          <a:p>
+            <a:r>
+              <a:rPr lang="en-US" dirty="0"/>
+              <a:t>5+ levels deep: Rare but possible, usually in enterprise </a:t>
+            </a:r>
+          </a:p>
+          <a:p>
+            <a:pPr lvl="1"/>
+            <a:r>
+              <a:rPr lang="en-US" dirty="0"/>
+              <a:t>/orgs/12/projects/55/tasks/34/comments/2</a:t>
+            </a:r>
+          </a:p>
+          <a:p>
+            <a:endParaRPr lang="en-US" dirty="0"/>
+          </a:p>
+        </p:txBody>
+      </p:sp>
+    </p:spTree>
+    <p:extLst>
+      <p:ext uri="{BB962C8B-B14F-4D97-AF65-F5344CB8AC3E}">
+        <p14:creationId xmlns:p14="http://schemas.microsoft.com/office/powerpoint/2010/main" val="2052455276"/>
+      </p:ext>
+    </p:extLst>
+  </p:cSld>
+  <p:clrMapOvr>
+    <a:masterClrMapping/>
+  </p:clrMapOvr>
+</p:sld>
+</file>
+
+<file path=ppt/slides/slide46.xml><?xml version="1.0" encoding="utf-8"?>
+<p:sld xmlns:a="http://schemas.openxmlformats.org/drawingml/2006/main" xmlns:r="http://schemas.openxmlformats.org/officeDocument/2006/relationships" xmlns:p="http://schemas.openxmlformats.org/presentationml/2006/main">
+  <p:cSld>
+    <p:spTree>
+      <p:nvGrpSpPr>
+        <p:cNvPr id="1" name=""/>
+        <p:cNvGrpSpPr/>
+        <p:nvPr/>
+      </p:nvGrpSpPr>
+      <p:grpSpPr>
+        <a:xfrm>
+          <a:off x="0" y="0"/>
+          <a:ext cx="0" cy="0"/>
+          <a:chOff x="0" y="0"/>
+          <a:chExt cx="0" cy="0"/>
+        </a:xfrm>
+      </p:grpSpPr>
+      <p:sp>
+        <p:nvSpPr>
+          <p:cNvPr id="2" name="Title 1">
+            <a:extLst>
+              <a:ext uri="{FF2B5EF4-FFF2-40B4-BE49-F238E27FC236}">
+                <a16:creationId xmlns:a16="http://schemas.microsoft.com/office/drawing/2014/main" id="{28A841C7-3DB6-ABB3-3C68-3EA22A56BEDD}"/>
+              </a:ext>
+            </a:extLst>
+          </p:cNvPr>
+          <p:cNvSpPr>
+            <a:spLocks noGrp="1"/>
+          </p:cNvSpPr>
+          <p:nvPr>
+            <p:ph type="title"/>
+          </p:nvPr>
+        </p:nvSpPr>
+        <p:spPr/>
+        <p:txBody>
+          <a:bodyPr/>
+          <a:lstStyle/>
+          <a:p>
+            <a:r>
+              <a:rPr lang="en-US" dirty="0"/>
+              <a:t>React Router Setup</a:t>
+            </a:r>
+          </a:p>
+        </p:txBody>
+      </p:sp>
+      <p:sp>
+        <p:nvSpPr>
+          <p:cNvPr id="3" name="Content Placeholder 2">
+            <a:extLst>
+              <a:ext uri="{FF2B5EF4-FFF2-40B4-BE49-F238E27FC236}">
+                <a16:creationId xmlns:a16="http://schemas.microsoft.com/office/drawing/2014/main" id="{1A5F25AE-D113-976C-0902-660AA3FD7F05}"/>
+              </a:ext>
+            </a:extLst>
+          </p:cNvPr>
+          <p:cNvSpPr>
+            <a:spLocks noGrp="1"/>
+          </p:cNvSpPr>
+          <p:nvPr>
+            <p:ph idx="1"/>
+          </p:nvPr>
+        </p:nvSpPr>
+        <p:spPr>
+          <a:xfrm>
+            <a:off x="581193" y="1927952"/>
+            <a:ext cx="4806596" cy="5089793"/>
+          </a:xfrm>
+        </p:spPr>
+        <p:txBody>
+          <a:bodyPr/>
+          <a:lstStyle/>
+          <a:p>
+            <a:r>
+              <a:rPr lang="en-US" dirty="0"/>
+              <a:t>Install the router package</a:t>
+            </a:r>
+          </a:p>
+          <a:p>
+            <a:r>
+              <a:rPr lang="en-US" dirty="0"/>
+              <a:t>Wrap your &lt;App/&gt; in &lt;</a:t>
+            </a:r>
+            <a:r>
+              <a:rPr lang="en-US" dirty="0" err="1"/>
+              <a:t>BrowserRouter</a:t>
+            </a:r>
+            <a:r>
+              <a:rPr lang="en-US" dirty="0"/>
+              <a:t>/&gt;</a:t>
+            </a:r>
+          </a:p>
+          <a:p>
+            <a:r>
+              <a:rPr lang="en-US" dirty="0"/>
+              <a:t>Import Routes, Route, &amp; Link</a:t>
+            </a:r>
+          </a:p>
+          <a:p>
+            <a:r>
+              <a:rPr lang="en-US" dirty="0"/>
+              <a:t>Your content will render where you place your routes</a:t>
+            </a:r>
+          </a:p>
+          <a:p>
+            <a:r>
+              <a:rPr lang="en-US" dirty="0"/>
+              <a:t>Then any Link tags may navigate the user to that content</a:t>
+            </a:r>
+          </a:p>
+          <a:p>
+            <a:pPr lvl="1"/>
+            <a:r>
+              <a:rPr lang="en-US" dirty="0"/>
+              <a:t>Never use &lt;a&gt; tags with React Router</a:t>
+            </a:r>
+          </a:p>
+          <a:p>
+            <a:pPr lvl="1"/>
+            <a:r>
+              <a:rPr lang="en-US" dirty="0"/>
+              <a:t>Only use &lt;a&gt; for external URL</a:t>
+            </a:r>
+          </a:p>
+        </p:txBody>
+      </p:sp>
+      <p:pic>
+        <p:nvPicPr>
+          <p:cNvPr id="5" name="Picture 4">
+            <a:extLst>
+              <a:ext uri="{FF2B5EF4-FFF2-40B4-BE49-F238E27FC236}">
+                <a16:creationId xmlns:a16="http://schemas.microsoft.com/office/drawing/2014/main" id="{E95DB1E1-436E-0845-AF52-3C522075F4B8}"/>
+              </a:ext>
+            </a:extLst>
+          </p:cNvPr>
+          <p:cNvPicPr>
+            <a:picLocks noChangeAspect="1"/>
+          </p:cNvPicPr>
+          <p:nvPr/>
+        </p:nvPicPr>
+        <p:blipFill>
+          <a:blip r:embed="rId2"/>
+          <a:stretch>
+            <a:fillRect/>
+          </a:stretch>
+        </p:blipFill>
+        <p:spPr>
+          <a:xfrm>
+            <a:off x="5877947" y="2180496"/>
+            <a:ext cx="5420481" cy="533474"/>
+          </a:xfrm>
+          <a:prstGeom prst="rect">
+            <a:avLst/>
+          </a:prstGeom>
+        </p:spPr>
+      </p:pic>
+      <p:pic>
+        <p:nvPicPr>
+          <p:cNvPr id="7" name="Picture 6">
+            <a:extLst>
+              <a:ext uri="{FF2B5EF4-FFF2-40B4-BE49-F238E27FC236}">
+                <a16:creationId xmlns:a16="http://schemas.microsoft.com/office/drawing/2014/main" id="{1AB9FDE8-89E1-94BD-0FA9-E6927F16F3BA}"/>
+              </a:ext>
+            </a:extLst>
+          </p:cNvPr>
+          <p:cNvPicPr>
+            <a:picLocks noChangeAspect="1"/>
+          </p:cNvPicPr>
+          <p:nvPr/>
+        </p:nvPicPr>
+        <p:blipFill>
+          <a:blip r:embed="rId3"/>
+          <a:stretch>
+            <a:fillRect/>
+          </a:stretch>
+        </p:blipFill>
+        <p:spPr>
+          <a:xfrm>
+            <a:off x="7048650" y="2841813"/>
+            <a:ext cx="3079073" cy="1788088"/>
+          </a:xfrm>
+          <a:prstGeom prst="rect">
+            <a:avLst/>
+          </a:prstGeom>
+        </p:spPr>
+      </p:pic>
+      <p:pic>
+        <p:nvPicPr>
+          <p:cNvPr id="11" name="Picture 10">
+            <a:extLst>
+              <a:ext uri="{FF2B5EF4-FFF2-40B4-BE49-F238E27FC236}">
+                <a16:creationId xmlns:a16="http://schemas.microsoft.com/office/drawing/2014/main" id="{0EDB3FDE-D213-F69C-D895-73AD9EDC43B7}"/>
+              </a:ext>
+            </a:extLst>
+          </p:cNvPr>
+          <p:cNvPicPr>
+            <a:picLocks noChangeAspect="1"/>
+          </p:cNvPicPr>
+          <p:nvPr/>
+        </p:nvPicPr>
+        <p:blipFill>
+          <a:blip r:embed="rId4"/>
+          <a:stretch>
+            <a:fillRect/>
+          </a:stretch>
+        </p:blipFill>
+        <p:spPr>
+          <a:xfrm>
+            <a:off x="5289697" y="5264103"/>
+            <a:ext cx="6596977" cy="594696"/>
+          </a:xfrm>
+          <a:prstGeom prst="rect">
+            <a:avLst/>
+          </a:prstGeom>
+        </p:spPr>
+      </p:pic>
+      <p:pic>
+        <p:nvPicPr>
+          <p:cNvPr id="15" name="Picture 14">
+            <a:extLst>
+              <a:ext uri="{FF2B5EF4-FFF2-40B4-BE49-F238E27FC236}">
+                <a16:creationId xmlns:a16="http://schemas.microsoft.com/office/drawing/2014/main" id="{95BDC00A-0FF1-2D37-18CB-070B1D2DD294}"/>
+              </a:ext>
+            </a:extLst>
+          </p:cNvPr>
+          <p:cNvPicPr>
+            <a:picLocks noChangeAspect="1"/>
+          </p:cNvPicPr>
+          <p:nvPr/>
+        </p:nvPicPr>
+        <p:blipFill>
+          <a:blip r:embed="rId5"/>
+          <a:stretch>
+            <a:fillRect/>
+          </a:stretch>
+        </p:blipFill>
+        <p:spPr>
+          <a:xfrm>
+            <a:off x="6311392" y="6052538"/>
+            <a:ext cx="4553585" cy="419158"/>
+          </a:xfrm>
+          <a:prstGeom prst="rect">
+            <a:avLst/>
+          </a:prstGeom>
+        </p:spPr>
+      </p:pic>
+      <p:pic>
+        <p:nvPicPr>
+          <p:cNvPr id="17" name="Picture 16">
+            <a:extLst>
+              <a:ext uri="{FF2B5EF4-FFF2-40B4-BE49-F238E27FC236}">
+                <a16:creationId xmlns:a16="http://schemas.microsoft.com/office/drawing/2014/main" id="{340487C3-E2B2-321F-49A6-F1B86AE42FDD}"/>
+              </a:ext>
+            </a:extLst>
+          </p:cNvPr>
+          <p:cNvPicPr>
+            <a:picLocks noChangeAspect="1"/>
+          </p:cNvPicPr>
+          <p:nvPr/>
+        </p:nvPicPr>
+        <p:blipFill>
+          <a:blip r:embed="rId6"/>
+          <a:stretch>
+            <a:fillRect/>
+          </a:stretch>
+        </p:blipFill>
+        <p:spPr>
+          <a:xfrm>
+            <a:off x="5588806" y="4732659"/>
+            <a:ext cx="6096851" cy="428685"/>
+          </a:xfrm>
+          <a:prstGeom prst="rect">
+            <a:avLst/>
+          </a:prstGeom>
+        </p:spPr>
+      </p:pic>
+    </p:spTree>
+    <p:extLst>
+      <p:ext uri="{BB962C8B-B14F-4D97-AF65-F5344CB8AC3E}">
+        <p14:creationId xmlns:p14="http://schemas.microsoft.com/office/powerpoint/2010/main" val="3201449293"/>
+      </p:ext>
+    </p:extLst>
+  </p:cSld>
+  <p:clrMapOvr>
+    <a:masterClrMapping/>
+  </p:clrMapOvr>
+</p:sld>
+</file>
+
+<file path=ppt/slides/slide47.xml><?xml version="1.0" encoding="utf-8"?>
+<p:sld xmlns:a="http://schemas.openxmlformats.org/drawingml/2006/main" xmlns:r="http://schemas.openxmlformats.org/officeDocument/2006/relationships" xmlns:p="http://schemas.openxmlformats.org/presentationml/2006/main">
+  <p:cSld>
+    <p:spTree>
+      <p:nvGrpSpPr>
+        <p:cNvPr id="1" name="">
+          <a:extLst>
+            <a:ext uri="{FF2B5EF4-FFF2-40B4-BE49-F238E27FC236}">
+              <a16:creationId xmlns:a16="http://schemas.microsoft.com/office/drawing/2014/main" id="{151F5E66-3851-CE53-0C47-FB2BC46690E3}"/>
+            </a:ext>
+          </a:extLst>
+        </p:cNvPr>
+        <p:cNvGrpSpPr/>
+        <p:nvPr/>
+      </p:nvGrpSpPr>
+      <p:grpSpPr>
+        <a:xfrm>
+          <a:off x="0" y="0"/>
+          <a:ext cx="0" cy="0"/>
+          <a:chOff x="0" y="0"/>
+          <a:chExt cx="0" cy="0"/>
+        </a:xfrm>
+      </p:grpSpPr>
+      <p:sp>
+        <p:nvSpPr>
+          <p:cNvPr id="2" name="Title 1">
+            <a:extLst>
+              <a:ext uri="{FF2B5EF4-FFF2-40B4-BE49-F238E27FC236}">
+                <a16:creationId xmlns:a16="http://schemas.microsoft.com/office/drawing/2014/main" id="{95861005-ABA7-81DC-0B20-C5481BBE11BE}"/>
+              </a:ext>
+            </a:extLst>
+          </p:cNvPr>
+          <p:cNvSpPr>
+            <a:spLocks noGrp="1"/>
+          </p:cNvSpPr>
+          <p:nvPr>
+            <p:ph type="title"/>
+          </p:nvPr>
+        </p:nvSpPr>
+        <p:spPr/>
+        <p:txBody>
+          <a:bodyPr/>
+          <a:lstStyle/>
+          <a:p>
+            <a:r>
+              <a:rPr lang="en-US" dirty="0"/>
+              <a:t>Challenge – Implement Routing</a:t>
+            </a:r>
+          </a:p>
+        </p:txBody>
+      </p:sp>
+      <p:sp>
+        <p:nvSpPr>
+          <p:cNvPr id="3" name="Content Placeholder 2">
+            <a:extLst>
+              <a:ext uri="{FF2B5EF4-FFF2-40B4-BE49-F238E27FC236}">
+                <a16:creationId xmlns:a16="http://schemas.microsoft.com/office/drawing/2014/main" id="{D16A8956-71EA-D81A-6FCA-5FA89737BEC4}"/>
+              </a:ext>
+            </a:extLst>
+          </p:cNvPr>
+          <p:cNvSpPr>
+            <a:spLocks noGrp="1"/>
+          </p:cNvSpPr>
+          <p:nvPr>
+            <p:ph idx="1"/>
+          </p:nvPr>
+        </p:nvSpPr>
+        <p:spPr>
+          <a:xfrm>
+            <a:off x="581192" y="2305595"/>
+            <a:ext cx="5317584" cy="1681246"/>
+          </a:xfrm>
+        </p:spPr>
+        <p:txBody>
+          <a:bodyPr/>
+          <a:lstStyle/>
+          <a:p>
+            <a:r>
+              <a:rPr lang="en-US" dirty="0"/>
+              <a:t>Implement Routing</a:t>
+            </a:r>
+          </a:p>
+        </p:txBody>
+      </p:sp>
+      <p:sp>
+        <p:nvSpPr>
+          <p:cNvPr id="6" name="TextBox 5">
+            <a:extLst>
+              <a:ext uri="{FF2B5EF4-FFF2-40B4-BE49-F238E27FC236}">
+                <a16:creationId xmlns:a16="http://schemas.microsoft.com/office/drawing/2014/main" id="{28F1BBFB-9B25-A368-614A-E7A2B0F7D75F}"/>
+              </a:ext>
+            </a:extLst>
+          </p:cNvPr>
+          <p:cNvSpPr txBox="1"/>
+          <p:nvPr/>
+        </p:nvSpPr>
+        <p:spPr>
+          <a:xfrm>
+            <a:off x="1228165" y="2402747"/>
+            <a:ext cx="756938" cy="369332"/>
+          </a:xfrm>
+          <a:prstGeom prst="rect">
+            <a:avLst/>
+          </a:prstGeom>
+          <a:noFill/>
+        </p:spPr>
+        <p:txBody>
+          <a:bodyPr wrap="none" rtlCol="0">
+            <a:spAutoFit/>
+          </a:bodyPr>
+          <a:lstStyle/>
+          <a:p>
+            <a:r>
+              <a:rPr lang="en-US" b="1" dirty="0"/>
+              <a:t>Goal:</a:t>
+            </a:r>
+          </a:p>
+        </p:txBody>
+      </p:sp>
+      <p:sp>
+        <p:nvSpPr>
+          <p:cNvPr id="7" name="TextBox 6">
+            <a:extLst>
+              <a:ext uri="{FF2B5EF4-FFF2-40B4-BE49-F238E27FC236}">
+                <a16:creationId xmlns:a16="http://schemas.microsoft.com/office/drawing/2014/main" id="{9C988B4F-DFDE-1BDB-884B-B8788208264F}"/>
+              </a:ext>
+            </a:extLst>
+          </p:cNvPr>
+          <p:cNvSpPr txBox="1"/>
+          <p:nvPr/>
+        </p:nvSpPr>
+        <p:spPr>
+          <a:xfrm>
+            <a:off x="6676991" y="2402747"/>
+            <a:ext cx="4933817" cy="369332"/>
+          </a:xfrm>
+          <a:prstGeom prst="rect">
+            <a:avLst/>
+          </a:prstGeom>
+          <a:noFill/>
+        </p:spPr>
+        <p:txBody>
+          <a:bodyPr wrap="square" rtlCol="0">
+            <a:spAutoFit/>
+          </a:bodyPr>
+          <a:lstStyle/>
+          <a:p>
+            <a:r>
+              <a:rPr lang="en-US" b="1" dirty="0"/>
+              <a:t>Scenario:  			</a:t>
+            </a:r>
+          </a:p>
+        </p:txBody>
+      </p:sp>
+      <p:sp>
+        <p:nvSpPr>
+          <p:cNvPr id="8" name="Content Placeholder 2">
+            <a:extLst>
+              <a:ext uri="{FF2B5EF4-FFF2-40B4-BE49-F238E27FC236}">
+                <a16:creationId xmlns:a16="http://schemas.microsoft.com/office/drawing/2014/main" id="{A8300895-8C56-970D-ADCF-3B6D8F6E1DF3}"/>
+              </a:ext>
+            </a:extLst>
+          </p:cNvPr>
+          <p:cNvSpPr txBox="1">
+            <a:spLocks/>
+          </p:cNvSpPr>
+          <p:nvPr/>
+        </p:nvSpPr>
+        <p:spPr>
+          <a:xfrm>
+            <a:off x="5898776" y="2982510"/>
+            <a:ext cx="5875227" cy="1103412"/>
+          </a:xfrm>
+          <a:prstGeom prst="rect">
+            <a:avLst/>
+          </a:prstGeom>
+        </p:spPr>
+        <p:txBody>
+          <a:bodyPr vert="horz" lIns="91440" tIns="45720" rIns="91440" bIns="45720" rtlCol="0" anchor="ctr">
+            <a:normAutofit/>
+          </a:bodyPr>
+          <a:lstStyle>
+            <a:lvl1pPr marL="306000" indent="-306000" algn="l" defTabSz="457200" rtl="0" eaLnBrk="1" latinLnBrk="0" hangingPunct="1">
+              <a:spcBef>
+                <a:spcPct val="20000"/>
+              </a:spcBef>
+              <a:spcAft>
+                <a:spcPts val="600"/>
+              </a:spcAft>
+              <a:buClr>
+                <a:schemeClr val="accent2"/>
+              </a:buClr>
+              <a:buSzPct val="92000"/>
+              <a:buFont typeface="Wingdings 2" panose="05020102010507070707" pitchFamily="18" charset="2"/>
+              <a:buChar char=""/>
+              <a:defRPr sz="1800" kern="1200">
+                <a:solidFill>
+                  <a:schemeClr val="tx2"/>
+                </a:solidFill>
+                <a:latin typeface="+mn-lt"/>
+                <a:ea typeface="+mn-ea"/>
+                <a:cs typeface="+mn-cs"/>
+              </a:defRPr>
+            </a:lvl1pPr>
+            <a:lvl2pPr marL="630000" indent="-306000" algn="l" defTabSz="457200" rtl="0" eaLnBrk="1" latinLnBrk="0" hangingPunct="1">
+              <a:spcBef>
+                <a:spcPct val="20000"/>
+              </a:spcBef>
+              <a:spcAft>
+                <a:spcPts val="600"/>
+              </a:spcAft>
+              <a:buClr>
+                <a:schemeClr val="accent2"/>
+              </a:buClr>
+              <a:buSzPct val="92000"/>
+              <a:buFont typeface="Wingdings 2" panose="05020102010507070707" pitchFamily="18" charset="2"/>
+              <a:buChar char=""/>
+              <a:defRPr sz="1600" kern="1200">
+                <a:solidFill>
+                  <a:schemeClr val="tx2"/>
+                </a:solidFill>
+                <a:latin typeface="+mn-lt"/>
+                <a:ea typeface="+mn-ea"/>
+                <a:cs typeface="+mn-cs"/>
+              </a:defRPr>
+            </a:lvl2pPr>
+            <a:lvl3pPr marL="900000" indent="-270000" algn="l" defTabSz="457200" rtl="0" eaLnBrk="1" latinLnBrk="0" hangingPunct="1">
+              <a:spcBef>
+                <a:spcPct val="20000"/>
+              </a:spcBef>
+              <a:spcAft>
+                <a:spcPts val="600"/>
+              </a:spcAft>
+              <a:buClr>
+                <a:schemeClr val="accent2"/>
+              </a:buClr>
+              <a:buSzPct val="92000"/>
+              <a:buFont typeface="Wingdings 2" panose="05020102010507070707" pitchFamily="18" charset="2"/>
+              <a:buChar char=""/>
+              <a:defRPr sz="1400" kern="1200">
+                <a:solidFill>
+                  <a:schemeClr val="tx2"/>
+                </a:solidFill>
+                <a:latin typeface="+mn-lt"/>
+                <a:ea typeface="+mn-ea"/>
+                <a:cs typeface="+mn-cs"/>
+              </a:defRPr>
+            </a:lvl3pPr>
+            <a:lvl4pPr marL="1242000" indent="-234000" algn="l" defTabSz="457200" rtl="0" eaLnBrk="1" latinLnBrk="0" hangingPunct="1">
+              <a:spcBef>
+                <a:spcPct val="20000"/>
+              </a:spcBef>
+              <a:spcAft>
+                <a:spcPts val="600"/>
+              </a:spcAft>
+              <a:buClr>
+                <a:schemeClr val="accent2"/>
+              </a:buClr>
+              <a:buSzPct val="92000"/>
+              <a:buFont typeface="Wingdings 2" panose="05020102010507070707" pitchFamily="18" charset="2"/>
+              <a:buChar char=""/>
+              <a:defRPr sz="1200" kern="1200">
+                <a:solidFill>
+                  <a:schemeClr val="tx2"/>
+                </a:solidFill>
+                <a:latin typeface="+mn-lt"/>
+                <a:ea typeface="+mn-ea"/>
+                <a:cs typeface="+mn-cs"/>
+              </a:defRPr>
+            </a:lvl4pPr>
+            <a:lvl5pPr marL="1602000" indent="-234000" algn="l" defTabSz="457200" rtl="0" eaLnBrk="1" latinLnBrk="0" hangingPunct="1">
+              <a:spcBef>
+                <a:spcPct val="20000"/>
+              </a:spcBef>
+              <a:spcAft>
+                <a:spcPts val="600"/>
+              </a:spcAft>
+              <a:buClr>
+                <a:schemeClr val="accent2"/>
+              </a:buClr>
+              <a:buSzPct val="92000"/>
+              <a:buFont typeface="Wingdings 2" panose="05020102010507070707" pitchFamily="18" charset="2"/>
+              <a:buChar char=""/>
+              <a:defRPr sz="1200" kern="1200">
+                <a:solidFill>
+                  <a:schemeClr val="tx2"/>
+                </a:solidFill>
+                <a:latin typeface="+mn-lt"/>
+                <a:ea typeface="+mn-ea"/>
+                <a:cs typeface="+mn-cs"/>
+              </a:defRPr>
+            </a:lvl5pPr>
+            <a:lvl6pPr marL="1900000" indent="-228600" algn="l" defTabSz="457200" rtl="0" eaLnBrk="1" latinLnBrk="0" hangingPunct="1">
+              <a:spcBef>
+                <a:spcPct val="20000"/>
+              </a:spcBef>
+              <a:spcAft>
+                <a:spcPts val="600"/>
+              </a:spcAft>
+              <a:buClr>
+                <a:schemeClr val="accent2"/>
+              </a:buClr>
+              <a:buSzPct val="92000"/>
+              <a:buFont typeface="Wingdings 2" panose="05020102010507070707" pitchFamily="18" charset="2"/>
+              <a:buChar char=""/>
+              <a:defRPr sz="1200" kern="1200">
+                <a:solidFill>
+                  <a:schemeClr val="tx2"/>
+                </a:solidFill>
+                <a:latin typeface="+mn-lt"/>
+                <a:ea typeface="+mn-ea"/>
+                <a:cs typeface="+mn-cs"/>
+              </a:defRPr>
+            </a:lvl6pPr>
+            <a:lvl7pPr marL="2200000" indent="-228600" algn="l" defTabSz="457200" rtl="0" eaLnBrk="1" latinLnBrk="0" hangingPunct="1">
+              <a:spcBef>
+                <a:spcPct val="20000"/>
+              </a:spcBef>
+              <a:spcAft>
+                <a:spcPts val="600"/>
+              </a:spcAft>
+              <a:buClr>
+                <a:schemeClr val="accent2"/>
+              </a:buClr>
+              <a:buSzPct val="92000"/>
+              <a:buFont typeface="Wingdings 2" panose="05020102010507070707" pitchFamily="18" charset="2"/>
+              <a:buChar char=""/>
+              <a:defRPr sz="1200" kern="1200">
+                <a:solidFill>
+                  <a:schemeClr val="tx2"/>
+                </a:solidFill>
+                <a:latin typeface="+mn-lt"/>
+                <a:ea typeface="+mn-ea"/>
+                <a:cs typeface="+mn-cs"/>
+              </a:defRPr>
+            </a:lvl7pPr>
+            <a:lvl8pPr marL="2500000" indent="-228600" algn="l" defTabSz="457200" rtl="0" eaLnBrk="1" latinLnBrk="0" hangingPunct="1">
+              <a:spcBef>
+                <a:spcPct val="20000"/>
+              </a:spcBef>
+              <a:spcAft>
+                <a:spcPts val="600"/>
+              </a:spcAft>
+              <a:buClr>
+                <a:schemeClr val="accent2"/>
+              </a:buClr>
+              <a:buSzPct val="92000"/>
+              <a:buFont typeface="Wingdings 2" panose="05020102010507070707" pitchFamily="18" charset="2"/>
+              <a:buChar char=""/>
+              <a:defRPr sz="1200" kern="1200">
+                <a:solidFill>
+                  <a:schemeClr val="tx2"/>
+                </a:solidFill>
+                <a:latin typeface="+mn-lt"/>
+                <a:ea typeface="+mn-ea"/>
+                <a:cs typeface="+mn-cs"/>
+              </a:defRPr>
+            </a:lvl8pPr>
+            <a:lvl9pPr marL="2800000" indent="-228600" algn="l" defTabSz="457200" rtl="0" eaLnBrk="1" latinLnBrk="0" hangingPunct="1">
+              <a:spcBef>
+                <a:spcPct val="20000"/>
+              </a:spcBef>
+              <a:spcAft>
+                <a:spcPts val="600"/>
+              </a:spcAft>
+              <a:buClr>
+                <a:schemeClr val="accent2"/>
+              </a:buClr>
+              <a:buSzPct val="92000"/>
+              <a:buFont typeface="Wingdings 2" panose="05020102010507070707" pitchFamily="18" charset="2"/>
+              <a:buChar char=""/>
+              <a:defRPr sz="1200" kern="1200">
+                <a:solidFill>
+                  <a:schemeClr val="tx2"/>
+                </a:solidFill>
+                <a:latin typeface="+mn-lt"/>
+                <a:ea typeface="+mn-ea"/>
+                <a:cs typeface="+mn-cs"/>
+              </a:defRPr>
+            </a:lvl9pPr>
+          </a:lstStyle>
+          <a:p>
+            <a:r>
+              <a:rPr lang="en-US" dirty="0"/>
+              <a:t>Implement routing so that:</a:t>
+            </a:r>
+          </a:p>
+          <a:p>
+            <a:pPr lvl="1"/>
+            <a:r>
+              <a:rPr lang="en-US" dirty="0"/>
+              <a:t>‘Welcome’ component is on this route: ‘/’</a:t>
+            </a:r>
+          </a:p>
+          <a:p>
+            <a:pPr lvl="1"/>
+            <a:r>
+              <a:rPr lang="en-US" dirty="0"/>
+              <a:t>‘</a:t>
+            </a:r>
+            <a:r>
+              <a:rPr lang="en-US" dirty="0" err="1"/>
+              <a:t>IncidentList</a:t>
+            </a:r>
+            <a:r>
+              <a:rPr lang="en-US" dirty="0"/>
+              <a:t>’ component is on this route: ‘/incidents’</a:t>
+            </a:r>
+          </a:p>
+        </p:txBody>
+      </p:sp>
+    </p:spTree>
+    <p:extLst>
+      <p:ext uri="{BB962C8B-B14F-4D97-AF65-F5344CB8AC3E}">
+        <p14:creationId xmlns:p14="http://schemas.microsoft.com/office/powerpoint/2010/main" val="2956276649"/>
+      </p:ext>
+    </p:extLst>
+  </p:cSld>
+  <p:clrMapOvr>
+    <a:masterClrMapping/>
+  </p:clrMapOvr>
+</p:sld>
+</file>
+
+<file path=ppt/slides/slide48.xml><?xml version="1.0" encoding="utf-8"?>
+<p:sld xmlns:a="http://schemas.openxmlformats.org/drawingml/2006/main" xmlns:r="http://schemas.openxmlformats.org/officeDocument/2006/relationships" xmlns:p="http://schemas.openxmlformats.org/presentationml/2006/main">
+  <p:cSld>
+    <p:spTree>
+      <p:nvGrpSpPr>
+        <p:cNvPr id="1" name=""/>
+        <p:cNvGrpSpPr/>
+        <p:nvPr/>
+      </p:nvGrpSpPr>
+      <p:grpSpPr>
+        <a:xfrm>
+          <a:off x="0" y="0"/>
+          <a:ext cx="0" cy="0"/>
+          <a:chOff x="0" y="0"/>
+          <a:chExt cx="0" cy="0"/>
+        </a:xfrm>
+      </p:grpSpPr>
+      <p:sp>
+        <p:nvSpPr>
+          <p:cNvPr id="2" name="Title 1">
+            <a:extLst>
+              <a:ext uri="{FF2B5EF4-FFF2-40B4-BE49-F238E27FC236}">
+                <a16:creationId xmlns:a16="http://schemas.microsoft.com/office/drawing/2014/main" id="{56234431-12AE-6693-E026-E847B55FB658}"/>
+              </a:ext>
+            </a:extLst>
+          </p:cNvPr>
+          <p:cNvSpPr>
+            <a:spLocks noGrp="1"/>
+          </p:cNvSpPr>
+          <p:nvPr>
+            <p:ph type="title"/>
+          </p:nvPr>
+        </p:nvSpPr>
+        <p:spPr/>
+        <p:txBody>
+          <a:bodyPr/>
+          <a:lstStyle/>
+          <a:p>
+            <a:r>
+              <a:rPr lang="en-US" dirty="0"/>
+              <a:t>Axios</a:t>
+            </a:r>
+          </a:p>
+        </p:txBody>
+      </p:sp>
+      <p:sp>
+        <p:nvSpPr>
+          <p:cNvPr id="3" name="Content Placeholder 2">
+            <a:extLst>
+              <a:ext uri="{FF2B5EF4-FFF2-40B4-BE49-F238E27FC236}">
+                <a16:creationId xmlns:a16="http://schemas.microsoft.com/office/drawing/2014/main" id="{AE6A9632-C212-3BA7-DD8F-1AFC48FF1974}"/>
+              </a:ext>
+            </a:extLst>
+          </p:cNvPr>
+          <p:cNvSpPr>
+            <a:spLocks noGrp="1"/>
+          </p:cNvSpPr>
+          <p:nvPr>
+            <p:ph idx="1"/>
+          </p:nvPr>
+        </p:nvSpPr>
+        <p:spPr>
+          <a:xfrm>
+            <a:off x="581192" y="2180496"/>
+            <a:ext cx="5390630" cy="3678303"/>
+          </a:xfrm>
+        </p:spPr>
+        <p:txBody>
+          <a:bodyPr/>
+          <a:lstStyle/>
+          <a:p>
+            <a:r>
+              <a:rPr lang="en-US" dirty="0"/>
+              <a:t>Definition: </a:t>
+            </a:r>
+            <a:r>
+              <a:rPr lang="en-US" dirty="0">
+                <a:solidFill>
+                  <a:schemeClr val="accent2"/>
+                </a:solidFill>
+              </a:rPr>
+              <a:t>Axios</a:t>
+            </a:r>
+            <a:r>
+              <a:rPr lang="en-US" dirty="0"/>
+              <a:t> is a popular JavaScript library for making HTTP requests from the browser or Node.js</a:t>
+            </a:r>
+          </a:p>
+          <a:p>
+            <a:pPr lvl="1"/>
+            <a:r>
+              <a:rPr lang="en-US" dirty="0"/>
+              <a:t>Promise based</a:t>
+            </a:r>
+          </a:p>
+          <a:p>
+            <a:pPr lvl="1"/>
+            <a:r>
+              <a:rPr lang="en-US" dirty="0"/>
+              <a:t>Automatic JSON parsing (no need for .</a:t>
+            </a:r>
+            <a:r>
+              <a:rPr lang="en-US" dirty="0" err="1"/>
+              <a:t>json</a:t>
+            </a:r>
+            <a:r>
+              <a:rPr lang="en-US" dirty="0"/>
+              <a:t>() )</a:t>
+            </a:r>
+          </a:p>
+          <a:p>
+            <a:pPr lvl="1"/>
+            <a:r>
+              <a:rPr lang="en-US" dirty="0"/>
+              <a:t>GET, POST, PUT, DELETE, PATCH, etc. </a:t>
+            </a:r>
+          </a:p>
+          <a:p>
+            <a:pPr lvl="1"/>
+            <a:r>
+              <a:rPr lang="en-US" dirty="0"/>
+              <a:t>Works with our </a:t>
+            </a:r>
+            <a:r>
+              <a:rPr lang="en-US" dirty="0" err="1"/>
+              <a:t>AbortController</a:t>
+            </a:r>
+            <a:endParaRPr lang="en-US" dirty="0"/>
+          </a:p>
+          <a:p>
+            <a:pPr lvl="1"/>
+            <a:endParaRPr lang="en-US" dirty="0"/>
+          </a:p>
+        </p:txBody>
+      </p:sp>
+      <p:pic>
+        <p:nvPicPr>
+          <p:cNvPr id="5" name="Picture 4">
+            <a:extLst>
+              <a:ext uri="{FF2B5EF4-FFF2-40B4-BE49-F238E27FC236}">
+                <a16:creationId xmlns:a16="http://schemas.microsoft.com/office/drawing/2014/main" id="{616D5492-7DC1-8FD0-B71E-5EEE8C5095DA}"/>
+              </a:ext>
+            </a:extLst>
+          </p:cNvPr>
+          <p:cNvPicPr>
+            <a:picLocks noChangeAspect="1"/>
+          </p:cNvPicPr>
+          <p:nvPr/>
+        </p:nvPicPr>
+        <p:blipFill>
+          <a:blip r:embed="rId2"/>
+          <a:stretch>
+            <a:fillRect/>
+          </a:stretch>
+        </p:blipFill>
+        <p:spPr>
+          <a:xfrm>
+            <a:off x="6344358" y="2296019"/>
+            <a:ext cx="4734586" cy="504895"/>
+          </a:xfrm>
+          <a:prstGeom prst="rect">
+            <a:avLst/>
+          </a:prstGeom>
+        </p:spPr>
+      </p:pic>
+      <p:pic>
+        <p:nvPicPr>
+          <p:cNvPr id="7" name="Picture 6">
+            <a:extLst>
+              <a:ext uri="{FF2B5EF4-FFF2-40B4-BE49-F238E27FC236}">
+                <a16:creationId xmlns:a16="http://schemas.microsoft.com/office/drawing/2014/main" id="{CDB31E7C-854A-90E5-0C1B-F0944CFE4B8B}"/>
+              </a:ext>
+            </a:extLst>
+          </p:cNvPr>
+          <p:cNvPicPr>
+            <a:picLocks noChangeAspect="1"/>
+          </p:cNvPicPr>
+          <p:nvPr/>
+        </p:nvPicPr>
+        <p:blipFill>
+          <a:blip r:embed="rId3"/>
+          <a:stretch>
+            <a:fillRect/>
+          </a:stretch>
+        </p:blipFill>
+        <p:spPr>
+          <a:xfrm>
+            <a:off x="6502736" y="3029594"/>
+            <a:ext cx="4417829" cy="504895"/>
+          </a:xfrm>
+          <a:prstGeom prst="rect">
+            <a:avLst/>
+          </a:prstGeom>
+        </p:spPr>
+      </p:pic>
+      <p:pic>
+        <p:nvPicPr>
+          <p:cNvPr id="9" name="Picture 8">
+            <a:extLst>
+              <a:ext uri="{FF2B5EF4-FFF2-40B4-BE49-F238E27FC236}">
+                <a16:creationId xmlns:a16="http://schemas.microsoft.com/office/drawing/2014/main" id="{ECFFF32F-DCC9-F7AC-FD75-856B8DC25D52}"/>
+              </a:ext>
+            </a:extLst>
+          </p:cNvPr>
+          <p:cNvPicPr>
+            <a:picLocks noChangeAspect="1"/>
+          </p:cNvPicPr>
+          <p:nvPr/>
+        </p:nvPicPr>
+        <p:blipFill>
+          <a:blip r:embed="rId4"/>
+          <a:stretch>
+            <a:fillRect/>
+          </a:stretch>
+        </p:blipFill>
+        <p:spPr>
+          <a:xfrm>
+            <a:off x="6056489" y="3763169"/>
+            <a:ext cx="5310322" cy="3007050"/>
+          </a:xfrm>
+          <a:prstGeom prst="rect">
+            <a:avLst/>
+          </a:prstGeom>
+        </p:spPr>
+      </p:pic>
+    </p:spTree>
+    <p:extLst>
+      <p:ext uri="{BB962C8B-B14F-4D97-AF65-F5344CB8AC3E}">
+        <p14:creationId xmlns:p14="http://schemas.microsoft.com/office/powerpoint/2010/main" val="4105252271"/>
+      </p:ext>
+    </p:extLst>
+  </p:cSld>
+  <p:clrMapOvr>
+    <a:masterClrMapping/>
+  </p:clrMapOvr>
+</p:sld>
+</file>
+
+<file path=ppt/slides/slide49.xml><?xml version="1.0" encoding="utf-8"?>
+<p:sld xmlns:a="http://schemas.openxmlformats.org/drawingml/2006/main" xmlns:r="http://schemas.openxmlformats.org/officeDocument/2006/relationships" xmlns:p="http://schemas.openxmlformats.org/presentationml/2006/main">
+  <p:cSld>
+    <p:spTree>
+      <p:nvGrpSpPr>
+        <p:cNvPr id="1" name=""/>
+        <p:cNvGrpSpPr/>
+        <p:nvPr/>
+      </p:nvGrpSpPr>
+      <p:grpSpPr>
+        <a:xfrm>
+          <a:off x="0" y="0"/>
+          <a:ext cx="0" cy="0"/>
+          <a:chOff x="0" y="0"/>
+          <a:chExt cx="0" cy="0"/>
+        </a:xfrm>
+      </p:grpSpPr>
+      <p:sp>
+        <p:nvSpPr>
+          <p:cNvPr id="2" name="Title 1">
+            <a:extLst>
+              <a:ext uri="{FF2B5EF4-FFF2-40B4-BE49-F238E27FC236}">
+                <a16:creationId xmlns:a16="http://schemas.microsoft.com/office/drawing/2014/main" id="{F1B798D0-FE94-C673-31C6-100324A7FEFC}"/>
+              </a:ext>
+            </a:extLst>
+          </p:cNvPr>
+          <p:cNvSpPr>
+            <a:spLocks noGrp="1"/>
+          </p:cNvSpPr>
+          <p:nvPr>
+            <p:ph type="title"/>
+          </p:nvPr>
+        </p:nvSpPr>
+        <p:spPr/>
+        <p:txBody>
+          <a:bodyPr/>
+          <a:lstStyle/>
+          <a:p>
+            <a:r>
+              <a:rPr lang="en-US" dirty="0"/>
+              <a:t>Other Types of Requests</a:t>
+            </a:r>
+          </a:p>
+        </p:txBody>
+      </p:sp>
+      <p:pic>
+        <p:nvPicPr>
+          <p:cNvPr id="7" name="Picture 6">
+            <a:extLst>
+              <a:ext uri="{FF2B5EF4-FFF2-40B4-BE49-F238E27FC236}">
+                <a16:creationId xmlns:a16="http://schemas.microsoft.com/office/drawing/2014/main" id="{A43AEC33-E2F6-D18F-7979-3271ABF15439}"/>
+              </a:ext>
+            </a:extLst>
+          </p:cNvPr>
+          <p:cNvPicPr>
+            <a:picLocks noChangeAspect="1"/>
+          </p:cNvPicPr>
+          <p:nvPr/>
+        </p:nvPicPr>
+        <p:blipFill>
+          <a:blip r:embed="rId2"/>
+          <a:stretch>
+            <a:fillRect/>
+          </a:stretch>
+        </p:blipFill>
+        <p:spPr>
+          <a:xfrm>
+            <a:off x="2923732" y="2266402"/>
+            <a:ext cx="6344535" cy="790685"/>
+          </a:xfrm>
+          <a:prstGeom prst="rect">
+            <a:avLst/>
+          </a:prstGeom>
+        </p:spPr>
+      </p:pic>
+      <p:pic>
+        <p:nvPicPr>
+          <p:cNvPr id="9" name="Picture 8">
+            <a:extLst>
+              <a:ext uri="{FF2B5EF4-FFF2-40B4-BE49-F238E27FC236}">
+                <a16:creationId xmlns:a16="http://schemas.microsoft.com/office/drawing/2014/main" id="{D7963A4F-B225-635A-20C6-58203251B787}"/>
+              </a:ext>
+            </a:extLst>
+          </p:cNvPr>
+          <p:cNvPicPr>
+            <a:picLocks noChangeAspect="1"/>
+          </p:cNvPicPr>
+          <p:nvPr/>
+        </p:nvPicPr>
+        <p:blipFill>
+          <a:blip r:embed="rId3"/>
+          <a:stretch>
+            <a:fillRect/>
+          </a:stretch>
+        </p:blipFill>
+        <p:spPr>
+          <a:xfrm>
+            <a:off x="2923732" y="3424150"/>
+            <a:ext cx="6439799" cy="771633"/>
+          </a:xfrm>
+          <a:prstGeom prst="rect">
+            <a:avLst/>
+          </a:prstGeom>
+        </p:spPr>
+      </p:pic>
+      <p:pic>
+        <p:nvPicPr>
+          <p:cNvPr id="11" name="Picture 10">
+            <a:extLst>
+              <a:ext uri="{FF2B5EF4-FFF2-40B4-BE49-F238E27FC236}">
+                <a16:creationId xmlns:a16="http://schemas.microsoft.com/office/drawing/2014/main" id="{CBDCDE3A-9858-357E-E153-42DCC1536F77}"/>
+              </a:ext>
+            </a:extLst>
+          </p:cNvPr>
+          <p:cNvPicPr>
+            <a:picLocks noChangeAspect="1"/>
+          </p:cNvPicPr>
+          <p:nvPr/>
+        </p:nvPicPr>
+        <p:blipFill>
+          <a:blip r:embed="rId4"/>
+          <a:stretch>
+            <a:fillRect/>
+          </a:stretch>
+        </p:blipFill>
+        <p:spPr>
+          <a:xfrm>
+            <a:off x="3367620" y="4562847"/>
+            <a:ext cx="5552021" cy="691384"/>
+          </a:xfrm>
+          <a:prstGeom prst="rect">
+            <a:avLst/>
+          </a:prstGeom>
+        </p:spPr>
+      </p:pic>
+    </p:spTree>
+    <p:extLst>
+      <p:ext uri="{BB962C8B-B14F-4D97-AF65-F5344CB8AC3E}">
+        <p14:creationId xmlns:p14="http://schemas.microsoft.com/office/powerpoint/2010/main" val="330037576"/>
+      </p:ext>
+    </p:extLst>
+  </p:cSld>
+  <p:clrMapOvr>
+    <a:masterClrMapping/>
+  </p:clrMapOvr>
+</p:sld>
+</file>
+
 <file path=ppt/slides/slide5.xml><?xml version="1.0" encoding="utf-8"?>
 <p:sld xmlns:a="http://schemas.openxmlformats.org/drawingml/2006/main" xmlns:r="http://schemas.openxmlformats.org/officeDocument/2006/relationships" xmlns:p="http://schemas.openxmlformats.org/presentationml/2006/main">
   <p:cSld>
@@ -17429,6 +19392,1393 @@
     <p:extLst>
       <p:ext uri="{BB962C8B-B14F-4D97-AF65-F5344CB8AC3E}">
         <p14:creationId xmlns:p14="http://schemas.microsoft.com/office/powerpoint/2010/main" val="3587871389"/>
+      </p:ext>
+    </p:extLst>
+  </p:cSld>
+  <p:clrMapOvr>
+    <a:masterClrMapping/>
+  </p:clrMapOvr>
+</p:sld>
+</file>
+
+<file path=ppt/slides/slide50.xml><?xml version="1.0" encoding="utf-8"?>
+<p:sld xmlns:a="http://schemas.openxmlformats.org/drawingml/2006/main" xmlns:r="http://schemas.openxmlformats.org/officeDocument/2006/relationships" xmlns:p="http://schemas.openxmlformats.org/presentationml/2006/main">
+  <p:cSld>
+    <p:spTree>
+      <p:nvGrpSpPr>
+        <p:cNvPr id="1" name="">
+          <a:extLst>
+            <a:ext uri="{FF2B5EF4-FFF2-40B4-BE49-F238E27FC236}">
+              <a16:creationId xmlns:a16="http://schemas.microsoft.com/office/drawing/2014/main" id="{ADE5622E-E18D-F1DA-7722-2F15C1990BAE}"/>
+            </a:ext>
+          </a:extLst>
+        </p:cNvPr>
+        <p:cNvGrpSpPr/>
+        <p:nvPr/>
+      </p:nvGrpSpPr>
+      <p:grpSpPr>
+        <a:xfrm>
+          <a:off x="0" y="0"/>
+          <a:ext cx="0" cy="0"/>
+          <a:chOff x="0" y="0"/>
+          <a:chExt cx="0" cy="0"/>
+        </a:xfrm>
+      </p:grpSpPr>
+      <p:sp>
+        <p:nvSpPr>
+          <p:cNvPr id="2" name="Title 1">
+            <a:extLst>
+              <a:ext uri="{FF2B5EF4-FFF2-40B4-BE49-F238E27FC236}">
+                <a16:creationId xmlns:a16="http://schemas.microsoft.com/office/drawing/2014/main" id="{01DC7610-8F33-DB21-9D87-DDD2C88FFE9C}"/>
+              </a:ext>
+            </a:extLst>
+          </p:cNvPr>
+          <p:cNvSpPr>
+            <a:spLocks noGrp="1"/>
+          </p:cNvSpPr>
+          <p:nvPr>
+            <p:ph type="title"/>
+          </p:nvPr>
+        </p:nvSpPr>
+        <p:spPr/>
+        <p:txBody>
+          <a:bodyPr/>
+          <a:lstStyle/>
+          <a:p>
+            <a:r>
+              <a:rPr lang="en-US" dirty="0"/>
+              <a:t>Challenge – Use Axios</a:t>
+            </a:r>
+          </a:p>
+        </p:txBody>
+      </p:sp>
+      <p:sp>
+        <p:nvSpPr>
+          <p:cNvPr id="3" name="Content Placeholder 2">
+            <a:extLst>
+              <a:ext uri="{FF2B5EF4-FFF2-40B4-BE49-F238E27FC236}">
+                <a16:creationId xmlns:a16="http://schemas.microsoft.com/office/drawing/2014/main" id="{43DAADE0-0C0B-08B0-2D58-37A829015225}"/>
+              </a:ext>
+            </a:extLst>
+          </p:cNvPr>
+          <p:cNvSpPr>
+            <a:spLocks noGrp="1"/>
+          </p:cNvSpPr>
+          <p:nvPr>
+            <p:ph idx="1"/>
+          </p:nvPr>
+        </p:nvSpPr>
+        <p:spPr>
+          <a:xfrm>
+            <a:off x="581192" y="2305595"/>
+            <a:ext cx="5317584" cy="1681246"/>
+          </a:xfrm>
+        </p:spPr>
+        <p:txBody>
+          <a:bodyPr/>
+          <a:lstStyle/>
+          <a:p>
+            <a:r>
+              <a:rPr lang="en-US" dirty="0"/>
+              <a:t>Update your fetch request to Axios</a:t>
+            </a:r>
+          </a:p>
+        </p:txBody>
+      </p:sp>
+      <p:sp>
+        <p:nvSpPr>
+          <p:cNvPr id="6" name="TextBox 5">
+            <a:extLst>
+              <a:ext uri="{FF2B5EF4-FFF2-40B4-BE49-F238E27FC236}">
+                <a16:creationId xmlns:a16="http://schemas.microsoft.com/office/drawing/2014/main" id="{43D07600-6EE3-DDF2-E66B-1076710269DE}"/>
+              </a:ext>
+            </a:extLst>
+          </p:cNvPr>
+          <p:cNvSpPr txBox="1"/>
+          <p:nvPr/>
+        </p:nvSpPr>
+        <p:spPr>
+          <a:xfrm>
+            <a:off x="1228165" y="2402747"/>
+            <a:ext cx="756938" cy="369332"/>
+          </a:xfrm>
+          <a:prstGeom prst="rect">
+            <a:avLst/>
+          </a:prstGeom>
+          <a:noFill/>
+        </p:spPr>
+        <p:txBody>
+          <a:bodyPr wrap="none" rtlCol="0">
+            <a:spAutoFit/>
+          </a:bodyPr>
+          <a:lstStyle/>
+          <a:p>
+            <a:r>
+              <a:rPr lang="en-US" b="1" dirty="0"/>
+              <a:t>Goal:</a:t>
+            </a:r>
+          </a:p>
+        </p:txBody>
+      </p:sp>
+      <p:sp>
+        <p:nvSpPr>
+          <p:cNvPr id="7" name="TextBox 6">
+            <a:extLst>
+              <a:ext uri="{FF2B5EF4-FFF2-40B4-BE49-F238E27FC236}">
+                <a16:creationId xmlns:a16="http://schemas.microsoft.com/office/drawing/2014/main" id="{999B7E63-9807-65A7-A84F-F45EC09C89A9}"/>
+              </a:ext>
+            </a:extLst>
+          </p:cNvPr>
+          <p:cNvSpPr txBox="1"/>
+          <p:nvPr/>
+        </p:nvSpPr>
+        <p:spPr>
+          <a:xfrm>
+            <a:off x="6676991" y="2402747"/>
+            <a:ext cx="4933817" cy="369332"/>
+          </a:xfrm>
+          <a:prstGeom prst="rect">
+            <a:avLst/>
+          </a:prstGeom>
+          <a:noFill/>
+        </p:spPr>
+        <p:txBody>
+          <a:bodyPr wrap="square" rtlCol="0">
+            <a:spAutoFit/>
+          </a:bodyPr>
+          <a:lstStyle/>
+          <a:p>
+            <a:r>
+              <a:rPr lang="en-US" b="1" dirty="0"/>
+              <a:t>Scenario:  			</a:t>
+            </a:r>
+          </a:p>
+        </p:txBody>
+      </p:sp>
+      <p:sp>
+        <p:nvSpPr>
+          <p:cNvPr id="8" name="Content Placeholder 2">
+            <a:extLst>
+              <a:ext uri="{FF2B5EF4-FFF2-40B4-BE49-F238E27FC236}">
+                <a16:creationId xmlns:a16="http://schemas.microsoft.com/office/drawing/2014/main" id="{C5210A9D-14C1-F4AE-9673-AEC14615266C}"/>
+              </a:ext>
+            </a:extLst>
+          </p:cNvPr>
+          <p:cNvSpPr txBox="1">
+            <a:spLocks/>
+          </p:cNvSpPr>
+          <p:nvPr/>
+        </p:nvSpPr>
+        <p:spPr>
+          <a:xfrm>
+            <a:off x="5898776" y="2982510"/>
+            <a:ext cx="5875227" cy="1103412"/>
+          </a:xfrm>
+          <a:prstGeom prst="rect">
+            <a:avLst/>
+          </a:prstGeom>
+        </p:spPr>
+        <p:txBody>
+          <a:bodyPr vert="horz" lIns="91440" tIns="45720" rIns="91440" bIns="45720" rtlCol="0" anchor="ctr">
+            <a:normAutofit/>
+          </a:bodyPr>
+          <a:lstStyle>
+            <a:lvl1pPr marL="306000" indent="-306000" algn="l" defTabSz="457200" rtl="0" eaLnBrk="1" latinLnBrk="0" hangingPunct="1">
+              <a:spcBef>
+                <a:spcPct val="20000"/>
+              </a:spcBef>
+              <a:spcAft>
+                <a:spcPts val="600"/>
+              </a:spcAft>
+              <a:buClr>
+                <a:schemeClr val="accent2"/>
+              </a:buClr>
+              <a:buSzPct val="92000"/>
+              <a:buFont typeface="Wingdings 2" panose="05020102010507070707" pitchFamily="18" charset="2"/>
+              <a:buChar char=""/>
+              <a:defRPr sz="1800" kern="1200">
+                <a:solidFill>
+                  <a:schemeClr val="tx2"/>
+                </a:solidFill>
+                <a:latin typeface="+mn-lt"/>
+                <a:ea typeface="+mn-ea"/>
+                <a:cs typeface="+mn-cs"/>
+              </a:defRPr>
+            </a:lvl1pPr>
+            <a:lvl2pPr marL="630000" indent="-306000" algn="l" defTabSz="457200" rtl="0" eaLnBrk="1" latinLnBrk="0" hangingPunct="1">
+              <a:spcBef>
+                <a:spcPct val="20000"/>
+              </a:spcBef>
+              <a:spcAft>
+                <a:spcPts val="600"/>
+              </a:spcAft>
+              <a:buClr>
+                <a:schemeClr val="accent2"/>
+              </a:buClr>
+              <a:buSzPct val="92000"/>
+              <a:buFont typeface="Wingdings 2" panose="05020102010507070707" pitchFamily="18" charset="2"/>
+              <a:buChar char=""/>
+              <a:defRPr sz="1600" kern="1200">
+                <a:solidFill>
+                  <a:schemeClr val="tx2"/>
+                </a:solidFill>
+                <a:latin typeface="+mn-lt"/>
+                <a:ea typeface="+mn-ea"/>
+                <a:cs typeface="+mn-cs"/>
+              </a:defRPr>
+            </a:lvl2pPr>
+            <a:lvl3pPr marL="900000" indent="-270000" algn="l" defTabSz="457200" rtl="0" eaLnBrk="1" latinLnBrk="0" hangingPunct="1">
+              <a:spcBef>
+                <a:spcPct val="20000"/>
+              </a:spcBef>
+              <a:spcAft>
+                <a:spcPts val="600"/>
+              </a:spcAft>
+              <a:buClr>
+                <a:schemeClr val="accent2"/>
+              </a:buClr>
+              <a:buSzPct val="92000"/>
+              <a:buFont typeface="Wingdings 2" panose="05020102010507070707" pitchFamily="18" charset="2"/>
+              <a:buChar char=""/>
+              <a:defRPr sz="1400" kern="1200">
+                <a:solidFill>
+                  <a:schemeClr val="tx2"/>
+                </a:solidFill>
+                <a:latin typeface="+mn-lt"/>
+                <a:ea typeface="+mn-ea"/>
+                <a:cs typeface="+mn-cs"/>
+              </a:defRPr>
+            </a:lvl3pPr>
+            <a:lvl4pPr marL="1242000" indent="-234000" algn="l" defTabSz="457200" rtl="0" eaLnBrk="1" latinLnBrk="0" hangingPunct="1">
+              <a:spcBef>
+                <a:spcPct val="20000"/>
+              </a:spcBef>
+              <a:spcAft>
+                <a:spcPts val="600"/>
+              </a:spcAft>
+              <a:buClr>
+                <a:schemeClr val="accent2"/>
+              </a:buClr>
+              <a:buSzPct val="92000"/>
+              <a:buFont typeface="Wingdings 2" panose="05020102010507070707" pitchFamily="18" charset="2"/>
+              <a:buChar char=""/>
+              <a:defRPr sz="1200" kern="1200">
+                <a:solidFill>
+                  <a:schemeClr val="tx2"/>
+                </a:solidFill>
+                <a:latin typeface="+mn-lt"/>
+                <a:ea typeface="+mn-ea"/>
+                <a:cs typeface="+mn-cs"/>
+              </a:defRPr>
+            </a:lvl4pPr>
+            <a:lvl5pPr marL="1602000" indent="-234000" algn="l" defTabSz="457200" rtl="0" eaLnBrk="1" latinLnBrk="0" hangingPunct="1">
+              <a:spcBef>
+                <a:spcPct val="20000"/>
+              </a:spcBef>
+              <a:spcAft>
+                <a:spcPts val="600"/>
+              </a:spcAft>
+              <a:buClr>
+                <a:schemeClr val="accent2"/>
+              </a:buClr>
+              <a:buSzPct val="92000"/>
+              <a:buFont typeface="Wingdings 2" panose="05020102010507070707" pitchFamily="18" charset="2"/>
+              <a:buChar char=""/>
+              <a:defRPr sz="1200" kern="1200">
+                <a:solidFill>
+                  <a:schemeClr val="tx2"/>
+                </a:solidFill>
+                <a:latin typeface="+mn-lt"/>
+                <a:ea typeface="+mn-ea"/>
+                <a:cs typeface="+mn-cs"/>
+              </a:defRPr>
+            </a:lvl5pPr>
+            <a:lvl6pPr marL="1900000" indent="-228600" algn="l" defTabSz="457200" rtl="0" eaLnBrk="1" latinLnBrk="0" hangingPunct="1">
+              <a:spcBef>
+                <a:spcPct val="20000"/>
+              </a:spcBef>
+              <a:spcAft>
+                <a:spcPts val="600"/>
+              </a:spcAft>
+              <a:buClr>
+                <a:schemeClr val="accent2"/>
+              </a:buClr>
+              <a:buSzPct val="92000"/>
+              <a:buFont typeface="Wingdings 2" panose="05020102010507070707" pitchFamily="18" charset="2"/>
+              <a:buChar char=""/>
+              <a:defRPr sz="1200" kern="1200">
+                <a:solidFill>
+                  <a:schemeClr val="tx2"/>
+                </a:solidFill>
+                <a:latin typeface="+mn-lt"/>
+                <a:ea typeface="+mn-ea"/>
+                <a:cs typeface="+mn-cs"/>
+              </a:defRPr>
+            </a:lvl6pPr>
+            <a:lvl7pPr marL="2200000" indent="-228600" algn="l" defTabSz="457200" rtl="0" eaLnBrk="1" latinLnBrk="0" hangingPunct="1">
+              <a:spcBef>
+                <a:spcPct val="20000"/>
+              </a:spcBef>
+              <a:spcAft>
+                <a:spcPts val="600"/>
+              </a:spcAft>
+              <a:buClr>
+                <a:schemeClr val="accent2"/>
+              </a:buClr>
+              <a:buSzPct val="92000"/>
+              <a:buFont typeface="Wingdings 2" panose="05020102010507070707" pitchFamily="18" charset="2"/>
+              <a:buChar char=""/>
+              <a:defRPr sz="1200" kern="1200">
+                <a:solidFill>
+                  <a:schemeClr val="tx2"/>
+                </a:solidFill>
+                <a:latin typeface="+mn-lt"/>
+                <a:ea typeface="+mn-ea"/>
+                <a:cs typeface="+mn-cs"/>
+              </a:defRPr>
+            </a:lvl7pPr>
+            <a:lvl8pPr marL="2500000" indent="-228600" algn="l" defTabSz="457200" rtl="0" eaLnBrk="1" latinLnBrk="0" hangingPunct="1">
+              <a:spcBef>
+                <a:spcPct val="20000"/>
+              </a:spcBef>
+              <a:spcAft>
+                <a:spcPts val="600"/>
+              </a:spcAft>
+              <a:buClr>
+                <a:schemeClr val="accent2"/>
+              </a:buClr>
+              <a:buSzPct val="92000"/>
+              <a:buFont typeface="Wingdings 2" panose="05020102010507070707" pitchFamily="18" charset="2"/>
+              <a:buChar char=""/>
+              <a:defRPr sz="1200" kern="1200">
+                <a:solidFill>
+                  <a:schemeClr val="tx2"/>
+                </a:solidFill>
+                <a:latin typeface="+mn-lt"/>
+                <a:ea typeface="+mn-ea"/>
+                <a:cs typeface="+mn-cs"/>
+              </a:defRPr>
+            </a:lvl8pPr>
+            <a:lvl9pPr marL="2800000" indent="-228600" algn="l" defTabSz="457200" rtl="0" eaLnBrk="1" latinLnBrk="0" hangingPunct="1">
+              <a:spcBef>
+                <a:spcPct val="20000"/>
+              </a:spcBef>
+              <a:spcAft>
+                <a:spcPts val="600"/>
+              </a:spcAft>
+              <a:buClr>
+                <a:schemeClr val="accent2"/>
+              </a:buClr>
+              <a:buSzPct val="92000"/>
+              <a:buFont typeface="Wingdings 2" panose="05020102010507070707" pitchFamily="18" charset="2"/>
+              <a:buChar char=""/>
+              <a:defRPr sz="1200" kern="1200">
+                <a:solidFill>
+                  <a:schemeClr val="tx2"/>
+                </a:solidFill>
+                <a:latin typeface="+mn-lt"/>
+                <a:ea typeface="+mn-ea"/>
+                <a:cs typeface="+mn-cs"/>
+              </a:defRPr>
+            </a:lvl9pPr>
+          </a:lstStyle>
+          <a:p>
+            <a:r>
+              <a:rPr lang="en-US" dirty="0"/>
+              <a:t>Install the NPM package</a:t>
+            </a:r>
+          </a:p>
+          <a:p>
+            <a:r>
+              <a:rPr lang="en-US" dirty="0"/>
+              <a:t>Import it into your .</a:t>
+            </a:r>
+            <a:r>
+              <a:rPr lang="en-US" dirty="0" err="1"/>
+              <a:t>jsx</a:t>
+            </a:r>
+            <a:endParaRPr lang="en-US" dirty="0"/>
+          </a:p>
+          <a:p>
+            <a:endParaRPr lang="en-US" dirty="0"/>
+          </a:p>
+        </p:txBody>
+      </p:sp>
+    </p:spTree>
+    <p:extLst>
+      <p:ext uri="{BB962C8B-B14F-4D97-AF65-F5344CB8AC3E}">
+        <p14:creationId xmlns:p14="http://schemas.microsoft.com/office/powerpoint/2010/main" val="2354577734"/>
+      </p:ext>
+    </p:extLst>
+  </p:cSld>
+  <p:clrMapOvr>
+    <a:masterClrMapping/>
+  </p:clrMapOvr>
+</p:sld>
+</file>
+
+<file path=ppt/slides/slide51.xml><?xml version="1.0" encoding="utf-8"?>
+<p:sld xmlns:a="http://schemas.openxmlformats.org/drawingml/2006/main" xmlns:r="http://schemas.openxmlformats.org/officeDocument/2006/relationships" xmlns:p="http://schemas.openxmlformats.org/presentationml/2006/main">
+  <p:cSld>
+    <p:spTree>
+      <p:nvGrpSpPr>
+        <p:cNvPr id="1" name=""/>
+        <p:cNvGrpSpPr/>
+        <p:nvPr/>
+      </p:nvGrpSpPr>
+      <p:grpSpPr>
+        <a:xfrm>
+          <a:off x="0" y="0"/>
+          <a:ext cx="0" cy="0"/>
+          <a:chOff x="0" y="0"/>
+          <a:chExt cx="0" cy="0"/>
+        </a:xfrm>
+      </p:grpSpPr>
+      <p:sp>
+        <p:nvSpPr>
+          <p:cNvPr id="2" name="Title 1">
+            <a:extLst>
+              <a:ext uri="{FF2B5EF4-FFF2-40B4-BE49-F238E27FC236}">
+                <a16:creationId xmlns:a16="http://schemas.microsoft.com/office/drawing/2014/main" id="{9A2573D2-F5DC-1CC3-B80C-6A80D44C9BDD}"/>
+              </a:ext>
+            </a:extLst>
+          </p:cNvPr>
+          <p:cNvSpPr>
+            <a:spLocks noGrp="1"/>
+          </p:cNvSpPr>
+          <p:nvPr>
+            <p:ph type="title"/>
+          </p:nvPr>
+        </p:nvSpPr>
+        <p:spPr/>
+        <p:txBody>
+          <a:bodyPr/>
+          <a:lstStyle/>
+          <a:p>
+            <a:r>
+              <a:rPr lang="en-US" dirty="0"/>
+              <a:t>What Is Material UI?</a:t>
+            </a:r>
+          </a:p>
+        </p:txBody>
+      </p:sp>
+      <p:sp>
+        <p:nvSpPr>
+          <p:cNvPr id="3" name="Content Placeholder 2">
+            <a:extLst>
+              <a:ext uri="{FF2B5EF4-FFF2-40B4-BE49-F238E27FC236}">
+                <a16:creationId xmlns:a16="http://schemas.microsoft.com/office/drawing/2014/main" id="{CB9849AD-7B04-8FB1-5C5B-B2EA9F2CBEE0}"/>
+              </a:ext>
+            </a:extLst>
+          </p:cNvPr>
+          <p:cNvSpPr>
+            <a:spLocks noGrp="1"/>
+          </p:cNvSpPr>
+          <p:nvPr>
+            <p:ph idx="1"/>
+          </p:nvPr>
+        </p:nvSpPr>
+        <p:spPr>
+          <a:xfrm>
+            <a:off x="581192" y="2180497"/>
+            <a:ext cx="11029616" cy="1248504"/>
+          </a:xfrm>
+        </p:spPr>
+        <p:txBody>
+          <a:bodyPr/>
+          <a:lstStyle/>
+          <a:p>
+            <a:r>
+              <a:rPr lang="en-US" dirty="0"/>
+              <a:t>Definition: </a:t>
+            </a:r>
+            <a:r>
+              <a:rPr lang="en-US" dirty="0">
+                <a:solidFill>
+                  <a:schemeClr val="accent2"/>
+                </a:solidFill>
+              </a:rPr>
+              <a:t>Material UI </a:t>
+            </a:r>
+            <a:r>
+              <a:rPr lang="en-US" dirty="0"/>
+              <a:t>is a popular React component library</a:t>
+            </a:r>
+          </a:p>
+          <a:p>
+            <a:pPr lvl="1"/>
+            <a:r>
+              <a:rPr lang="en-US" dirty="0"/>
+              <a:t>Provides pre-built, customizable UI components that help developers build consistent, modern, and responsive user interfaces quickly </a:t>
+            </a:r>
+          </a:p>
+        </p:txBody>
+      </p:sp>
+      <p:pic>
+        <p:nvPicPr>
+          <p:cNvPr id="7" name="Picture 6">
+            <a:extLst>
+              <a:ext uri="{FF2B5EF4-FFF2-40B4-BE49-F238E27FC236}">
+                <a16:creationId xmlns:a16="http://schemas.microsoft.com/office/drawing/2014/main" id="{0C1849D0-A3ED-184F-792D-5E78A5AFFBBC}"/>
+              </a:ext>
+            </a:extLst>
+          </p:cNvPr>
+          <p:cNvPicPr>
+            <a:picLocks noChangeAspect="1"/>
+          </p:cNvPicPr>
+          <p:nvPr/>
+        </p:nvPicPr>
+        <p:blipFill>
+          <a:blip r:embed="rId2"/>
+          <a:stretch>
+            <a:fillRect/>
+          </a:stretch>
+        </p:blipFill>
+        <p:spPr>
+          <a:xfrm>
+            <a:off x="2151911" y="3759696"/>
+            <a:ext cx="7888177" cy="2987946"/>
+          </a:xfrm>
+          <a:prstGeom prst="rect">
+            <a:avLst/>
+          </a:prstGeom>
+        </p:spPr>
+      </p:pic>
+    </p:spTree>
+    <p:extLst>
+      <p:ext uri="{BB962C8B-B14F-4D97-AF65-F5344CB8AC3E}">
+        <p14:creationId xmlns:p14="http://schemas.microsoft.com/office/powerpoint/2010/main" val="2579981148"/>
+      </p:ext>
+    </p:extLst>
+  </p:cSld>
+  <p:clrMapOvr>
+    <a:masterClrMapping/>
+  </p:clrMapOvr>
+</p:sld>
+</file>
+
+<file path=ppt/slides/slide52.xml><?xml version="1.0" encoding="utf-8"?>
+<p:sld xmlns:a="http://schemas.openxmlformats.org/drawingml/2006/main" xmlns:r="http://schemas.openxmlformats.org/officeDocument/2006/relationships" xmlns:p="http://schemas.openxmlformats.org/presentationml/2006/main">
+  <p:cSld>
+    <p:spTree>
+      <p:nvGrpSpPr>
+        <p:cNvPr id="1" name=""/>
+        <p:cNvGrpSpPr/>
+        <p:nvPr/>
+      </p:nvGrpSpPr>
+      <p:grpSpPr>
+        <a:xfrm>
+          <a:off x="0" y="0"/>
+          <a:ext cx="0" cy="0"/>
+          <a:chOff x="0" y="0"/>
+          <a:chExt cx="0" cy="0"/>
+        </a:xfrm>
+      </p:grpSpPr>
+      <p:sp>
+        <p:nvSpPr>
+          <p:cNvPr id="2" name="Title 1">
+            <a:extLst>
+              <a:ext uri="{FF2B5EF4-FFF2-40B4-BE49-F238E27FC236}">
+                <a16:creationId xmlns:a16="http://schemas.microsoft.com/office/drawing/2014/main" id="{EE4056A9-CE51-4ECA-0D24-409D540C64F9}"/>
+              </a:ext>
+            </a:extLst>
+          </p:cNvPr>
+          <p:cNvSpPr>
+            <a:spLocks noGrp="1"/>
+          </p:cNvSpPr>
+          <p:nvPr>
+            <p:ph type="title"/>
+          </p:nvPr>
+        </p:nvSpPr>
+        <p:spPr/>
+        <p:txBody>
+          <a:bodyPr/>
+          <a:lstStyle/>
+          <a:p>
+            <a:r>
+              <a:rPr lang="en-US" dirty="0"/>
+              <a:t>Setup Material UI</a:t>
+            </a:r>
+          </a:p>
+        </p:txBody>
+      </p:sp>
+      <p:sp>
+        <p:nvSpPr>
+          <p:cNvPr id="3" name="Content Placeholder 2">
+            <a:extLst>
+              <a:ext uri="{FF2B5EF4-FFF2-40B4-BE49-F238E27FC236}">
+                <a16:creationId xmlns:a16="http://schemas.microsoft.com/office/drawing/2014/main" id="{61C8BF47-E8D7-A3CE-FFDE-6AA570E5520A}"/>
+              </a:ext>
+            </a:extLst>
+          </p:cNvPr>
+          <p:cNvSpPr>
+            <a:spLocks noGrp="1"/>
+          </p:cNvSpPr>
+          <p:nvPr>
+            <p:ph idx="1"/>
+          </p:nvPr>
+        </p:nvSpPr>
+        <p:spPr>
+          <a:xfrm>
+            <a:off x="581193" y="2621932"/>
+            <a:ext cx="11029615" cy="1248504"/>
+          </a:xfrm>
+        </p:spPr>
+        <p:txBody>
+          <a:bodyPr/>
+          <a:lstStyle/>
+          <a:p>
+            <a:r>
+              <a:rPr lang="en-US" dirty="0"/>
+              <a:t>@mui/material – core components</a:t>
+            </a:r>
+          </a:p>
+          <a:p>
+            <a:r>
+              <a:rPr lang="en-US" dirty="0"/>
+              <a:t>@emotion/react &amp; @emotion/styled – required for styling</a:t>
+            </a:r>
+          </a:p>
+          <a:p>
+            <a:r>
+              <a:rPr lang="en-US" dirty="0"/>
+              <a:t>@mui/icons-material – optional icons (but we may use them so install them anyway)</a:t>
+            </a:r>
+          </a:p>
+        </p:txBody>
+      </p:sp>
+      <p:pic>
+        <p:nvPicPr>
+          <p:cNvPr id="5" name="Picture 4">
+            <a:extLst>
+              <a:ext uri="{FF2B5EF4-FFF2-40B4-BE49-F238E27FC236}">
+                <a16:creationId xmlns:a16="http://schemas.microsoft.com/office/drawing/2014/main" id="{AABA699A-192E-97B1-D716-735DC919E944}"/>
+              </a:ext>
+            </a:extLst>
+          </p:cNvPr>
+          <p:cNvPicPr>
+            <a:picLocks noChangeAspect="1"/>
+          </p:cNvPicPr>
+          <p:nvPr/>
+        </p:nvPicPr>
+        <p:blipFill>
+          <a:blip r:embed="rId2"/>
+          <a:stretch>
+            <a:fillRect/>
+          </a:stretch>
+        </p:blipFill>
+        <p:spPr>
+          <a:xfrm>
+            <a:off x="1794861" y="4453324"/>
+            <a:ext cx="8602275" cy="562053"/>
+          </a:xfrm>
+          <a:prstGeom prst="rect">
+            <a:avLst/>
+          </a:prstGeom>
+        </p:spPr>
+      </p:pic>
+    </p:spTree>
+    <p:extLst>
+      <p:ext uri="{BB962C8B-B14F-4D97-AF65-F5344CB8AC3E}">
+        <p14:creationId xmlns:p14="http://schemas.microsoft.com/office/powerpoint/2010/main" val="2401813697"/>
+      </p:ext>
+    </p:extLst>
+  </p:cSld>
+  <p:clrMapOvr>
+    <a:masterClrMapping/>
+  </p:clrMapOvr>
+</p:sld>
+</file>
+
+<file path=ppt/slides/slide53.xml><?xml version="1.0" encoding="utf-8"?>
+<p:sld xmlns:a="http://schemas.openxmlformats.org/drawingml/2006/main" xmlns:r="http://schemas.openxmlformats.org/officeDocument/2006/relationships" xmlns:p="http://schemas.openxmlformats.org/presentationml/2006/main">
+  <p:cSld>
+    <p:spTree>
+      <p:nvGrpSpPr>
+        <p:cNvPr id="1" name=""/>
+        <p:cNvGrpSpPr/>
+        <p:nvPr/>
+      </p:nvGrpSpPr>
+      <p:grpSpPr>
+        <a:xfrm>
+          <a:off x="0" y="0"/>
+          <a:ext cx="0" cy="0"/>
+          <a:chOff x="0" y="0"/>
+          <a:chExt cx="0" cy="0"/>
+        </a:xfrm>
+      </p:grpSpPr>
+      <p:sp>
+        <p:nvSpPr>
+          <p:cNvPr id="2" name="Title 1">
+            <a:extLst>
+              <a:ext uri="{FF2B5EF4-FFF2-40B4-BE49-F238E27FC236}">
+                <a16:creationId xmlns:a16="http://schemas.microsoft.com/office/drawing/2014/main" id="{9D9D4431-F44A-8892-CF12-03F89CDDA15F}"/>
+              </a:ext>
+            </a:extLst>
+          </p:cNvPr>
+          <p:cNvSpPr>
+            <a:spLocks noGrp="1"/>
+          </p:cNvSpPr>
+          <p:nvPr>
+            <p:ph type="title"/>
+          </p:nvPr>
+        </p:nvSpPr>
+        <p:spPr/>
+        <p:txBody>
+          <a:bodyPr/>
+          <a:lstStyle/>
+          <a:p>
+            <a:r>
+              <a:rPr lang="en-US" dirty="0"/>
+              <a:t>Using Material UI Components</a:t>
+            </a:r>
+          </a:p>
+        </p:txBody>
+      </p:sp>
+      <p:sp>
+        <p:nvSpPr>
+          <p:cNvPr id="3" name="Content Placeholder 2">
+            <a:extLst>
+              <a:ext uri="{FF2B5EF4-FFF2-40B4-BE49-F238E27FC236}">
+                <a16:creationId xmlns:a16="http://schemas.microsoft.com/office/drawing/2014/main" id="{C892B675-93A2-C52C-2307-A3D7C07E1EFA}"/>
+              </a:ext>
+            </a:extLst>
+          </p:cNvPr>
+          <p:cNvSpPr>
+            <a:spLocks noGrp="1"/>
+          </p:cNvSpPr>
+          <p:nvPr>
+            <p:ph idx="1"/>
+          </p:nvPr>
+        </p:nvSpPr>
+        <p:spPr>
+          <a:xfrm>
+            <a:off x="581193" y="2180496"/>
+            <a:ext cx="4768574" cy="2370483"/>
+          </a:xfrm>
+        </p:spPr>
+        <p:txBody>
+          <a:bodyPr/>
+          <a:lstStyle/>
+          <a:p>
+            <a:r>
+              <a:rPr lang="en-US" dirty="0"/>
+              <a:t>After installing with NPM:</a:t>
+            </a:r>
+          </a:p>
+          <a:p>
+            <a:r>
+              <a:rPr lang="en-US" dirty="0"/>
+              <a:t>Import the component you’d like to use</a:t>
+            </a:r>
+          </a:p>
+          <a:p>
+            <a:r>
+              <a:rPr lang="en-US" dirty="0"/>
+              <a:t>Customize it with props </a:t>
+            </a:r>
+          </a:p>
+          <a:p>
+            <a:r>
+              <a:rPr lang="en-US" dirty="0"/>
+              <a:t>The documentation is your best friend</a:t>
+            </a:r>
+          </a:p>
+        </p:txBody>
+      </p:sp>
+      <p:pic>
+        <p:nvPicPr>
+          <p:cNvPr id="5" name="Picture 4">
+            <a:extLst>
+              <a:ext uri="{FF2B5EF4-FFF2-40B4-BE49-F238E27FC236}">
+                <a16:creationId xmlns:a16="http://schemas.microsoft.com/office/drawing/2014/main" id="{CBC15C3D-2C21-33E3-0681-5202ED757F9E}"/>
+              </a:ext>
+            </a:extLst>
+          </p:cNvPr>
+          <p:cNvPicPr>
+            <a:picLocks noChangeAspect="1"/>
+          </p:cNvPicPr>
+          <p:nvPr/>
+        </p:nvPicPr>
+        <p:blipFill>
+          <a:blip r:embed="rId2"/>
+          <a:stretch>
+            <a:fillRect/>
+          </a:stretch>
+        </p:blipFill>
+        <p:spPr>
+          <a:xfrm>
+            <a:off x="5615151" y="2583723"/>
+            <a:ext cx="5710449" cy="411726"/>
+          </a:xfrm>
+          <a:prstGeom prst="rect">
+            <a:avLst/>
+          </a:prstGeom>
+        </p:spPr>
+      </p:pic>
+      <p:pic>
+        <p:nvPicPr>
+          <p:cNvPr id="7" name="Picture 6">
+            <a:extLst>
+              <a:ext uri="{FF2B5EF4-FFF2-40B4-BE49-F238E27FC236}">
+                <a16:creationId xmlns:a16="http://schemas.microsoft.com/office/drawing/2014/main" id="{4116ED2C-2993-4C25-6277-12904F12D076}"/>
+              </a:ext>
+            </a:extLst>
+          </p:cNvPr>
+          <p:cNvPicPr>
+            <a:picLocks noChangeAspect="1"/>
+          </p:cNvPicPr>
+          <p:nvPr/>
+        </p:nvPicPr>
+        <p:blipFill>
+          <a:blip r:embed="rId3"/>
+          <a:stretch>
+            <a:fillRect/>
+          </a:stretch>
+        </p:blipFill>
+        <p:spPr>
+          <a:xfrm>
+            <a:off x="1975485" y="4695450"/>
+            <a:ext cx="9350115" cy="321494"/>
+          </a:xfrm>
+          <a:prstGeom prst="rect">
+            <a:avLst/>
+          </a:prstGeom>
+        </p:spPr>
+      </p:pic>
+    </p:spTree>
+    <p:extLst>
+      <p:ext uri="{BB962C8B-B14F-4D97-AF65-F5344CB8AC3E}">
+        <p14:creationId xmlns:p14="http://schemas.microsoft.com/office/powerpoint/2010/main" val="3336544271"/>
+      </p:ext>
+    </p:extLst>
+  </p:cSld>
+  <p:clrMapOvr>
+    <a:masterClrMapping/>
+  </p:clrMapOvr>
+</p:sld>
+</file>
+
+<file path=ppt/slides/slide54.xml><?xml version="1.0" encoding="utf-8"?>
+<p:sld xmlns:a="http://schemas.openxmlformats.org/drawingml/2006/main" xmlns:r="http://schemas.openxmlformats.org/officeDocument/2006/relationships" xmlns:p="http://schemas.openxmlformats.org/presentationml/2006/main">
+  <p:cSld>
+    <p:spTree>
+      <p:nvGrpSpPr>
+        <p:cNvPr id="1" name=""/>
+        <p:cNvGrpSpPr/>
+        <p:nvPr/>
+      </p:nvGrpSpPr>
+      <p:grpSpPr>
+        <a:xfrm>
+          <a:off x="0" y="0"/>
+          <a:ext cx="0" cy="0"/>
+          <a:chOff x="0" y="0"/>
+          <a:chExt cx="0" cy="0"/>
+        </a:xfrm>
+      </p:grpSpPr>
+      <p:sp>
+        <p:nvSpPr>
+          <p:cNvPr id="2" name="Title 1">
+            <a:extLst>
+              <a:ext uri="{FF2B5EF4-FFF2-40B4-BE49-F238E27FC236}">
+                <a16:creationId xmlns:a16="http://schemas.microsoft.com/office/drawing/2014/main" id="{DC815978-FE74-BE0A-2C56-D9A6FE6EBC90}"/>
+              </a:ext>
+            </a:extLst>
+          </p:cNvPr>
+          <p:cNvSpPr>
+            <a:spLocks noGrp="1"/>
+          </p:cNvSpPr>
+          <p:nvPr>
+            <p:ph type="title"/>
+          </p:nvPr>
+        </p:nvSpPr>
+        <p:spPr/>
+        <p:txBody>
+          <a:bodyPr/>
+          <a:lstStyle/>
+          <a:p>
+            <a:r>
+              <a:rPr lang="en-US" dirty="0"/>
+              <a:t>No, Seriously, Use the Documentation</a:t>
+            </a:r>
+          </a:p>
+        </p:txBody>
+      </p:sp>
+      <p:sp>
+        <p:nvSpPr>
+          <p:cNvPr id="3" name="Content Placeholder 2">
+            <a:extLst>
+              <a:ext uri="{FF2B5EF4-FFF2-40B4-BE49-F238E27FC236}">
+                <a16:creationId xmlns:a16="http://schemas.microsoft.com/office/drawing/2014/main" id="{FD890447-E5A7-C0F1-7B60-3DC39CEFBF88}"/>
+              </a:ext>
+            </a:extLst>
+          </p:cNvPr>
+          <p:cNvSpPr>
+            <a:spLocks noGrp="1"/>
+          </p:cNvSpPr>
+          <p:nvPr>
+            <p:ph idx="1"/>
+          </p:nvPr>
+        </p:nvSpPr>
+        <p:spPr>
+          <a:xfrm>
+            <a:off x="581193" y="2180496"/>
+            <a:ext cx="4222036" cy="3684275"/>
+          </a:xfrm>
+        </p:spPr>
+        <p:txBody>
+          <a:bodyPr/>
+          <a:lstStyle/>
+          <a:p>
+            <a:r>
+              <a:rPr lang="en-US" dirty="0"/>
+              <a:t>This is why - look at that code, there is no way you will remember that unless you use it ever day</a:t>
+            </a:r>
+          </a:p>
+          <a:p>
+            <a:r>
+              <a:rPr lang="en-US" dirty="0"/>
+              <a:t>And that is just for a simple dropdown, it’s not even part of the rest of the form</a:t>
+            </a:r>
+          </a:p>
+        </p:txBody>
+      </p:sp>
+      <p:pic>
+        <p:nvPicPr>
+          <p:cNvPr id="5" name="Picture 4">
+            <a:extLst>
+              <a:ext uri="{FF2B5EF4-FFF2-40B4-BE49-F238E27FC236}">
+                <a16:creationId xmlns:a16="http://schemas.microsoft.com/office/drawing/2014/main" id="{280BC1A8-4E42-EA31-4114-FB18AC80A905}"/>
+              </a:ext>
+            </a:extLst>
+          </p:cNvPr>
+          <p:cNvPicPr>
+            <a:picLocks noChangeAspect="1"/>
+          </p:cNvPicPr>
+          <p:nvPr/>
+        </p:nvPicPr>
+        <p:blipFill>
+          <a:blip r:embed="rId2"/>
+          <a:stretch>
+            <a:fillRect/>
+          </a:stretch>
+        </p:blipFill>
+        <p:spPr>
+          <a:xfrm>
+            <a:off x="4913798" y="3147288"/>
+            <a:ext cx="6697010" cy="1743318"/>
+          </a:xfrm>
+          <a:prstGeom prst="rect">
+            <a:avLst/>
+          </a:prstGeom>
+        </p:spPr>
+      </p:pic>
+    </p:spTree>
+    <p:extLst>
+      <p:ext uri="{BB962C8B-B14F-4D97-AF65-F5344CB8AC3E}">
+        <p14:creationId xmlns:p14="http://schemas.microsoft.com/office/powerpoint/2010/main" val="1921583196"/>
+      </p:ext>
+    </p:extLst>
+  </p:cSld>
+  <p:clrMapOvr>
+    <a:masterClrMapping/>
+  </p:clrMapOvr>
+</p:sld>
+</file>
+
+<file path=ppt/slides/slide55.xml><?xml version="1.0" encoding="utf-8"?>
+<p:sld xmlns:a="http://schemas.openxmlformats.org/drawingml/2006/main" xmlns:r="http://schemas.openxmlformats.org/officeDocument/2006/relationships" xmlns:p="http://schemas.openxmlformats.org/presentationml/2006/main">
+  <p:cSld>
+    <p:spTree>
+      <p:nvGrpSpPr>
+        <p:cNvPr id="1" name="">
+          <a:extLst>
+            <a:ext uri="{FF2B5EF4-FFF2-40B4-BE49-F238E27FC236}">
+              <a16:creationId xmlns:a16="http://schemas.microsoft.com/office/drawing/2014/main" id="{E4CF00AB-77BF-D1E0-F821-730907DCFC2E}"/>
+            </a:ext>
+          </a:extLst>
+        </p:cNvPr>
+        <p:cNvGrpSpPr/>
+        <p:nvPr/>
+      </p:nvGrpSpPr>
+      <p:grpSpPr>
+        <a:xfrm>
+          <a:off x="0" y="0"/>
+          <a:ext cx="0" cy="0"/>
+          <a:chOff x="0" y="0"/>
+          <a:chExt cx="0" cy="0"/>
+        </a:xfrm>
+      </p:grpSpPr>
+      <p:sp>
+        <p:nvSpPr>
+          <p:cNvPr id="2" name="Title 1">
+            <a:extLst>
+              <a:ext uri="{FF2B5EF4-FFF2-40B4-BE49-F238E27FC236}">
+                <a16:creationId xmlns:a16="http://schemas.microsoft.com/office/drawing/2014/main" id="{2BE4103C-8E20-803A-D7AB-EC42DF423647}"/>
+              </a:ext>
+            </a:extLst>
+          </p:cNvPr>
+          <p:cNvSpPr>
+            <a:spLocks noGrp="1"/>
+          </p:cNvSpPr>
+          <p:nvPr>
+            <p:ph type="title"/>
+          </p:nvPr>
+        </p:nvSpPr>
+        <p:spPr/>
+        <p:txBody>
+          <a:bodyPr/>
+          <a:lstStyle/>
+          <a:p>
+            <a:r>
+              <a:rPr lang="en-US" dirty="0"/>
+              <a:t>Challenge – Use Material UI</a:t>
+            </a:r>
+          </a:p>
+        </p:txBody>
+      </p:sp>
+      <p:sp>
+        <p:nvSpPr>
+          <p:cNvPr id="3" name="Content Placeholder 2">
+            <a:extLst>
+              <a:ext uri="{FF2B5EF4-FFF2-40B4-BE49-F238E27FC236}">
+                <a16:creationId xmlns:a16="http://schemas.microsoft.com/office/drawing/2014/main" id="{E7D87CED-5C84-66E0-8E74-4FD628065D71}"/>
+              </a:ext>
+            </a:extLst>
+          </p:cNvPr>
+          <p:cNvSpPr>
+            <a:spLocks noGrp="1"/>
+          </p:cNvSpPr>
+          <p:nvPr>
+            <p:ph idx="1"/>
+          </p:nvPr>
+        </p:nvSpPr>
+        <p:spPr>
+          <a:xfrm>
+            <a:off x="581192" y="2484687"/>
+            <a:ext cx="5317584" cy="1681246"/>
+          </a:xfrm>
+        </p:spPr>
+        <p:txBody>
+          <a:bodyPr/>
+          <a:lstStyle/>
+          <a:p>
+            <a:r>
+              <a:rPr lang="en-US" dirty="0"/>
+              <a:t>Update the delete button on your incident cards</a:t>
+            </a:r>
+          </a:p>
+        </p:txBody>
+      </p:sp>
+      <p:sp>
+        <p:nvSpPr>
+          <p:cNvPr id="6" name="TextBox 5">
+            <a:extLst>
+              <a:ext uri="{FF2B5EF4-FFF2-40B4-BE49-F238E27FC236}">
+                <a16:creationId xmlns:a16="http://schemas.microsoft.com/office/drawing/2014/main" id="{A1F7A688-135A-27FD-E1AF-360FF00CB04B}"/>
+              </a:ext>
+            </a:extLst>
+          </p:cNvPr>
+          <p:cNvSpPr txBox="1"/>
+          <p:nvPr/>
+        </p:nvSpPr>
+        <p:spPr>
+          <a:xfrm>
+            <a:off x="1228165" y="2402747"/>
+            <a:ext cx="756938" cy="369332"/>
+          </a:xfrm>
+          <a:prstGeom prst="rect">
+            <a:avLst/>
+          </a:prstGeom>
+          <a:noFill/>
+        </p:spPr>
+        <p:txBody>
+          <a:bodyPr wrap="none" rtlCol="0">
+            <a:spAutoFit/>
+          </a:bodyPr>
+          <a:lstStyle/>
+          <a:p>
+            <a:r>
+              <a:rPr lang="en-US" b="1" dirty="0"/>
+              <a:t>Goal:</a:t>
+            </a:r>
+          </a:p>
+        </p:txBody>
+      </p:sp>
+      <p:sp>
+        <p:nvSpPr>
+          <p:cNvPr id="7" name="TextBox 6">
+            <a:extLst>
+              <a:ext uri="{FF2B5EF4-FFF2-40B4-BE49-F238E27FC236}">
+                <a16:creationId xmlns:a16="http://schemas.microsoft.com/office/drawing/2014/main" id="{234CD847-5D75-8BB0-D289-A4F7D8F03DE6}"/>
+              </a:ext>
+            </a:extLst>
+          </p:cNvPr>
+          <p:cNvSpPr txBox="1"/>
+          <p:nvPr/>
+        </p:nvSpPr>
+        <p:spPr>
+          <a:xfrm>
+            <a:off x="6676991" y="2402747"/>
+            <a:ext cx="4933817" cy="369332"/>
+          </a:xfrm>
+          <a:prstGeom prst="rect">
+            <a:avLst/>
+          </a:prstGeom>
+          <a:noFill/>
+        </p:spPr>
+        <p:txBody>
+          <a:bodyPr wrap="square" rtlCol="0">
+            <a:spAutoFit/>
+          </a:bodyPr>
+          <a:lstStyle/>
+          <a:p>
+            <a:r>
+              <a:rPr lang="en-US" b="1" dirty="0"/>
+              <a:t>Scenario:  			</a:t>
+            </a:r>
+          </a:p>
+        </p:txBody>
+      </p:sp>
+      <p:sp>
+        <p:nvSpPr>
+          <p:cNvPr id="8" name="Content Placeholder 2">
+            <a:extLst>
+              <a:ext uri="{FF2B5EF4-FFF2-40B4-BE49-F238E27FC236}">
+                <a16:creationId xmlns:a16="http://schemas.microsoft.com/office/drawing/2014/main" id="{1CA81AF8-7843-0CBE-E014-7104243E26BF}"/>
+              </a:ext>
+            </a:extLst>
+          </p:cNvPr>
+          <p:cNvSpPr txBox="1">
+            <a:spLocks/>
+          </p:cNvSpPr>
+          <p:nvPr/>
+        </p:nvSpPr>
+        <p:spPr>
+          <a:xfrm>
+            <a:off x="5898776" y="2982510"/>
+            <a:ext cx="5875227" cy="685600"/>
+          </a:xfrm>
+          <a:prstGeom prst="rect">
+            <a:avLst/>
+          </a:prstGeom>
+        </p:spPr>
+        <p:txBody>
+          <a:bodyPr vert="horz" lIns="91440" tIns="45720" rIns="91440" bIns="45720" rtlCol="0" anchor="ctr">
+            <a:normAutofit/>
+          </a:bodyPr>
+          <a:lstStyle>
+            <a:lvl1pPr marL="306000" indent="-306000" algn="l" defTabSz="457200" rtl="0" eaLnBrk="1" latinLnBrk="0" hangingPunct="1">
+              <a:spcBef>
+                <a:spcPct val="20000"/>
+              </a:spcBef>
+              <a:spcAft>
+                <a:spcPts val="600"/>
+              </a:spcAft>
+              <a:buClr>
+                <a:schemeClr val="accent2"/>
+              </a:buClr>
+              <a:buSzPct val="92000"/>
+              <a:buFont typeface="Wingdings 2" panose="05020102010507070707" pitchFamily="18" charset="2"/>
+              <a:buChar char=""/>
+              <a:defRPr sz="1800" kern="1200">
+                <a:solidFill>
+                  <a:schemeClr val="tx2"/>
+                </a:solidFill>
+                <a:latin typeface="+mn-lt"/>
+                <a:ea typeface="+mn-ea"/>
+                <a:cs typeface="+mn-cs"/>
+              </a:defRPr>
+            </a:lvl1pPr>
+            <a:lvl2pPr marL="630000" indent="-306000" algn="l" defTabSz="457200" rtl="0" eaLnBrk="1" latinLnBrk="0" hangingPunct="1">
+              <a:spcBef>
+                <a:spcPct val="20000"/>
+              </a:spcBef>
+              <a:spcAft>
+                <a:spcPts val="600"/>
+              </a:spcAft>
+              <a:buClr>
+                <a:schemeClr val="accent2"/>
+              </a:buClr>
+              <a:buSzPct val="92000"/>
+              <a:buFont typeface="Wingdings 2" panose="05020102010507070707" pitchFamily="18" charset="2"/>
+              <a:buChar char=""/>
+              <a:defRPr sz="1600" kern="1200">
+                <a:solidFill>
+                  <a:schemeClr val="tx2"/>
+                </a:solidFill>
+                <a:latin typeface="+mn-lt"/>
+                <a:ea typeface="+mn-ea"/>
+                <a:cs typeface="+mn-cs"/>
+              </a:defRPr>
+            </a:lvl2pPr>
+            <a:lvl3pPr marL="900000" indent="-270000" algn="l" defTabSz="457200" rtl="0" eaLnBrk="1" latinLnBrk="0" hangingPunct="1">
+              <a:spcBef>
+                <a:spcPct val="20000"/>
+              </a:spcBef>
+              <a:spcAft>
+                <a:spcPts val="600"/>
+              </a:spcAft>
+              <a:buClr>
+                <a:schemeClr val="accent2"/>
+              </a:buClr>
+              <a:buSzPct val="92000"/>
+              <a:buFont typeface="Wingdings 2" panose="05020102010507070707" pitchFamily="18" charset="2"/>
+              <a:buChar char=""/>
+              <a:defRPr sz="1400" kern="1200">
+                <a:solidFill>
+                  <a:schemeClr val="tx2"/>
+                </a:solidFill>
+                <a:latin typeface="+mn-lt"/>
+                <a:ea typeface="+mn-ea"/>
+                <a:cs typeface="+mn-cs"/>
+              </a:defRPr>
+            </a:lvl3pPr>
+            <a:lvl4pPr marL="1242000" indent="-234000" algn="l" defTabSz="457200" rtl="0" eaLnBrk="1" latinLnBrk="0" hangingPunct="1">
+              <a:spcBef>
+                <a:spcPct val="20000"/>
+              </a:spcBef>
+              <a:spcAft>
+                <a:spcPts val="600"/>
+              </a:spcAft>
+              <a:buClr>
+                <a:schemeClr val="accent2"/>
+              </a:buClr>
+              <a:buSzPct val="92000"/>
+              <a:buFont typeface="Wingdings 2" panose="05020102010507070707" pitchFamily="18" charset="2"/>
+              <a:buChar char=""/>
+              <a:defRPr sz="1200" kern="1200">
+                <a:solidFill>
+                  <a:schemeClr val="tx2"/>
+                </a:solidFill>
+                <a:latin typeface="+mn-lt"/>
+                <a:ea typeface="+mn-ea"/>
+                <a:cs typeface="+mn-cs"/>
+              </a:defRPr>
+            </a:lvl4pPr>
+            <a:lvl5pPr marL="1602000" indent="-234000" algn="l" defTabSz="457200" rtl="0" eaLnBrk="1" latinLnBrk="0" hangingPunct="1">
+              <a:spcBef>
+                <a:spcPct val="20000"/>
+              </a:spcBef>
+              <a:spcAft>
+                <a:spcPts val="600"/>
+              </a:spcAft>
+              <a:buClr>
+                <a:schemeClr val="accent2"/>
+              </a:buClr>
+              <a:buSzPct val="92000"/>
+              <a:buFont typeface="Wingdings 2" panose="05020102010507070707" pitchFamily="18" charset="2"/>
+              <a:buChar char=""/>
+              <a:defRPr sz="1200" kern="1200">
+                <a:solidFill>
+                  <a:schemeClr val="tx2"/>
+                </a:solidFill>
+                <a:latin typeface="+mn-lt"/>
+                <a:ea typeface="+mn-ea"/>
+                <a:cs typeface="+mn-cs"/>
+              </a:defRPr>
+            </a:lvl5pPr>
+            <a:lvl6pPr marL="1900000" indent="-228600" algn="l" defTabSz="457200" rtl="0" eaLnBrk="1" latinLnBrk="0" hangingPunct="1">
+              <a:spcBef>
+                <a:spcPct val="20000"/>
+              </a:spcBef>
+              <a:spcAft>
+                <a:spcPts val="600"/>
+              </a:spcAft>
+              <a:buClr>
+                <a:schemeClr val="accent2"/>
+              </a:buClr>
+              <a:buSzPct val="92000"/>
+              <a:buFont typeface="Wingdings 2" panose="05020102010507070707" pitchFamily="18" charset="2"/>
+              <a:buChar char=""/>
+              <a:defRPr sz="1200" kern="1200">
+                <a:solidFill>
+                  <a:schemeClr val="tx2"/>
+                </a:solidFill>
+                <a:latin typeface="+mn-lt"/>
+                <a:ea typeface="+mn-ea"/>
+                <a:cs typeface="+mn-cs"/>
+              </a:defRPr>
+            </a:lvl6pPr>
+            <a:lvl7pPr marL="2200000" indent="-228600" algn="l" defTabSz="457200" rtl="0" eaLnBrk="1" latinLnBrk="0" hangingPunct="1">
+              <a:spcBef>
+                <a:spcPct val="20000"/>
+              </a:spcBef>
+              <a:spcAft>
+                <a:spcPts val="600"/>
+              </a:spcAft>
+              <a:buClr>
+                <a:schemeClr val="accent2"/>
+              </a:buClr>
+              <a:buSzPct val="92000"/>
+              <a:buFont typeface="Wingdings 2" panose="05020102010507070707" pitchFamily="18" charset="2"/>
+              <a:buChar char=""/>
+              <a:defRPr sz="1200" kern="1200">
+                <a:solidFill>
+                  <a:schemeClr val="tx2"/>
+                </a:solidFill>
+                <a:latin typeface="+mn-lt"/>
+                <a:ea typeface="+mn-ea"/>
+                <a:cs typeface="+mn-cs"/>
+              </a:defRPr>
+            </a:lvl7pPr>
+            <a:lvl8pPr marL="2500000" indent="-228600" algn="l" defTabSz="457200" rtl="0" eaLnBrk="1" latinLnBrk="0" hangingPunct="1">
+              <a:spcBef>
+                <a:spcPct val="20000"/>
+              </a:spcBef>
+              <a:spcAft>
+                <a:spcPts val="600"/>
+              </a:spcAft>
+              <a:buClr>
+                <a:schemeClr val="accent2"/>
+              </a:buClr>
+              <a:buSzPct val="92000"/>
+              <a:buFont typeface="Wingdings 2" panose="05020102010507070707" pitchFamily="18" charset="2"/>
+              <a:buChar char=""/>
+              <a:defRPr sz="1200" kern="1200">
+                <a:solidFill>
+                  <a:schemeClr val="tx2"/>
+                </a:solidFill>
+                <a:latin typeface="+mn-lt"/>
+                <a:ea typeface="+mn-ea"/>
+                <a:cs typeface="+mn-cs"/>
+              </a:defRPr>
+            </a:lvl8pPr>
+            <a:lvl9pPr marL="2800000" indent="-228600" algn="l" defTabSz="457200" rtl="0" eaLnBrk="1" latinLnBrk="0" hangingPunct="1">
+              <a:spcBef>
+                <a:spcPct val="20000"/>
+              </a:spcBef>
+              <a:spcAft>
+                <a:spcPts val="600"/>
+              </a:spcAft>
+              <a:buClr>
+                <a:schemeClr val="accent2"/>
+              </a:buClr>
+              <a:buSzPct val="92000"/>
+              <a:buFont typeface="Wingdings 2" panose="05020102010507070707" pitchFamily="18" charset="2"/>
+              <a:buChar char=""/>
+              <a:defRPr sz="1200" kern="1200">
+                <a:solidFill>
+                  <a:schemeClr val="tx2"/>
+                </a:solidFill>
+                <a:latin typeface="+mn-lt"/>
+                <a:ea typeface="+mn-ea"/>
+                <a:cs typeface="+mn-cs"/>
+              </a:defRPr>
+            </a:lvl9pPr>
+          </a:lstStyle>
+          <a:p>
+            <a:r>
+              <a:rPr lang="en-US" dirty="0"/>
+              <a:t>Make sure your incident cards have a red delete button via Material UI</a:t>
+            </a:r>
+          </a:p>
+        </p:txBody>
+      </p:sp>
+    </p:spTree>
+    <p:extLst>
+      <p:ext uri="{BB962C8B-B14F-4D97-AF65-F5344CB8AC3E}">
+        <p14:creationId xmlns:p14="http://schemas.microsoft.com/office/powerpoint/2010/main" val="2167924180"/>
       </p:ext>
     </p:extLst>
   </p:cSld>
